--- a/images/figures.pptx
+++ b/images/figures.pptx
@@ -5,7 +5,7 @@
     <p:sldMasterId id="2147483648" r:id="rId1"/>
   </p:sldMasterIdLst>
   <p:notesMasterIdLst>
-    <p:notesMasterId r:id="rId7"/>
+    <p:notesMasterId r:id="rId8"/>
   </p:notesMasterIdLst>
   <p:sldIdLst>
     <p:sldId id="256" r:id="rId2"/>
@@ -13,6 +13,7 @@
     <p:sldId id="438" r:id="rId4"/>
     <p:sldId id="440" r:id="rId5"/>
     <p:sldId id="441" r:id="rId6"/>
+    <p:sldId id="442" r:id="rId7"/>
   </p:sldIdLst>
   <p:sldSz cx="12192000" cy="6858000"/>
   <p:notesSz cx="6858000" cy="9144000"/>
@@ -201,7 +202,7 @@
           <a:p>
             <a:fld id="{1E717189-69EA-4142-945D-85EE3E06463B}" type="datetimeFigureOut">
               <a:rPr lang="LID4096" smtClean="0"/>
-              <a:t>09/10/2025</a:t>
+              <a:t>09/15/2025</a:t>
             </a:fld>
             <a:endParaRPr lang="LID4096"/>
           </a:p>
@@ -1065,7 +1066,7 @@
           <a:p>
             <a:fld id="{6E06BE13-2967-499D-85E1-E8100B951B63}" type="datetimeFigureOut">
               <a:rPr lang="LID4096" smtClean="0"/>
-              <a:t>09/10/2025</a:t>
+              <a:t>09/15/2025</a:t>
             </a:fld>
             <a:endParaRPr lang="LID4096"/>
           </a:p>
@@ -1265,7 +1266,7 @@
           <a:p>
             <a:fld id="{6E06BE13-2967-499D-85E1-E8100B951B63}" type="datetimeFigureOut">
               <a:rPr lang="LID4096" smtClean="0"/>
-              <a:t>09/10/2025</a:t>
+              <a:t>09/15/2025</a:t>
             </a:fld>
             <a:endParaRPr lang="LID4096"/>
           </a:p>
@@ -1475,7 +1476,7 @@
           <a:p>
             <a:fld id="{6E06BE13-2967-499D-85E1-E8100B951B63}" type="datetimeFigureOut">
               <a:rPr lang="LID4096" smtClean="0"/>
-              <a:t>09/10/2025</a:t>
+              <a:t>09/15/2025</a:t>
             </a:fld>
             <a:endParaRPr lang="LID4096"/>
           </a:p>
@@ -1675,7 +1676,7 @@
           <a:p>
             <a:fld id="{6E06BE13-2967-499D-85E1-E8100B951B63}" type="datetimeFigureOut">
               <a:rPr lang="LID4096" smtClean="0"/>
-              <a:t>09/10/2025</a:t>
+              <a:t>09/15/2025</a:t>
             </a:fld>
             <a:endParaRPr lang="LID4096"/>
           </a:p>
@@ -1951,7 +1952,7 @@
           <a:p>
             <a:fld id="{6E06BE13-2967-499D-85E1-E8100B951B63}" type="datetimeFigureOut">
               <a:rPr lang="LID4096" smtClean="0"/>
-              <a:t>09/10/2025</a:t>
+              <a:t>09/15/2025</a:t>
             </a:fld>
             <a:endParaRPr lang="LID4096"/>
           </a:p>
@@ -2219,7 +2220,7 @@
           <a:p>
             <a:fld id="{6E06BE13-2967-499D-85E1-E8100B951B63}" type="datetimeFigureOut">
               <a:rPr lang="LID4096" smtClean="0"/>
-              <a:t>09/10/2025</a:t>
+              <a:t>09/15/2025</a:t>
             </a:fld>
             <a:endParaRPr lang="LID4096"/>
           </a:p>
@@ -2634,7 +2635,7 @@
           <a:p>
             <a:fld id="{6E06BE13-2967-499D-85E1-E8100B951B63}" type="datetimeFigureOut">
               <a:rPr lang="LID4096" smtClean="0"/>
-              <a:t>09/10/2025</a:t>
+              <a:t>09/15/2025</a:t>
             </a:fld>
             <a:endParaRPr lang="LID4096"/>
           </a:p>
@@ -2776,7 +2777,7 @@
           <a:p>
             <a:fld id="{6E06BE13-2967-499D-85E1-E8100B951B63}" type="datetimeFigureOut">
               <a:rPr lang="LID4096" smtClean="0"/>
-              <a:t>09/10/2025</a:t>
+              <a:t>09/15/2025</a:t>
             </a:fld>
             <a:endParaRPr lang="LID4096"/>
           </a:p>
@@ -2889,7 +2890,7 @@
           <a:p>
             <a:fld id="{6E06BE13-2967-499D-85E1-E8100B951B63}" type="datetimeFigureOut">
               <a:rPr lang="LID4096" smtClean="0"/>
-              <a:t>09/10/2025</a:t>
+              <a:t>09/15/2025</a:t>
             </a:fld>
             <a:endParaRPr lang="LID4096"/>
           </a:p>
@@ -3202,7 +3203,7 @@
           <a:p>
             <a:fld id="{6E06BE13-2967-499D-85E1-E8100B951B63}" type="datetimeFigureOut">
               <a:rPr lang="LID4096" smtClean="0"/>
-              <a:t>09/10/2025</a:t>
+              <a:t>09/15/2025</a:t>
             </a:fld>
             <a:endParaRPr lang="LID4096"/>
           </a:p>
@@ -3491,7 +3492,7 @@
           <a:p>
             <a:fld id="{6E06BE13-2967-499D-85E1-E8100B951B63}" type="datetimeFigureOut">
               <a:rPr lang="LID4096" smtClean="0"/>
-              <a:t>09/10/2025</a:t>
+              <a:t>09/15/2025</a:t>
             </a:fld>
             <a:endParaRPr lang="LID4096"/>
           </a:p>
@@ -3734,7 +3735,7 @@
           <a:p>
             <a:fld id="{6E06BE13-2967-499D-85E1-E8100B951B63}" type="datetimeFigureOut">
               <a:rPr lang="LID4096" smtClean="0"/>
-              <a:t>09/10/2025</a:t>
+              <a:t>09/15/2025</a:t>
             </a:fld>
             <a:endParaRPr lang="LID4096"/>
           </a:p>
@@ -19345,6 +19346,2309 @@
     <p:extLst>
       <p:ext uri="{BB962C8B-B14F-4D97-AF65-F5344CB8AC3E}">
         <p14:creationId xmlns:p14="http://schemas.microsoft.com/office/powerpoint/2010/main" val="1859187612"/>
+      </p:ext>
+    </p:extLst>
+  </p:cSld>
+  <p:clrMapOvr>
+    <a:masterClrMapping/>
+  </p:clrMapOvr>
+</p:sld>
+</file>
+
+<file path=ppt/slides/slide6.xml><?xml version="1.0" encoding="utf-8"?>
+<p:sld xmlns:a="http://schemas.openxmlformats.org/drawingml/2006/main" xmlns:r="http://schemas.openxmlformats.org/officeDocument/2006/relationships" xmlns:p="http://schemas.openxmlformats.org/presentationml/2006/main">
+  <p:cSld>
+    <p:spTree>
+      <p:nvGrpSpPr>
+        <p:cNvPr id="1" name=""/>
+        <p:cNvGrpSpPr/>
+        <p:nvPr/>
+      </p:nvGrpSpPr>
+      <p:grpSpPr>
+        <a:xfrm>
+          <a:off x="0" y="0"/>
+          <a:ext cx="0" cy="0"/>
+          <a:chOff x="0" y="0"/>
+          <a:chExt cx="0" cy="0"/>
+        </a:xfrm>
+      </p:grpSpPr>
+      <p:sp>
+        <p:nvSpPr>
+          <p:cNvPr id="6" name="Rectangle 5">
+            <a:extLst>
+              <a:ext uri="{FF2B5EF4-FFF2-40B4-BE49-F238E27FC236}">
+                <a16:creationId xmlns:a16="http://schemas.microsoft.com/office/drawing/2014/main" id="{25B9F360-8B2F-9EE9-62FE-A63C35873815}"/>
+              </a:ext>
+            </a:extLst>
+          </p:cNvPr>
+          <p:cNvSpPr/>
+          <p:nvPr/>
+        </p:nvSpPr>
+        <p:spPr>
+          <a:xfrm>
+            <a:off x="1916769" y="1502679"/>
+            <a:ext cx="1256492" cy="231131"/>
+          </a:xfrm>
+          <a:prstGeom prst="rect">
+            <a:avLst/>
+          </a:prstGeom>
+          <a:noFill/>
+          <a:ln>
+            <a:solidFill>
+              <a:schemeClr val="bg1">
+                <a:lumMod val="65000"/>
+              </a:schemeClr>
+            </a:solidFill>
+          </a:ln>
+        </p:spPr>
+        <p:style>
+          <a:lnRef idx="2">
+            <a:schemeClr val="accent1">
+              <a:shade val="15000"/>
+            </a:schemeClr>
+          </a:lnRef>
+          <a:fillRef idx="1">
+            <a:schemeClr val="accent1"/>
+          </a:fillRef>
+          <a:effectRef idx="0">
+            <a:schemeClr val="accent1"/>
+          </a:effectRef>
+          <a:fontRef idx="minor">
+            <a:schemeClr val="lt1"/>
+          </a:fontRef>
+        </p:style>
+        <p:txBody>
+          <a:bodyPr rtlCol="0" anchor="ctr"/>
+          <a:lstStyle/>
+          <a:p>
+            <a:pPr algn="ctr"/>
+            <a:endParaRPr lang="LID4096"/>
+          </a:p>
+        </p:txBody>
+      </p:sp>
+      <p:sp>
+        <p:nvSpPr>
+          <p:cNvPr id="2" name="Rectangle 1">
+            <a:extLst>
+              <a:ext uri="{FF2B5EF4-FFF2-40B4-BE49-F238E27FC236}">
+                <a16:creationId xmlns:a16="http://schemas.microsoft.com/office/drawing/2014/main" id="{1D31DE08-D7C0-3E0A-7DC2-F93B8AEE085A}"/>
+              </a:ext>
+            </a:extLst>
+          </p:cNvPr>
+          <p:cNvSpPr/>
+          <p:nvPr/>
+        </p:nvSpPr>
+        <p:spPr>
+          <a:xfrm>
+            <a:off x="1916769" y="1727104"/>
+            <a:ext cx="1256492" cy="231131"/>
+          </a:xfrm>
+          <a:prstGeom prst="rect">
+            <a:avLst/>
+          </a:prstGeom>
+          <a:noFill/>
+          <a:ln>
+            <a:solidFill>
+              <a:schemeClr val="bg1">
+                <a:lumMod val="65000"/>
+              </a:schemeClr>
+            </a:solidFill>
+          </a:ln>
+        </p:spPr>
+        <p:style>
+          <a:lnRef idx="2">
+            <a:schemeClr val="accent1">
+              <a:shade val="15000"/>
+            </a:schemeClr>
+          </a:lnRef>
+          <a:fillRef idx="1">
+            <a:schemeClr val="accent1"/>
+          </a:fillRef>
+          <a:effectRef idx="0">
+            <a:schemeClr val="accent1"/>
+          </a:effectRef>
+          <a:fontRef idx="minor">
+            <a:schemeClr val="lt1"/>
+          </a:fontRef>
+        </p:style>
+        <p:txBody>
+          <a:bodyPr rtlCol="0" anchor="ctr"/>
+          <a:lstStyle/>
+          <a:p>
+            <a:pPr algn="ctr"/>
+            <a:endParaRPr lang="LID4096"/>
+          </a:p>
+        </p:txBody>
+      </p:sp>
+      <p:sp>
+        <p:nvSpPr>
+          <p:cNvPr id="3" name="TextBox 2">
+            <a:extLst>
+              <a:ext uri="{FF2B5EF4-FFF2-40B4-BE49-F238E27FC236}">
+                <a16:creationId xmlns:a16="http://schemas.microsoft.com/office/drawing/2014/main" id="{F947A3C6-371E-F6EB-9ADD-DCE68759E86E}"/>
+              </a:ext>
+            </a:extLst>
+          </p:cNvPr>
+          <p:cNvSpPr txBox="1"/>
+          <p:nvPr/>
+        </p:nvSpPr>
+        <p:spPr>
+          <a:xfrm>
+            <a:off x="3173261" y="1723905"/>
+            <a:ext cx="954107" cy="261610"/>
+          </a:xfrm>
+          <a:prstGeom prst="rect">
+            <a:avLst/>
+          </a:prstGeom>
+          <a:noFill/>
+        </p:spPr>
+        <p:txBody>
+          <a:bodyPr wrap="none" rtlCol="0">
+            <a:spAutoFit/>
+          </a:bodyPr>
+          <a:lstStyle/>
+          <a:p>
+            <a:r>
+              <a:rPr lang="en-GB" sz="1050">
+                <a:latin typeface="Consolas" panose="020B0609020204030204" pitchFamily="49" charset="0"/>
+              </a:rPr>
+              <a:t>0x20010000</a:t>
+            </a:r>
+            <a:endParaRPr lang="LID4096" sz="1050">
+              <a:latin typeface="Consolas" panose="020B0609020204030204" pitchFamily="49" charset="0"/>
+            </a:endParaRPr>
+          </a:p>
+        </p:txBody>
+      </p:sp>
+      <p:sp>
+        <p:nvSpPr>
+          <p:cNvPr id="7" name="TextBox 6">
+            <a:extLst>
+              <a:ext uri="{FF2B5EF4-FFF2-40B4-BE49-F238E27FC236}">
+                <a16:creationId xmlns:a16="http://schemas.microsoft.com/office/drawing/2014/main" id="{EB66036B-660C-E9BF-9740-69C4753231B5}"/>
+              </a:ext>
+            </a:extLst>
+          </p:cNvPr>
+          <p:cNvSpPr txBox="1"/>
+          <p:nvPr/>
+        </p:nvSpPr>
+        <p:spPr>
+          <a:xfrm>
+            <a:off x="3173261" y="1491707"/>
+            <a:ext cx="922047" cy="253916"/>
+          </a:xfrm>
+          <a:prstGeom prst="rect">
+            <a:avLst/>
+          </a:prstGeom>
+          <a:noFill/>
+        </p:spPr>
+        <p:txBody>
+          <a:bodyPr wrap="none" rtlCol="0">
+            <a:spAutoFit/>
+          </a:bodyPr>
+          <a:lstStyle/>
+          <a:p>
+            <a:r>
+              <a:rPr lang="en-GB" sz="1050">
+                <a:solidFill>
+                  <a:schemeClr val="bg1">
+                    <a:lumMod val="65000"/>
+                  </a:schemeClr>
+                </a:solidFill>
+                <a:latin typeface="Consolas" panose="020B0609020204030204" pitchFamily="49" charset="0"/>
+              </a:rPr>
+              <a:t>0x20010004</a:t>
+            </a:r>
+            <a:endParaRPr lang="LID4096" sz="1050">
+              <a:solidFill>
+                <a:schemeClr val="bg1">
+                  <a:lumMod val="65000"/>
+                </a:schemeClr>
+              </a:solidFill>
+              <a:latin typeface="Consolas" panose="020B0609020204030204" pitchFamily="49" charset="0"/>
+            </a:endParaRPr>
+          </a:p>
+        </p:txBody>
+      </p:sp>
+      <p:sp>
+        <p:nvSpPr>
+          <p:cNvPr id="9" name="Rectangle 8">
+            <a:extLst>
+              <a:ext uri="{FF2B5EF4-FFF2-40B4-BE49-F238E27FC236}">
+                <a16:creationId xmlns:a16="http://schemas.microsoft.com/office/drawing/2014/main" id="{3B26D6C5-DF11-A6A2-4FCD-4FD75F19F5B6}"/>
+              </a:ext>
+            </a:extLst>
+          </p:cNvPr>
+          <p:cNvSpPr/>
+          <p:nvPr/>
+        </p:nvSpPr>
+        <p:spPr>
+          <a:xfrm>
+            <a:off x="1916769" y="2185859"/>
+            <a:ext cx="1256492" cy="231131"/>
+          </a:xfrm>
+          <a:prstGeom prst="rect">
+            <a:avLst/>
+          </a:prstGeom>
+          <a:solidFill>
+            <a:schemeClr val="bg1">
+              <a:lumMod val="85000"/>
+            </a:schemeClr>
+          </a:solidFill>
+        </p:spPr>
+        <p:style>
+          <a:lnRef idx="2">
+            <a:schemeClr val="accent1">
+              <a:shade val="15000"/>
+            </a:schemeClr>
+          </a:lnRef>
+          <a:fillRef idx="1">
+            <a:schemeClr val="accent1"/>
+          </a:fillRef>
+          <a:effectRef idx="0">
+            <a:schemeClr val="accent1"/>
+          </a:effectRef>
+          <a:fontRef idx="minor">
+            <a:schemeClr val="lt1"/>
+          </a:fontRef>
+        </p:style>
+        <p:txBody>
+          <a:bodyPr rtlCol="0" anchor="ctr"/>
+          <a:lstStyle/>
+          <a:p>
+            <a:pPr algn="ctr"/>
+            <a:endParaRPr lang="LID4096"/>
+          </a:p>
+        </p:txBody>
+      </p:sp>
+      <p:sp>
+        <p:nvSpPr>
+          <p:cNvPr id="10" name="TextBox 9">
+            <a:extLst>
+              <a:ext uri="{FF2B5EF4-FFF2-40B4-BE49-F238E27FC236}">
+                <a16:creationId xmlns:a16="http://schemas.microsoft.com/office/drawing/2014/main" id="{5F87AD07-C549-0056-4197-4C5917307A52}"/>
+              </a:ext>
+            </a:extLst>
+          </p:cNvPr>
+          <p:cNvSpPr txBox="1"/>
+          <p:nvPr/>
+        </p:nvSpPr>
+        <p:spPr>
+          <a:xfrm>
+            <a:off x="3173261" y="2182660"/>
+            <a:ext cx="922047" cy="253916"/>
+          </a:xfrm>
+          <a:prstGeom prst="rect">
+            <a:avLst/>
+          </a:prstGeom>
+          <a:noFill/>
+        </p:spPr>
+        <p:txBody>
+          <a:bodyPr wrap="none" rtlCol="0">
+            <a:spAutoFit/>
+          </a:bodyPr>
+          <a:lstStyle/>
+          <a:p>
+            <a:r>
+              <a:rPr lang="en-GB" sz="1050">
+                <a:latin typeface="Consolas" panose="020B0609020204030204" pitchFamily="49" charset="0"/>
+              </a:rPr>
+              <a:t>0x2000FFF8</a:t>
+            </a:r>
+            <a:endParaRPr lang="LID4096" sz="1050">
+              <a:latin typeface="Consolas" panose="020B0609020204030204" pitchFamily="49" charset="0"/>
+            </a:endParaRPr>
+          </a:p>
+        </p:txBody>
+      </p:sp>
+      <p:sp>
+        <p:nvSpPr>
+          <p:cNvPr id="11" name="Rectangle 10">
+            <a:extLst>
+              <a:ext uri="{FF2B5EF4-FFF2-40B4-BE49-F238E27FC236}">
+                <a16:creationId xmlns:a16="http://schemas.microsoft.com/office/drawing/2014/main" id="{A0D7F36B-4F17-7A74-6520-A67C95F6397F}"/>
+              </a:ext>
+            </a:extLst>
+          </p:cNvPr>
+          <p:cNvSpPr/>
+          <p:nvPr/>
+        </p:nvSpPr>
+        <p:spPr>
+          <a:xfrm>
+            <a:off x="1916769" y="1961434"/>
+            <a:ext cx="1256492" cy="231131"/>
+          </a:xfrm>
+          <a:prstGeom prst="rect">
+            <a:avLst/>
+          </a:prstGeom>
+          <a:solidFill>
+            <a:schemeClr val="bg1">
+              <a:lumMod val="85000"/>
+            </a:schemeClr>
+          </a:solidFill>
+        </p:spPr>
+        <p:style>
+          <a:lnRef idx="2">
+            <a:schemeClr val="accent1">
+              <a:shade val="15000"/>
+            </a:schemeClr>
+          </a:lnRef>
+          <a:fillRef idx="1">
+            <a:schemeClr val="accent1"/>
+          </a:fillRef>
+          <a:effectRef idx="0">
+            <a:schemeClr val="accent1"/>
+          </a:effectRef>
+          <a:fontRef idx="minor">
+            <a:schemeClr val="lt1"/>
+          </a:fontRef>
+        </p:style>
+        <p:txBody>
+          <a:bodyPr rtlCol="0" anchor="ctr"/>
+          <a:lstStyle/>
+          <a:p>
+            <a:pPr algn="ctr"/>
+            <a:endParaRPr lang="LID4096"/>
+          </a:p>
+        </p:txBody>
+      </p:sp>
+      <p:sp>
+        <p:nvSpPr>
+          <p:cNvPr id="12" name="TextBox 11">
+            <a:extLst>
+              <a:ext uri="{FF2B5EF4-FFF2-40B4-BE49-F238E27FC236}">
+                <a16:creationId xmlns:a16="http://schemas.microsoft.com/office/drawing/2014/main" id="{E1F502B8-130D-B303-C4AE-81B603ACBB6C}"/>
+              </a:ext>
+            </a:extLst>
+          </p:cNvPr>
+          <p:cNvSpPr txBox="1"/>
+          <p:nvPr/>
+        </p:nvSpPr>
+        <p:spPr>
+          <a:xfrm>
+            <a:off x="3173261" y="1950462"/>
+            <a:ext cx="922047" cy="253916"/>
+          </a:xfrm>
+          <a:prstGeom prst="rect">
+            <a:avLst/>
+          </a:prstGeom>
+          <a:noFill/>
+        </p:spPr>
+        <p:txBody>
+          <a:bodyPr wrap="none" rtlCol="0">
+            <a:spAutoFit/>
+          </a:bodyPr>
+          <a:lstStyle/>
+          <a:p>
+            <a:r>
+              <a:rPr lang="en-GB" sz="1050">
+                <a:latin typeface="Consolas" panose="020B0609020204030204" pitchFamily="49" charset="0"/>
+              </a:rPr>
+              <a:t>0x2000FFFC</a:t>
+            </a:r>
+            <a:endParaRPr lang="LID4096" sz="1050">
+              <a:latin typeface="Consolas" panose="020B0609020204030204" pitchFamily="49" charset="0"/>
+            </a:endParaRPr>
+          </a:p>
+        </p:txBody>
+      </p:sp>
+      <p:sp>
+        <p:nvSpPr>
+          <p:cNvPr id="14" name="Rectangle 13">
+            <a:extLst>
+              <a:ext uri="{FF2B5EF4-FFF2-40B4-BE49-F238E27FC236}">
+                <a16:creationId xmlns:a16="http://schemas.microsoft.com/office/drawing/2014/main" id="{FC3A8E9C-E657-DDB1-978E-0CAC2B997D2A}"/>
+              </a:ext>
+            </a:extLst>
+          </p:cNvPr>
+          <p:cNvSpPr/>
+          <p:nvPr/>
+        </p:nvSpPr>
+        <p:spPr>
+          <a:xfrm>
+            <a:off x="1916769" y="2644614"/>
+            <a:ext cx="1256492" cy="231131"/>
+          </a:xfrm>
+          <a:prstGeom prst="rect">
+            <a:avLst/>
+          </a:prstGeom>
+          <a:solidFill>
+            <a:schemeClr val="bg1">
+              <a:lumMod val="85000"/>
+            </a:schemeClr>
+          </a:solidFill>
+        </p:spPr>
+        <p:style>
+          <a:lnRef idx="2">
+            <a:schemeClr val="accent1">
+              <a:shade val="15000"/>
+            </a:schemeClr>
+          </a:lnRef>
+          <a:fillRef idx="1">
+            <a:schemeClr val="accent1"/>
+          </a:fillRef>
+          <a:effectRef idx="0">
+            <a:schemeClr val="accent1"/>
+          </a:effectRef>
+          <a:fontRef idx="minor">
+            <a:schemeClr val="lt1"/>
+          </a:fontRef>
+        </p:style>
+        <p:txBody>
+          <a:bodyPr rtlCol="0" anchor="ctr"/>
+          <a:lstStyle/>
+          <a:p>
+            <a:pPr algn="ctr"/>
+            <a:endParaRPr lang="LID4096"/>
+          </a:p>
+        </p:txBody>
+      </p:sp>
+      <p:sp>
+        <p:nvSpPr>
+          <p:cNvPr id="15" name="TextBox 14">
+            <a:extLst>
+              <a:ext uri="{FF2B5EF4-FFF2-40B4-BE49-F238E27FC236}">
+                <a16:creationId xmlns:a16="http://schemas.microsoft.com/office/drawing/2014/main" id="{7B0854C5-A81C-6672-31D5-0747F90EB254}"/>
+              </a:ext>
+            </a:extLst>
+          </p:cNvPr>
+          <p:cNvSpPr txBox="1"/>
+          <p:nvPr/>
+        </p:nvSpPr>
+        <p:spPr>
+          <a:xfrm>
+            <a:off x="3173261" y="2641415"/>
+            <a:ext cx="922047" cy="253916"/>
+          </a:xfrm>
+          <a:prstGeom prst="rect">
+            <a:avLst/>
+          </a:prstGeom>
+          <a:noFill/>
+        </p:spPr>
+        <p:txBody>
+          <a:bodyPr wrap="none" rtlCol="0">
+            <a:spAutoFit/>
+          </a:bodyPr>
+          <a:lstStyle/>
+          <a:p>
+            <a:r>
+              <a:rPr lang="en-GB" sz="1050">
+                <a:latin typeface="Consolas" panose="020B0609020204030204" pitchFamily="49" charset="0"/>
+              </a:rPr>
+              <a:t>0x2000FFF0</a:t>
+            </a:r>
+            <a:endParaRPr lang="LID4096" sz="1050">
+              <a:latin typeface="Consolas" panose="020B0609020204030204" pitchFamily="49" charset="0"/>
+            </a:endParaRPr>
+          </a:p>
+        </p:txBody>
+      </p:sp>
+      <p:sp>
+        <p:nvSpPr>
+          <p:cNvPr id="16" name="Rectangle 15">
+            <a:extLst>
+              <a:ext uri="{FF2B5EF4-FFF2-40B4-BE49-F238E27FC236}">
+                <a16:creationId xmlns:a16="http://schemas.microsoft.com/office/drawing/2014/main" id="{E2FDF3AC-C5E1-1658-7995-26F35FDC5FE1}"/>
+              </a:ext>
+            </a:extLst>
+          </p:cNvPr>
+          <p:cNvSpPr/>
+          <p:nvPr/>
+        </p:nvSpPr>
+        <p:spPr>
+          <a:xfrm>
+            <a:off x="1916769" y="2420189"/>
+            <a:ext cx="1256492" cy="231131"/>
+          </a:xfrm>
+          <a:prstGeom prst="rect">
+            <a:avLst/>
+          </a:prstGeom>
+          <a:solidFill>
+            <a:schemeClr val="bg1">
+              <a:lumMod val="85000"/>
+            </a:schemeClr>
+          </a:solidFill>
+        </p:spPr>
+        <p:style>
+          <a:lnRef idx="2">
+            <a:schemeClr val="accent1">
+              <a:shade val="15000"/>
+            </a:schemeClr>
+          </a:lnRef>
+          <a:fillRef idx="1">
+            <a:schemeClr val="accent1"/>
+          </a:fillRef>
+          <a:effectRef idx="0">
+            <a:schemeClr val="accent1"/>
+          </a:effectRef>
+          <a:fontRef idx="minor">
+            <a:schemeClr val="lt1"/>
+          </a:fontRef>
+        </p:style>
+        <p:txBody>
+          <a:bodyPr rtlCol="0" anchor="ctr"/>
+          <a:lstStyle/>
+          <a:p>
+            <a:pPr algn="ctr"/>
+            <a:endParaRPr lang="LID4096"/>
+          </a:p>
+        </p:txBody>
+      </p:sp>
+      <p:sp>
+        <p:nvSpPr>
+          <p:cNvPr id="17" name="TextBox 16">
+            <a:extLst>
+              <a:ext uri="{FF2B5EF4-FFF2-40B4-BE49-F238E27FC236}">
+                <a16:creationId xmlns:a16="http://schemas.microsoft.com/office/drawing/2014/main" id="{E0CBEC8B-042E-7699-5A52-A725F872363B}"/>
+              </a:ext>
+            </a:extLst>
+          </p:cNvPr>
+          <p:cNvSpPr txBox="1"/>
+          <p:nvPr/>
+        </p:nvSpPr>
+        <p:spPr>
+          <a:xfrm>
+            <a:off x="3173261" y="2409217"/>
+            <a:ext cx="922047" cy="253916"/>
+          </a:xfrm>
+          <a:prstGeom prst="rect">
+            <a:avLst/>
+          </a:prstGeom>
+          <a:noFill/>
+        </p:spPr>
+        <p:txBody>
+          <a:bodyPr wrap="none" rtlCol="0">
+            <a:spAutoFit/>
+          </a:bodyPr>
+          <a:lstStyle/>
+          <a:p>
+            <a:r>
+              <a:rPr lang="en-GB" sz="1050">
+                <a:latin typeface="Consolas" panose="020B0609020204030204" pitchFamily="49" charset="0"/>
+              </a:rPr>
+              <a:t>0x2000FFF4</a:t>
+            </a:r>
+            <a:endParaRPr lang="LID4096" sz="1050">
+              <a:latin typeface="Consolas" panose="020B0609020204030204" pitchFamily="49" charset="0"/>
+            </a:endParaRPr>
+          </a:p>
+        </p:txBody>
+      </p:sp>
+      <p:sp>
+        <p:nvSpPr>
+          <p:cNvPr id="19" name="TextBox 18">
+            <a:extLst>
+              <a:ext uri="{FF2B5EF4-FFF2-40B4-BE49-F238E27FC236}">
+                <a16:creationId xmlns:a16="http://schemas.microsoft.com/office/drawing/2014/main" id="{1661788E-A6AA-375C-8528-2A3990D6CDFE}"/>
+              </a:ext>
+            </a:extLst>
+          </p:cNvPr>
+          <p:cNvSpPr txBox="1"/>
+          <p:nvPr/>
+        </p:nvSpPr>
+        <p:spPr>
+          <a:xfrm>
+            <a:off x="3173261" y="1018928"/>
+            <a:ext cx="1290738" cy="484748"/>
+          </a:xfrm>
+          <a:prstGeom prst="rect">
+            <a:avLst/>
+          </a:prstGeom>
+          <a:noFill/>
+        </p:spPr>
+        <p:txBody>
+          <a:bodyPr wrap="none" rtlCol="0">
+            <a:spAutoFit/>
+          </a:bodyPr>
+          <a:lstStyle/>
+          <a:p>
+            <a:r>
+              <a:rPr lang="en-GB" sz="1050" b="1">
+                <a:latin typeface="Consolas" panose="020B0609020204030204" pitchFamily="49" charset="0"/>
+              </a:rPr>
+              <a:t>sp</a:t>
+            </a:r>
+            <a:r>
+              <a:rPr lang="en-GB" sz="1050">
+                <a:latin typeface="Consolas" panose="020B0609020204030204" pitchFamily="49" charset="0"/>
+              </a:rPr>
+              <a:t> = 0x20010000</a:t>
+            </a:r>
+          </a:p>
+          <a:p>
+            <a:pPr algn="ctr"/>
+            <a:r>
+              <a:rPr lang="en-GB" sz="500">
+                <a:latin typeface="Consolas" panose="020B0609020204030204" pitchFamily="49" charset="0"/>
+              </a:rPr>
+              <a:t>= &lt;bottom of stack&gt;</a:t>
+            </a:r>
+          </a:p>
+          <a:p>
+            <a:pPr algn="ctr"/>
+            <a:r>
+              <a:rPr lang="en-GB" sz="500">
+                <a:latin typeface="Consolas" panose="020B0609020204030204" pitchFamily="49" charset="0"/>
+              </a:rPr>
+              <a:t>= &lt;top of stack&gt;</a:t>
+            </a:r>
+          </a:p>
+          <a:p>
+            <a:pPr algn="ctr"/>
+            <a:endParaRPr lang="en-GB" sz="500">
+              <a:latin typeface="Consolas" panose="020B0609020204030204" pitchFamily="49" charset="0"/>
+            </a:endParaRPr>
+          </a:p>
+        </p:txBody>
+      </p:sp>
+      <p:sp>
+        <p:nvSpPr>
+          <p:cNvPr id="20" name="Arrow: Bent 19">
+            <a:extLst>
+              <a:ext uri="{FF2B5EF4-FFF2-40B4-BE49-F238E27FC236}">
+                <a16:creationId xmlns:a16="http://schemas.microsoft.com/office/drawing/2014/main" id="{8F76212D-ACBE-EC6D-0BFF-CF5D25DDE062}"/>
+              </a:ext>
+            </a:extLst>
+          </p:cNvPr>
+          <p:cNvSpPr/>
+          <p:nvPr/>
+        </p:nvSpPr>
+        <p:spPr>
+          <a:xfrm flipH="1" flipV="1">
+            <a:off x="4062610" y="1306659"/>
+            <a:ext cx="304800" cy="623170"/>
+          </a:xfrm>
+          <a:prstGeom prst="bentArrow">
+            <a:avLst/>
+          </a:prstGeom>
+          <a:solidFill>
+            <a:schemeClr val="bg1">
+              <a:lumMod val="85000"/>
+            </a:schemeClr>
+          </a:solidFill>
+          <a:ln w="12700">
+            <a:solidFill>
+              <a:schemeClr val="tx1"/>
+            </a:solidFill>
+          </a:ln>
+        </p:spPr>
+        <p:style>
+          <a:lnRef idx="2">
+            <a:schemeClr val="accent1">
+              <a:shade val="15000"/>
+            </a:schemeClr>
+          </a:lnRef>
+          <a:fillRef idx="1">
+            <a:schemeClr val="accent1"/>
+          </a:fillRef>
+          <a:effectRef idx="0">
+            <a:schemeClr val="accent1"/>
+          </a:effectRef>
+          <a:fontRef idx="minor">
+            <a:schemeClr val="lt1"/>
+          </a:fontRef>
+        </p:style>
+        <p:txBody>
+          <a:bodyPr rtlCol="0" anchor="ctr"/>
+          <a:lstStyle/>
+          <a:p>
+            <a:pPr algn="ctr"/>
+            <a:endParaRPr lang="LID4096">
+              <a:solidFill>
+                <a:schemeClr val="tx1"/>
+              </a:solidFill>
+            </a:endParaRPr>
+          </a:p>
+        </p:txBody>
+      </p:sp>
+      <p:sp>
+        <p:nvSpPr>
+          <p:cNvPr id="21" name="Rectangle 20">
+            <a:extLst>
+              <a:ext uri="{FF2B5EF4-FFF2-40B4-BE49-F238E27FC236}">
+                <a16:creationId xmlns:a16="http://schemas.microsoft.com/office/drawing/2014/main" id="{0844AD97-B912-D5AA-A96B-BE75FFEDF499}"/>
+              </a:ext>
+            </a:extLst>
+          </p:cNvPr>
+          <p:cNvSpPr/>
+          <p:nvPr/>
+        </p:nvSpPr>
+        <p:spPr>
+          <a:xfrm>
+            <a:off x="4979381" y="1483093"/>
+            <a:ext cx="1256492" cy="231131"/>
+          </a:xfrm>
+          <a:prstGeom prst="rect">
+            <a:avLst/>
+          </a:prstGeom>
+          <a:noFill/>
+          <a:ln>
+            <a:solidFill>
+              <a:schemeClr val="bg1">
+                <a:lumMod val="65000"/>
+              </a:schemeClr>
+            </a:solidFill>
+          </a:ln>
+        </p:spPr>
+        <p:style>
+          <a:lnRef idx="2">
+            <a:schemeClr val="accent1">
+              <a:shade val="15000"/>
+            </a:schemeClr>
+          </a:lnRef>
+          <a:fillRef idx="1">
+            <a:schemeClr val="accent1"/>
+          </a:fillRef>
+          <a:effectRef idx="0">
+            <a:schemeClr val="accent1"/>
+          </a:effectRef>
+          <a:fontRef idx="minor">
+            <a:schemeClr val="lt1"/>
+          </a:fontRef>
+        </p:style>
+        <p:txBody>
+          <a:bodyPr rtlCol="0" anchor="ctr"/>
+          <a:lstStyle/>
+          <a:p>
+            <a:pPr algn="ctr"/>
+            <a:endParaRPr lang="LID4096"/>
+          </a:p>
+        </p:txBody>
+      </p:sp>
+      <p:sp>
+        <p:nvSpPr>
+          <p:cNvPr id="22" name="Rectangle 21">
+            <a:extLst>
+              <a:ext uri="{FF2B5EF4-FFF2-40B4-BE49-F238E27FC236}">
+                <a16:creationId xmlns:a16="http://schemas.microsoft.com/office/drawing/2014/main" id="{385316FD-E832-922F-DED2-0608DF787AA8}"/>
+              </a:ext>
+            </a:extLst>
+          </p:cNvPr>
+          <p:cNvSpPr/>
+          <p:nvPr/>
+        </p:nvSpPr>
+        <p:spPr>
+          <a:xfrm>
+            <a:off x="4979381" y="1707518"/>
+            <a:ext cx="1256492" cy="231131"/>
+          </a:xfrm>
+          <a:prstGeom prst="rect">
+            <a:avLst/>
+          </a:prstGeom>
+          <a:noFill/>
+          <a:ln>
+            <a:solidFill>
+              <a:schemeClr val="bg1">
+                <a:lumMod val="65000"/>
+              </a:schemeClr>
+            </a:solidFill>
+          </a:ln>
+        </p:spPr>
+        <p:style>
+          <a:lnRef idx="2">
+            <a:schemeClr val="accent1">
+              <a:shade val="15000"/>
+            </a:schemeClr>
+          </a:lnRef>
+          <a:fillRef idx="1">
+            <a:schemeClr val="accent1"/>
+          </a:fillRef>
+          <a:effectRef idx="0">
+            <a:schemeClr val="accent1"/>
+          </a:effectRef>
+          <a:fontRef idx="minor">
+            <a:schemeClr val="lt1"/>
+          </a:fontRef>
+        </p:style>
+        <p:txBody>
+          <a:bodyPr rtlCol="0" anchor="ctr"/>
+          <a:lstStyle/>
+          <a:p>
+            <a:pPr algn="ctr"/>
+            <a:endParaRPr lang="LID4096"/>
+          </a:p>
+        </p:txBody>
+      </p:sp>
+      <p:sp>
+        <p:nvSpPr>
+          <p:cNvPr id="23" name="TextBox 22">
+            <a:extLst>
+              <a:ext uri="{FF2B5EF4-FFF2-40B4-BE49-F238E27FC236}">
+                <a16:creationId xmlns:a16="http://schemas.microsoft.com/office/drawing/2014/main" id="{79A7E8B7-9B51-7A6B-86E8-EDC37E717772}"/>
+              </a:ext>
+            </a:extLst>
+          </p:cNvPr>
+          <p:cNvSpPr txBox="1"/>
+          <p:nvPr/>
+        </p:nvSpPr>
+        <p:spPr>
+          <a:xfrm>
+            <a:off x="6235873" y="1704319"/>
+            <a:ext cx="954107" cy="261610"/>
+          </a:xfrm>
+          <a:prstGeom prst="rect">
+            <a:avLst/>
+          </a:prstGeom>
+          <a:noFill/>
+        </p:spPr>
+        <p:txBody>
+          <a:bodyPr wrap="none" rtlCol="0">
+            <a:spAutoFit/>
+          </a:bodyPr>
+          <a:lstStyle/>
+          <a:p>
+            <a:r>
+              <a:rPr lang="en-GB" sz="1050">
+                <a:latin typeface="Consolas" panose="020B0609020204030204" pitchFamily="49" charset="0"/>
+              </a:rPr>
+              <a:t>0x20010000</a:t>
+            </a:r>
+            <a:endParaRPr lang="LID4096" sz="1050">
+              <a:latin typeface="Consolas" panose="020B0609020204030204" pitchFamily="49" charset="0"/>
+            </a:endParaRPr>
+          </a:p>
+        </p:txBody>
+      </p:sp>
+      <p:sp>
+        <p:nvSpPr>
+          <p:cNvPr id="24" name="TextBox 23">
+            <a:extLst>
+              <a:ext uri="{FF2B5EF4-FFF2-40B4-BE49-F238E27FC236}">
+                <a16:creationId xmlns:a16="http://schemas.microsoft.com/office/drawing/2014/main" id="{02B9E8E9-19AA-E4B7-DFB7-12010124D8C2}"/>
+              </a:ext>
+            </a:extLst>
+          </p:cNvPr>
+          <p:cNvSpPr txBox="1"/>
+          <p:nvPr/>
+        </p:nvSpPr>
+        <p:spPr>
+          <a:xfrm>
+            <a:off x="6235873" y="1472121"/>
+            <a:ext cx="922047" cy="253916"/>
+          </a:xfrm>
+          <a:prstGeom prst="rect">
+            <a:avLst/>
+          </a:prstGeom>
+          <a:noFill/>
+        </p:spPr>
+        <p:txBody>
+          <a:bodyPr wrap="none" rtlCol="0">
+            <a:spAutoFit/>
+          </a:bodyPr>
+          <a:lstStyle/>
+          <a:p>
+            <a:r>
+              <a:rPr lang="en-GB" sz="1050">
+                <a:solidFill>
+                  <a:schemeClr val="bg1">
+                    <a:lumMod val="65000"/>
+                  </a:schemeClr>
+                </a:solidFill>
+                <a:latin typeface="Consolas" panose="020B0609020204030204" pitchFamily="49" charset="0"/>
+              </a:rPr>
+              <a:t>0x20010004</a:t>
+            </a:r>
+            <a:endParaRPr lang="LID4096" sz="1050">
+              <a:solidFill>
+                <a:schemeClr val="bg1">
+                  <a:lumMod val="65000"/>
+                </a:schemeClr>
+              </a:solidFill>
+              <a:latin typeface="Consolas" panose="020B0609020204030204" pitchFamily="49" charset="0"/>
+            </a:endParaRPr>
+          </a:p>
+        </p:txBody>
+      </p:sp>
+      <p:sp>
+        <p:nvSpPr>
+          <p:cNvPr id="26" name="Rectangle 25">
+            <a:extLst>
+              <a:ext uri="{FF2B5EF4-FFF2-40B4-BE49-F238E27FC236}">
+                <a16:creationId xmlns:a16="http://schemas.microsoft.com/office/drawing/2014/main" id="{5840FBC5-A57D-304C-D9A1-E785D773075A}"/>
+              </a:ext>
+            </a:extLst>
+          </p:cNvPr>
+          <p:cNvSpPr/>
+          <p:nvPr/>
+        </p:nvSpPr>
+        <p:spPr>
+          <a:xfrm>
+            <a:off x="4979381" y="2166273"/>
+            <a:ext cx="1256492" cy="231131"/>
+          </a:xfrm>
+          <a:prstGeom prst="rect">
+            <a:avLst/>
+          </a:prstGeom>
+          <a:noFill/>
+        </p:spPr>
+        <p:style>
+          <a:lnRef idx="2">
+            <a:schemeClr val="accent1">
+              <a:shade val="15000"/>
+            </a:schemeClr>
+          </a:lnRef>
+          <a:fillRef idx="1">
+            <a:schemeClr val="accent1"/>
+          </a:fillRef>
+          <a:effectRef idx="0">
+            <a:schemeClr val="accent1"/>
+          </a:effectRef>
+          <a:fontRef idx="minor">
+            <a:schemeClr val="lt1"/>
+          </a:fontRef>
+        </p:style>
+        <p:txBody>
+          <a:bodyPr rtlCol="0" anchor="ctr"/>
+          <a:lstStyle/>
+          <a:p>
+            <a:pPr algn="ctr"/>
+            <a:endParaRPr lang="LID4096"/>
+          </a:p>
+        </p:txBody>
+      </p:sp>
+      <p:sp>
+        <p:nvSpPr>
+          <p:cNvPr id="27" name="TextBox 26">
+            <a:extLst>
+              <a:ext uri="{FF2B5EF4-FFF2-40B4-BE49-F238E27FC236}">
+                <a16:creationId xmlns:a16="http://schemas.microsoft.com/office/drawing/2014/main" id="{773F74AA-542D-5BB0-5C2C-A05B0DEBD28B}"/>
+              </a:ext>
+            </a:extLst>
+          </p:cNvPr>
+          <p:cNvSpPr txBox="1"/>
+          <p:nvPr/>
+        </p:nvSpPr>
+        <p:spPr>
+          <a:xfrm>
+            <a:off x="6235873" y="2163074"/>
+            <a:ext cx="922047" cy="253916"/>
+          </a:xfrm>
+          <a:prstGeom prst="rect">
+            <a:avLst/>
+          </a:prstGeom>
+          <a:noFill/>
+        </p:spPr>
+        <p:txBody>
+          <a:bodyPr wrap="none" rtlCol="0">
+            <a:spAutoFit/>
+          </a:bodyPr>
+          <a:lstStyle/>
+          <a:p>
+            <a:r>
+              <a:rPr lang="en-GB" sz="1050">
+                <a:latin typeface="Consolas" panose="020B0609020204030204" pitchFamily="49" charset="0"/>
+              </a:rPr>
+              <a:t>0x2000FFF8</a:t>
+            </a:r>
+            <a:endParaRPr lang="LID4096" sz="1050">
+              <a:latin typeface="Consolas" panose="020B0609020204030204" pitchFamily="49" charset="0"/>
+            </a:endParaRPr>
+          </a:p>
+        </p:txBody>
+      </p:sp>
+      <p:sp>
+        <p:nvSpPr>
+          <p:cNvPr id="28" name="Rectangle 27">
+            <a:extLst>
+              <a:ext uri="{FF2B5EF4-FFF2-40B4-BE49-F238E27FC236}">
+                <a16:creationId xmlns:a16="http://schemas.microsoft.com/office/drawing/2014/main" id="{6C3EA220-8D9F-B2B7-0714-B3EEB8E27D7C}"/>
+              </a:ext>
+            </a:extLst>
+          </p:cNvPr>
+          <p:cNvSpPr/>
+          <p:nvPr/>
+        </p:nvSpPr>
+        <p:spPr>
+          <a:xfrm>
+            <a:off x="4979381" y="1941848"/>
+            <a:ext cx="1256492" cy="231131"/>
+          </a:xfrm>
+          <a:prstGeom prst="rect">
+            <a:avLst/>
+          </a:prstGeom>
+          <a:noFill/>
+        </p:spPr>
+        <p:style>
+          <a:lnRef idx="2">
+            <a:schemeClr val="accent1">
+              <a:shade val="15000"/>
+            </a:schemeClr>
+          </a:lnRef>
+          <a:fillRef idx="1">
+            <a:schemeClr val="accent1"/>
+          </a:fillRef>
+          <a:effectRef idx="0">
+            <a:schemeClr val="accent1"/>
+          </a:effectRef>
+          <a:fontRef idx="minor">
+            <a:schemeClr val="lt1"/>
+          </a:fontRef>
+        </p:style>
+        <p:txBody>
+          <a:bodyPr rtlCol="0" anchor="ctr"/>
+          <a:lstStyle/>
+          <a:p>
+            <a:pPr algn="ctr"/>
+            <a:endParaRPr lang="LID4096"/>
+          </a:p>
+        </p:txBody>
+      </p:sp>
+      <p:sp>
+        <p:nvSpPr>
+          <p:cNvPr id="29" name="TextBox 28">
+            <a:extLst>
+              <a:ext uri="{FF2B5EF4-FFF2-40B4-BE49-F238E27FC236}">
+                <a16:creationId xmlns:a16="http://schemas.microsoft.com/office/drawing/2014/main" id="{C3C19A3D-5D9D-9AA4-9614-3D454ACDD7E5}"/>
+              </a:ext>
+            </a:extLst>
+          </p:cNvPr>
+          <p:cNvSpPr txBox="1"/>
+          <p:nvPr/>
+        </p:nvSpPr>
+        <p:spPr>
+          <a:xfrm>
+            <a:off x="6235873" y="1930876"/>
+            <a:ext cx="922047" cy="253916"/>
+          </a:xfrm>
+          <a:prstGeom prst="rect">
+            <a:avLst/>
+          </a:prstGeom>
+          <a:noFill/>
+        </p:spPr>
+        <p:txBody>
+          <a:bodyPr wrap="none" rtlCol="0">
+            <a:spAutoFit/>
+          </a:bodyPr>
+          <a:lstStyle/>
+          <a:p>
+            <a:r>
+              <a:rPr lang="en-GB" sz="1050">
+                <a:latin typeface="Consolas" panose="020B0609020204030204" pitchFamily="49" charset="0"/>
+              </a:rPr>
+              <a:t>0x2000FFFC</a:t>
+            </a:r>
+            <a:endParaRPr lang="LID4096" sz="1050">
+              <a:latin typeface="Consolas" panose="020B0609020204030204" pitchFamily="49" charset="0"/>
+            </a:endParaRPr>
+          </a:p>
+        </p:txBody>
+      </p:sp>
+      <p:sp>
+        <p:nvSpPr>
+          <p:cNvPr id="31" name="Rectangle 30">
+            <a:extLst>
+              <a:ext uri="{FF2B5EF4-FFF2-40B4-BE49-F238E27FC236}">
+                <a16:creationId xmlns:a16="http://schemas.microsoft.com/office/drawing/2014/main" id="{001B17A7-4644-EA91-1F6B-0BD828AF6F7E}"/>
+              </a:ext>
+            </a:extLst>
+          </p:cNvPr>
+          <p:cNvSpPr/>
+          <p:nvPr/>
+        </p:nvSpPr>
+        <p:spPr>
+          <a:xfrm>
+            <a:off x="4979381" y="2625028"/>
+            <a:ext cx="1256492" cy="231131"/>
+          </a:xfrm>
+          <a:prstGeom prst="rect">
+            <a:avLst/>
+          </a:prstGeom>
+          <a:solidFill>
+            <a:schemeClr val="bg1">
+              <a:lumMod val="85000"/>
+            </a:schemeClr>
+          </a:solidFill>
+        </p:spPr>
+        <p:style>
+          <a:lnRef idx="2">
+            <a:schemeClr val="accent1">
+              <a:shade val="15000"/>
+            </a:schemeClr>
+          </a:lnRef>
+          <a:fillRef idx="1">
+            <a:schemeClr val="accent1"/>
+          </a:fillRef>
+          <a:effectRef idx="0">
+            <a:schemeClr val="accent1"/>
+          </a:effectRef>
+          <a:fontRef idx="minor">
+            <a:schemeClr val="lt1"/>
+          </a:fontRef>
+        </p:style>
+        <p:txBody>
+          <a:bodyPr rtlCol="0" anchor="ctr"/>
+          <a:lstStyle/>
+          <a:p>
+            <a:pPr algn="ctr"/>
+            <a:endParaRPr lang="LID4096"/>
+          </a:p>
+        </p:txBody>
+      </p:sp>
+      <p:sp>
+        <p:nvSpPr>
+          <p:cNvPr id="32" name="TextBox 31">
+            <a:extLst>
+              <a:ext uri="{FF2B5EF4-FFF2-40B4-BE49-F238E27FC236}">
+                <a16:creationId xmlns:a16="http://schemas.microsoft.com/office/drawing/2014/main" id="{42E3C354-F802-1329-3E7F-65BF4DD390CA}"/>
+              </a:ext>
+            </a:extLst>
+          </p:cNvPr>
+          <p:cNvSpPr txBox="1"/>
+          <p:nvPr/>
+        </p:nvSpPr>
+        <p:spPr>
+          <a:xfrm>
+            <a:off x="6235873" y="2621829"/>
+            <a:ext cx="922047" cy="253916"/>
+          </a:xfrm>
+          <a:prstGeom prst="rect">
+            <a:avLst/>
+          </a:prstGeom>
+          <a:noFill/>
+        </p:spPr>
+        <p:txBody>
+          <a:bodyPr wrap="none" rtlCol="0">
+            <a:spAutoFit/>
+          </a:bodyPr>
+          <a:lstStyle/>
+          <a:p>
+            <a:r>
+              <a:rPr lang="en-GB" sz="1050">
+                <a:latin typeface="Consolas" panose="020B0609020204030204" pitchFamily="49" charset="0"/>
+              </a:rPr>
+              <a:t>0x2000FFF0</a:t>
+            </a:r>
+            <a:endParaRPr lang="LID4096" sz="1050">
+              <a:latin typeface="Consolas" panose="020B0609020204030204" pitchFamily="49" charset="0"/>
+            </a:endParaRPr>
+          </a:p>
+        </p:txBody>
+      </p:sp>
+      <p:sp>
+        <p:nvSpPr>
+          <p:cNvPr id="33" name="Rectangle 32">
+            <a:extLst>
+              <a:ext uri="{FF2B5EF4-FFF2-40B4-BE49-F238E27FC236}">
+                <a16:creationId xmlns:a16="http://schemas.microsoft.com/office/drawing/2014/main" id="{D29BB9E1-DC40-DB75-BDCE-1049FB1FE1BB}"/>
+              </a:ext>
+            </a:extLst>
+          </p:cNvPr>
+          <p:cNvSpPr/>
+          <p:nvPr/>
+        </p:nvSpPr>
+        <p:spPr>
+          <a:xfrm>
+            <a:off x="4979381" y="2400603"/>
+            <a:ext cx="1256492" cy="231131"/>
+          </a:xfrm>
+          <a:prstGeom prst="rect">
+            <a:avLst/>
+          </a:prstGeom>
+          <a:noFill/>
+        </p:spPr>
+        <p:style>
+          <a:lnRef idx="2">
+            <a:schemeClr val="accent1">
+              <a:shade val="15000"/>
+            </a:schemeClr>
+          </a:lnRef>
+          <a:fillRef idx="1">
+            <a:schemeClr val="accent1"/>
+          </a:fillRef>
+          <a:effectRef idx="0">
+            <a:schemeClr val="accent1"/>
+          </a:effectRef>
+          <a:fontRef idx="minor">
+            <a:schemeClr val="lt1"/>
+          </a:fontRef>
+        </p:style>
+        <p:txBody>
+          <a:bodyPr rtlCol="0" anchor="ctr"/>
+          <a:lstStyle/>
+          <a:p>
+            <a:pPr algn="ctr"/>
+            <a:endParaRPr lang="LID4096"/>
+          </a:p>
+        </p:txBody>
+      </p:sp>
+      <p:sp>
+        <p:nvSpPr>
+          <p:cNvPr id="34" name="TextBox 33">
+            <a:extLst>
+              <a:ext uri="{FF2B5EF4-FFF2-40B4-BE49-F238E27FC236}">
+                <a16:creationId xmlns:a16="http://schemas.microsoft.com/office/drawing/2014/main" id="{41ED3A92-7928-B50D-B9C9-8AF9968DD36F}"/>
+              </a:ext>
+            </a:extLst>
+          </p:cNvPr>
+          <p:cNvSpPr txBox="1"/>
+          <p:nvPr/>
+        </p:nvSpPr>
+        <p:spPr>
+          <a:xfrm>
+            <a:off x="6235873" y="2389631"/>
+            <a:ext cx="922047" cy="253916"/>
+          </a:xfrm>
+          <a:prstGeom prst="rect">
+            <a:avLst/>
+          </a:prstGeom>
+          <a:noFill/>
+        </p:spPr>
+        <p:txBody>
+          <a:bodyPr wrap="none" rtlCol="0">
+            <a:spAutoFit/>
+          </a:bodyPr>
+          <a:lstStyle/>
+          <a:p>
+            <a:r>
+              <a:rPr lang="en-GB" sz="1050">
+                <a:latin typeface="Consolas" panose="020B0609020204030204" pitchFamily="49" charset="0"/>
+              </a:rPr>
+              <a:t>0x2000FFF4</a:t>
+            </a:r>
+            <a:endParaRPr lang="LID4096" sz="1050">
+              <a:latin typeface="Consolas" panose="020B0609020204030204" pitchFamily="49" charset="0"/>
+            </a:endParaRPr>
+          </a:p>
+        </p:txBody>
+      </p:sp>
+      <p:sp>
+        <p:nvSpPr>
+          <p:cNvPr id="35" name="TextBox 34">
+            <a:extLst>
+              <a:ext uri="{FF2B5EF4-FFF2-40B4-BE49-F238E27FC236}">
+                <a16:creationId xmlns:a16="http://schemas.microsoft.com/office/drawing/2014/main" id="{61BE9703-9287-53AB-B9E7-8C2089F8529F}"/>
+              </a:ext>
+            </a:extLst>
+          </p:cNvPr>
+          <p:cNvSpPr txBox="1"/>
+          <p:nvPr/>
+        </p:nvSpPr>
+        <p:spPr>
+          <a:xfrm>
+            <a:off x="6235873" y="999342"/>
+            <a:ext cx="1290738" cy="492443"/>
+          </a:xfrm>
+          <a:prstGeom prst="rect">
+            <a:avLst/>
+          </a:prstGeom>
+          <a:noFill/>
+        </p:spPr>
+        <p:txBody>
+          <a:bodyPr wrap="none" rtlCol="0">
+            <a:spAutoFit/>
+          </a:bodyPr>
+          <a:lstStyle/>
+          <a:p>
+            <a:r>
+              <a:rPr lang="en-GB" sz="1050" b="1">
+                <a:latin typeface="Consolas" panose="020B0609020204030204" pitchFamily="49" charset="0"/>
+              </a:rPr>
+              <a:t>sp</a:t>
+            </a:r>
+            <a:r>
+              <a:rPr lang="en-GB" sz="1050">
+                <a:latin typeface="Consolas" panose="020B0609020204030204" pitchFamily="49" charset="0"/>
+              </a:rPr>
+              <a:t> = 0x2000FFF4</a:t>
+            </a:r>
+          </a:p>
+          <a:p>
+            <a:pPr algn="ctr"/>
+            <a:r>
+              <a:rPr lang="en-GB" sz="500">
+                <a:latin typeface="Consolas" panose="020B0609020204030204" pitchFamily="49" charset="0"/>
+              </a:rPr>
+              <a:t>= &lt;top of stack&gt;</a:t>
+            </a:r>
+          </a:p>
+          <a:p>
+            <a:endParaRPr lang="LID4096" sz="1050">
+              <a:latin typeface="Consolas" panose="020B0609020204030204" pitchFamily="49" charset="0"/>
+            </a:endParaRPr>
+          </a:p>
+        </p:txBody>
+      </p:sp>
+      <p:sp>
+        <p:nvSpPr>
+          <p:cNvPr id="36" name="Arrow: Bent 35">
+            <a:extLst>
+              <a:ext uri="{FF2B5EF4-FFF2-40B4-BE49-F238E27FC236}">
+                <a16:creationId xmlns:a16="http://schemas.microsoft.com/office/drawing/2014/main" id="{2D52C49E-6190-ADF6-6E72-94DD2B65BF4A}"/>
+              </a:ext>
+            </a:extLst>
+          </p:cNvPr>
+          <p:cNvSpPr/>
+          <p:nvPr/>
+        </p:nvSpPr>
+        <p:spPr>
+          <a:xfrm flipH="1" flipV="1">
+            <a:off x="7125222" y="1287072"/>
+            <a:ext cx="304800" cy="1286641"/>
+          </a:xfrm>
+          <a:prstGeom prst="bentArrow">
+            <a:avLst/>
+          </a:prstGeom>
+          <a:solidFill>
+            <a:schemeClr val="bg1">
+              <a:lumMod val="85000"/>
+            </a:schemeClr>
+          </a:solidFill>
+          <a:ln w="12700">
+            <a:solidFill>
+              <a:schemeClr val="tx1"/>
+            </a:solidFill>
+          </a:ln>
+        </p:spPr>
+        <p:style>
+          <a:lnRef idx="2">
+            <a:schemeClr val="accent1">
+              <a:shade val="15000"/>
+            </a:schemeClr>
+          </a:lnRef>
+          <a:fillRef idx="1">
+            <a:schemeClr val="accent1"/>
+          </a:fillRef>
+          <a:effectRef idx="0">
+            <a:schemeClr val="accent1"/>
+          </a:effectRef>
+          <a:fontRef idx="minor">
+            <a:schemeClr val="lt1"/>
+          </a:fontRef>
+        </p:style>
+        <p:txBody>
+          <a:bodyPr rtlCol="0" anchor="ctr"/>
+          <a:lstStyle/>
+          <a:p>
+            <a:pPr algn="ctr"/>
+            <a:endParaRPr lang="LID4096">
+              <a:solidFill>
+                <a:schemeClr val="tx1"/>
+              </a:solidFill>
+            </a:endParaRPr>
+          </a:p>
+        </p:txBody>
+      </p:sp>
+      <p:sp>
+        <p:nvSpPr>
+          <p:cNvPr id="37" name="Rectangle 36">
+            <a:extLst>
+              <a:ext uri="{FF2B5EF4-FFF2-40B4-BE49-F238E27FC236}">
+                <a16:creationId xmlns:a16="http://schemas.microsoft.com/office/drawing/2014/main" id="{949B5D2F-3718-77C2-8EEC-F290B105FB44}"/>
+              </a:ext>
+            </a:extLst>
+          </p:cNvPr>
+          <p:cNvSpPr/>
+          <p:nvPr/>
+        </p:nvSpPr>
+        <p:spPr>
+          <a:xfrm>
+            <a:off x="8007747" y="1463507"/>
+            <a:ext cx="1256492" cy="231131"/>
+          </a:xfrm>
+          <a:prstGeom prst="rect">
+            <a:avLst/>
+          </a:prstGeom>
+          <a:noFill/>
+          <a:ln>
+            <a:solidFill>
+              <a:schemeClr val="bg1">
+                <a:lumMod val="65000"/>
+              </a:schemeClr>
+            </a:solidFill>
+          </a:ln>
+        </p:spPr>
+        <p:style>
+          <a:lnRef idx="2">
+            <a:schemeClr val="accent1">
+              <a:shade val="15000"/>
+            </a:schemeClr>
+          </a:lnRef>
+          <a:fillRef idx="1">
+            <a:schemeClr val="accent1"/>
+          </a:fillRef>
+          <a:effectRef idx="0">
+            <a:schemeClr val="accent1"/>
+          </a:effectRef>
+          <a:fontRef idx="minor">
+            <a:schemeClr val="lt1"/>
+          </a:fontRef>
+        </p:style>
+        <p:txBody>
+          <a:bodyPr rtlCol="0" anchor="ctr"/>
+          <a:lstStyle/>
+          <a:p>
+            <a:pPr algn="ctr"/>
+            <a:endParaRPr lang="LID4096"/>
+          </a:p>
+        </p:txBody>
+      </p:sp>
+      <p:sp>
+        <p:nvSpPr>
+          <p:cNvPr id="38" name="Rectangle 37">
+            <a:extLst>
+              <a:ext uri="{FF2B5EF4-FFF2-40B4-BE49-F238E27FC236}">
+                <a16:creationId xmlns:a16="http://schemas.microsoft.com/office/drawing/2014/main" id="{1954C094-1447-94B6-08D3-F693304D7543}"/>
+              </a:ext>
+            </a:extLst>
+          </p:cNvPr>
+          <p:cNvSpPr/>
+          <p:nvPr/>
+        </p:nvSpPr>
+        <p:spPr>
+          <a:xfrm>
+            <a:off x="8007747" y="1687932"/>
+            <a:ext cx="1256492" cy="231131"/>
+          </a:xfrm>
+          <a:prstGeom prst="rect">
+            <a:avLst/>
+          </a:prstGeom>
+          <a:noFill/>
+          <a:ln>
+            <a:solidFill>
+              <a:schemeClr val="bg1">
+                <a:lumMod val="65000"/>
+              </a:schemeClr>
+            </a:solidFill>
+          </a:ln>
+        </p:spPr>
+        <p:style>
+          <a:lnRef idx="2">
+            <a:schemeClr val="accent1">
+              <a:shade val="15000"/>
+            </a:schemeClr>
+          </a:lnRef>
+          <a:fillRef idx="1">
+            <a:schemeClr val="accent1"/>
+          </a:fillRef>
+          <a:effectRef idx="0">
+            <a:schemeClr val="accent1"/>
+          </a:effectRef>
+          <a:fontRef idx="minor">
+            <a:schemeClr val="lt1"/>
+          </a:fontRef>
+        </p:style>
+        <p:txBody>
+          <a:bodyPr rtlCol="0" anchor="ctr"/>
+          <a:lstStyle/>
+          <a:p>
+            <a:pPr algn="ctr"/>
+            <a:endParaRPr lang="LID4096"/>
+          </a:p>
+        </p:txBody>
+      </p:sp>
+      <p:sp>
+        <p:nvSpPr>
+          <p:cNvPr id="39" name="TextBox 38">
+            <a:extLst>
+              <a:ext uri="{FF2B5EF4-FFF2-40B4-BE49-F238E27FC236}">
+                <a16:creationId xmlns:a16="http://schemas.microsoft.com/office/drawing/2014/main" id="{E0E33384-FB25-6391-EDF2-88AB15CBA9C0}"/>
+              </a:ext>
+            </a:extLst>
+          </p:cNvPr>
+          <p:cNvSpPr txBox="1"/>
+          <p:nvPr/>
+        </p:nvSpPr>
+        <p:spPr>
+          <a:xfrm>
+            <a:off x="9264239" y="1684733"/>
+            <a:ext cx="954107" cy="261610"/>
+          </a:xfrm>
+          <a:prstGeom prst="rect">
+            <a:avLst/>
+          </a:prstGeom>
+          <a:noFill/>
+        </p:spPr>
+        <p:txBody>
+          <a:bodyPr wrap="none" rtlCol="0">
+            <a:spAutoFit/>
+          </a:bodyPr>
+          <a:lstStyle/>
+          <a:p>
+            <a:r>
+              <a:rPr lang="en-GB" sz="1050">
+                <a:latin typeface="Consolas" panose="020B0609020204030204" pitchFamily="49" charset="0"/>
+              </a:rPr>
+              <a:t>0x20010000</a:t>
+            </a:r>
+            <a:endParaRPr lang="LID4096" sz="1050">
+              <a:latin typeface="Consolas" panose="020B0609020204030204" pitchFamily="49" charset="0"/>
+            </a:endParaRPr>
+          </a:p>
+        </p:txBody>
+      </p:sp>
+      <p:sp>
+        <p:nvSpPr>
+          <p:cNvPr id="40" name="TextBox 39">
+            <a:extLst>
+              <a:ext uri="{FF2B5EF4-FFF2-40B4-BE49-F238E27FC236}">
+                <a16:creationId xmlns:a16="http://schemas.microsoft.com/office/drawing/2014/main" id="{8DDD5514-C71D-59C2-0BCA-D3B1E7ECAC96}"/>
+              </a:ext>
+            </a:extLst>
+          </p:cNvPr>
+          <p:cNvSpPr txBox="1"/>
+          <p:nvPr/>
+        </p:nvSpPr>
+        <p:spPr>
+          <a:xfrm>
+            <a:off x="9264239" y="1452535"/>
+            <a:ext cx="922047" cy="253916"/>
+          </a:xfrm>
+          <a:prstGeom prst="rect">
+            <a:avLst/>
+          </a:prstGeom>
+          <a:noFill/>
+        </p:spPr>
+        <p:txBody>
+          <a:bodyPr wrap="none" rtlCol="0">
+            <a:spAutoFit/>
+          </a:bodyPr>
+          <a:lstStyle/>
+          <a:p>
+            <a:r>
+              <a:rPr lang="en-GB" sz="1050">
+                <a:solidFill>
+                  <a:schemeClr val="bg1">
+                    <a:lumMod val="65000"/>
+                  </a:schemeClr>
+                </a:solidFill>
+                <a:latin typeface="Consolas" panose="020B0609020204030204" pitchFamily="49" charset="0"/>
+              </a:rPr>
+              <a:t>0x20010004</a:t>
+            </a:r>
+            <a:endParaRPr lang="LID4096" sz="1050">
+              <a:solidFill>
+                <a:schemeClr val="bg1">
+                  <a:lumMod val="65000"/>
+                </a:schemeClr>
+              </a:solidFill>
+              <a:latin typeface="Consolas" panose="020B0609020204030204" pitchFamily="49" charset="0"/>
+            </a:endParaRPr>
+          </a:p>
+        </p:txBody>
+      </p:sp>
+      <p:grpSp>
+        <p:nvGrpSpPr>
+          <p:cNvPr id="41" name="Group 40">
+            <a:extLst>
+              <a:ext uri="{FF2B5EF4-FFF2-40B4-BE49-F238E27FC236}">
+                <a16:creationId xmlns:a16="http://schemas.microsoft.com/office/drawing/2014/main" id="{6C278E5A-1471-FF1D-F3AB-08384BD5A29F}"/>
+              </a:ext>
+            </a:extLst>
+          </p:cNvPr>
+          <p:cNvGrpSpPr/>
+          <p:nvPr/>
+        </p:nvGrpSpPr>
+        <p:grpSpPr>
+          <a:xfrm>
+            <a:off x="8007747" y="2143488"/>
+            <a:ext cx="2178539" cy="253916"/>
+            <a:chOff x="1916769" y="1723905"/>
+            <a:chExt cx="2178539" cy="253916"/>
+          </a:xfrm>
+        </p:grpSpPr>
+        <p:sp>
+          <p:nvSpPr>
+            <p:cNvPr id="42" name="Rectangle 41">
+              <a:extLst>
+                <a:ext uri="{FF2B5EF4-FFF2-40B4-BE49-F238E27FC236}">
+                  <a16:creationId xmlns:a16="http://schemas.microsoft.com/office/drawing/2014/main" id="{DC864059-6715-5D2C-6B26-6A817F75E531}"/>
+                </a:ext>
+              </a:extLst>
+            </p:cNvPr>
+            <p:cNvSpPr/>
+            <p:nvPr/>
+          </p:nvSpPr>
+          <p:spPr>
+            <a:xfrm>
+              <a:off x="1916769" y="1727104"/>
+              <a:ext cx="1256492" cy="231131"/>
+            </a:xfrm>
+            <a:prstGeom prst="rect">
+              <a:avLst/>
+            </a:prstGeom>
+            <a:noFill/>
+          </p:spPr>
+          <p:style>
+            <a:lnRef idx="2">
+              <a:schemeClr val="accent1">
+                <a:shade val="15000"/>
+              </a:schemeClr>
+            </a:lnRef>
+            <a:fillRef idx="1">
+              <a:schemeClr val="accent1"/>
+            </a:fillRef>
+            <a:effectRef idx="0">
+              <a:schemeClr val="accent1"/>
+            </a:effectRef>
+            <a:fontRef idx="minor">
+              <a:schemeClr val="lt1"/>
+            </a:fontRef>
+          </p:style>
+          <p:txBody>
+            <a:bodyPr rtlCol="0" anchor="ctr"/>
+            <a:lstStyle/>
+            <a:p>
+              <a:pPr algn="ctr"/>
+              <a:endParaRPr lang="LID4096"/>
+            </a:p>
+          </p:txBody>
+        </p:sp>
+        <p:sp>
+          <p:nvSpPr>
+            <p:cNvPr id="43" name="TextBox 42">
+              <a:extLst>
+                <a:ext uri="{FF2B5EF4-FFF2-40B4-BE49-F238E27FC236}">
+                  <a16:creationId xmlns:a16="http://schemas.microsoft.com/office/drawing/2014/main" id="{6FD87A6B-B97F-FC24-2E63-542129847593}"/>
+                </a:ext>
+              </a:extLst>
+            </p:cNvPr>
+            <p:cNvSpPr txBox="1"/>
+            <p:nvPr/>
+          </p:nvSpPr>
+          <p:spPr>
+            <a:xfrm>
+              <a:off x="3173261" y="1723905"/>
+              <a:ext cx="922047" cy="253916"/>
+            </a:xfrm>
+            <a:prstGeom prst="rect">
+              <a:avLst/>
+            </a:prstGeom>
+            <a:noFill/>
+          </p:spPr>
+          <p:txBody>
+            <a:bodyPr wrap="none" rtlCol="0">
+              <a:spAutoFit/>
+            </a:bodyPr>
+            <a:lstStyle/>
+            <a:p>
+              <a:r>
+                <a:rPr lang="en-GB" sz="1050">
+                  <a:latin typeface="Consolas" panose="020B0609020204030204" pitchFamily="49" charset="0"/>
+                </a:rPr>
+                <a:t>0x2000FFF8</a:t>
+              </a:r>
+              <a:endParaRPr lang="LID4096" sz="1050">
+                <a:latin typeface="Consolas" panose="020B0609020204030204" pitchFamily="49" charset="0"/>
+              </a:endParaRPr>
+            </a:p>
+          </p:txBody>
+        </p:sp>
+      </p:grpSp>
+      <p:sp>
+        <p:nvSpPr>
+          <p:cNvPr id="44" name="Rectangle 43">
+            <a:extLst>
+              <a:ext uri="{FF2B5EF4-FFF2-40B4-BE49-F238E27FC236}">
+                <a16:creationId xmlns:a16="http://schemas.microsoft.com/office/drawing/2014/main" id="{0528A562-DF4C-DDBB-3896-FF72D7AE9C66}"/>
+              </a:ext>
+            </a:extLst>
+          </p:cNvPr>
+          <p:cNvSpPr/>
+          <p:nvPr/>
+        </p:nvSpPr>
+        <p:spPr>
+          <a:xfrm>
+            <a:off x="8007747" y="1922262"/>
+            <a:ext cx="1256492" cy="231131"/>
+          </a:xfrm>
+          <a:prstGeom prst="rect">
+            <a:avLst/>
+          </a:prstGeom>
+          <a:noFill/>
+        </p:spPr>
+        <p:style>
+          <a:lnRef idx="2">
+            <a:schemeClr val="accent1">
+              <a:shade val="15000"/>
+            </a:schemeClr>
+          </a:lnRef>
+          <a:fillRef idx="1">
+            <a:schemeClr val="accent1"/>
+          </a:fillRef>
+          <a:effectRef idx="0">
+            <a:schemeClr val="accent1"/>
+          </a:effectRef>
+          <a:fontRef idx="minor">
+            <a:schemeClr val="lt1"/>
+          </a:fontRef>
+        </p:style>
+        <p:txBody>
+          <a:bodyPr rtlCol="0" anchor="ctr"/>
+          <a:lstStyle/>
+          <a:p>
+            <a:pPr algn="ctr"/>
+            <a:endParaRPr lang="LID4096"/>
+          </a:p>
+        </p:txBody>
+      </p:sp>
+      <p:sp>
+        <p:nvSpPr>
+          <p:cNvPr id="45" name="TextBox 44">
+            <a:extLst>
+              <a:ext uri="{FF2B5EF4-FFF2-40B4-BE49-F238E27FC236}">
+                <a16:creationId xmlns:a16="http://schemas.microsoft.com/office/drawing/2014/main" id="{DC386745-66A8-57CA-45E9-3E868CCF4956}"/>
+              </a:ext>
+            </a:extLst>
+          </p:cNvPr>
+          <p:cNvSpPr txBox="1"/>
+          <p:nvPr/>
+        </p:nvSpPr>
+        <p:spPr>
+          <a:xfrm>
+            <a:off x="9264239" y="1911290"/>
+            <a:ext cx="922047" cy="253916"/>
+          </a:xfrm>
+          <a:prstGeom prst="rect">
+            <a:avLst/>
+          </a:prstGeom>
+          <a:noFill/>
+        </p:spPr>
+        <p:txBody>
+          <a:bodyPr wrap="none" rtlCol="0">
+            <a:spAutoFit/>
+          </a:bodyPr>
+          <a:lstStyle/>
+          <a:p>
+            <a:r>
+              <a:rPr lang="en-GB" sz="1050">
+                <a:latin typeface="Consolas" panose="020B0609020204030204" pitchFamily="49" charset="0"/>
+              </a:rPr>
+              <a:t>0x2000FFFC</a:t>
+            </a:r>
+            <a:endParaRPr lang="LID4096" sz="1050">
+              <a:latin typeface="Consolas" panose="020B0609020204030204" pitchFamily="49" charset="0"/>
+            </a:endParaRPr>
+          </a:p>
+        </p:txBody>
+      </p:sp>
+      <p:grpSp>
+        <p:nvGrpSpPr>
+          <p:cNvPr id="46" name="Group 45">
+            <a:extLst>
+              <a:ext uri="{FF2B5EF4-FFF2-40B4-BE49-F238E27FC236}">
+                <a16:creationId xmlns:a16="http://schemas.microsoft.com/office/drawing/2014/main" id="{2E9C53EF-F98C-D3B9-79FF-ECE721C491C0}"/>
+              </a:ext>
+            </a:extLst>
+          </p:cNvPr>
+          <p:cNvGrpSpPr/>
+          <p:nvPr/>
+        </p:nvGrpSpPr>
+        <p:grpSpPr>
+          <a:xfrm>
+            <a:off x="8007747" y="2602243"/>
+            <a:ext cx="2178539" cy="253916"/>
+            <a:chOff x="1916769" y="1723905"/>
+            <a:chExt cx="2178539" cy="253916"/>
+          </a:xfrm>
+        </p:grpSpPr>
+        <p:sp>
+          <p:nvSpPr>
+            <p:cNvPr id="47" name="Rectangle 46">
+              <a:extLst>
+                <a:ext uri="{FF2B5EF4-FFF2-40B4-BE49-F238E27FC236}">
+                  <a16:creationId xmlns:a16="http://schemas.microsoft.com/office/drawing/2014/main" id="{EFB4F694-A6F3-06CB-CA3C-8DD78C40E9D9}"/>
+                </a:ext>
+              </a:extLst>
+            </p:cNvPr>
+            <p:cNvSpPr/>
+            <p:nvPr/>
+          </p:nvSpPr>
+          <p:spPr>
+            <a:xfrm>
+              <a:off x="1916769" y="1727104"/>
+              <a:ext cx="1256492" cy="231131"/>
+            </a:xfrm>
+            <a:prstGeom prst="rect">
+              <a:avLst/>
+            </a:prstGeom>
+            <a:solidFill>
+              <a:schemeClr val="bg1">
+                <a:lumMod val="85000"/>
+              </a:schemeClr>
+            </a:solidFill>
+          </p:spPr>
+          <p:style>
+            <a:lnRef idx="2">
+              <a:schemeClr val="accent1">
+                <a:shade val="15000"/>
+              </a:schemeClr>
+            </a:lnRef>
+            <a:fillRef idx="1">
+              <a:schemeClr val="accent1"/>
+            </a:fillRef>
+            <a:effectRef idx="0">
+              <a:schemeClr val="accent1"/>
+            </a:effectRef>
+            <a:fontRef idx="minor">
+              <a:schemeClr val="lt1"/>
+            </a:fontRef>
+          </p:style>
+          <p:txBody>
+            <a:bodyPr rtlCol="0" anchor="ctr"/>
+            <a:lstStyle/>
+            <a:p>
+              <a:pPr algn="ctr"/>
+              <a:endParaRPr lang="LID4096"/>
+            </a:p>
+          </p:txBody>
+        </p:sp>
+        <p:sp>
+          <p:nvSpPr>
+            <p:cNvPr id="48" name="TextBox 47">
+              <a:extLst>
+                <a:ext uri="{FF2B5EF4-FFF2-40B4-BE49-F238E27FC236}">
+                  <a16:creationId xmlns:a16="http://schemas.microsoft.com/office/drawing/2014/main" id="{1B909B8A-649A-76EF-284B-B3F9E5936C06}"/>
+                </a:ext>
+              </a:extLst>
+            </p:cNvPr>
+            <p:cNvSpPr txBox="1"/>
+            <p:nvPr/>
+          </p:nvSpPr>
+          <p:spPr>
+            <a:xfrm>
+              <a:off x="3173261" y="1723905"/>
+              <a:ext cx="922047" cy="253916"/>
+            </a:xfrm>
+            <a:prstGeom prst="rect">
+              <a:avLst/>
+            </a:prstGeom>
+            <a:noFill/>
+          </p:spPr>
+          <p:txBody>
+            <a:bodyPr wrap="none" rtlCol="0">
+              <a:spAutoFit/>
+            </a:bodyPr>
+            <a:lstStyle/>
+            <a:p>
+              <a:r>
+                <a:rPr lang="en-GB" sz="1050">
+                  <a:latin typeface="Consolas" panose="020B0609020204030204" pitchFamily="49" charset="0"/>
+                </a:rPr>
+                <a:t>0x2000FFF0</a:t>
+              </a:r>
+              <a:endParaRPr lang="LID4096" sz="1050">
+                <a:latin typeface="Consolas" panose="020B0609020204030204" pitchFamily="49" charset="0"/>
+              </a:endParaRPr>
+            </a:p>
+          </p:txBody>
+        </p:sp>
+      </p:grpSp>
+      <p:sp>
+        <p:nvSpPr>
+          <p:cNvPr id="49" name="Rectangle 48">
+            <a:extLst>
+              <a:ext uri="{FF2B5EF4-FFF2-40B4-BE49-F238E27FC236}">
+                <a16:creationId xmlns:a16="http://schemas.microsoft.com/office/drawing/2014/main" id="{6DE37775-DBC6-AAED-4DD3-831B98FAA498}"/>
+              </a:ext>
+            </a:extLst>
+          </p:cNvPr>
+          <p:cNvSpPr/>
+          <p:nvPr/>
+        </p:nvSpPr>
+        <p:spPr>
+          <a:xfrm>
+            <a:off x="8007747" y="2381017"/>
+            <a:ext cx="1256492" cy="231131"/>
+          </a:xfrm>
+          <a:prstGeom prst="rect">
+            <a:avLst/>
+          </a:prstGeom>
+          <a:noFill/>
+        </p:spPr>
+        <p:style>
+          <a:lnRef idx="2">
+            <a:schemeClr val="accent1">
+              <a:shade val="15000"/>
+            </a:schemeClr>
+          </a:lnRef>
+          <a:fillRef idx="1">
+            <a:schemeClr val="accent1"/>
+          </a:fillRef>
+          <a:effectRef idx="0">
+            <a:schemeClr val="accent1"/>
+          </a:effectRef>
+          <a:fontRef idx="minor">
+            <a:schemeClr val="lt1"/>
+          </a:fontRef>
+        </p:style>
+        <p:txBody>
+          <a:bodyPr rtlCol="0" anchor="ctr"/>
+          <a:lstStyle/>
+          <a:p>
+            <a:pPr algn="ctr"/>
+            <a:endParaRPr lang="LID4096"/>
+          </a:p>
+        </p:txBody>
+      </p:sp>
+      <p:sp>
+        <p:nvSpPr>
+          <p:cNvPr id="50" name="TextBox 49">
+            <a:extLst>
+              <a:ext uri="{FF2B5EF4-FFF2-40B4-BE49-F238E27FC236}">
+                <a16:creationId xmlns:a16="http://schemas.microsoft.com/office/drawing/2014/main" id="{D97835CE-61DF-F963-4B87-6FBF4CF1F15E}"/>
+              </a:ext>
+            </a:extLst>
+          </p:cNvPr>
+          <p:cNvSpPr txBox="1"/>
+          <p:nvPr/>
+        </p:nvSpPr>
+        <p:spPr>
+          <a:xfrm>
+            <a:off x="9264239" y="2370045"/>
+            <a:ext cx="922047" cy="253916"/>
+          </a:xfrm>
+          <a:prstGeom prst="rect">
+            <a:avLst/>
+          </a:prstGeom>
+          <a:noFill/>
+        </p:spPr>
+        <p:txBody>
+          <a:bodyPr wrap="none" rtlCol="0">
+            <a:spAutoFit/>
+          </a:bodyPr>
+          <a:lstStyle/>
+          <a:p>
+            <a:r>
+              <a:rPr lang="en-GB" sz="1050">
+                <a:latin typeface="Consolas" panose="020B0609020204030204" pitchFamily="49" charset="0"/>
+              </a:rPr>
+              <a:t>0x2000FFF4</a:t>
+            </a:r>
+            <a:endParaRPr lang="LID4096" sz="1050">
+              <a:latin typeface="Consolas" panose="020B0609020204030204" pitchFamily="49" charset="0"/>
+            </a:endParaRPr>
+          </a:p>
+        </p:txBody>
+      </p:sp>
+      <p:sp>
+        <p:nvSpPr>
+          <p:cNvPr id="51" name="TextBox 50">
+            <a:extLst>
+              <a:ext uri="{FF2B5EF4-FFF2-40B4-BE49-F238E27FC236}">
+                <a16:creationId xmlns:a16="http://schemas.microsoft.com/office/drawing/2014/main" id="{14FFD047-EAFD-3988-AB11-EBA55B5A49B5}"/>
+              </a:ext>
+            </a:extLst>
+          </p:cNvPr>
+          <p:cNvSpPr txBox="1"/>
+          <p:nvPr/>
+        </p:nvSpPr>
+        <p:spPr>
+          <a:xfrm>
+            <a:off x="9264239" y="979756"/>
+            <a:ext cx="1290738" cy="492443"/>
+          </a:xfrm>
+          <a:prstGeom prst="rect">
+            <a:avLst/>
+          </a:prstGeom>
+          <a:noFill/>
+        </p:spPr>
+        <p:txBody>
+          <a:bodyPr wrap="none" rtlCol="0">
+            <a:spAutoFit/>
+          </a:bodyPr>
+          <a:lstStyle/>
+          <a:p>
+            <a:r>
+              <a:rPr lang="en-GB" sz="1050" b="1">
+                <a:latin typeface="Consolas" panose="020B0609020204030204" pitchFamily="49" charset="0"/>
+              </a:rPr>
+              <a:t>sp</a:t>
+            </a:r>
+            <a:r>
+              <a:rPr lang="en-GB" sz="1050">
+                <a:latin typeface="Consolas" panose="020B0609020204030204" pitchFamily="49" charset="0"/>
+              </a:rPr>
+              <a:t> = 0x2000FFF4</a:t>
+            </a:r>
+          </a:p>
+          <a:p>
+            <a:pPr algn="ctr"/>
+            <a:r>
+              <a:rPr lang="en-GB" sz="500">
+                <a:latin typeface="Consolas" panose="020B0609020204030204" pitchFamily="49" charset="0"/>
+              </a:rPr>
+              <a:t>= &lt;top of stack&gt;</a:t>
+            </a:r>
+          </a:p>
+          <a:p>
+            <a:endParaRPr lang="LID4096" sz="1050">
+              <a:latin typeface="Consolas" panose="020B0609020204030204" pitchFamily="49" charset="0"/>
+            </a:endParaRPr>
+          </a:p>
+        </p:txBody>
+      </p:sp>
+      <p:sp>
+        <p:nvSpPr>
+          <p:cNvPr id="52" name="Arrow: Bent 51">
+            <a:extLst>
+              <a:ext uri="{FF2B5EF4-FFF2-40B4-BE49-F238E27FC236}">
+                <a16:creationId xmlns:a16="http://schemas.microsoft.com/office/drawing/2014/main" id="{1688CFAE-E67A-BD76-8446-853308A3CCD5}"/>
+              </a:ext>
+            </a:extLst>
+          </p:cNvPr>
+          <p:cNvSpPr/>
+          <p:nvPr/>
+        </p:nvSpPr>
+        <p:spPr>
+          <a:xfrm flipH="1" flipV="1">
+            <a:off x="10153588" y="1267486"/>
+            <a:ext cx="304800" cy="1286641"/>
+          </a:xfrm>
+          <a:prstGeom prst="bentArrow">
+            <a:avLst/>
+          </a:prstGeom>
+          <a:solidFill>
+            <a:schemeClr val="bg1">
+              <a:lumMod val="85000"/>
+            </a:schemeClr>
+          </a:solidFill>
+          <a:ln w="12700">
+            <a:solidFill>
+              <a:schemeClr val="tx1"/>
+            </a:solidFill>
+          </a:ln>
+        </p:spPr>
+        <p:style>
+          <a:lnRef idx="2">
+            <a:schemeClr val="accent1">
+              <a:shade val="15000"/>
+            </a:schemeClr>
+          </a:lnRef>
+          <a:fillRef idx="1">
+            <a:schemeClr val="accent1"/>
+          </a:fillRef>
+          <a:effectRef idx="0">
+            <a:schemeClr val="accent1"/>
+          </a:effectRef>
+          <a:fontRef idx="minor">
+            <a:schemeClr val="lt1"/>
+          </a:fontRef>
+        </p:style>
+        <p:txBody>
+          <a:bodyPr rtlCol="0" anchor="ctr"/>
+          <a:lstStyle/>
+          <a:p>
+            <a:pPr algn="ctr"/>
+            <a:endParaRPr lang="LID4096">
+              <a:solidFill>
+                <a:schemeClr val="tx1"/>
+              </a:solidFill>
+            </a:endParaRPr>
+          </a:p>
+        </p:txBody>
+      </p:sp>
+      <p:sp>
+        <p:nvSpPr>
+          <p:cNvPr id="53" name="TextBox 52">
+            <a:extLst>
+              <a:ext uri="{FF2B5EF4-FFF2-40B4-BE49-F238E27FC236}">
+                <a16:creationId xmlns:a16="http://schemas.microsoft.com/office/drawing/2014/main" id="{E371F57B-B1D4-F697-17FF-37C90A9C2C31}"/>
+              </a:ext>
+            </a:extLst>
+          </p:cNvPr>
+          <p:cNvSpPr txBox="1"/>
+          <p:nvPr/>
+        </p:nvSpPr>
+        <p:spPr>
+          <a:xfrm>
+            <a:off x="8517237" y="2360219"/>
+            <a:ext cx="338554" cy="261610"/>
+          </a:xfrm>
+          <a:prstGeom prst="rect">
+            <a:avLst/>
+          </a:prstGeom>
+          <a:noFill/>
+        </p:spPr>
+        <p:txBody>
+          <a:bodyPr wrap="none" rtlCol="0">
+            <a:spAutoFit/>
+          </a:bodyPr>
+          <a:lstStyle/>
+          <a:p>
+            <a:r>
+              <a:rPr lang="en-GB" sz="1100">
+                <a:latin typeface="Consolas" panose="020B0609020204030204" pitchFamily="49" charset="0"/>
+              </a:rPr>
+              <a:t>t2</a:t>
+            </a:r>
+            <a:endParaRPr lang="LID4096" sz="1100">
+              <a:latin typeface="Consolas" panose="020B0609020204030204" pitchFamily="49" charset="0"/>
+            </a:endParaRPr>
+          </a:p>
+        </p:txBody>
+      </p:sp>
+      <p:sp>
+        <p:nvSpPr>
+          <p:cNvPr id="54" name="TextBox 53">
+            <a:extLst>
+              <a:ext uri="{FF2B5EF4-FFF2-40B4-BE49-F238E27FC236}">
+                <a16:creationId xmlns:a16="http://schemas.microsoft.com/office/drawing/2014/main" id="{E0DF6C16-1997-B019-6886-CA4047AC6B24}"/>
+              </a:ext>
+            </a:extLst>
+          </p:cNvPr>
+          <p:cNvSpPr txBox="1"/>
+          <p:nvPr/>
+        </p:nvSpPr>
+        <p:spPr>
+          <a:xfrm>
+            <a:off x="8517237" y="2139641"/>
+            <a:ext cx="338554" cy="261610"/>
+          </a:xfrm>
+          <a:prstGeom prst="rect">
+            <a:avLst/>
+          </a:prstGeom>
+          <a:noFill/>
+        </p:spPr>
+        <p:txBody>
+          <a:bodyPr wrap="none" rtlCol="0">
+            <a:spAutoFit/>
+          </a:bodyPr>
+          <a:lstStyle/>
+          <a:p>
+            <a:r>
+              <a:rPr lang="en-GB" sz="1100">
+                <a:latin typeface="Consolas" panose="020B0609020204030204" pitchFamily="49" charset="0"/>
+              </a:rPr>
+              <a:t>t1</a:t>
+            </a:r>
+            <a:endParaRPr lang="LID4096" sz="1100">
+              <a:latin typeface="Consolas" panose="020B0609020204030204" pitchFamily="49" charset="0"/>
+            </a:endParaRPr>
+          </a:p>
+        </p:txBody>
+      </p:sp>
+      <p:sp>
+        <p:nvSpPr>
+          <p:cNvPr id="55" name="TextBox 54">
+            <a:extLst>
+              <a:ext uri="{FF2B5EF4-FFF2-40B4-BE49-F238E27FC236}">
+                <a16:creationId xmlns:a16="http://schemas.microsoft.com/office/drawing/2014/main" id="{B0395900-7B18-E88E-675B-7B53900361B7}"/>
+              </a:ext>
+            </a:extLst>
+          </p:cNvPr>
+          <p:cNvSpPr txBox="1"/>
+          <p:nvPr/>
+        </p:nvSpPr>
+        <p:spPr>
+          <a:xfrm>
+            <a:off x="8517237" y="1919063"/>
+            <a:ext cx="338554" cy="261610"/>
+          </a:xfrm>
+          <a:prstGeom prst="rect">
+            <a:avLst/>
+          </a:prstGeom>
+          <a:noFill/>
+        </p:spPr>
+        <p:txBody>
+          <a:bodyPr wrap="none" rtlCol="0">
+            <a:spAutoFit/>
+          </a:bodyPr>
+          <a:lstStyle/>
+          <a:p>
+            <a:r>
+              <a:rPr lang="en-GB" sz="1100">
+                <a:latin typeface="Consolas" panose="020B0609020204030204" pitchFamily="49" charset="0"/>
+              </a:rPr>
+              <a:t>t0</a:t>
+            </a:r>
+            <a:endParaRPr lang="LID4096" sz="1100">
+              <a:latin typeface="Consolas" panose="020B0609020204030204" pitchFamily="49" charset="0"/>
+            </a:endParaRPr>
+          </a:p>
+        </p:txBody>
+      </p:sp>
+      <p:cxnSp>
+        <p:nvCxnSpPr>
+          <p:cNvPr id="57" name="Straight Connector 56">
+            <a:extLst>
+              <a:ext uri="{FF2B5EF4-FFF2-40B4-BE49-F238E27FC236}">
+                <a16:creationId xmlns:a16="http://schemas.microsoft.com/office/drawing/2014/main" id="{822D86C9-FCBF-540D-BEC6-556A0DEFB629}"/>
+              </a:ext>
+            </a:extLst>
+          </p:cNvPr>
+          <p:cNvCxnSpPr>
+            <a:cxnSpLocks/>
+          </p:cNvCxnSpPr>
+          <p:nvPr/>
+        </p:nvCxnSpPr>
+        <p:spPr>
+          <a:xfrm>
+            <a:off x="4668033" y="901874"/>
+            <a:ext cx="0" cy="2233808"/>
+          </a:xfrm>
+          <a:prstGeom prst="line">
+            <a:avLst/>
+          </a:prstGeom>
+          <a:ln>
+            <a:solidFill>
+              <a:schemeClr val="tx1"/>
+            </a:solidFill>
+            <a:prstDash val="lgDash"/>
+          </a:ln>
+        </p:spPr>
+        <p:style>
+          <a:lnRef idx="2">
+            <a:schemeClr val="accent1"/>
+          </a:lnRef>
+          <a:fillRef idx="0">
+            <a:schemeClr val="accent1"/>
+          </a:fillRef>
+          <a:effectRef idx="1">
+            <a:schemeClr val="accent1"/>
+          </a:effectRef>
+          <a:fontRef idx="minor">
+            <a:schemeClr val="tx1"/>
+          </a:fontRef>
+        </p:style>
+      </p:cxnSp>
+      <p:cxnSp>
+        <p:nvCxnSpPr>
+          <p:cNvPr id="60" name="Straight Connector 59">
+            <a:extLst>
+              <a:ext uri="{FF2B5EF4-FFF2-40B4-BE49-F238E27FC236}">
+                <a16:creationId xmlns:a16="http://schemas.microsoft.com/office/drawing/2014/main" id="{EE3C25E7-0786-51C2-0FCF-D2D2F2657951}"/>
+              </a:ext>
+            </a:extLst>
+          </p:cNvPr>
+          <p:cNvCxnSpPr>
+            <a:cxnSpLocks/>
+          </p:cNvCxnSpPr>
+          <p:nvPr/>
+        </p:nvCxnSpPr>
+        <p:spPr>
+          <a:xfrm>
+            <a:off x="7693068" y="901874"/>
+            <a:ext cx="0" cy="2233808"/>
+          </a:xfrm>
+          <a:prstGeom prst="line">
+            <a:avLst/>
+          </a:prstGeom>
+          <a:ln>
+            <a:solidFill>
+              <a:schemeClr val="tx1"/>
+            </a:solidFill>
+            <a:prstDash val="lgDash"/>
+          </a:ln>
+        </p:spPr>
+        <p:style>
+          <a:lnRef idx="2">
+            <a:schemeClr val="accent1"/>
+          </a:lnRef>
+          <a:fillRef idx="0">
+            <a:schemeClr val="accent1"/>
+          </a:fillRef>
+          <a:effectRef idx="1">
+            <a:schemeClr val="accent1"/>
+          </a:effectRef>
+          <a:fontRef idx="minor">
+            <a:schemeClr val="tx1"/>
+          </a:fontRef>
+        </p:style>
+      </p:cxnSp>
+    </p:spTree>
+    <p:extLst>
+      <p:ext uri="{BB962C8B-B14F-4D97-AF65-F5344CB8AC3E}">
+        <p14:creationId xmlns:p14="http://schemas.microsoft.com/office/powerpoint/2010/main" val="297298827"/>
       </p:ext>
     </p:extLst>
   </p:cSld>

--- a/images/figures.pptx
+++ b/images/figures.pptx
@@ -5,7 +5,7 @@
     <p:sldMasterId id="2147483648" r:id="rId1"/>
   </p:sldMasterIdLst>
   <p:notesMasterIdLst>
-    <p:notesMasterId r:id="rId7"/>
+    <p:notesMasterId r:id="rId9"/>
   </p:notesMasterIdLst>
   <p:sldIdLst>
     <p:sldId id="256" r:id="rId2"/>
@@ -13,6 +13,8 @@
     <p:sldId id="438" r:id="rId4"/>
     <p:sldId id="440" r:id="rId5"/>
     <p:sldId id="441" r:id="rId6"/>
+    <p:sldId id="442" r:id="rId7"/>
+    <p:sldId id="443" r:id="rId8"/>
   </p:sldIdLst>
   <p:sldSz cx="12192000" cy="6858000"/>
   <p:notesSz cx="6858000" cy="9144000"/>
@@ -201,7 +203,7 @@
           <a:p>
             <a:fld id="{1E717189-69EA-4142-945D-85EE3E06463B}" type="datetimeFigureOut">
               <a:rPr lang="LID4096" smtClean="0"/>
-              <a:t>09/10/2025</a:t>
+              <a:t>09/29/2025</a:t>
             </a:fld>
             <a:endParaRPr lang="LID4096"/>
           </a:p>
@@ -916,6 +918,198 @@
 </p:notes>
 </file>
 
+<file path=ppt/notesSlides/notesSlide5.xml><?xml version="1.0" encoding="utf-8"?>
+<p:notes xmlns:a="http://schemas.openxmlformats.org/drawingml/2006/main" xmlns:r="http://schemas.openxmlformats.org/officeDocument/2006/relationships" xmlns:p="http://schemas.openxmlformats.org/presentationml/2006/main">
+  <p:cSld>
+    <p:spTree>
+      <p:nvGrpSpPr>
+        <p:cNvPr id="1" name=""/>
+        <p:cNvGrpSpPr/>
+        <p:nvPr/>
+      </p:nvGrpSpPr>
+      <p:grpSpPr>
+        <a:xfrm>
+          <a:off x="0" y="0"/>
+          <a:ext cx="0" cy="0"/>
+          <a:chOff x="0" y="0"/>
+          <a:chExt cx="0" cy="0"/>
+        </a:xfrm>
+      </p:grpSpPr>
+      <p:sp>
+        <p:nvSpPr>
+          <p:cNvPr id="2" name="Slide Image Placeholder 1"/>
+          <p:cNvSpPr>
+            <a:spLocks noGrp="1" noRot="1" noChangeAspect="1"/>
+          </p:cNvSpPr>
+          <p:nvPr>
+            <p:ph type="sldImg"/>
+          </p:nvPr>
+        </p:nvSpPr>
+        <p:spPr/>
+      </p:sp>
+      <p:sp>
+        <p:nvSpPr>
+          <p:cNvPr id="3" name="Notes Placeholder 2"/>
+          <p:cNvSpPr>
+            <a:spLocks noGrp="1"/>
+          </p:cNvSpPr>
+          <p:nvPr>
+            <p:ph type="body" idx="1"/>
+          </p:nvPr>
+        </p:nvSpPr>
+        <p:spPr/>
+        <p:txBody>
+          <a:bodyPr/>
+          <a:lstStyle/>
+          <a:p>
+            <a:endParaRPr lang="LID4096" dirty="0"/>
+          </a:p>
+        </p:txBody>
+      </p:sp>
+      <p:sp>
+        <p:nvSpPr>
+          <p:cNvPr id="4" name="Slide Number Placeholder 3"/>
+          <p:cNvSpPr>
+            <a:spLocks noGrp="1"/>
+          </p:cNvSpPr>
+          <p:nvPr>
+            <p:ph type="sldNum" sz="quarter" idx="5"/>
+          </p:nvPr>
+        </p:nvSpPr>
+        <p:spPr/>
+        <p:txBody>
+          <a:bodyPr/>
+          <a:lstStyle/>
+          <a:p>
+            <a:fld id="{5FD2D078-0734-41DD-A137-6D7276E88BE2}" type="slidenum">
+              <a:rPr lang="LID4096" smtClean="0"/>
+              <a:t>6</a:t>
+            </a:fld>
+            <a:endParaRPr lang="LID4096"/>
+          </a:p>
+        </p:txBody>
+      </p:sp>
+    </p:spTree>
+    <p:extLst>
+      <p:ext uri="{BB962C8B-B14F-4D97-AF65-F5344CB8AC3E}">
+        <p14:creationId xmlns:p14="http://schemas.microsoft.com/office/powerpoint/2010/main" val="3095198154"/>
+      </p:ext>
+    </p:extLst>
+  </p:cSld>
+  <p:clrMapOvr>
+    <a:masterClrMapping/>
+  </p:clrMapOvr>
+</p:notes>
+</file>
+
+<file path=ppt/notesSlides/notesSlide6.xml><?xml version="1.0" encoding="utf-8"?>
+<p:notes xmlns:a="http://schemas.openxmlformats.org/drawingml/2006/main" xmlns:r="http://schemas.openxmlformats.org/officeDocument/2006/relationships" xmlns:p="http://schemas.openxmlformats.org/presentationml/2006/main">
+  <p:cSld>
+    <p:spTree>
+      <p:nvGrpSpPr>
+        <p:cNvPr id="1" name="">
+          <a:extLst>
+            <a:ext uri="{FF2B5EF4-FFF2-40B4-BE49-F238E27FC236}">
+              <a16:creationId xmlns:a16="http://schemas.microsoft.com/office/drawing/2014/main" id="{2013B376-6E49-E247-779F-BE4411CB5BFE}"/>
+            </a:ext>
+          </a:extLst>
+        </p:cNvPr>
+        <p:cNvGrpSpPr/>
+        <p:nvPr/>
+      </p:nvGrpSpPr>
+      <p:grpSpPr>
+        <a:xfrm>
+          <a:off x="0" y="0"/>
+          <a:ext cx="0" cy="0"/>
+          <a:chOff x="0" y="0"/>
+          <a:chExt cx="0" cy="0"/>
+        </a:xfrm>
+      </p:grpSpPr>
+      <p:sp>
+        <p:nvSpPr>
+          <p:cNvPr id="2" name="Slide Image Placeholder 1">
+            <a:extLst>
+              <a:ext uri="{FF2B5EF4-FFF2-40B4-BE49-F238E27FC236}">
+                <a16:creationId xmlns:a16="http://schemas.microsoft.com/office/drawing/2014/main" id="{C0D7BCAF-F7DC-D607-E421-DE403B5D6C54}"/>
+              </a:ext>
+            </a:extLst>
+          </p:cNvPr>
+          <p:cNvSpPr>
+            <a:spLocks noGrp="1" noRot="1" noChangeAspect="1"/>
+          </p:cNvSpPr>
+          <p:nvPr>
+            <p:ph type="sldImg"/>
+          </p:nvPr>
+        </p:nvSpPr>
+        <p:spPr/>
+      </p:sp>
+      <p:sp>
+        <p:nvSpPr>
+          <p:cNvPr id="3" name="Notes Placeholder 2">
+            <a:extLst>
+              <a:ext uri="{FF2B5EF4-FFF2-40B4-BE49-F238E27FC236}">
+                <a16:creationId xmlns:a16="http://schemas.microsoft.com/office/drawing/2014/main" id="{2C8E8F02-56E0-7AF4-0BA1-605608CF6E40}"/>
+              </a:ext>
+            </a:extLst>
+          </p:cNvPr>
+          <p:cNvSpPr>
+            <a:spLocks noGrp="1"/>
+          </p:cNvSpPr>
+          <p:nvPr>
+            <p:ph type="body" idx="1"/>
+          </p:nvPr>
+        </p:nvSpPr>
+        <p:spPr/>
+        <p:txBody>
+          <a:bodyPr/>
+          <a:lstStyle/>
+          <a:p>
+            <a:endParaRPr lang="LID4096" dirty="0"/>
+          </a:p>
+        </p:txBody>
+      </p:sp>
+      <p:sp>
+        <p:nvSpPr>
+          <p:cNvPr id="4" name="Slide Number Placeholder 3">
+            <a:extLst>
+              <a:ext uri="{FF2B5EF4-FFF2-40B4-BE49-F238E27FC236}">
+                <a16:creationId xmlns:a16="http://schemas.microsoft.com/office/drawing/2014/main" id="{647D0792-24AE-8AA7-AE14-EB89ED5AC2D6}"/>
+              </a:ext>
+            </a:extLst>
+          </p:cNvPr>
+          <p:cNvSpPr>
+            <a:spLocks noGrp="1"/>
+          </p:cNvSpPr>
+          <p:nvPr>
+            <p:ph type="sldNum" sz="quarter" idx="5"/>
+          </p:nvPr>
+        </p:nvSpPr>
+        <p:spPr/>
+        <p:txBody>
+          <a:bodyPr/>
+          <a:lstStyle/>
+          <a:p>
+            <a:fld id="{5FD2D078-0734-41DD-A137-6D7276E88BE2}" type="slidenum">
+              <a:rPr lang="LID4096" smtClean="0"/>
+              <a:t>7</a:t>
+            </a:fld>
+            <a:endParaRPr lang="LID4096"/>
+          </a:p>
+        </p:txBody>
+      </p:sp>
+    </p:spTree>
+    <p:extLst>
+      <p:ext uri="{BB962C8B-B14F-4D97-AF65-F5344CB8AC3E}">
+        <p14:creationId xmlns:p14="http://schemas.microsoft.com/office/powerpoint/2010/main" val="1340672361"/>
+      </p:ext>
+    </p:extLst>
+  </p:cSld>
+  <p:clrMapOvr>
+    <a:masterClrMapping/>
+  </p:clrMapOvr>
+</p:notes>
+</file>
+
 <file path=ppt/slideLayouts/slideLayout1.xml><?xml version="1.0" encoding="utf-8"?>
 <p:sldLayout xmlns:a="http://schemas.openxmlformats.org/drawingml/2006/main" xmlns:r="http://schemas.openxmlformats.org/officeDocument/2006/relationships" xmlns:p="http://schemas.openxmlformats.org/presentationml/2006/main" type="title" preserve="1">
   <p:cSld name="Title Slide">
@@ -1065,7 +1259,7 @@
           <a:p>
             <a:fld id="{6E06BE13-2967-499D-85E1-E8100B951B63}" type="datetimeFigureOut">
               <a:rPr lang="LID4096" smtClean="0"/>
-              <a:t>09/10/2025</a:t>
+              <a:t>09/29/2025</a:t>
             </a:fld>
             <a:endParaRPr lang="LID4096"/>
           </a:p>
@@ -1265,7 +1459,7 @@
           <a:p>
             <a:fld id="{6E06BE13-2967-499D-85E1-E8100B951B63}" type="datetimeFigureOut">
               <a:rPr lang="LID4096" smtClean="0"/>
-              <a:t>09/10/2025</a:t>
+              <a:t>09/29/2025</a:t>
             </a:fld>
             <a:endParaRPr lang="LID4096"/>
           </a:p>
@@ -1475,7 +1669,7 @@
           <a:p>
             <a:fld id="{6E06BE13-2967-499D-85E1-E8100B951B63}" type="datetimeFigureOut">
               <a:rPr lang="LID4096" smtClean="0"/>
-              <a:t>09/10/2025</a:t>
+              <a:t>09/29/2025</a:t>
             </a:fld>
             <a:endParaRPr lang="LID4096"/>
           </a:p>
@@ -1675,7 +1869,7 @@
           <a:p>
             <a:fld id="{6E06BE13-2967-499D-85E1-E8100B951B63}" type="datetimeFigureOut">
               <a:rPr lang="LID4096" smtClean="0"/>
-              <a:t>09/10/2025</a:t>
+              <a:t>09/29/2025</a:t>
             </a:fld>
             <a:endParaRPr lang="LID4096"/>
           </a:p>
@@ -1951,7 +2145,7 @@
           <a:p>
             <a:fld id="{6E06BE13-2967-499D-85E1-E8100B951B63}" type="datetimeFigureOut">
               <a:rPr lang="LID4096" smtClean="0"/>
-              <a:t>09/10/2025</a:t>
+              <a:t>09/29/2025</a:t>
             </a:fld>
             <a:endParaRPr lang="LID4096"/>
           </a:p>
@@ -2219,7 +2413,7 @@
           <a:p>
             <a:fld id="{6E06BE13-2967-499D-85E1-E8100B951B63}" type="datetimeFigureOut">
               <a:rPr lang="LID4096" smtClean="0"/>
-              <a:t>09/10/2025</a:t>
+              <a:t>09/29/2025</a:t>
             </a:fld>
             <a:endParaRPr lang="LID4096"/>
           </a:p>
@@ -2634,7 +2828,7 @@
           <a:p>
             <a:fld id="{6E06BE13-2967-499D-85E1-E8100B951B63}" type="datetimeFigureOut">
               <a:rPr lang="LID4096" smtClean="0"/>
-              <a:t>09/10/2025</a:t>
+              <a:t>09/29/2025</a:t>
             </a:fld>
             <a:endParaRPr lang="LID4096"/>
           </a:p>
@@ -2776,7 +2970,7 @@
           <a:p>
             <a:fld id="{6E06BE13-2967-499D-85E1-E8100B951B63}" type="datetimeFigureOut">
               <a:rPr lang="LID4096" smtClean="0"/>
-              <a:t>09/10/2025</a:t>
+              <a:t>09/29/2025</a:t>
             </a:fld>
             <a:endParaRPr lang="LID4096"/>
           </a:p>
@@ -2889,7 +3083,7 @@
           <a:p>
             <a:fld id="{6E06BE13-2967-499D-85E1-E8100B951B63}" type="datetimeFigureOut">
               <a:rPr lang="LID4096" smtClean="0"/>
-              <a:t>09/10/2025</a:t>
+              <a:t>09/29/2025</a:t>
             </a:fld>
             <a:endParaRPr lang="LID4096"/>
           </a:p>
@@ -3202,7 +3396,7 @@
           <a:p>
             <a:fld id="{6E06BE13-2967-499D-85E1-E8100B951B63}" type="datetimeFigureOut">
               <a:rPr lang="LID4096" smtClean="0"/>
-              <a:t>09/10/2025</a:t>
+              <a:t>09/29/2025</a:t>
             </a:fld>
             <a:endParaRPr lang="LID4096"/>
           </a:p>
@@ -3491,7 +3685,7 @@
           <a:p>
             <a:fld id="{6E06BE13-2967-499D-85E1-E8100B951B63}" type="datetimeFigureOut">
               <a:rPr lang="LID4096" smtClean="0"/>
-              <a:t>09/10/2025</a:t>
+              <a:t>09/29/2025</a:t>
             </a:fld>
             <a:endParaRPr lang="LID4096"/>
           </a:p>
@@ -3734,7 +3928,7 @@
           <a:p>
             <a:fld id="{6E06BE13-2967-499D-85E1-E8100B951B63}" type="datetimeFigureOut">
               <a:rPr lang="LID4096" smtClean="0"/>
-              <a:t>09/10/2025</a:t>
+              <a:t>09/29/2025</a:t>
             </a:fld>
             <a:endParaRPr lang="LID4096"/>
           </a:p>
@@ -19354,6 +19548,4970 @@
 </p:sld>
 </file>
 
+<file path=ppt/slides/slide6.xml><?xml version="1.0" encoding="utf-8"?>
+<p:sld xmlns:a="http://schemas.openxmlformats.org/drawingml/2006/main" xmlns:r="http://schemas.openxmlformats.org/officeDocument/2006/relationships" xmlns:p="http://schemas.openxmlformats.org/presentationml/2006/main">
+  <p:cSld>
+    <p:spTree>
+      <p:nvGrpSpPr>
+        <p:cNvPr id="1" name=""/>
+        <p:cNvGrpSpPr/>
+        <p:nvPr/>
+      </p:nvGrpSpPr>
+      <p:grpSpPr>
+        <a:xfrm>
+          <a:off x="0" y="0"/>
+          <a:ext cx="0" cy="0"/>
+          <a:chOff x="0" y="0"/>
+          <a:chExt cx="0" cy="0"/>
+        </a:xfrm>
+      </p:grpSpPr>
+      <p:pic>
+        <p:nvPicPr>
+          <p:cNvPr id="3" name="Picture 2" descr="A close-up of a circuit board&#10;&#10;AI-generated content may be incorrect.">
+            <a:extLst>
+              <a:ext uri="{FF2B5EF4-FFF2-40B4-BE49-F238E27FC236}">
+                <a16:creationId xmlns:a16="http://schemas.microsoft.com/office/drawing/2014/main" id="{F78A810C-283C-1F43-5BF4-31A666DFE854}"/>
+              </a:ext>
+            </a:extLst>
+          </p:cNvPr>
+          <p:cNvPicPr>
+            <a:picLocks noChangeAspect="1"/>
+          </p:cNvPicPr>
+          <p:nvPr/>
+        </p:nvPicPr>
+        <p:blipFill>
+          <a:blip r:embed="rId3">
+            <a:extLst>
+              <a:ext uri="{BEBA8EAE-BF5A-486C-A8C5-ECC9F3942E4B}">
+                <a14:imgProps xmlns:a14="http://schemas.microsoft.com/office/drawing/2010/main">
+                  <a14:imgLayer r:embed="rId4">
+                    <a14:imgEffect>
+                      <a14:saturation sat="66000"/>
+                    </a14:imgEffect>
+                    <a14:imgEffect>
+                      <a14:brightnessContrast bright="33000" contrast="-20000"/>
+                    </a14:imgEffect>
+                  </a14:imgLayer>
+                </a14:imgProps>
+              </a:ext>
+              <a:ext uri="{28A0092B-C50C-407E-A947-70E740481C1C}">
+                <a14:useLocalDpi xmlns:a14="http://schemas.microsoft.com/office/drawing/2010/main" val="0"/>
+              </a:ext>
+            </a:extLst>
+          </a:blip>
+          <a:stretch>
+            <a:fillRect/>
+          </a:stretch>
+        </p:blipFill>
+        <p:spPr>
+          <a:xfrm>
+            <a:off x="1567682" y="2322234"/>
+            <a:ext cx="5236475" cy="2633477"/>
+          </a:xfrm>
+          <a:prstGeom prst="rect">
+            <a:avLst/>
+          </a:prstGeom>
+        </p:spPr>
+      </p:pic>
+      <p:pic>
+        <p:nvPicPr>
+          <p:cNvPr id="5" name="Picture 4">
+            <a:extLst>
+              <a:ext uri="{FF2B5EF4-FFF2-40B4-BE49-F238E27FC236}">
+                <a16:creationId xmlns:a16="http://schemas.microsoft.com/office/drawing/2014/main" id="{5054D953-0B4D-75FC-68B1-B570C8467F16}"/>
+              </a:ext>
+            </a:extLst>
+          </p:cNvPr>
+          <p:cNvPicPr>
+            <a:picLocks noChangeAspect="1"/>
+          </p:cNvPicPr>
+          <p:nvPr/>
+        </p:nvPicPr>
+        <p:blipFill>
+          <a:blip r:embed="rId5"/>
+          <a:stretch>
+            <a:fillRect/>
+          </a:stretch>
+        </p:blipFill>
+        <p:spPr>
+          <a:xfrm rot="10800000">
+            <a:off x="7532914" y="2381387"/>
+            <a:ext cx="2583575" cy="2493188"/>
+          </a:xfrm>
+          <a:prstGeom prst="rect">
+            <a:avLst/>
+          </a:prstGeom>
+          <a:ln w="50800">
+            <a:solidFill>
+              <a:schemeClr val="tx1"/>
+            </a:solidFill>
+          </a:ln>
+        </p:spPr>
+      </p:pic>
+      <p:sp>
+        <p:nvSpPr>
+          <p:cNvPr id="6" name="Rectangle 5">
+            <a:extLst>
+              <a:ext uri="{FF2B5EF4-FFF2-40B4-BE49-F238E27FC236}">
+                <a16:creationId xmlns:a16="http://schemas.microsoft.com/office/drawing/2014/main" id="{8967E5B9-B367-2998-44A6-B455F694AF5D}"/>
+              </a:ext>
+            </a:extLst>
+          </p:cNvPr>
+          <p:cNvSpPr/>
+          <p:nvPr/>
+        </p:nvSpPr>
+        <p:spPr>
+          <a:xfrm>
+            <a:off x="4789088" y="3368150"/>
+            <a:ext cx="802567" cy="828880"/>
+          </a:xfrm>
+          <a:prstGeom prst="rect">
+            <a:avLst/>
+          </a:prstGeom>
+          <a:noFill/>
+          <a:ln>
+            <a:solidFill>
+              <a:schemeClr val="tx1"/>
+            </a:solidFill>
+          </a:ln>
+        </p:spPr>
+        <p:style>
+          <a:lnRef idx="2">
+            <a:schemeClr val="accent1">
+              <a:shade val="15000"/>
+            </a:schemeClr>
+          </a:lnRef>
+          <a:fillRef idx="1">
+            <a:schemeClr val="accent1"/>
+          </a:fillRef>
+          <a:effectRef idx="0">
+            <a:schemeClr val="accent1"/>
+          </a:effectRef>
+          <a:fontRef idx="minor">
+            <a:schemeClr val="lt1"/>
+          </a:fontRef>
+        </p:style>
+        <p:txBody>
+          <a:bodyPr rtlCol="0" anchor="ctr"/>
+          <a:lstStyle/>
+          <a:p>
+            <a:pPr algn="ctr"/>
+            <a:endParaRPr lang="LID4096"/>
+          </a:p>
+        </p:txBody>
+      </p:sp>
+      <p:cxnSp>
+        <p:nvCxnSpPr>
+          <p:cNvPr id="8" name="Straight Connector 7">
+            <a:extLst>
+              <a:ext uri="{FF2B5EF4-FFF2-40B4-BE49-F238E27FC236}">
+                <a16:creationId xmlns:a16="http://schemas.microsoft.com/office/drawing/2014/main" id="{65C7606F-BE05-6C65-3A8D-55C756946723}"/>
+              </a:ext>
+            </a:extLst>
+          </p:cNvPr>
+          <p:cNvCxnSpPr/>
+          <p:nvPr/>
+        </p:nvCxnSpPr>
+        <p:spPr>
+          <a:xfrm flipV="1">
+            <a:off x="4789088" y="2381387"/>
+            <a:ext cx="2690572" cy="986763"/>
+          </a:xfrm>
+          <a:prstGeom prst="line">
+            <a:avLst/>
+          </a:prstGeom>
+          <a:ln>
+            <a:solidFill>
+              <a:schemeClr val="tx1"/>
+            </a:solidFill>
+          </a:ln>
+        </p:spPr>
+        <p:style>
+          <a:lnRef idx="2">
+            <a:schemeClr val="accent1"/>
+          </a:lnRef>
+          <a:fillRef idx="0">
+            <a:schemeClr val="accent1"/>
+          </a:fillRef>
+          <a:effectRef idx="1">
+            <a:schemeClr val="accent1"/>
+          </a:effectRef>
+          <a:fontRef idx="minor">
+            <a:schemeClr val="tx1"/>
+          </a:fontRef>
+        </p:style>
+      </p:cxnSp>
+      <p:cxnSp>
+        <p:nvCxnSpPr>
+          <p:cNvPr id="9" name="Straight Connector 8">
+            <a:extLst>
+              <a:ext uri="{FF2B5EF4-FFF2-40B4-BE49-F238E27FC236}">
+                <a16:creationId xmlns:a16="http://schemas.microsoft.com/office/drawing/2014/main" id="{335BB47D-0323-FCE6-BA0E-8267E6558FF0}"/>
+              </a:ext>
+            </a:extLst>
+          </p:cNvPr>
+          <p:cNvCxnSpPr>
+            <a:cxnSpLocks/>
+          </p:cNvCxnSpPr>
+          <p:nvPr/>
+        </p:nvCxnSpPr>
+        <p:spPr>
+          <a:xfrm>
+            <a:off x="4789088" y="4197030"/>
+            <a:ext cx="2690572" cy="677545"/>
+          </a:xfrm>
+          <a:prstGeom prst="line">
+            <a:avLst/>
+          </a:prstGeom>
+          <a:ln>
+            <a:solidFill>
+              <a:schemeClr val="tx1"/>
+            </a:solidFill>
+          </a:ln>
+        </p:spPr>
+        <p:style>
+          <a:lnRef idx="2">
+            <a:schemeClr val="accent1"/>
+          </a:lnRef>
+          <a:fillRef idx="0">
+            <a:schemeClr val="accent1"/>
+          </a:fillRef>
+          <a:effectRef idx="1">
+            <a:schemeClr val="accent1"/>
+          </a:effectRef>
+          <a:fontRef idx="minor">
+            <a:schemeClr val="tx1"/>
+          </a:fontRef>
+        </p:style>
+      </p:cxnSp>
+      <p:sp>
+        <p:nvSpPr>
+          <p:cNvPr id="13" name="Right Brace 12">
+            <a:extLst>
+              <a:ext uri="{FF2B5EF4-FFF2-40B4-BE49-F238E27FC236}">
+                <a16:creationId xmlns:a16="http://schemas.microsoft.com/office/drawing/2014/main" id="{F93BB77B-D332-F559-C473-C930126080FB}"/>
+              </a:ext>
+            </a:extLst>
+          </p:cNvPr>
+          <p:cNvSpPr/>
+          <p:nvPr/>
+        </p:nvSpPr>
+        <p:spPr>
+          <a:xfrm rot="5400000">
+            <a:off x="2591897" y="4690412"/>
+            <a:ext cx="78941" cy="776253"/>
+          </a:xfrm>
+          <a:prstGeom prst="rightBrace">
+            <a:avLst/>
+          </a:prstGeom>
+        </p:spPr>
+        <p:style>
+          <a:lnRef idx="2">
+            <a:schemeClr val="accent1"/>
+          </a:lnRef>
+          <a:fillRef idx="0">
+            <a:schemeClr val="accent1"/>
+          </a:fillRef>
+          <a:effectRef idx="1">
+            <a:schemeClr val="accent1"/>
+          </a:effectRef>
+          <a:fontRef idx="minor">
+            <a:schemeClr val="tx1"/>
+          </a:fontRef>
+        </p:style>
+        <p:txBody>
+          <a:bodyPr rtlCol="0" anchor="ctr"/>
+          <a:lstStyle/>
+          <a:p>
+            <a:pPr algn="ctr"/>
+            <a:endParaRPr lang="LID4096"/>
+          </a:p>
+        </p:txBody>
+      </p:sp>
+      <p:sp>
+        <p:nvSpPr>
+          <p:cNvPr id="14" name="TextBox 13">
+            <a:extLst>
+              <a:ext uri="{FF2B5EF4-FFF2-40B4-BE49-F238E27FC236}">
+                <a16:creationId xmlns:a16="http://schemas.microsoft.com/office/drawing/2014/main" id="{670EA364-38EB-C00A-7095-C9F1E038ACB5}"/>
+              </a:ext>
+            </a:extLst>
+          </p:cNvPr>
+          <p:cNvSpPr txBox="1"/>
+          <p:nvPr/>
+        </p:nvSpPr>
+        <p:spPr>
+          <a:xfrm>
+            <a:off x="2243241" y="5078538"/>
+            <a:ext cx="795411" cy="246221"/>
+          </a:xfrm>
+          <a:prstGeom prst="rect">
+            <a:avLst/>
+          </a:prstGeom>
+          <a:noFill/>
+        </p:spPr>
+        <p:txBody>
+          <a:bodyPr wrap="none" rtlCol="0">
+            <a:spAutoFit/>
+          </a:bodyPr>
+          <a:lstStyle/>
+          <a:p>
+            <a:r>
+              <a:rPr lang="en-US" sz="1000" dirty="0"/>
+              <a:t>Upper Byte</a:t>
+            </a:r>
+            <a:endParaRPr lang="LID4096" sz="1000" dirty="0"/>
+          </a:p>
+        </p:txBody>
+      </p:sp>
+      <p:sp>
+        <p:nvSpPr>
+          <p:cNvPr id="15" name="Right Brace 14">
+            <a:extLst>
+              <a:ext uri="{FF2B5EF4-FFF2-40B4-BE49-F238E27FC236}">
+                <a16:creationId xmlns:a16="http://schemas.microsoft.com/office/drawing/2014/main" id="{28701935-3C55-128E-66DD-3345A53357D8}"/>
+              </a:ext>
+            </a:extLst>
+          </p:cNvPr>
+          <p:cNvSpPr/>
+          <p:nvPr/>
+        </p:nvSpPr>
+        <p:spPr>
+          <a:xfrm rot="5400000">
+            <a:off x="3678432" y="4690412"/>
+            <a:ext cx="78941" cy="776253"/>
+          </a:xfrm>
+          <a:prstGeom prst="rightBrace">
+            <a:avLst/>
+          </a:prstGeom>
+        </p:spPr>
+        <p:style>
+          <a:lnRef idx="2">
+            <a:schemeClr val="accent1"/>
+          </a:lnRef>
+          <a:fillRef idx="0">
+            <a:schemeClr val="accent1"/>
+          </a:fillRef>
+          <a:effectRef idx="1">
+            <a:schemeClr val="accent1"/>
+          </a:effectRef>
+          <a:fontRef idx="minor">
+            <a:schemeClr val="tx1"/>
+          </a:fontRef>
+        </p:style>
+        <p:txBody>
+          <a:bodyPr rtlCol="0" anchor="ctr"/>
+          <a:lstStyle/>
+          <a:p>
+            <a:pPr algn="ctr"/>
+            <a:endParaRPr lang="LID4096"/>
+          </a:p>
+        </p:txBody>
+      </p:sp>
+      <p:sp>
+        <p:nvSpPr>
+          <p:cNvPr id="16" name="TextBox 15">
+            <a:extLst>
+              <a:ext uri="{FF2B5EF4-FFF2-40B4-BE49-F238E27FC236}">
+                <a16:creationId xmlns:a16="http://schemas.microsoft.com/office/drawing/2014/main" id="{CEAA6CDB-3C43-FF10-2016-E8465A14A1A7}"/>
+              </a:ext>
+            </a:extLst>
+          </p:cNvPr>
+          <p:cNvSpPr txBox="1"/>
+          <p:nvPr/>
+        </p:nvSpPr>
+        <p:spPr>
+          <a:xfrm>
+            <a:off x="3329776" y="5078538"/>
+            <a:ext cx="792205" cy="246221"/>
+          </a:xfrm>
+          <a:prstGeom prst="rect">
+            <a:avLst/>
+          </a:prstGeom>
+          <a:noFill/>
+        </p:spPr>
+        <p:txBody>
+          <a:bodyPr wrap="none" rtlCol="0">
+            <a:spAutoFit/>
+          </a:bodyPr>
+          <a:lstStyle/>
+          <a:p>
+            <a:r>
+              <a:rPr lang="en-US" sz="1000" dirty="0"/>
+              <a:t>Lower Byte</a:t>
+            </a:r>
+            <a:endParaRPr lang="LID4096" sz="1000" dirty="0"/>
+          </a:p>
+        </p:txBody>
+      </p:sp>
+      <p:sp>
+        <p:nvSpPr>
+          <p:cNvPr id="17" name="Right Brace 16">
+            <a:extLst>
+              <a:ext uri="{FF2B5EF4-FFF2-40B4-BE49-F238E27FC236}">
+                <a16:creationId xmlns:a16="http://schemas.microsoft.com/office/drawing/2014/main" id="{4E2A9B11-6305-AFCF-EA57-7E343C5A33EF}"/>
+              </a:ext>
+            </a:extLst>
+          </p:cNvPr>
+          <p:cNvSpPr/>
+          <p:nvPr/>
+        </p:nvSpPr>
+        <p:spPr>
+          <a:xfrm rot="5400000">
+            <a:off x="3138507" y="4380756"/>
+            <a:ext cx="78941" cy="1888005"/>
+          </a:xfrm>
+          <a:prstGeom prst="rightBrace">
+            <a:avLst/>
+          </a:prstGeom>
+        </p:spPr>
+        <p:style>
+          <a:lnRef idx="2">
+            <a:schemeClr val="accent1"/>
+          </a:lnRef>
+          <a:fillRef idx="0">
+            <a:schemeClr val="accent1"/>
+          </a:fillRef>
+          <a:effectRef idx="1">
+            <a:schemeClr val="accent1"/>
+          </a:effectRef>
+          <a:fontRef idx="minor">
+            <a:schemeClr val="tx1"/>
+          </a:fontRef>
+        </p:style>
+        <p:txBody>
+          <a:bodyPr rtlCol="0" anchor="ctr"/>
+          <a:lstStyle/>
+          <a:p>
+            <a:pPr algn="ctr"/>
+            <a:endParaRPr lang="LID4096"/>
+          </a:p>
+        </p:txBody>
+      </p:sp>
+      <p:sp>
+        <p:nvSpPr>
+          <p:cNvPr id="20" name="TextBox 19">
+            <a:extLst>
+              <a:ext uri="{FF2B5EF4-FFF2-40B4-BE49-F238E27FC236}">
+                <a16:creationId xmlns:a16="http://schemas.microsoft.com/office/drawing/2014/main" id="{E48DD4B5-8FDF-A23B-497D-F1BB7C05ADEF}"/>
+              </a:ext>
+            </a:extLst>
+          </p:cNvPr>
+          <p:cNvSpPr txBox="1"/>
+          <p:nvPr/>
+        </p:nvSpPr>
+        <p:spPr>
+          <a:xfrm>
+            <a:off x="2640946" y="5364229"/>
+            <a:ext cx="1119730" cy="307777"/>
+          </a:xfrm>
+          <a:prstGeom prst="rect">
+            <a:avLst/>
+          </a:prstGeom>
+          <a:noFill/>
+        </p:spPr>
+        <p:txBody>
+          <a:bodyPr wrap="none" rtlCol="0">
+            <a:spAutoFit/>
+          </a:bodyPr>
+          <a:lstStyle/>
+          <a:p>
+            <a:r>
+              <a:rPr lang="en-US" sz="1400" b="1" dirty="0"/>
+              <a:t>GPIO Port E</a:t>
+            </a:r>
+            <a:endParaRPr lang="LID4096" sz="1400" b="1" dirty="0"/>
+          </a:p>
+        </p:txBody>
+      </p:sp>
+      <p:sp>
+        <p:nvSpPr>
+          <p:cNvPr id="21" name="Right Brace 20">
+            <a:extLst>
+              <a:ext uri="{FF2B5EF4-FFF2-40B4-BE49-F238E27FC236}">
+                <a16:creationId xmlns:a16="http://schemas.microsoft.com/office/drawing/2014/main" id="{B82C5514-A1EE-B725-129D-3337AAA523ED}"/>
+              </a:ext>
+            </a:extLst>
+          </p:cNvPr>
+          <p:cNvSpPr/>
+          <p:nvPr/>
+        </p:nvSpPr>
+        <p:spPr>
+          <a:xfrm rot="5400000">
+            <a:off x="4740039" y="4690412"/>
+            <a:ext cx="78941" cy="776253"/>
+          </a:xfrm>
+          <a:prstGeom prst="rightBrace">
+            <a:avLst/>
+          </a:prstGeom>
+        </p:spPr>
+        <p:style>
+          <a:lnRef idx="2">
+            <a:schemeClr val="accent1"/>
+          </a:lnRef>
+          <a:fillRef idx="0">
+            <a:schemeClr val="accent1"/>
+          </a:fillRef>
+          <a:effectRef idx="1">
+            <a:schemeClr val="accent1"/>
+          </a:effectRef>
+          <a:fontRef idx="minor">
+            <a:schemeClr val="tx1"/>
+          </a:fontRef>
+        </p:style>
+        <p:txBody>
+          <a:bodyPr rtlCol="0" anchor="ctr"/>
+          <a:lstStyle/>
+          <a:p>
+            <a:pPr algn="ctr"/>
+            <a:endParaRPr lang="LID4096"/>
+          </a:p>
+        </p:txBody>
+      </p:sp>
+      <p:sp>
+        <p:nvSpPr>
+          <p:cNvPr id="22" name="TextBox 21">
+            <a:extLst>
+              <a:ext uri="{FF2B5EF4-FFF2-40B4-BE49-F238E27FC236}">
+                <a16:creationId xmlns:a16="http://schemas.microsoft.com/office/drawing/2014/main" id="{52C8F472-5AA4-2A80-9D66-C199BB2758DC}"/>
+              </a:ext>
+            </a:extLst>
+          </p:cNvPr>
+          <p:cNvSpPr txBox="1"/>
+          <p:nvPr/>
+        </p:nvSpPr>
+        <p:spPr>
+          <a:xfrm>
+            <a:off x="4391383" y="5078538"/>
+            <a:ext cx="795411" cy="246221"/>
+          </a:xfrm>
+          <a:prstGeom prst="rect">
+            <a:avLst/>
+          </a:prstGeom>
+          <a:noFill/>
+        </p:spPr>
+        <p:txBody>
+          <a:bodyPr wrap="none" rtlCol="0">
+            <a:spAutoFit/>
+          </a:bodyPr>
+          <a:lstStyle/>
+          <a:p>
+            <a:r>
+              <a:rPr lang="en-US" sz="1000" dirty="0"/>
+              <a:t>Upper Byte</a:t>
+            </a:r>
+            <a:endParaRPr lang="LID4096" sz="1000" dirty="0"/>
+          </a:p>
+        </p:txBody>
+      </p:sp>
+      <p:sp>
+        <p:nvSpPr>
+          <p:cNvPr id="23" name="Right Brace 22">
+            <a:extLst>
+              <a:ext uri="{FF2B5EF4-FFF2-40B4-BE49-F238E27FC236}">
+                <a16:creationId xmlns:a16="http://schemas.microsoft.com/office/drawing/2014/main" id="{0CBA38D3-B702-F865-72B2-0F1B0241BAEC}"/>
+              </a:ext>
+            </a:extLst>
+          </p:cNvPr>
+          <p:cNvSpPr/>
+          <p:nvPr/>
+        </p:nvSpPr>
+        <p:spPr>
+          <a:xfrm rot="5400000">
+            <a:off x="5826574" y="4690412"/>
+            <a:ext cx="78941" cy="776253"/>
+          </a:xfrm>
+          <a:prstGeom prst="rightBrace">
+            <a:avLst/>
+          </a:prstGeom>
+        </p:spPr>
+        <p:style>
+          <a:lnRef idx="2">
+            <a:schemeClr val="accent1"/>
+          </a:lnRef>
+          <a:fillRef idx="0">
+            <a:schemeClr val="accent1"/>
+          </a:fillRef>
+          <a:effectRef idx="1">
+            <a:schemeClr val="accent1"/>
+          </a:effectRef>
+          <a:fontRef idx="minor">
+            <a:schemeClr val="tx1"/>
+          </a:fontRef>
+        </p:style>
+        <p:txBody>
+          <a:bodyPr rtlCol="0" anchor="ctr"/>
+          <a:lstStyle/>
+          <a:p>
+            <a:pPr algn="ctr"/>
+            <a:endParaRPr lang="LID4096"/>
+          </a:p>
+        </p:txBody>
+      </p:sp>
+      <p:sp>
+        <p:nvSpPr>
+          <p:cNvPr id="24" name="TextBox 23">
+            <a:extLst>
+              <a:ext uri="{FF2B5EF4-FFF2-40B4-BE49-F238E27FC236}">
+                <a16:creationId xmlns:a16="http://schemas.microsoft.com/office/drawing/2014/main" id="{2E4C846C-2BF4-F7B2-E376-024C88BE0128}"/>
+              </a:ext>
+            </a:extLst>
+          </p:cNvPr>
+          <p:cNvSpPr txBox="1"/>
+          <p:nvPr/>
+        </p:nvSpPr>
+        <p:spPr>
+          <a:xfrm>
+            <a:off x="5477918" y="5078538"/>
+            <a:ext cx="792205" cy="246221"/>
+          </a:xfrm>
+          <a:prstGeom prst="rect">
+            <a:avLst/>
+          </a:prstGeom>
+          <a:noFill/>
+        </p:spPr>
+        <p:txBody>
+          <a:bodyPr wrap="none" rtlCol="0">
+            <a:spAutoFit/>
+          </a:bodyPr>
+          <a:lstStyle/>
+          <a:p>
+            <a:r>
+              <a:rPr lang="en-US" sz="1000" dirty="0"/>
+              <a:t>Lower Byte</a:t>
+            </a:r>
+            <a:endParaRPr lang="LID4096" sz="1000" dirty="0"/>
+          </a:p>
+        </p:txBody>
+      </p:sp>
+      <p:sp>
+        <p:nvSpPr>
+          <p:cNvPr id="25" name="Right Brace 24">
+            <a:extLst>
+              <a:ext uri="{FF2B5EF4-FFF2-40B4-BE49-F238E27FC236}">
+                <a16:creationId xmlns:a16="http://schemas.microsoft.com/office/drawing/2014/main" id="{B7B7AB33-CEC8-1838-7786-8BE2FB61A9CA}"/>
+              </a:ext>
+            </a:extLst>
+          </p:cNvPr>
+          <p:cNvSpPr/>
+          <p:nvPr/>
+        </p:nvSpPr>
+        <p:spPr>
+          <a:xfrm rot="5400000">
+            <a:off x="5286649" y="4380756"/>
+            <a:ext cx="78941" cy="1888005"/>
+          </a:xfrm>
+          <a:prstGeom prst="rightBrace">
+            <a:avLst/>
+          </a:prstGeom>
+        </p:spPr>
+        <p:style>
+          <a:lnRef idx="2">
+            <a:schemeClr val="accent1"/>
+          </a:lnRef>
+          <a:fillRef idx="0">
+            <a:schemeClr val="accent1"/>
+          </a:fillRef>
+          <a:effectRef idx="1">
+            <a:schemeClr val="accent1"/>
+          </a:effectRef>
+          <a:fontRef idx="minor">
+            <a:schemeClr val="tx1"/>
+          </a:fontRef>
+        </p:style>
+        <p:txBody>
+          <a:bodyPr rtlCol="0" anchor="ctr"/>
+          <a:lstStyle/>
+          <a:p>
+            <a:pPr algn="ctr"/>
+            <a:endParaRPr lang="LID4096"/>
+          </a:p>
+        </p:txBody>
+      </p:sp>
+      <p:sp>
+        <p:nvSpPr>
+          <p:cNvPr id="26" name="TextBox 25">
+            <a:extLst>
+              <a:ext uri="{FF2B5EF4-FFF2-40B4-BE49-F238E27FC236}">
+                <a16:creationId xmlns:a16="http://schemas.microsoft.com/office/drawing/2014/main" id="{34492A0A-1979-7B55-D30F-C545D1B809D8}"/>
+              </a:ext>
+            </a:extLst>
+          </p:cNvPr>
+          <p:cNvSpPr txBox="1"/>
+          <p:nvPr/>
+        </p:nvSpPr>
+        <p:spPr>
+          <a:xfrm>
+            <a:off x="4789088" y="5364229"/>
+            <a:ext cx="1143775" cy="307777"/>
+          </a:xfrm>
+          <a:prstGeom prst="rect">
+            <a:avLst/>
+          </a:prstGeom>
+          <a:noFill/>
+        </p:spPr>
+        <p:txBody>
+          <a:bodyPr wrap="none" rtlCol="0">
+            <a:spAutoFit/>
+          </a:bodyPr>
+          <a:lstStyle/>
+          <a:p>
+            <a:r>
+              <a:rPr lang="en-US" sz="1400" b="1" dirty="0"/>
+              <a:t>GPIO Port D</a:t>
+            </a:r>
+            <a:endParaRPr lang="LID4096" sz="1400" b="1" dirty="0"/>
+          </a:p>
+        </p:txBody>
+      </p:sp>
+      <p:sp>
+        <p:nvSpPr>
+          <p:cNvPr id="27" name="Right Brace 26">
+            <a:extLst>
+              <a:ext uri="{FF2B5EF4-FFF2-40B4-BE49-F238E27FC236}">
+                <a16:creationId xmlns:a16="http://schemas.microsoft.com/office/drawing/2014/main" id="{B62FF8D5-3CB0-6DBF-A847-AF33D7CE456A}"/>
+              </a:ext>
+            </a:extLst>
+          </p:cNvPr>
+          <p:cNvSpPr/>
+          <p:nvPr/>
+        </p:nvSpPr>
+        <p:spPr>
+          <a:xfrm rot="16200000">
+            <a:off x="4739261" y="868875"/>
+            <a:ext cx="147597" cy="2680180"/>
+          </a:xfrm>
+          <a:prstGeom prst="rightBrace">
+            <a:avLst/>
+          </a:prstGeom>
+        </p:spPr>
+        <p:style>
+          <a:lnRef idx="2">
+            <a:schemeClr val="accent1"/>
+          </a:lnRef>
+          <a:fillRef idx="0">
+            <a:schemeClr val="accent1"/>
+          </a:fillRef>
+          <a:effectRef idx="1">
+            <a:schemeClr val="accent1"/>
+          </a:effectRef>
+          <a:fontRef idx="minor">
+            <a:schemeClr val="tx1"/>
+          </a:fontRef>
+        </p:style>
+        <p:txBody>
+          <a:bodyPr rtlCol="0" anchor="ctr"/>
+          <a:lstStyle/>
+          <a:p>
+            <a:pPr algn="ctr"/>
+            <a:endParaRPr lang="LID4096"/>
+          </a:p>
+        </p:txBody>
+      </p:sp>
+      <p:sp>
+        <p:nvSpPr>
+          <p:cNvPr id="28" name="TextBox 27">
+            <a:extLst>
+              <a:ext uri="{FF2B5EF4-FFF2-40B4-BE49-F238E27FC236}">
+                <a16:creationId xmlns:a16="http://schemas.microsoft.com/office/drawing/2014/main" id="{9E15BBAA-7889-F57F-5251-1A0AD203D39B}"/>
+              </a:ext>
+            </a:extLst>
+          </p:cNvPr>
+          <p:cNvSpPr txBox="1"/>
+          <p:nvPr/>
+        </p:nvSpPr>
+        <p:spPr>
+          <a:xfrm>
+            <a:off x="3829083" y="1827389"/>
+            <a:ext cx="2134174" cy="307777"/>
+          </a:xfrm>
+          <a:prstGeom prst="rect">
+            <a:avLst/>
+          </a:prstGeom>
+          <a:noFill/>
+        </p:spPr>
+        <p:txBody>
+          <a:bodyPr wrap="none" rtlCol="0">
+            <a:spAutoFit/>
+          </a:bodyPr>
+          <a:lstStyle/>
+          <a:p>
+            <a:r>
+              <a:rPr lang="en-US" sz="1400" b="1" dirty="0"/>
+              <a:t>All GPIO Pins (Ports A-E)</a:t>
+            </a:r>
+            <a:endParaRPr lang="LID4096" sz="1400" b="1" dirty="0"/>
+          </a:p>
+        </p:txBody>
+      </p:sp>
+      <p:sp>
+        <p:nvSpPr>
+          <p:cNvPr id="29" name="Freeform: Shape 28">
+            <a:extLst>
+              <a:ext uri="{FF2B5EF4-FFF2-40B4-BE49-F238E27FC236}">
+                <a16:creationId xmlns:a16="http://schemas.microsoft.com/office/drawing/2014/main" id="{5D43038E-94EC-F41D-B310-733B92197D79}"/>
+              </a:ext>
+            </a:extLst>
+          </p:cNvPr>
+          <p:cNvSpPr/>
+          <p:nvPr/>
+        </p:nvSpPr>
+        <p:spPr>
+          <a:xfrm>
+            <a:off x="2527300" y="3867150"/>
+            <a:ext cx="2317750" cy="723900"/>
+          </a:xfrm>
+          <a:custGeom>
+            <a:avLst/>
+            <a:gdLst>
+              <a:gd name="connsiteX0" fmla="*/ 2317750 w 2317750"/>
+              <a:gd name="connsiteY0" fmla="*/ 0 h 723900"/>
+              <a:gd name="connsiteX1" fmla="*/ 1022350 w 2317750"/>
+              <a:gd name="connsiteY1" fmla="*/ 15875 h 723900"/>
+              <a:gd name="connsiteX2" fmla="*/ 549275 w 2317750"/>
+              <a:gd name="connsiteY2" fmla="*/ 482600 h 723900"/>
+              <a:gd name="connsiteX3" fmla="*/ 228600 w 2317750"/>
+              <a:gd name="connsiteY3" fmla="*/ 482600 h 723900"/>
+              <a:gd name="connsiteX4" fmla="*/ 0 w 2317750"/>
+              <a:gd name="connsiteY4" fmla="*/ 723900 h 723900"/>
+            </a:gdLst>
+            <a:ahLst/>
+            <a:cxnLst>
+              <a:cxn ang="0">
+                <a:pos x="connsiteX0" y="connsiteY0"/>
+              </a:cxn>
+              <a:cxn ang="0">
+                <a:pos x="connsiteX1" y="connsiteY1"/>
+              </a:cxn>
+              <a:cxn ang="0">
+                <a:pos x="connsiteX2" y="connsiteY2"/>
+              </a:cxn>
+              <a:cxn ang="0">
+                <a:pos x="connsiteX3" y="connsiteY3"/>
+              </a:cxn>
+              <a:cxn ang="0">
+                <a:pos x="connsiteX4" y="connsiteY4"/>
+              </a:cxn>
+            </a:cxnLst>
+            <a:rect l="l" t="t" r="r" b="b"/>
+            <a:pathLst>
+              <a:path w="2317750" h="723900">
+                <a:moveTo>
+                  <a:pt x="2317750" y="0"/>
+                </a:moveTo>
+                <a:lnTo>
+                  <a:pt x="1022350" y="15875"/>
+                </a:lnTo>
+                <a:lnTo>
+                  <a:pt x="549275" y="482600"/>
+                </a:lnTo>
+                <a:lnTo>
+                  <a:pt x="228600" y="482600"/>
+                </a:lnTo>
+                <a:lnTo>
+                  <a:pt x="0" y="723900"/>
+                </a:lnTo>
+              </a:path>
+            </a:pathLst>
+          </a:custGeom>
+          <a:noFill/>
+          <a:ln>
+            <a:solidFill>
+              <a:schemeClr val="bg1"/>
+            </a:solidFill>
+          </a:ln>
+        </p:spPr>
+        <p:style>
+          <a:lnRef idx="2">
+            <a:schemeClr val="accent1">
+              <a:shade val="15000"/>
+            </a:schemeClr>
+          </a:lnRef>
+          <a:fillRef idx="1">
+            <a:schemeClr val="accent1"/>
+          </a:fillRef>
+          <a:effectRef idx="0">
+            <a:schemeClr val="accent1"/>
+          </a:effectRef>
+          <a:fontRef idx="minor">
+            <a:schemeClr val="lt1"/>
+          </a:fontRef>
+        </p:style>
+        <p:txBody>
+          <a:bodyPr rtlCol="0" anchor="ctr"/>
+          <a:lstStyle/>
+          <a:p>
+            <a:pPr algn="ctr"/>
+            <a:endParaRPr lang="LID4096"/>
+          </a:p>
+        </p:txBody>
+      </p:sp>
+      <p:sp>
+        <p:nvSpPr>
+          <p:cNvPr id="30" name="Oval 29">
+            <a:extLst>
+              <a:ext uri="{FF2B5EF4-FFF2-40B4-BE49-F238E27FC236}">
+                <a16:creationId xmlns:a16="http://schemas.microsoft.com/office/drawing/2014/main" id="{183B1BDA-1B07-758C-A5A2-2FF6B463B05D}"/>
+              </a:ext>
+            </a:extLst>
+          </p:cNvPr>
+          <p:cNvSpPr/>
+          <p:nvPr/>
+        </p:nvSpPr>
+        <p:spPr>
+          <a:xfrm>
+            <a:off x="2473325" y="4581525"/>
+            <a:ext cx="73025" cy="73025"/>
+          </a:xfrm>
+          <a:prstGeom prst="ellipse">
+            <a:avLst/>
+          </a:prstGeom>
+          <a:noFill/>
+          <a:ln>
+            <a:solidFill>
+              <a:schemeClr val="bg1"/>
+            </a:solidFill>
+          </a:ln>
+        </p:spPr>
+        <p:style>
+          <a:lnRef idx="2">
+            <a:schemeClr val="accent1">
+              <a:shade val="15000"/>
+            </a:schemeClr>
+          </a:lnRef>
+          <a:fillRef idx="1">
+            <a:schemeClr val="accent1"/>
+          </a:fillRef>
+          <a:effectRef idx="0">
+            <a:schemeClr val="accent1"/>
+          </a:effectRef>
+          <a:fontRef idx="minor">
+            <a:schemeClr val="lt1"/>
+          </a:fontRef>
+        </p:style>
+        <p:txBody>
+          <a:bodyPr rtlCol="0" anchor="ctr"/>
+          <a:lstStyle/>
+          <a:p>
+            <a:pPr algn="ctr"/>
+            <a:endParaRPr lang="LID4096"/>
+          </a:p>
+        </p:txBody>
+      </p:sp>
+    </p:spTree>
+    <p:extLst>
+      <p:ext uri="{BB962C8B-B14F-4D97-AF65-F5344CB8AC3E}">
+        <p14:creationId xmlns:p14="http://schemas.microsoft.com/office/powerpoint/2010/main" val="3651923596"/>
+      </p:ext>
+    </p:extLst>
+  </p:cSld>
+  <p:clrMapOvr>
+    <a:masterClrMapping/>
+  </p:clrMapOvr>
+</p:sld>
+</file>
+
+<file path=ppt/slides/slide7.xml><?xml version="1.0" encoding="utf-8"?>
+<p:sld xmlns:a="http://schemas.openxmlformats.org/drawingml/2006/main" xmlns:r="http://schemas.openxmlformats.org/officeDocument/2006/relationships" xmlns:p="http://schemas.openxmlformats.org/presentationml/2006/main">
+  <p:cSld>
+    <p:spTree>
+      <p:nvGrpSpPr>
+        <p:cNvPr id="1" name="">
+          <a:extLst>
+            <a:ext uri="{FF2B5EF4-FFF2-40B4-BE49-F238E27FC236}">
+              <a16:creationId xmlns:a16="http://schemas.microsoft.com/office/drawing/2014/main" id="{80A024B2-F4F1-DE03-BB3B-C21370D10746}"/>
+            </a:ext>
+          </a:extLst>
+        </p:cNvPr>
+        <p:cNvGrpSpPr/>
+        <p:nvPr/>
+      </p:nvGrpSpPr>
+      <p:grpSpPr>
+        <a:xfrm>
+          <a:off x="0" y="0"/>
+          <a:ext cx="0" cy="0"/>
+          <a:chOff x="0" y="0"/>
+          <a:chExt cx="0" cy="0"/>
+        </a:xfrm>
+      </p:grpSpPr>
+      <p:pic>
+        <p:nvPicPr>
+          <p:cNvPr id="4" name="Picture 3">
+            <a:extLst>
+              <a:ext uri="{FF2B5EF4-FFF2-40B4-BE49-F238E27FC236}">
+                <a16:creationId xmlns:a16="http://schemas.microsoft.com/office/drawing/2014/main" id="{85F44016-2520-8918-8208-02DB742201B8}"/>
+              </a:ext>
+            </a:extLst>
+          </p:cNvPr>
+          <p:cNvPicPr>
+            <a:picLocks noChangeAspect="1"/>
+          </p:cNvPicPr>
+          <p:nvPr/>
+        </p:nvPicPr>
+        <p:blipFill>
+          <a:blip r:embed="rId3"/>
+          <a:stretch>
+            <a:fillRect/>
+          </a:stretch>
+        </p:blipFill>
+        <p:spPr>
+          <a:xfrm>
+            <a:off x="2862973" y="2919219"/>
+            <a:ext cx="5353797" cy="2772162"/>
+          </a:xfrm>
+          <a:prstGeom prst="rect">
+            <a:avLst/>
+          </a:prstGeom>
+        </p:spPr>
+      </p:pic>
+      <p:sp>
+        <p:nvSpPr>
+          <p:cNvPr id="89" name="Rectangle 88">
+            <a:extLst>
+              <a:ext uri="{FF2B5EF4-FFF2-40B4-BE49-F238E27FC236}">
+                <a16:creationId xmlns:a16="http://schemas.microsoft.com/office/drawing/2014/main" id="{9C31C63C-B3D3-032D-AFF4-1F1D95E6F7FF}"/>
+              </a:ext>
+            </a:extLst>
+          </p:cNvPr>
+          <p:cNvSpPr/>
+          <p:nvPr/>
+        </p:nvSpPr>
+        <p:spPr>
+          <a:xfrm>
+            <a:off x="4005263" y="3931920"/>
+            <a:ext cx="3381375" cy="1402080"/>
+          </a:xfrm>
+          <a:prstGeom prst="rect">
+            <a:avLst/>
+          </a:prstGeom>
+          <a:solidFill>
+            <a:schemeClr val="tx1">
+              <a:lumMod val="85000"/>
+              <a:lumOff val="15000"/>
+            </a:schemeClr>
+          </a:solidFill>
+          <a:ln>
+            <a:noFill/>
+          </a:ln>
+        </p:spPr>
+        <p:style>
+          <a:lnRef idx="2">
+            <a:schemeClr val="accent1">
+              <a:shade val="15000"/>
+            </a:schemeClr>
+          </a:lnRef>
+          <a:fillRef idx="1">
+            <a:schemeClr val="accent1"/>
+          </a:fillRef>
+          <a:effectRef idx="0">
+            <a:schemeClr val="accent1"/>
+          </a:effectRef>
+          <a:fontRef idx="minor">
+            <a:schemeClr val="lt1"/>
+          </a:fontRef>
+        </p:style>
+        <p:txBody>
+          <a:bodyPr rtlCol="0" anchor="ctr"/>
+          <a:lstStyle/>
+          <a:p>
+            <a:pPr algn="ctr"/>
+            <a:endParaRPr lang="LID4096"/>
+          </a:p>
+        </p:txBody>
+      </p:sp>
+      <p:sp>
+        <p:nvSpPr>
+          <p:cNvPr id="7" name="Freeform: Shape 6">
+            <a:extLst>
+              <a:ext uri="{FF2B5EF4-FFF2-40B4-BE49-F238E27FC236}">
+                <a16:creationId xmlns:a16="http://schemas.microsoft.com/office/drawing/2014/main" id="{13DD2DAA-3A5E-3701-ABEB-350245EFEA18}"/>
+              </a:ext>
+            </a:extLst>
+          </p:cNvPr>
+          <p:cNvSpPr/>
+          <p:nvPr/>
+        </p:nvSpPr>
+        <p:spPr>
+          <a:xfrm>
+            <a:off x="3863340" y="3779520"/>
+            <a:ext cx="3787140" cy="259080"/>
+          </a:xfrm>
+          <a:custGeom>
+            <a:avLst/>
+            <a:gdLst>
+              <a:gd name="connsiteX0" fmla="*/ 3406140 w 3825240"/>
+              <a:gd name="connsiteY0" fmla="*/ 0 h 259080"/>
+              <a:gd name="connsiteX1" fmla="*/ 0 w 3825240"/>
+              <a:gd name="connsiteY1" fmla="*/ 68580 h 259080"/>
+              <a:gd name="connsiteX2" fmla="*/ 228600 w 3825240"/>
+              <a:gd name="connsiteY2" fmla="*/ 259080 h 259080"/>
+              <a:gd name="connsiteX3" fmla="*/ 3825240 w 3825240"/>
+              <a:gd name="connsiteY3" fmla="*/ 167640 h 259080"/>
+              <a:gd name="connsiteX4" fmla="*/ 3406140 w 3825240"/>
+              <a:gd name="connsiteY4" fmla="*/ 0 h 259080"/>
+              <a:gd name="connsiteX0" fmla="*/ 3406140 w 3787140"/>
+              <a:gd name="connsiteY0" fmla="*/ 0 h 259080"/>
+              <a:gd name="connsiteX1" fmla="*/ 0 w 3787140"/>
+              <a:gd name="connsiteY1" fmla="*/ 68580 h 259080"/>
+              <a:gd name="connsiteX2" fmla="*/ 228600 w 3787140"/>
+              <a:gd name="connsiteY2" fmla="*/ 259080 h 259080"/>
+              <a:gd name="connsiteX3" fmla="*/ 3787140 w 3787140"/>
+              <a:gd name="connsiteY3" fmla="*/ 153353 h 259080"/>
+              <a:gd name="connsiteX4" fmla="*/ 3406140 w 3787140"/>
+              <a:gd name="connsiteY4" fmla="*/ 0 h 259080"/>
+            </a:gdLst>
+            <a:ahLst/>
+            <a:cxnLst>
+              <a:cxn ang="0">
+                <a:pos x="connsiteX0" y="connsiteY0"/>
+              </a:cxn>
+              <a:cxn ang="0">
+                <a:pos x="connsiteX1" y="connsiteY1"/>
+              </a:cxn>
+              <a:cxn ang="0">
+                <a:pos x="connsiteX2" y="connsiteY2"/>
+              </a:cxn>
+              <a:cxn ang="0">
+                <a:pos x="connsiteX3" y="connsiteY3"/>
+              </a:cxn>
+              <a:cxn ang="0">
+                <a:pos x="connsiteX4" y="connsiteY4"/>
+              </a:cxn>
+            </a:cxnLst>
+            <a:rect l="l" t="t" r="r" b="b"/>
+            <a:pathLst>
+              <a:path w="3787140" h="259080">
+                <a:moveTo>
+                  <a:pt x="3406140" y="0"/>
+                </a:moveTo>
+                <a:lnTo>
+                  <a:pt x="0" y="68580"/>
+                </a:lnTo>
+                <a:lnTo>
+                  <a:pt x="228600" y="259080"/>
+                </a:lnTo>
+                <a:lnTo>
+                  <a:pt x="3787140" y="153353"/>
+                </a:lnTo>
+                <a:lnTo>
+                  <a:pt x="3406140" y="0"/>
+                </a:lnTo>
+                <a:close/>
+              </a:path>
+            </a:pathLst>
+          </a:custGeom>
+          <a:solidFill>
+            <a:schemeClr val="bg2">
+              <a:lumMod val="25000"/>
+            </a:schemeClr>
+          </a:solidFill>
+        </p:spPr>
+        <p:style>
+          <a:lnRef idx="2">
+            <a:schemeClr val="accent1">
+              <a:shade val="15000"/>
+            </a:schemeClr>
+          </a:lnRef>
+          <a:fillRef idx="1">
+            <a:schemeClr val="accent1"/>
+          </a:fillRef>
+          <a:effectRef idx="0">
+            <a:schemeClr val="accent1"/>
+          </a:effectRef>
+          <a:fontRef idx="minor">
+            <a:schemeClr val="lt1"/>
+          </a:fontRef>
+        </p:style>
+        <p:txBody>
+          <a:bodyPr rtlCol="0" anchor="ctr"/>
+          <a:lstStyle/>
+          <a:p>
+            <a:pPr algn="ctr"/>
+            <a:endParaRPr lang="LID4096"/>
+          </a:p>
+        </p:txBody>
+      </p:sp>
+      <p:sp>
+        <p:nvSpPr>
+          <p:cNvPr id="10" name="Freeform: Shape 9">
+            <a:extLst>
+              <a:ext uri="{FF2B5EF4-FFF2-40B4-BE49-F238E27FC236}">
+                <a16:creationId xmlns:a16="http://schemas.microsoft.com/office/drawing/2014/main" id="{EA0B8ECF-7F99-E85F-2C09-46FA91C74FAD}"/>
+              </a:ext>
+            </a:extLst>
+          </p:cNvPr>
+          <p:cNvSpPr/>
+          <p:nvPr/>
+        </p:nvSpPr>
+        <p:spPr>
+          <a:xfrm>
+            <a:off x="3886200" y="3855720"/>
+            <a:ext cx="205740" cy="1714500"/>
+          </a:xfrm>
+          <a:custGeom>
+            <a:avLst/>
+            <a:gdLst>
+              <a:gd name="connsiteX0" fmla="*/ 0 w 205740"/>
+              <a:gd name="connsiteY0" fmla="*/ 0 h 1714500"/>
+              <a:gd name="connsiteX1" fmla="*/ 30480 w 205740"/>
+              <a:gd name="connsiteY1" fmla="*/ 1539240 h 1714500"/>
+              <a:gd name="connsiteX2" fmla="*/ 205740 w 205740"/>
+              <a:gd name="connsiteY2" fmla="*/ 1714500 h 1714500"/>
+              <a:gd name="connsiteX3" fmla="*/ 198120 w 205740"/>
+              <a:gd name="connsiteY3" fmla="*/ 167640 h 1714500"/>
+              <a:gd name="connsiteX4" fmla="*/ 0 w 205740"/>
+              <a:gd name="connsiteY4" fmla="*/ 0 h 1714500"/>
+            </a:gdLst>
+            <a:ahLst/>
+            <a:cxnLst>
+              <a:cxn ang="0">
+                <a:pos x="connsiteX0" y="connsiteY0"/>
+              </a:cxn>
+              <a:cxn ang="0">
+                <a:pos x="connsiteX1" y="connsiteY1"/>
+              </a:cxn>
+              <a:cxn ang="0">
+                <a:pos x="connsiteX2" y="connsiteY2"/>
+              </a:cxn>
+              <a:cxn ang="0">
+                <a:pos x="connsiteX3" y="connsiteY3"/>
+              </a:cxn>
+              <a:cxn ang="0">
+                <a:pos x="connsiteX4" y="connsiteY4"/>
+              </a:cxn>
+            </a:cxnLst>
+            <a:rect l="l" t="t" r="r" b="b"/>
+            <a:pathLst>
+              <a:path w="205740" h="1714500">
+                <a:moveTo>
+                  <a:pt x="0" y="0"/>
+                </a:moveTo>
+                <a:lnTo>
+                  <a:pt x="30480" y="1539240"/>
+                </a:lnTo>
+                <a:lnTo>
+                  <a:pt x="205740" y="1714500"/>
+                </a:lnTo>
+                <a:lnTo>
+                  <a:pt x="198120" y="167640"/>
+                </a:lnTo>
+                <a:lnTo>
+                  <a:pt x="0" y="0"/>
+                </a:lnTo>
+                <a:close/>
+              </a:path>
+            </a:pathLst>
+          </a:custGeom>
+          <a:solidFill>
+            <a:schemeClr val="tx1">
+              <a:lumMod val="85000"/>
+              <a:lumOff val="15000"/>
+            </a:schemeClr>
+          </a:solidFill>
+        </p:spPr>
+        <p:style>
+          <a:lnRef idx="2">
+            <a:schemeClr val="accent1">
+              <a:shade val="15000"/>
+            </a:schemeClr>
+          </a:lnRef>
+          <a:fillRef idx="1">
+            <a:schemeClr val="accent1"/>
+          </a:fillRef>
+          <a:effectRef idx="0">
+            <a:schemeClr val="accent1"/>
+          </a:effectRef>
+          <a:fontRef idx="minor">
+            <a:schemeClr val="lt1"/>
+          </a:fontRef>
+        </p:style>
+        <p:txBody>
+          <a:bodyPr rtlCol="0" anchor="ctr"/>
+          <a:lstStyle/>
+          <a:p>
+            <a:pPr algn="ctr"/>
+            <a:endParaRPr lang="LID4096"/>
+          </a:p>
+        </p:txBody>
+      </p:sp>
+      <p:sp>
+        <p:nvSpPr>
+          <p:cNvPr id="11" name="Freeform: Shape 10">
+            <a:extLst>
+              <a:ext uri="{FF2B5EF4-FFF2-40B4-BE49-F238E27FC236}">
+                <a16:creationId xmlns:a16="http://schemas.microsoft.com/office/drawing/2014/main" id="{28068516-C5F1-73B1-53D9-969A088D0B16}"/>
+              </a:ext>
+            </a:extLst>
+          </p:cNvPr>
+          <p:cNvSpPr/>
+          <p:nvPr/>
+        </p:nvSpPr>
+        <p:spPr>
+          <a:xfrm>
+            <a:off x="4084320" y="3931920"/>
+            <a:ext cx="3596640" cy="1653540"/>
+          </a:xfrm>
+          <a:custGeom>
+            <a:avLst/>
+            <a:gdLst>
+              <a:gd name="connsiteX0" fmla="*/ 0 w 3680460"/>
+              <a:gd name="connsiteY0" fmla="*/ 1653540 h 1653540"/>
+              <a:gd name="connsiteX1" fmla="*/ 1463040 w 3680460"/>
+              <a:gd name="connsiteY1" fmla="*/ 1592580 h 1653540"/>
+              <a:gd name="connsiteX2" fmla="*/ 1463040 w 3680460"/>
+              <a:gd name="connsiteY2" fmla="*/ 1417320 h 1653540"/>
+              <a:gd name="connsiteX3" fmla="*/ 182880 w 3680460"/>
+              <a:gd name="connsiteY3" fmla="*/ 1478280 h 1653540"/>
+              <a:gd name="connsiteX4" fmla="*/ 160020 w 3680460"/>
+              <a:gd name="connsiteY4" fmla="*/ 266700 h 1653540"/>
+              <a:gd name="connsiteX5" fmla="*/ 3474720 w 3680460"/>
+              <a:gd name="connsiteY5" fmla="*/ 160020 h 1653540"/>
+              <a:gd name="connsiteX6" fmla="*/ 3467100 w 3680460"/>
+              <a:gd name="connsiteY6" fmla="*/ 1424940 h 1653540"/>
+              <a:gd name="connsiteX7" fmla="*/ 2278380 w 3680460"/>
+              <a:gd name="connsiteY7" fmla="*/ 1432560 h 1653540"/>
+              <a:gd name="connsiteX8" fmla="*/ 2263140 w 3680460"/>
+              <a:gd name="connsiteY8" fmla="*/ 1584960 h 1653540"/>
+              <a:gd name="connsiteX9" fmla="*/ 3680460 w 3680460"/>
+              <a:gd name="connsiteY9" fmla="*/ 1546860 h 1653540"/>
+              <a:gd name="connsiteX10" fmla="*/ 3589020 w 3680460"/>
+              <a:gd name="connsiteY10" fmla="*/ 0 h 1653540"/>
+              <a:gd name="connsiteX11" fmla="*/ 0 w 3680460"/>
+              <a:gd name="connsiteY11" fmla="*/ 91440 h 1653540"/>
+              <a:gd name="connsiteX12" fmla="*/ 0 w 3680460"/>
+              <a:gd name="connsiteY12" fmla="*/ 1653540 h 1653540"/>
+              <a:gd name="connsiteX0" fmla="*/ 0 w 3649980"/>
+              <a:gd name="connsiteY0" fmla="*/ 1653540 h 1653540"/>
+              <a:gd name="connsiteX1" fmla="*/ 1463040 w 3649980"/>
+              <a:gd name="connsiteY1" fmla="*/ 1592580 h 1653540"/>
+              <a:gd name="connsiteX2" fmla="*/ 1463040 w 3649980"/>
+              <a:gd name="connsiteY2" fmla="*/ 1417320 h 1653540"/>
+              <a:gd name="connsiteX3" fmla="*/ 182880 w 3649980"/>
+              <a:gd name="connsiteY3" fmla="*/ 1478280 h 1653540"/>
+              <a:gd name="connsiteX4" fmla="*/ 160020 w 3649980"/>
+              <a:gd name="connsiteY4" fmla="*/ 266700 h 1653540"/>
+              <a:gd name="connsiteX5" fmla="*/ 3474720 w 3649980"/>
+              <a:gd name="connsiteY5" fmla="*/ 160020 h 1653540"/>
+              <a:gd name="connsiteX6" fmla="*/ 3467100 w 3649980"/>
+              <a:gd name="connsiteY6" fmla="*/ 1424940 h 1653540"/>
+              <a:gd name="connsiteX7" fmla="*/ 2278380 w 3649980"/>
+              <a:gd name="connsiteY7" fmla="*/ 1432560 h 1653540"/>
+              <a:gd name="connsiteX8" fmla="*/ 2263140 w 3649980"/>
+              <a:gd name="connsiteY8" fmla="*/ 1584960 h 1653540"/>
+              <a:gd name="connsiteX9" fmla="*/ 3649980 w 3649980"/>
+              <a:gd name="connsiteY9" fmla="*/ 1554480 h 1653540"/>
+              <a:gd name="connsiteX10" fmla="*/ 3589020 w 3649980"/>
+              <a:gd name="connsiteY10" fmla="*/ 0 h 1653540"/>
+              <a:gd name="connsiteX11" fmla="*/ 0 w 3649980"/>
+              <a:gd name="connsiteY11" fmla="*/ 91440 h 1653540"/>
+              <a:gd name="connsiteX12" fmla="*/ 0 w 3649980"/>
+              <a:gd name="connsiteY12" fmla="*/ 1653540 h 1653540"/>
+              <a:gd name="connsiteX0" fmla="*/ 0 w 3596640"/>
+              <a:gd name="connsiteY0" fmla="*/ 1653540 h 1653540"/>
+              <a:gd name="connsiteX1" fmla="*/ 1463040 w 3596640"/>
+              <a:gd name="connsiteY1" fmla="*/ 1592580 h 1653540"/>
+              <a:gd name="connsiteX2" fmla="*/ 1463040 w 3596640"/>
+              <a:gd name="connsiteY2" fmla="*/ 1417320 h 1653540"/>
+              <a:gd name="connsiteX3" fmla="*/ 182880 w 3596640"/>
+              <a:gd name="connsiteY3" fmla="*/ 1478280 h 1653540"/>
+              <a:gd name="connsiteX4" fmla="*/ 160020 w 3596640"/>
+              <a:gd name="connsiteY4" fmla="*/ 266700 h 1653540"/>
+              <a:gd name="connsiteX5" fmla="*/ 3474720 w 3596640"/>
+              <a:gd name="connsiteY5" fmla="*/ 160020 h 1653540"/>
+              <a:gd name="connsiteX6" fmla="*/ 3467100 w 3596640"/>
+              <a:gd name="connsiteY6" fmla="*/ 1424940 h 1653540"/>
+              <a:gd name="connsiteX7" fmla="*/ 2278380 w 3596640"/>
+              <a:gd name="connsiteY7" fmla="*/ 1432560 h 1653540"/>
+              <a:gd name="connsiteX8" fmla="*/ 2263140 w 3596640"/>
+              <a:gd name="connsiteY8" fmla="*/ 1584960 h 1653540"/>
+              <a:gd name="connsiteX9" fmla="*/ 3596640 w 3596640"/>
+              <a:gd name="connsiteY9" fmla="*/ 1546860 h 1653540"/>
+              <a:gd name="connsiteX10" fmla="*/ 3589020 w 3596640"/>
+              <a:gd name="connsiteY10" fmla="*/ 0 h 1653540"/>
+              <a:gd name="connsiteX11" fmla="*/ 0 w 3596640"/>
+              <a:gd name="connsiteY11" fmla="*/ 91440 h 1653540"/>
+              <a:gd name="connsiteX12" fmla="*/ 0 w 3596640"/>
+              <a:gd name="connsiteY12" fmla="*/ 1653540 h 1653540"/>
+            </a:gdLst>
+            <a:ahLst/>
+            <a:cxnLst>
+              <a:cxn ang="0">
+                <a:pos x="connsiteX0" y="connsiteY0"/>
+              </a:cxn>
+              <a:cxn ang="0">
+                <a:pos x="connsiteX1" y="connsiteY1"/>
+              </a:cxn>
+              <a:cxn ang="0">
+                <a:pos x="connsiteX2" y="connsiteY2"/>
+              </a:cxn>
+              <a:cxn ang="0">
+                <a:pos x="connsiteX3" y="connsiteY3"/>
+              </a:cxn>
+              <a:cxn ang="0">
+                <a:pos x="connsiteX4" y="connsiteY4"/>
+              </a:cxn>
+              <a:cxn ang="0">
+                <a:pos x="connsiteX5" y="connsiteY5"/>
+              </a:cxn>
+              <a:cxn ang="0">
+                <a:pos x="connsiteX6" y="connsiteY6"/>
+              </a:cxn>
+              <a:cxn ang="0">
+                <a:pos x="connsiteX7" y="connsiteY7"/>
+              </a:cxn>
+              <a:cxn ang="0">
+                <a:pos x="connsiteX8" y="connsiteY8"/>
+              </a:cxn>
+              <a:cxn ang="0">
+                <a:pos x="connsiteX9" y="connsiteY9"/>
+              </a:cxn>
+              <a:cxn ang="0">
+                <a:pos x="connsiteX10" y="connsiteY10"/>
+              </a:cxn>
+              <a:cxn ang="0">
+                <a:pos x="connsiteX11" y="connsiteY11"/>
+              </a:cxn>
+              <a:cxn ang="0">
+                <a:pos x="connsiteX12" y="connsiteY12"/>
+              </a:cxn>
+            </a:cxnLst>
+            <a:rect l="l" t="t" r="r" b="b"/>
+            <a:pathLst>
+              <a:path w="3596640" h="1653540">
+                <a:moveTo>
+                  <a:pt x="0" y="1653540"/>
+                </a:moveTo>
+                <a:lnTo>
+                  <a:pt x="1463040" y="1592580"/>
+                </a:lnTo>
+                <a:lnTo>
+                  <a:pt x="1463040" y="1417320"/>
+                </a:lnTo>
+                <a:lnTo>
+                  <a:pt x="182880" y="1478280"/>
+                </a:lnTo>
+                <a:lnTo>
+                  <a:pt x="160020" y="266700"/>
+                </a:lnTo>
+                <a:lnTo>
+                  <a:pt x="3474720" y="160020"/>
+                </a:lnTo>
+                <a:lnTo>
+                  <a:pt x="3467100" y="1424940"/>
+                </a:lnTo>
+                <a:lnTo>
+                  <a:pt x="2278380" y="1432560"/>
+                </a:lnTo>
+                <a:lnTo>
+                  <a:pt x="2263140" y="1584960"/>
+                </a:lnTo>
+                <a:lnTo>
+                  <a:pt x="3596640" y="1546860"/>
+                </a:lnTo>
+                <a:lnTo>
+                  <a:pt x="3589020" y="0"/>
+                </a:lnTo>
+                <a:lnTo>
+                  <a:pt x="0" y="91440"/>
+                </a:lnTo>
+                <a:lnTo>
+                  <a:pt x="0" y="1653540"/>
+                </a:lnTo>
+                <a:close/>
+              </a:path>
+            </a:pathLst>
+          </a:custGeom>
+          <a:solidFill>
+            <a:schemeClr val="bg1">
+              <a:lumMod val="65000"/>
+            </a:schemeClr>
+          </a:solidFill>
+        </p:spPr>
+        <p:style>
+          <a:lnRef idx="2">
+            <a:schemeClr val="accent1">
+              <a:shade val="15000"/>
+            </a:schemeClr>
+          </a:lnRef>
+          <a:fillRef idx="1">
+            <a:schemeClr val="accent1"/>
+          </a:fillRef>
+          <a:effectRef idx="0">
+            <a:schemeClr val="accent1"/>
+          </a:effectRef>
+          <a:fontRef idx="minor">
+            <a:schemeClr val="lt1"/>
+          </a:fontRef>
+        </p:style>
+        <p:txBody>
+          <a:bodyPr rtlCol="0" anchor="ctr"/>
+          <a:lstStyle/>
+          <a:p>
+            <a:pPr algn="ctr"/>
+            <a:endParaRPr lang="LID4096"/>
+          </a:p>
+        </p:txBody>
+      </p:sp>
+      <p:sp>
+        <p:nvSpPr>
+          <p:cNvPr id="12" name="Freeform: Shape 11">
+            <a:extLst>
+              <a:ext uri="{FF2B5EF4-FFF2-40B4-BE49-F238E27FC236}">
+                <a16:creationId xmlns:a16="http://schemas.microsoft.com/office/drawing/2014/main" id="{F97FBA48-F957-12F8-A329-E5F82A65B7FC}"/>
+              </a:ext>
+            </a:extLst>
+          </p:cNvPr>
+          <p:cNvSpPr/>
+          <p:nvPr/>
+        </p:nvSpPr>
+        <p:spPr>
+          <a:xfrm>
+            <a:off x="4260056" y="4100513"/>
+            <a:ext cx="3305175" cy="1312068"/>
+          </a:xfrm>
+          <a:custGeom>
+            <a:avLst/>
+            <a:gdLst>
+              <a:gd name="connsiteX0" fmla="*/ 2943225 w 3305175"/>
+              <a:gd name="connsiteY0" fmla="*/ 4762 h 1312068"/>
+              <a:gd name="connsiteX1" fmla="*/ 2964657 w 3305175"/>
+              <a:gd name="connsiteY1" fmla="*/ 1040606 h 1312068"/>
+              <a:gd name="connsiteX2" fmla="*/ 0 w 3305175"/>
+              <a:gd name="connsiteY2" fmla="*/ 1133475 h 1312068"/>
+              <a:gd name="connsiteX3" fmla="*/ 7144 w 3305175"/>
+              <a:gd name="connsiteY3" fmla="*/ 1312068 h 1312068"/>
+              <a:gd name="connsiteX4" fmla="*/ 1290638 w 3305175"/>
+              <a:gd name="connsiteY4" fmla="*/ 1254918 h 1312068"/>
+              <a:gd name="connsiteX5" fmla="*/ 1362075 w 3305175"/>
+              <a:gd name="connsiteY5" fmla="*/ 1202531 h 1312068"/>
+              <a:gd name="connsiteX6" fmla="*/ 1431132 w 3305175"/>
+              <a:gd name="connsiteY6" fmla="*/ 1185862 h 1312068"/>
+              <a:gd name="connsiteX7" fmla="*/ 1735932 w 3305175"/>
+              <a:gd name="connsiteY7" fmla="*/ 1171575 h 1312068"/>
+              <a:gd name="connsiteX8" fmla="*/ 1902619 w 3305175"/>
+              <a:gd name="connsiteY8" fmla="*/ 1178718 h 1312068"/>
+              <a:gd name="connsiteX9" fmla="*/ 2100263 w 3305175"/>
+              <a:gd name="connsiteY9" fmla="*/ 1264443 h 1312068"/>
+              <a:gd name="connsiteX10" fmla="*/ 3300413 w 3305175"/>
+              <a:gd name="connsiteY10" fmla="*/ 1257300 h 1312068"/>
+              <a:gd name="connsiteX11" fmla="*/ 3305175 w 3305175"/>
+              <a:gd name="connsiteY11" fmla="*/ 0 h 1312068"/>
+              <a:gd name="connsiteX12" fmla="*/ 2943225 w 3305175"/>
+              <a:gd name="connsiteY12" fmla="*/ 4762 h 1312068"/>
+            </a:gdLst>
+            <a:ahLst/>
+            <a:cxnLst>
+              <a:cxn ang="0">
+                <a:pos x="connsiteX0" y="connsiteY0"/>
+              </a:cxn>
+              <a:cxn ang="0">
+                <a:pos x="connsiteX1" y="connsiteY1"/>
+              </a:cxn>
+              <a:cxn ang="0">
+                <a:pos x="connsiteX2" y="connsiteY2"/>
+              </a:cxn>
+              <a:cxn ang="0">
+                <a:pos x="connsiteX3" y="connsiteY3"/>
+              </a:cxn>
+              <a:cxn ang="0">
+                <a:pos x="connsiteX4" y="connsiteY4"/>
+              </a:cxn>
+              <a:cxn ang="0">
+                <a:pos x="connsiteX5" y="connsiteY5"/>
+              </a:cxn>
+              <a:cxn ang="0">
+                <a:pos x="connsiteX6" y="connsiteY6"/>
+              </a:cxn>
+              <a:cxn ang="0">
+                <a:pos x="connsiteX7" y="connsiteY7"/>
+              </a:cxn>
+              <a:cxn ang="0">
+                <a:pos x="connsiteX8" y="connsiteY8"/>
+              </a:cxn>
+              <a:cxn ang="0">
+                <a:pos x="connsiteX9" y="connsiteY9"/>
+              </a:cxn>
+              <a:cxn ang="0">
+                <a:pos x="connsiteX10" y="connsiteY10"/>
+              </a:cxn>
+              <a:cxn ang="0">
+                <a:pos x="connsiteX11" y="connsiteY11"/>
+              </a:cxn>
+              <a:cxn ang="0">
+                <a:pos x="connsiteX12" y="connsiteY12"/>
+              </a:cxn>
+            </a:cxnLst>
+            <a:rect l="l" t="t" r="r" b="b"/>
+            <a:pathLst>
+              <a:path w="3305175" h="1312068">
+                <a:moveTo>
+                  <a:pt x="2943225" y="4762"/>
+                </a:moveTo>
+                <a:lnTo>
+                  <a:pt x="2964657" y="1040606"/>
+                </a:lnTo>
+                <a:lnTo>
+                  <a:pt x="0" y="1133475"/>
+                </a:lnTo>
+                <a:lnTo>
+                  <a:pt x="7144" y="1312068"/>
+                </a:lnTo>
+                <a:lnTo>
+                  <a:pt x="1290638" y="1254918"/>
+                </a:lnTo>
+                <a:lnTo>
+                  <a:pt x="1362075" y="1202531"/>
+                </a:lnTo>
+                <a:lnTo>
+                  <a:pt x="1431132" y="1185862"/>
+                </a:lnTo>
+                <a:lnTo>
+                  <a:pt x="1735932" y="1171575"/>
+                </a:lnTo>
+                <a:lnTo>
+                  <a:pt x="1902619" y="1178718"/>
+                </a:lnTo>
+                <a:lnTo>
+                  <a:pt x="2100263" y="1264443"/>
+                </a:lnTo>
+                <a:lnTo>
+                  <a:pt x="3300413" y="1257300"/>
+                </a:lnTo>
+                <a:cubicBezTo>
+                  <a:pt x="3302000" y="838200"/>
+                  <a:pt x="3303588" y="419100"/>
+                  <a:pt x="3305175" y="0"/>
+                </a:cubicBezTo>
+                <a:lnTo>
+                  <a:pt x="2943225" y="4762"/>
+                </a:lnTo>
+                <a:close/>
+              </a:path>
+            </a:pathLst>
+          </a:custGeom>
+          <a:solidFill>
+            <a:schemeClr val="tx1">
+              <a:lumMod val="65000"/>
+              <a:lumOff val="35000"/>
+            </a:schemeClr>
+          </a:solidFill>
+        </p:spPr>
+        <p:style>
+          <a:lnRef idx="2">
+            <a:schemeClr val="accent1">
+              <a:shade val="15000"/>
+            </a:schemeClr>
+          </a:lnRef>
+          <a:fillRef idx="1">
+            <a:schemeClr val="accent1"/>
+          </a:fillRef>
+          <a:effectRef idx="0">
+            <a:schemeClr val="accent1"/>
+          </a:effectRef>
+          <a:fontRef idx="minor">
+            <a:schemeClr val="lt1"/>
+          </a:fontRef>
+        </p:style>
+        <p:txBody>
+          <a:bodyPr rtlCol="0" anchor="ctr"/>
+          <a:lstStyle/>
+          <a:p>
+            <a:pPr algn="ctr"/>
+            <a:endParaRPr lang="LID4096"/>
+          </a:p>
+        </p:txBody>
+      </p:sp>
+      <p:sp>
+        <p:nvSpPr>
+          <p:cNvPr id="18" name="Freeform: Shape 17">
+            <a:extLst>
+              <a:ext uri="{FF2B5EF4-FFF2-40B4-BE49-F238E27FC236}">
+                <a16:creationId xmlns:a16="http://schemas.microsoft.com/office/drawing/2014/main" id="{9FDF8B3F-30CF-B907-5853-E3C796C2DF74}"/>
+              </a:ext>
+            </a:extLst>
+          </p:cNvPr>
+          <p:cNvSpPr/>
+          <p:nvPr/>
+        </p:nvSpPr>
+        <p:spPr>
+          <a:xfrm>
+            <a:off x="5545931" y="5269706"/>
+            <a:ext cx="819150" cy="247650"/>
+          </a:xfrm>
+          <a:custGeom>
+            <a:avLst/>
+            <a:gdLst>
+              <a:gd name="connsiteX0" fmla="*/ 802482 w 819150"/>
+              <a:gd name="connsiteY0" fmla="*/ 242888 h 247650"/>
+              <a:gd name="connsiteX1" fmla="*/ 588169 w 819150"/>
+              <a:gd name="connsiteY1" fmla="*/ 116682 h 247650"/>
+              <a:gd name="connsiteX2" fmla="*/ 452438 w 819150"/>
+              <a:gd name="connsiteY2" fmla="*/ 95250 h 247650"/>
+              <a:gd name="connsiteX3" fmla="*/ 192882 w 819150"/>
+              <a:gd name="connsiteY3" fmla="*/ 92869 h 247650"/>
+              <a:gd name="connsiteX4" fmla="*/ 76200 w 819150"/>
+              <a:gd name="connsiteY4" fmla="*/ 140494 h 247650"/>
+              <a:gd name="connsiteX5" fmla="*/ 11907 w 819150"/>
+              <a:gd name="connsiteY5" fmla="*/ 247650 h 247650"/>
+              <a:gd name="connsiteX6" fmla="*/ 0 w 819150"/>
+              <a:gd name="connsiteY6" fmla="*/ 85725 h 247650"/>
+              <a:gd name="connsiteX7" fmla="*/ 76200 w 819150"/>
+              <a:gd name="connsiteY7" fmla="*/ 33338 h 247650"/>
+              <a:gd name="connsiteX8" fmla="*/ 173832 w 819150"/>
+              <a:gd name="connsiteY8" fmla="*/ 14288 h 247650"/>
+              <a:gd name="connsiteX9" fmla="*/ 469107 w 819150"/>
+              <a:gd name="connsiteY9" fmla="*/ 0 h 247650"/>
+              <a:gd name="connsiteX10" fmla="*/ 616744 w 819150"/>
+              <a:gd name="connsiteY10" fmla="*/ 14288 h 247650"/>
+              <a:gd name="connsiteX11" fmla="*/ 819150 w 819150"/>
+              <a:gd name="connsiteY11" fmla="*/ 95250 h 247650"/>
+              <a:gd name="connsiteX12" fmla="*/ 802482 w 819150"/>
+              <a:gd name="connsiteY12" fmla="*/ 242888 h 247650"/>
+            </a:gdLst>
+            <a:ahLst/>
+            <a:cxnLst>
+              <a:cxn ang="0">
+                <a:pos x="connsiteX0" y="connsiteY0"/>
+              </a:cxn>
+              <a:cxn ang="0">
+                <a:pos x="connsiteX1" y="connsiteY1"/>
+              </a:cxn>
+              <a:cxn ang="0">
+                <a:pos x="connsiteX2" y="connsiteY2"/>
+              </a:cxn>
+              <a:cxn ang="0">
+                <a:pos x="connsiteX3" y="connsiteY3"/>
+              </a:cxn>
+              <a:cxn ang="0">
+                <a:pos x="connsiteX4" y="connsiteY4"/>
+              </a:cxn>
+              <a:cxn ang="0">
+                <a:pos x="connsiteX5" y="connsiteY5"/>
+              </a:cxn>
+              <a:cxn ang="0">
+                <a:pos x="connsiteX6" y="connsiteY6"/>
+              </a:cxn>
+              <a:cxn ang="0">
+                <a:pos x="connsiteX7" y="connsiteY7"/>
+              </a:cxn>
+              <a:cxn ang="0">
+                <a:pos x="connsiteX8" y="connsiteY8"/>
+              </a:cxn>
+              <a:cxn ang="0">
+                <a:pos x="connsiteX9" y="connsiteY9"/>
+              </a:cxn>
+              <a:cxn ang="0">
+                <a:pos x="connsiteX10" y="connsiteY10"/>
+              </a:cxn>
+              <a:cxn ang="0">
+                <a:pos x="connsiteX11" y="connsiteY11"/>
+              </a:cxn>
+              <a:cxn ang="0">
+                <a:pos x="connsiteX12" y="connsiteY12"/>
+              </a:cxn>
+            </a:cxnLst>
+            <a:rect l="l" t="t" r="r" b="b"/>
+            <a:pathLst>
+              <a:path w="819150" h="247650">
+                <a:moveTo>
+                  <a:pt x="802482" y="242888"/>
+                </a:moveTo>
+                <a:lnTo>
+                  <a:pt x="588169" y="116682"/>
+                </a:lnTo>
+                <a:lnTo>
+                  <a:pt x="452438" y="95250"/>
+                </a:lnTo>
+                <a:lnTo>
+                  <a:pt x="192882" y="92869"/>
+                </a:lnTo>
+                <a:lnTo>
+                  <a:pt x="76200" y="140494"/>
+                </a:lnTo>
+                <a:lnTo>
+                  <a:pt x="11907" y="247650"/>
+                </a:lnTo>
+                <a:lnTo>
+                  <a:pt x="0" y="85725"/>
+                </a:lnTo>
+                <a:lnTo>
+                  <a:pt x="76200" y="33338"/>
+                </a:lnTo>
+                <a:lnTo>
+                  <a:pt x="173832" y="14288"/>
+                </a:lnTo>
+                <a:lnTo>
+                  <a:pt x="469107" y="0"/>
+                </a:lnTo>
+                <a:lnTo>
+                  <a:pt x="616744" y="14288"/>
+                </a:lnTo>
+                <a:lnTo>
+                  <a:pt x="819150" y="95250"/>
+                </a:lnTo>
+                <a:lnTo>
+                  <a:pt x="802482" y="242888"/>
+                </a:lnTo>
+                <a:close/>
+              </a:path>
+            </a:pathLst>
+          </a:custGeom>
+          <a:solidFill>
+            <a:schemeClr val="tx1">
+              <a:lumMod val="50000"/>
+              <a:lumOff val="50000"/>
+            </a:schemeClr>
+          </a:solidFill>
+        </p:spPr>
+        <p:style>
+          <a:lnRef idx="2">
+            <a:schemeClr val="accent1">
+              <a:shade val="15000"/>
+            </a:schemeClr>
+          </a:lnRef>
+          <a:fillRef idx="1">
+            <a:schemeClr val="accent1"/>
+          </a:fillRef>
+          <a:effectRef idx="0">
+            <a:schemeClr val="accent1"/>
+          </a:effectRef>
+          <a:fontRef idx="minor">
+            <a:schemeClr val="lt1"/>
+          </a:fontRef>
+        </p:style>
+        <p:txBody>
+          <a:bodyPr rtlCol="0" anchor="ctr"/>
+          <a:lstStyle/>
+          <a:p>
+            <a:pPr algn="ctr"/>
+            <a:endParaRPr lang="LID4096"/>
+          </a:p>
+        </p:txBody>
+      </p:sp>
+      <p:grpSp>
+        <p:nvGrpSpPr>
+          <p:cNvPr id="34" name="Group 33">
+            <a:extLst>
+              <a:ext uri="{FF2B5EF4-FFF2-40B4-BE49-F238E27FC236}">
+                <a16:creationId xmlns:a16="http://schemas.microsoft.com/office/drawing/2014/main" id="{1D65493E-2F16-9E98-9FF2-AAA7B728F33E}"/>
+              </a:ext>
+            </a:extLst>
+          </p:cNvPr>
+          <p:cNvGrpSpPr/>
+          <p:nvPr/>
+        </p:nvGrpSpPr>
+        <p:grpSpPr>
+          <a:xfrm>
+            <a:off x="6669881" y="4393406"/>
+            <a:ext cx="209550" cy="157163"/>
+            <a:chOff x="6669881" y="4393406"/>
+            <a:chExt cx="209550" cy="157163"/>
+          </a:xfrm>
+        </p:grpSpPr>
+        <p:sp>
+          <p:nvSpPr>
+            <p:cNvPr id="19" name="Rectangle 18">
+              <a:extLst>
+                <a:ext uri="{FF2B5EF4-FFF2-40B4-BE49-F238E27FC236}">
+                  <a16:creationId xmlns:a16="http://schemas.microsoft.com/office/drawing/2014/main" id="{D6CCC803-01B9-475F-36A7-4B2FA2B35678}"/>
+                </a:ext>
+              </a:extLst>
+            </p:cNvPr>
+            <p:cNvSpPr/>
+            <p:nvPr/>
+          </p:nvSpPr>
+          <p:spPr>
+            <a:xfrm>
+              <a:off x="6788944" y="4455319"/>
+              <a:ext cx="90487" cy="95250"/>
+            </a:xfrm>
+            <a:prstGeom prst="rect">
+              <a:avLst/>
+            </a:prstGeom>
+            <a:solidFill>
+              <a:srgbClr val="FFC000"/>
+            </a:solidFill>
+          </p:spPr>
+          <p:style>
+            <a:lnRef idx="2">
+              <a:schemeClr val="accent1">
+                <a:shade val="15000"/>
+              </a:schemeClr>
+            </a:lnRef>
+            <a:fillRef idx="1">
+              <a:schemeClr val="accent1"/>
+            </a:fillRef>
+            <a:effectRef idx="0">
+              <a:schemeClr val="accent1"/>
+            </a:effectRef>
+            <a:fontRef idx="minor">
+              <a:schemeClr val="lt1"/>
+            </a:fontRef>
+          </p:style>
+          <p:txBody>
+            <a:bodyPr rtlCol="0" anchor="ctr"/>
+            <a:lstStyle/>
+            <a:p>
+              <a:pPr algn="ctr"/>
+              <a:endParaRPr lang="LID4096"/>
+            </a:p>
+          </p:txBody>
+        </p:sp>
+        <p:sp>
+          <p:nvSpPr>
+            <p:cNvPr id="32" name="Freeform: Shape 31">
+              <a:extLst>
+                <a:ext uri="{FF2B5EF4-FFF2-40B4-BE49-F238E27FC236}">
+                  <a16:creationId xmlns:a16="http://schemas.microsoft.com/office/drawing/2014/main" id="{2292FE8F-C860-DE72-286D-19C0AE17330B}"/>
+                </a:ext>
+              </a:extLst>
+            </p:cNvPr>
+            <p:cNvSpPr/>
+            <p:nvPr/>
+          </p:nvSpPr>
+          <p:spPr>
+            <a:xfrm>
+              <a:off x="6669881" y="4393406"/>
+              <a:ext cx="185737" cy="152400"/>
+            </a:xfrm>
+            <a:custGeom>
+              <a:avLst/>
+              <a:gdLst>
+                <a:gd name="connsiteX0" fmla="*/ 195263 w 195263"/>
+                <a:gd name="connsiteY0" fmla="*/ 57150 h 152400"/>
+                <a:gd name="connsiteX1" fmla="*/ 76200 w 195263"/>
+                <a:gd name="connsiteY1" fmla="*/ 0 h 152400"/>
+                <a:gd name="connsiteX2" fmla="*/ 0 w 195263"/>
+                <a:gd name="connsiteY2" fmla="*/ 7144 h 152400"/>
+                <a:gd name="connsiteX3" fmla="*/ 16669 w 195263"/>
+                <a:gd name="connsiteY3" fmla="*/ 85725 h 152400"/>
+                <a:gd name="connsiteX4" fmla="*/ 121444 w 195263"/>
+                <a:gd name="connsiteY4" fmla="*/ 152400 h 152400"/>
+                <a:gd name="connsiteX5" fmla="*/ 121444 w 195263"/>
+                <a:gd name="connsiteY5" fmla="*/ 57150 h 152400"/>
+                <a:gd name="connsiteX6" fmla="*/ 195263 w 195263"/>
+                <a:gd name="connsiteY6" fmla="*/ 57150 h 152400"/>
+                <a:gd name="connsiteX0" fmla="*/ 171450 w 171450"/>
+                <a:gd name="connsiteY0" fmla="*/ 59531 h 152400"/>
+                <a:gd name="connsiteX1" fmla="*/ 76200 w 171450"/>
+                <a:gd name="connsiteY1" fmla="*/ 0 h 152400"/>
+                <a:gd name="connsiteX2" fmla="*/ 0 w 171450"/>
+                <a:gd name="connsiteY2" fmla="*/ 7144 h 152400"/>
+                <a:gd name="connsiteX3" fmla="*/ 16669 w 171450"/>
+                <a:gd name="connsiteY3" fmla="*/ 85725 h 152400"/>
+                <a:gd name="connsiteX4" fmla="*/ 121444 w 171450"/>
+                <a:gd name="connsiteY4" fmla="*/ 152400 h 152400"/>
+                <a:gd name="connsiteX5" fmla="*/ 121444 w 171450"/>
+                <a:gd name="connsiteY5" fmla="*/ 57150 h 152400"/>
+                <a:gd name="connsiteX6" fmla="*/ 171450 w 171450"/>
+                <a:gd name="connsiteY6" fmla="*/ 59531 h 152400"/>
+                <a:gd name="connsiteX0" fmla="*/ 180975 w 180975"/>
+                <a:gd name="connsiteY0" fmla="*/ 61913 h 152400"/>
+                <a:gd name="connsiteX1" fmla="*/ 76200 w 180975"/>
+                <a:gd name="connsiteY1" fmla="*/ 0 h 152400"/>
+                <a:gd name="connsiteX2" fmla="*/ 0 w 180975"/>
+                <a:gd name="connsiteY2" fmla="*/ 7144 h 152400"/>
+                <a:gd name="connsiteX3" fmla="*/ 16669 w 180975"/>
+                <a:gd name="connsiteY3" fmla="*/ 85725 h 152400"/>
+                <a:gd name="connsiteX4" fmla="*/ 121444 w 180975"/>
+                <a:gd name="connsiteY4" fmla="*/ 152400 h 152400"/>
+                <a:gd name="connsiteX5" fmla="*/ 121444 w 180975"/>
+                <a:gd name="connsiteY5" fmla="*/ 57150 h 152400"/>
+                <a:gd name="connsiteX6" fmla="*/ 180975 w 180975"/>
+                <a:gd name="connsiteY6" fmla="*/ 61913 h 152400"/>
+                <a:gd name="connsiteX0" fmla="*/ 185737 w 185737"/>
+                <a:gd name="connsiteY0" fmla="*/ 57151 h 152400"/>
+                <a:gd name="connsiteX1" fmla="*/ 76200 w 185737"/>
+                <a:gd name="connsiteY1" fmla="*/ 0 h 152400"/>
+                <a:gd name="connsiteX2" fmla="*/ 0 w 185737"/>
+                <a:gd name="connsiteY2" fmla="*/ 7144 h 152400"/>
+                <a:gd name="connsiteX3" fmla="*/ 16669 w 185737"/>
+                <a:gd name="connsiteY3" fmla="*/ 85725 h 152400"/>
+                <a:gd name="connsiteX4" fmla="*/ 121444 w 185737"/>
+                <a:gd name="connsiteY4" fmla="*/ 152400 h 152400"/>
+                <a:gd name="connsiteX5" fmla="*/ 121444 w 185737"/>
+                <a:gd name="connsiteY5" fmla="*/ 57150 h 152400"/>
+                <a:gd name="connsiteX6" fmla="*/ 185737 w 185737"/>
+                <a:gd name="connsiteY6" fmla="*/ 57151 h 152400"/>
+              </a:gdLst>
+              <a:ahLst/>
+              <a:cxnLst>
+                <a:cxn ang="0">
+                  <a:pos x="connsiteX0" y="connsiteY0"/>
+                </a:cxn>
+                <a:cxn ang="0">
+                  <a:pos x="connsiteX1" y="connsiteY1"/>
+                </a:cxn>
+                <a:cxn ang="0">
+                  <a:pos x="connsiteX2" y="connsiteY2"/>
+                </a:cxn>
+                <a:cxn ang="0">
+                  <a:pos x="connsiteX3" y="connsiteY3"/>
+                </a:cxn>
+                <a:cxn ang="0">
+                  <a:pos x="connsiteX4" y="connsiteY4"/>
+                </a:cxn>
+                <a:cxn ang="0">
+                  <a:pos x="connsiteX5" y="connsiteY5"/>
+                </a:cxn>
+                <a:cxn ang="0">
+                  <a:pos x="connsiteX6" y="connsiteY6"/>
+                </a:cxn>
+              </a:cxnLst>
+              <a:rect l="l" t="t" r="r" b="b"/>
+              <a:pathLst>
+                <a:path w="185737" h="152400">
+                  <a:moveTo>
+                    <a:pt x="185737" y="57151"/>
+                  </a:moveTo>
+                  <a:lnTo>
+                    <a:pt x="76200" y="0"/>
+                  </a:lnTo>
+                  <a:lnTo>
+                    <a:pt x="0" y="7144"/>
+                  </a:lnTo>
+                  <a:lnTo>
+                    <a:pt x="16669" y="85725"/>
+                  </a:lnTo>
+                  <a:lnTo>
+                    <a:pt x="121444" y="152400"/>
+                  </a:lnTo>
+                  <a:lnTo>
+                    <a:pt x="121444" y="57150"/>
+                  </a:lnTo>
+                  <a:lnTo>
+                    <a:pt x="185737" y="57151"/>
+                  </a:lnTo>
+                  <a:close/>
+                </a:path>
+              </a:pathLst>
+            </a:custGeom>
+            <a:solidFill>
+              <a:schemeClr val="accent2">
+                <a:lumMod val="75000"/>
+              </a:schemeClr>
+            </a:solidFill>
+          </p:spPr>
+          <p:style>
+            <a:lnRef idx="2">
+              <a:schemeClr val="accent1">
+                <a:shade val="15000"/>
+              </a:schemeClr>
+            </a:lnRef>
+            <a:fillRef idx="1">
+              <a:schemeClr val="accent1"/>
+            </a:fillRef>
+            <a:effectRef idx="0">
+              <a:schemeClr val="accent1"/>
+            </a:effectRef>
+            <a:fontRef idx="minor">
+              <a:schemeClr val="lt1"/>
+            </a:fontRef>
+          </p:style>
+          <p:txBody>
+            <a:bodyPr rtlCol="0" anchor="ctr"/>
+            <a:lstStyle/>
+            <a:p>
+              <a:pPr algn="ctr"/>
+              <a:endParaRPr lang="LID4096"/>
+            </a:p>
+          </p:txBody>
+        </p:sp>
+      </p:grpSp>
+      <p:grpSp>
+        <p:nvGrpSpPr>
+          <p:cNvPr id="62" name="Group 61">
+            <a:extLst>
+              <a:ext uri="{FF2B5EF4-FFF2-40B4-BE49-F238E27FC236}">
+                <a16:creationId xmlns:a16="http://schemas.microsoft.com/office/drawing/2014/main" id="{BF26F472-87DE-9D70-743D-122581876E5F}"/>
+              </a:ext>
+            </a:extLst>
+          </p:cNvPr>
+          <p:cNvGrpSpPr/>
+          <p:nvPr/>
+        </p:nvGrpSpPr>
+        <p:grpSpPr>
+          <a:xfrm>
+            <a:off x="6224587" y="4424362"/>
+            <a:ext cx="209550" cy="157163"/>
+            <a:chOff x="6669881" y="4393406"/>
+            <a:chExt cx="209550" cy="157163"/>
+          </a:xfrm>
+        </p:grpSpPr>
+        <p:sp>
+          <p:nvSpPr>
+            <p:cNvPr id="63" name="Rectangle 62">
+              <a:extLst>
+                <a:ext uri="{FF2B5EF4-FFF2-40B4-BE49-F238E27FC236}">
+                  <a16:creationId xmlns:a16="http://schemas.microsoft.com/office/drawing/2014/main" id="{C7C74774-086A-B2F8-FC13-1099F51A9E82}"/>
+                </a:ext>
+              </a:extLst>
+            </p:cNvPr>
+            <p:cNvSpPr/>
+            <p:nvPr/>
+          </p:nvSpPr>
+          <p:spPr>
+            <a:xfrm>
+              <a:off x="6788944" y="4455319"/>
+              <a:ext cx="90487" cy="95250"/>
+            </a:xfrm>
+            <a:prstGeom prst="rect">
+              <a:avLst/>
+            </a:prstGeom>
+            <a:solidFill>
+              <a:srgbClr val="FFC000"/>
+            </a:solidFill>
+          </p:spPr>
+          <p:style>
+            <a:lnRef idx="2">
+              <a:schemeClr val="accent1">
+                <a:shade val="15000"/>
+              </a:schemeClr>
+            </a:lnRef>
+            <a:fillRef idx="1">
+              <a:schemeClr val="accent1"/>
+            </a:fillRef>
+            <a:effectRef idx="0">
+              <a:schemeClr val="accent1"/>
+            </a:effectRef>
+            <a:fontRef idx="minor">
+              <a:schemeClr val="lt1"/>
+            </a:fontRef>
+          </p:style>
+          <p:txBody>
+            <a:bodyPr rtlCol="0" anchor="ctr"/>
+            <a:lstStyle/>
+            <a:p>
+              <a:pPr algn="ctr"/>
+              <a:endParaRPr lang="LID4096"/>
+            </a:p>
+          </p:txBody>
+        </p:sp>
+        <p:sp>
+          <p:nvSpPr>
+            <p:cNvPr id="64" name="Freeform: Shape 63">
+              <a:extLst>
+                <a:ext uri="{FF2B5EF4-FFF2-40B4-BE49-F238E27FC236}">
+                  <a16:creationId xmlns:a16="http://schemas.microsoft.com/office/drawing/2014/main" id="{1AF20588-D5D9-B723-475D-93E6352EE91B}"/>
+                </a:ext>
+              </a:extLst>
+            </p:cNvPr>
+            <p:cNvSpPr/>
+            <p:nvPr/>
+          </p:nvSpPr>
+          <p:spPr>
+            <a:xfrm>
+              <a:off x="6669881" y="4393406"/>
+              <a:ext cx="185737" cy="152400"/>
+            </a:xfrm>
+            <a:custGeom>
+              <a:avLst/>
+              <a:gdLst>
+                <a:gd name="connsiteX0" fmla="*/ 195263 w 195263"/>
+                <a:gd name="connsiteY0" fmla="*/ 57150 h 152400"/>
+                <a:gd name="connsiteX1" fmla="*/ 76200 w 195263"/>
+                <a:gd name="connsiteY1" fmla="*/ 0 h 152400"/>
+                <a:gd name="connsiteX2" fmla="*/ 0 w 195263"/>
+                <a:gd name="connsiteY2" fmla="*/ 7144 h 152400"/>
+                <a:gd name="connsiteX3" fmla="*/ 16669 w 195263"/>
+                <a:gd name="connsiteY3" fmla="*/ 85725 h 152400"/>
+                <a:gd name="connsiteX4" fmla="*/ 121444 w 195263"/>
+                <a:gd name="connsiteY4" fmla="*/ 152400 h 152400"/>
+                <a:gd name="connsiteX5" fmla="*/ 121444 w 195263"/>
+                <a:gd name="connsiteY5" fmla="*/ 57150 h 152400"/>
+                <a:gd name="connsiteX6" fmla="*/ 195263 w 195263"/>
+                <a:gd name="connsiteY6" fmla="*/ 57150 h 152400"/>
+                <a:gd name="connsiteX0" fmla="*/ 171450 w 171450"/>
+                <a:gd name="connsiteY0" fmla="*/ 59531 h 152400"/>
+                <a:gd name="connsiteX1" fmla="*/ 76200 w 171450"/>
+                <a:gd name="connsiteY1" fmla="*/ 0 h 152400"/>
+                <a:gd name="connsiteX2" fmla="*/ 0 w 171450"/>
+                <a:gd name="connsiteY2" fmla="*/ 7144 h 152400"/>
+                <a:gd name="connsiteX3" fmla="*/ 16669 w 171450"/>
+                <a:gd name="connsiteY3" fmla="*/ 85725 h 152400"/>
+                <a:gd name="connsiteX4" fmla="*/ 121444 w 171450"/>
+                <a:gd name="connsiteY4" fmla="*/ 152400 h 152400"/>
+                <a:gd name="connsiteX5" fmla="*/ 121444 w 171450"/>
+                <a:gd name="connsiteY5" fmla="*/ 57150 h 152400"/>
+                <a:gd name="connsiteX6" fmla="*/ 171450 w 171450"/>
+                <a:gd name="connsiteY6" fmla="*/ 59531 h 152400"/>
+                <a:gd name="connsiteX0" fmla="*/ 180975 w 180975"/>
+                <a:gd name="connsiteY0" fmla="*/ 61913 h 152400"/>
+                <a:gd name="connsiteX1" fmla="*/ 76200 w 180975"/>
+                <a:gd name="connsiteY1" fmla="*/ 0 h 152400"/>
+                <a:gd name="connsiteX2" fmla="*/ 0 w 180975"/>
+                <a:gd name="connsiteY2" fmla="*/ 7144 h 152400"/>
+                <a:gd name="connsiteX3" fmla="*/ 16669 w 180975"/>
+                <a:gd name="connsiteY3" fmla="*/ 85725 h 152400"/>
+                <a:gd name="connsiteX4" fmla="*/ 121444 w 180975"/>
+                <a:gd name="connsiteY4" fmla="*/ 152400 h 152400"/>
+                <a:gd name="connsiteX5" fmla="*/ 121444 w 180975"/>
+                <a:gd name="connsiteY5" fmla="*/ 57150 h 152400"/>
+                <a:gd name="connsiteX6" fmla="*/ 180975 w 180975"/>
+                <a:gd name="connsiteY6" fmla="*/ 61913 h 152400"/>
+                <a:gd name="connsiteX0" fmla="*/ 185737 w 185737"/>
+                <a:gd name="connsiteY0" fmla="*/ 57151 h 152400"/>
+                <a:gd name="connsiteX1" fmla="*/ 76200 w 185737"/>
+                <a:gd name="connsiteY1" fmla="*/ 0 h 152400"/>
+                <a:gd name="connsiteX2" fmla="*/ 0 w 185737"/>
+                <a:gd name="connsiteY2" fmla="*/ 7144 h 152400"/>
+                <a:gd name="connsiteX3" fmla="*/ 16669 w 185737"/>
+                <a:gd name="connsiteY3" fmla="*/ 85725 h 152400"/>
+                <a:gd name="connsiteX4" fmla="*/ 121444 w 185737"/>
+                <a:gd name="connsiteY4" fmla="*/ 152400 h 152400"/>
+                <a:gd name="connsiteX5" fmla="*/ 121444 w 185737"/>
+                <a:gd name="connsiteY5" fmla="*/ 57150 h 152400"/>
+                <a:gd name="connsiteX6" fmla="*/ 185737 w 185737"/>
+                <a:gd name="connsiteY6" fmla="*/ 57151 h 152400"/>
+              </a:gdLst>
+              <a:ahLst/>
+              <a:cxnLst>
+                <a:cxn ang="0">
+                  <a:pos x="connsiteX0" y="connsiteY0"/>
+                </a:cxn>
+                <a:cxn ang="0">
+                  <a:pos x="connsiteX1" y="connsiteY1"/>
+                </a:cxn>
+                <a:cxn ang="0">
+                  <a:pos x="connsiteX2" y="connsiteY2"/>
+                </a:cxn>
+                <a:cxn ang="0">
+                  <a:pos x="connsiteX3" y="connsiteY3"/>
+                </a:cxn>
+                <a:cxn ang="0">
+                  <a:pos x="connsiteX4" y="connsiteY4"/>
+                </a:cxn>
+                <a:cxn ang="0">
+                  <a:pos x="connsiteX5" y="connsiteY5"/>
+                </a:cxn>
+                <a:cxn ang="0">
+                  <a:pos x="connsiteX6" y="connsiteY6"/>
+                </a:cxn>
+              </a:cxnLst>
+              <a:rect l="l" t="t" r="r" b="b"/>
+              <a:pathLst>
+                <a:path w="185737" h="152400">
+                  <a:moveTo>
+                    <a:pt x="185737" y="57151"/>
+                  </a:moveTo>
+                  <a:lnTo>
+                    <a:pt x="76200" y="0"/>
+                  </a:lnTo>
+                  <a:lnTo>
+                    <a:pt x="0" y="7144"/>
+                  </a:lnTo>
+                  <a:lnTo>
+                    <a:pt x="16669" y="85725"/>
+                  </a:lnTo>
+                  <a:lnTo>
+                    <a:pt x="121444" y="152400"/>
+                  </a:lnTo>
+                  <a:lnTo>
+                    <a:pt x="121444" y="57150"/>
+                  </a:lnTo>
+                  <a:lnTo>
+                    <a:pt x="185737" y="57151"/>
+                  </a:lnTo>
+                  <a:close/>
+                </a:path>
+              </a:pathLst>
+            </a:custGeom>
+            <a:solidFill>
+              <a:schemeClr val="accent2">
+                <a:lumMod val="75000"/>
+              </a:schemeClr>
+            </a:solidFill>
+          </p:spPr>
+          <p:style>
+            <a:lnRef idx="2">
+              <a:schemeClr val="accent1">
+                <a:shade val="15000"/>
+              </a:schemeClr>
+            </a:lnRef>
+            <a:fillRef idx="1">
+              <a:schemeClr val="accent1"/>
+            </a:fillRef>
+            <a:effectRef idx="0">
+              <a:schemeClr val="accent1"/>
+            </a:effectRef>
+            <a:fontRef idx="minor">
+              <a:schemeClr val="lt1"/>
+            </a:fontRef>
+          </p:style>
+          <p:txBody>
+            <a:bodyPr rtlCol="0" anchor="ctr"/>
+            <a:lstStyle/>
+            <a:p>
+              <a:pPr algn="ctr"/>
+              <a:endParaRPr lang="LID4096"/>
+            </a:p>
+          </p:txBody>
+        </p:sp>
+      </p:grpSp>
+      <p:grpSp>
+        <p:nvGrpSpPr>
+          <p:cNvPr id="65" name="Group 64">
+            <a:extLst>
+              <a:ext uri="{FF2B5EF4-FFF2-40B4-BE49-F238E27FC236}">
+                <a16:creationId xmlns:a16="http://schemas.microsoft.com/office/drawing/2014/main" id="{09448F24-6E5A-47CA-B9E7-98025A4A5280}"/>
+              </a:ext>
+            </a:extLst>
+          </p:cNvPr>
+          <p:cNvGrpSpPr/>
+          <p:nvPr/>
+        </p:nvGrpSpPr>
+        <p:grpSpPr>
+          <a:xfrm>
+            <a:off x="5779293" y="4455318"/>
+            <a:ext cx="209550" cy="157163"/>
+            <a:chOff x="6669881" y="4393406"/>
+            <a:chExt cx="209550" cy="157163"/>
+          </a:xfrm>
+        </p:grpSpPr>
+        <p:sp>
+          <p:nvSpPr>
+            <p:cNvPr id="66" name="Rectangle 65">
+              <a:extLst>
+                <a:ext uri="{FF2B5EF4-FFF2-40B4-BE49-F238E27FC236}">
+                  <a16:creationId xmlns:a16="http://schemas.microsoft.com/office/drawing/2014/main" id="{377C63C8-EA25-C899-38AA-C364016DB510}"/>
+                </a:ext>
+              </a:extLst>
+            </p:cNvPr>
+            <p:cNvSpPr/>
+            <p:nvPr/>
+          </p:nvSpPr>
+          <p:spPr>
+            <a:xfrm>
+              <a:off x="6788944" y="4455319"/>
+              <a:ext cx="90487" cy="95250"/>
+            </a:xfrm>
+            <a:prstGeom prst="rect">
+              <a:avLst/>
+            </a:prstGeom>
+            <a:solidFill>
+              <a:srgbClr val="FFC000"/>
+            </a:solidFill>
+          </p:spPr>
+          <p:style>
+            <a:lnRef idx="2">
+              <a:schemeClr val="accent1">
+                <a:shade val="15000"/>
+              </a:schemeClr>
+            </a:lnRef>
+            <a:fillRef idx="1">
+              <a:schemeClr val="accent1"/>
+            </a:fillRef>
+            <a:effectRef idx="0">
+              <a:schemeClr val="accent1"/>
+            </a:effectRef>
+            <a:fontRef idx="minor">
+              <a:schemeClr val="lt1"/>
+            </a:fontRef>
+          </p:style>
+          <p:txBody>
+            <a:bodyPr rtlCol="0" anchor="ctr"/>
+            <a:lstStyle/>
+            <a:p>
+              <a:pPr algn="ctr"/>
+              <a:endParaRPr lang="LID4096"/>
+            </a:p>
+          </p:txBody>
+        </p:sp>
+        <p:sp>
+          <p:nvSpPr>
+            <p:cNvPr id="67" name="Freeform: Shape 66">
+              <a:extLst>
+                <a:ext uri="{FF2B5EF4-FFF2-40B4-BE49-F238E27FC236}">
+                  <a16:creationId xmlns:a16="http://schemas.microsoft.com/office/drawing/2014/main" id="{4537A568-C58C-CD43-CE64-72C6822BA206}"/>
+                </a:ext>
+              </a:extLst>
+            </p:cNvPr>
+            <p:cNvSpPr/>
+            <p:nvPr/>
+          </p:nvSpPr>
+          <p:spPr>
+            <a:xfrm>
+              <a:off x="6669881" y="4393406"/>
+              <a:ext cx="185737" cy="152400"/>
+            </a:xfrm>
+            <a:custGeom>
+              <a:avLst/>
+              <a:gdLst>
+                <a:gd name="connsiteX0" fmla="*/ 195263 w 195263"/>
+                <a:gd name="connsiteY0" fmla="*/ 57150 h 152400"/>
+                <a:gd name="connsiteX1" fmla="*/ 76200 w 195263"/>
+                <a:gd name="connsiteY1" fmla="*/ 0 h 152400"/>
+                <a:gd name="connsiteX2" fmla="*/ 0 w 195263"/>
+                <a:gd name="connsiteY2" fmla="*/ 7144 h 152400"/>
+                <a:gd name="connsiteX3" fmla="*/ 16669 w 195263"/>
+                <a:gd name="connsiteY3" fmla="*/ 85725 h 152400"/>
+                <a:gd name="connsiteX4" fmla="*/ 121444 w 195263"/>
+                <a:gd name="connsiteY4" fmla="*/ 152400 h 152400"/>
+                <a:gd name="connsiteX5" fmla="*/ 121444 w 195263"/>
+                <a:gd name="connsiteY5" fmla="*/ 57150 h 152400"/>
+                <a:gd name="connsiteX6" fmla="*/ 195263 w 195263"/>
+                <a:gd name="connsiteY6" fmla="*/ 57150 h 152400"/>
+                <a:gd name="connsiteX0" fmla="*/ 171450 w 171450"/>
+                <a:gd name="connsiteY0" fmla="*/ 59531 h 152400"/>
+                <a:gd name="connsiteX1" fmla="*/ 76200 w 171450"/>
+                <a:gd name="connsiteY1" fmla="*/ 0 h 152400"/>
+                <a:gd name="connsiteX2" fmla="*/ 0 w 171450"/>
+                <a:gd name="connsiteY2" fmla="*/ 7144 h 152400"/>
+                <a:gd name="connsiteX3" fmla="*/ 16669 w 171450"/>
+                <a:gd name="connsiteY3" fmla="*/ 85725 h 152400"/>
+                <a:gd name="connsiteX4" fmla="*/ 121444 w 171450"/>
+                <a:gd name="connsiteY4" fmla="*/ 152400 h 152400"/>
+                <a:gd name="connsiteX5" fmla="*/ 121444 w 171450"/>
+                <a:gd name="connsiteY5" fmla="*/ 57150 h 152400"/>
+                <a:gd name="connsiteX6" fmla="*/ 171450 w 171450"/>
+                <a:gd name="connsiteY6" fmla="*/ 59531 h 152400"/>
+                <a:gd name="connsiteX0" fmla="*/ 180975 w 180975"/>
+                <a:gd name="connsiteY0" fmla="*/ 61913 h 152400"/>
+                <a:gd name="connsiteX1" fmla="*/ 76200 w 180975"/>
+                <a:gd name="connsiteY1" fmla="*/ 0 h 152400"/>
+                <a:gd name="connsiteX2" fmla="*/ 0 w 180975"/>
+                <a:gd name="connsiteY2" fmla="*/ 7144 h 152400"/>
+                <a:gd name="connsiteX3" fmla="*/ 16669 w 180975"/>
+                <a:gd name="connsiteY3" fmla="*/ 85725 h 152400"/>
+                <a:gd name="connsiteX4" fmla="*/ 121444 w 180975"/>
+                <a:gd name="connsiteY4" fmla="*/ 152400 h 152400"/>
+                <a:gd name="connsiteX5" fmla="*/ 121444 w 180975"/>
+                <a:gd name="connsiteY5" fmla="*/ 57150 h 152400"/>
+                <a:gd name="connsiteX6" fmla="*/ 180975 w 180975"/>
+                <a:gd name="connsiteY6" fmla="*/ 61913 h 152400"/>
+                <a:gd name="connsiteX0" fmla="*/ 185737 w 185737"/>
+                <a:gd name="connsiteY0" fmla="*/ 57151 h 152400"/>
+                <a:gd name="connsiteX1" fmla="*/ 76200 w 185737"/>
+                <a:gd name="connsiteY1" fmla="*/ 0 h 152400"/>
+                <a:gd name="connsiteX2" fmla="*/ 0 w 185737"/>
+                <a:gd name="connsiteY2" fmla="*/ 7144 h 152400"/>
+                <a:gd name="connsiteX3" fmla="*/ 16669 w 185737"/>
+                <a:gd name="connsiteY3" fmla="*/ 85725 h 152400"/>
+                <a:gd name="connsiteX4" fmla="*/ 121444 w 185737"/>
+                <a:gd name="connsiteY4" fmla="*/ 152400 h 152400"/>
+                <a:gd name="connsiteX5" fmla="*/ 121444 w 185737"/>
+                <a:gd name="connsiteY5" fmla="*/ 57150 h 152400"/>
+                <a:gd name="connsiteX6" fmla="*/ 185737 w 185737"/>
+                <a:gd name="connsiteY6" fmla="*/ 57151 h 152400"/>
+              </a:gdLst>
+              <a:ahLst/>
+              <a:cxnLst>
+                <a:cxn ang="0">
+                  <a:pos x="connsiteX0" y="connsiteY0"/>
+                </a:cxn>
+                <a:cxn ang="0">
+                  <a:pos x="connsiteX1" y="connsiteY1"/>
+                </a:cxn>
+                <a:cxn ang="0">
+                  <a:pos x="connsiteX2" y="connsiteY2"/>
+                </a:cxn>
+                <a:cxn ang="0">
+                  <a:pos x="connsiteX3" y="connsiteY3"/>
+                </a:cxn>
+                <a:cxn ang="0">
+                  <a:pos x="connsiteX4" y="connsiteY4"/>
+                </a:cxn>
+                <a:cxn ang="0">
+                  <a:pos x="connsiteX5" y="connsiteY5"/>
+                </a:cxn>
+                <a:cxn ang="0">
+                  <a:pos x="connsiteX6" y="connsiteY6"/>
+                </a:cxn>
+              </a:cxnLst>
+              <a:rect l="l" t="t" r="r" b="b"/>
+              <a:pathLst>
+                <a:path w="185737" h="152400">
+                  <a:moveTo>
+                    <a:pt x="185737" y="57151"/>
+                  </a:moveTo>
+                  <a:lnTo>
+                    <a:pt x="76200" y="0"/>
+                  </a:lnTo>
+                  <a:lnTo>
+                    <a:pt x="0" y="7144"/>
+                  </a:lnTo>
+                  <a:lnTo>
+                    <a:pt x="16669" y="85725"/>
+                  </a:lnTo>
+                  <a:lnTo>
+                    <a:pt x="121444" y="152400"/>
+                  </a:lnTo>
+                  <a:lnTo>
+                    <a:pt x="121444" y="57150"/>
+                  </a:lnTo>
+                  <a:lnTo>
+                    <a:pt x="185737" y="57151"/>
+                  </a:lnTo>
+                  <a:close/>
+                </a:path>
+              </a:pathLst>
+            </a:custGeom>
+            <a:solidFill>
+              <a:schemeClr val="accent2">
+                <a:lumMod val="75000"/>
+              </a:schemeClr>
+            </a:solidFill>
+          </p:spPr>
+          <p:style>
+            <a:lnRef idx="2">
+              <a:schemeClr val="accent1">
+                <a:shade val="15000"/>
+              </a:schemeClr>
+            </a:lnRef>
+            <a:fillRef idx="1">
+              <a:schemeClr val="accent1"/>
+            </a:fillRef>
+            <a:effectRef idx="0">
+              <a:schemeClr val="accent1"/>
+            </a:effectRef>
+            <a:fontRef idx="minor">
+              <a:schemeClr val="lt1"/>
+            </a:fontRef>
+          </p:style>
+          <p:txBody>
+            <a:bodyPr rtlCol="0" anchor="ctr"/>
+            <a:lstStyle/>
+            <a:p>
+              <a:pPr algn="ctr"/>
+              <a:endParaRPr lang="LID4096"/>
+            </a:p>
+          </p:txBody>
+        </p:sp>
+      </p:grpSp>
+      <p:grpSp>
+        <p:nvGrpSpPr>
+          <p:cNvPr id="68" name="Group 67">
+            <a:extLst>
+              <a:ext uri="{FF2B5EF4-FFF2-40B4-BE49-F238E27FC236}">
+                <a16:creationId xmlns:a16="http://schemas.microsoft.com/office/drawing/2014/main" id="{DE0044B3-58DA-E5AF-C1B9-FD7ACE844553}"/>
+              </a:ext>
+            </a:extLst>
+          </p:cNvPr>
+          <p:cNvGrpSpPr/>
+          <p:nvPr/>
+        </p:nvGrpSpPr>
+        <p:grpSpPr>
+          <a:xfrm>
+            <a:off x="5278037" y="4467224"/>
+            <a:ext cx="209550" cy="157163"/>
+            <a:chOff x="6669881" y="4393406"/>
+            <a:chExt cx="209550" cy="157163"/>
+          </a:xfrm>
+        </p:grpSpPr>
+        <p:sp>
+          <p:nvSpPr>
+            <p:cNvPr id="69" name="Rectangle 68">
+              <a:extLst>
+                <a:ext uri="{FF2B5EF4-FFF2-40B4-BE49-F238E27FC236}">
+                  <a16:creationId xmlns:a16="http://schemas.microsoft.com/office/drawing/2014/main" id="{8416A671-530E-EF8A-1D90-AC263D172BE2}"/>
+                </a:ext>
+              </a:extLst>
+            </p:cNvPr>
+            <p:cNvSpPr/>
+            <p:nvPr/>
+          </p:nvSpPr>
+          <p:spPr>
+            <a:xfrm>
+              <a:off x="6788944" y="4455319"/>
+              <a:ext cx="90487" cy="95250"/>
+            </a:xfrm>
+            <a:prstGeom prst="rect">
+              <a:avLst/>
+            </a:prstGeom>
+            <a:solidFill>
+              <a:srgbClr val="FFC000"/>
+            </a:solidFill>
+          </p:spPr>
+          <p:style>
+            <a:lnRef idx="2">
+              <a:schemeClr val="accent1">
+                <a:shade val="15000"/>
+              </a:schemeClr>
+            </a:lnRef>
+            <a:fillRef idx="1">
+              <a:schemeClr val="accent1"/>
+            </a:fillRef>
+            <a:effectRef idx="0">
+              <a:schemeClr val="accent1"/>
+            </a:effectRef>
+            <a:fontRef idx="minor">
+              <a:schemeClr val="lt1"/>
+            </a:fontRef>
+          </p:style>
+          <p:txBody>
+            <a:bodyPr rtlCol="0" anchor="ctr"/>
+            <a:lstStyle/>
+            <a:p>
+              <a:pPr algn="ctr"/>
+              <a:endParaRPr lang="LID4096"/>
+            </a:p>
+          </p:txBody>
+        </p:sp>
+        <p:sp>
+          <p:nvSpPr>
+            <p:cNvPr id="70" name="Freeform: Shape 69">
+              <a:extLst>
+                <a:ext uri="{FF2B5EF4-FFF2-40B4-BE49-F238E27FC236}">
+                  <a16:creationId xmlns:a16="http://schemas.microsoft.com/office/drawing/2014/main" id="{46CA65C8-2534-84BC-A190-09DEC82AC2DF}"/>
+                </a:ext>
+              </a:extLst>
+            </p:cNvPr>
+            <p:cNvSpPr/>
+            <p:nvPr/>
+          </p:nvSpPr>
+          <p:spPr>
+            <a:xfrm>
+              <a:off x="6669881" y="4393406"/>
+              <a:ext cx="185737" cy="152400"/>
+            </a:xfrm>
+            <a:custGeom>
+              <a:avLst/>
+              <a:gdLst>
+                <a:gd name="connsiteX0" fmla="*/ 195263 w 195263"/>
+                <a:gd name="connsiteY0" fmla="*/ 57150 h 152400"/>
+                <a:gd name="connsiteX1" fmla="*/ 76200 w 195263"/>
+                <a:gd name="connsiteY1" fmla="*/ 0 h 152400"/>
+                <a:gd name="connsiteX2" fmla="*/ 0 w 195263"/>
+                <a:gd name="connsiteY2" fmla="*/ 7144 h 152400"/>
+                <a:gd name="connsiteX3" fmla="*/ 16669 w 195263"/>
+                <a:gd name="connsiteY3" fmla="*/ 85725 h 152400"/>
+                <a:gd name="connsiteX4" fmla="*/ 121444 w 195263"/>
+                <a:gd name="connsiteY4" fmla="*/ 152400 h 152400"/>
+                <a:gd name="connsiteX5" fmla="*/ 121444 w 195263"/>
+                <a:gd name="connsiteY5" fmla="*/ 57150 h 152400"/>
+                <a:gd name="connsiteX6" fmla="*/ 195263 w 195263"/>
+                <a:gd name="connsiteY6" fmla="*/ 57150 h 152400"/>
+                <a:gd name="connsiteX0" fmla="*/ 171450 w 171450"/>
+                <a:gd name="connsiteY0" fmla="*/ 59531 h 152400"/>
+                <a:gd name="connsiteX1" fmla="*/ 76200 w 171450"/>
+                <a:gd name="connsiteY1" fmla="*/ 0 h 152400"/>
+                <a:gd name="connsiteX2" fmla="*/ 0 w 171450"/>
+                <a:gd name="connsiteY2" fmla="*/ 7144 h 152400"/>
+                <a:gd name="connsiteX3" fmla="*/ 16669 w 171450"/>
+                <a:gd name="connsiteY3" fmla="*/ 85725 h 152400"/>
+                <a:gd name="connsiteX4" fmla="*/ 121444 w 171450"/>
+                <a:gd name="connsiteY4" fmla="*/ 152400 h 152400"/>
+                <a:gd name="connsiteX5" fmla="*/ 121444 w 171450"/>
+                <a:gd name="connsiteY5" fmla="*/ 57150 h 152400"/>
+                <a:gd name="connsiteX6" fmla="*/ 171450 w 171450"/>
+                <a:gd name="connsiteY6" fmla="*/ 59531 h 152400"/>
+                <a:gd name="connsiteX0" fmla="*/ 180975 w 180975"/>
+                <a:gd name="connsiteY0" fmla="*/ 61913 h 152400"/>
+                <a:gd name="connsiteX1" fmla="*/ 76200 w 180975"/>
+                <a:gd name="connsiteY1" fmla="*/ 0 h 152400"/>
+                <a:gd name="connsiteX2" fmla="*/ 0 w 180975"/>
+                <a:gd name="connsiteY2" fmla="*/ 7144 h 152400"/>
+                <a:gd name="connsiteX3" fmla="*/ 16669 w 180975"/>
+                <a:gd name="connsiteY3" fmla="*/ 85725 h 152400"/>
+                <a:gd name="connsiteX4" fmla="*/ 121444 w 180975"/>
+                <a:gd name="connsiteY4" fmla="*/ 152400 h 152400"/>
+                <a:gd name="connsiteX5" fmla="*/ 121444 w 180975"/>
+                <a:gd name="connsiteY5" fmla="*/ 57150 h 152400"/>
+                <a:gd name="connsiteX6" fmla="*/ 180975 w 180975"/>
+                <a:gd name="connsiteY6" fmla="*/ 61913 h 152400"/>
+                <a:gd name="connsiteX0" fmla="*/ 185737 w 185737"/>
+                <a:gd name="connsiteY0" fmla="*/ 57151 h 152400"/>
+                <a:gd name="connsiteX1" fmla="*/ 76200 w 185737"/>
+                <a:gd name="connsiteY1" fmla="*/ 0 h 152400"/>
+                <a:gd name="connsiteX2" fmla="*/ 0 w 185737"/>
+                <a:gd name="connsiteY2" fmla="*/ 7144 h 152400"/>
+                <a:gd name="connsiteX3" fmla="*/ 16669 w 185737"/>
+                <a:gd name="connsiteY3" fmla="*/ 85725 h 152400"/>
+                <a:gd name="connsiteX4" fmla="*/ 121444 w 185737"/>
+                <a:gd name="connsiteY4" fmla="*/ 152400 h 152400"/>
+                <a:gd name="connsiteX5" fmla="*/ 121444 w 185737"/>
+                <a:gd name="connsiteY5" fmla="*/ 57150 h 152400"/>
+                <a:gd name="connsiteX6" fmla="*/ 185737 w 185737"/>
+                <a:gd name="connsiteY6" fmla="*/ 57151 h 152400"/>
+              </a:gdLst>
+              <a:ahLst/>
+              <a:cxnLst>
+                <a:cxn ang="0">
+                  <a:pos x="connsiteX0" y="connsiteY0"/>
+                </a:cxn>
+                <a:cxn ang="0">
+                  <a:pos x="connsiteX1" y="connsiteY1"/>
+                </a:cxn>
+                <a:cxn ang="0">
+                  <a:pos x="connsiteX2" y="connsiteY2"/>
+                </a:cxn>
+                <a:cxn ang="0">
+                  <a:pos x="connsiteX3" y="connsiteY3"/>
+                </a:cxn>
+                <a:cxn ang="0">
+                  <a:pos x="connsiteX4" y="connsiteY4"/>
+                </a:cxn>
+                <a:cxn ang="0">
+                  <a:pos x="connsiteX5" y="connsiteY5"/>
+                </a:cxn>
+                <a:cxn ang="0">
+                  <a:pos x="connsiteX6" y="connsiteY6"/>
+                </a:cxn>
+              </a:cxnLst>
+              <a:rect l="l" t="t" r="r" b="b"/>
+              <a:pathLst>
+                <a:path w="185737" h="152400">
+                  <a:moveTo>
+                    <a:pt x="185737" y="57151"/>
+                  </a:moveTo>
+                  <a:lnTo>
+                    <a:pt x="76200" y="0"/>
+                  </a:lnTo>
+                  <a:lnTo>
+                    <a:pt x="0" y="7144"/>
+                  </a:lnTo>
+                  <a:lnTo>
+                    <a:pt x="16669" y="85725"/>
+                  </a:lnTo>
+                  <a:lnTo>
+                    <a:pt x="121444" y="152400"/>
+                  </a:lnTo>
+                  <a:lnTo>
+                    <a:pt x="121444" y="57150"/>
+                  </a:lnTo>
+                  <a:lnTo>
+                    <a:pt x="185737" y="57151"/>
+                  </a:lnTo>
+                  <a:close/>
+                </a:path>
+              </a:pathLst>
+            </a:custGeom>
+            <a:solidFill>
+              <a:schemeClr val="accent2">
+                <a:lumMod val="75000"/>
+              </a:schemeClr>
+            </a:solidFill>
+          </p:spPr>
+          <p:style>
+            <a:lnRef idx="2">
+              <a:schemeClr val="accent1">
+                <a:shade val="15000"/>
+              </a:schemeClr>
+            </a:lnRef>
+            <a:fillRef idx="1">
+              <a:schemeClr val="accent1"/>
+            </a:fillRef>
+            <a:effectRef idx="0">
+              <a:schemeClr val="accent1"/>
+            </a:effectRef>
+            <a:fontRef idx="minor">
+              <a:schemeClr val="lt1"/>
+            </a:fontRef>
+          </p:style>
+          <p:txBody>
+            <a:bodyPr rtlCol="0" anchor="ctr"/>
+            <a:lstStyle/>
+            <a:p>
+              <a:pPr algn="ctr"/>
+              <a:endParaRPr lang="LID4096"/>
+            </a:p>
+          </p:txBody>
+        </p:sp>
+      </p:grpSp>
+      <p:grpSp>
+        <p:nvGrpSpPr>
+          <p:cNvPr id="71" name="Group 70">
+            <a:extLst>
+              <a:ext uri="{FF2B5EF4-FFF2-40B4-BE49-F238E27FC236}">
+                <a16:creationId xmlns:a16="http://schemas.microsoft.com/office/drawing/2014/main" id="{83D7AED8-8D1F-FAF8-3CDE-7F896F5EB77C}"/>
+              </a:ext>
+            </a:extLst>
+          </p:cNvPr>
+          <p:cNvGrpSpPr/>
+          <p:nvPr/>
+        </p:nvGrpSpPr>
+        <p:grpSpPr>
+          <a:xfrm>
+            <a:off x="4771789" y="4486947"/>
+            <a:ext cx="209550" cy="157163"/>
+            <a:chOff x="6669881" y="4393406"/>
+            <a:chExt cx="209550" cy="157163"/>
+          </a:xfrm>
+        </p:grpSpPr>
+        <p:sp>
+          <p:nvSpPr>
+            <p:cNvPr id="72" name="Rectangle 71">
+              <a:extLst>
+                <a:ext uri="{FF2B5EF4-FFF2-40B4-BE49-F238E27FC236}">
+                  <a16:creationId xmlns:a16="http://schemas.microsoft.com/office/drawing/2014/main" id="{32261C2B-05C7-790D-CFCB-F96B1B034654}"/>
+                </a:ext>
+              </a:extLst>
+            </p:cNvPr>
+            <p:cNvSpPr/>
+            <p:nvPr/>
+          </p:nvSpPr>
+          <p:spPr>
+            <a:xfrm>
+              <a:off x="6788944" y="4455319"/>
+              <a:ext cx="90487" cy="95250"/>
+            </a:xfrm>
+            <a:prstGeom prst="rect">
+              <a:avLst/>
+            </a:prstGeom>
+            <a:solidFill>
+              <a:srgbClr val="FFC000"/>
+            </a:solidFill>
+          </p:spPr>
+          <p:style>
+            <a:lnRef idx="2">
+              <a:schemeClr val="accent1">
+                <a:shade val="15000"/>
+              </a:schemeClr>
+            </a:lnRef>
+            <a:fillRef idx="1">
+              <a:schemeClr val="accent1"/>
+            </a:fillRef>
+            <a:effectRef idx="0">
+              <a:schemeClr val="accent1"/>
+            </a:effectRef>
+            <a:fontRef idx="minor">
+              <a:schemeClr val="lt1"/>
+            </a:fontRef>
+          </p:style>
+          <p:txBody>
+            <a:bodyPr rtlCol="0" anchor="ctr"/>
+            <a:lstStyle/>
+            <a:p>
+              <a:pPr algn="ctr"/>
+              <a:endParaRPr lang="LID4096"/>
+            </a:p>
+          </p:txBody>
+        </p:sp>
+        <p:sp>
+          <p:nvSpPr>
+            <p:cNvPr id="73" name="Freeform: Shape 72">
+              <a:extLst>
+                <a:ext uri="{FF2B5EF4-FFF2-40B4-BE49-F238E27FC236}">
+                  <a16:creationId xmlns:a16="http://schemas.microsoft.com/office/drawing/2014/main" id="{2B1F324D-4448-69A1-B541-78A050ACBD38}"/>
+                </a:ext>
+              </a:extLst>
+            </p:cNvPr>
+            <p:cNvSpPr/>
+            <p:nvPr/>
+          </p:nvSpPr>
+          <p:spPr>
+            <a:xfrm>
+              <a:off x="6669881" y="4393406"/>
+              <a:ext cx="185737" cy="152400"/>
+            </a:xfrm>
+            <a:custGeom>
+              <a:avLst/>
+              <a:gdLst>
+                <a:gd name="connsiteX0" fmla="*/ 195263 w 195263"/>
+                <a:gd name="connsiteY0" fmla="*/ 57150 h 152400"/>
+                <a:gd name="connsiteX1" fmla="*/ 76200 w 195263"/>
+                <a:gd name="connsiteY1" fmla="*/ 0 h 152400"/>
+                <a:gd name="connsiteX2" fmla="*/ 0 w 195263"/>
+                <a:gd name="connsiteY2" fmla="*/ 7144 h 152400"/>
+                <a:gd name="connsiteX3" fmla="*/ 16669 w 195263"/>
+                <a:gd name="connsiteY3" fmla="*/ 85725 h 152400"/>
+                <a:gd name="connsiteX4" fmla="*/ 121444 w 195263"/>
+                <a:gd name="connsiteY4" fmla="*/ 152400 h 152400"/>
+                <a:gd name="connsiteX5" fmla="*/ 121444 w 195263"/>
+                <a:gd name="connsiteY5" fmla="*/ 57150 h 152400"/>
+                <a:gd name="connsiteX6" fmla="*/ 195263 w 195263"/>
+                <a:gd name="connsiteY6" fmla="*/ 57150 h 152400"/>
+                <a:gd name="connsiteX0" fmla="*/ 171450 w 171450"/>
+                <a:gd name="connsiteY0" fmla="*/ 59531 h 152400"/>
+                <a:gd name="connsiteX1" fmla="*/ 76200 w 171450"/>
+                <a:gd name="connsiteY1" fmla="*/ 0 h 152400"/>
+                <a:gd name="connsiteX2" fmla="*/ 0 w 171450"/>
+                <a:gd name="connsiteY2" fmla="*/ 7144 h 152400"/>
+                <a:gd name="connsiteX3" fmla="*/ 16669 w 171450"/>
+                <a:gd name="connsiteY3" fmla="*/ 85725 h 152400"/>
+                <a:gd name="connsiteX4" fmla="*/ 121444 w 171450"/>
+                <a:gd name="connsiteY4" fmla="*/ 152400 h 152400"/>
+                <a:gd name="connsiteX5" fmla="*/ 121444 w 171450"/>
+                <a:gd name="connsiteY5" fmla="*/ 57150 h 152400"/>
+                <a:gd name="connsiteX6" fmla="*/ 171450 w 171450"/>
+                <a:gd name="connsiteY6" fmla="*/ 59531 h 152400"/>
+                <a:gd name="connsiteX0" fmla="*/ 180975 w 180975"/>
+                <a:gd name="connsiteY0" fmla="*/ 61913 h 152400"/>
+                <a:gd name="connsiteX1" fmla="*/ 76200 w 180975"/>
+                <a:gd name="connsiteY1" fmla="*/ 0 h 152400"/>
+                <a:gd name="connsiteX2" fmla="*/ 0 w 180975"/>
+                <a:gd name="connsiteY2" fmla="*/ 7144 h 152400"/>
+                <a:gd name="connsiteX3" fmla="*/ 16669 w 180975"/>
+                <a:gd name="connsiteY3" fmla="*/ 85725 h 152400"/>
+                <a:gd name="connsiteX4" fmla="*/ 121444 w 180975"/>
+                <a:gd name="connsiteY4" fmla="*/ 152400 h 152400"/>
+                <a:gd name="connsiteX5" fmla="*/ 121444 w 180975"/>
+                <a:gd name="connsiteY5" fmla="*/ 57150 h 152400"/>
+                <a:gd name="connsiteX6" fmla="*/ 180975 w 180975"/>
+                <a:gd name="connsiteY6" fmla="*/ 61913 h 152400"/>
+                <a:gd name="connsiteX0" fmla="*/ 185737 w 185737"/>
+                <a:gd name="connsiteY0" fmla="*/ 57151 h 152400"/>
+                <a:gd name="connsiteX1" fmla="*/ 76200 w 185737"/>
+                <a:gd name="connsiteY1" fmla="*/ 0 h 152400"/>
+                <a:gd name="connsiteX2" fmla="*/ 0 w 185737"/>
+                <a:gd name="connsiteY2" fmla="*/ 7144 h 152400"/>
+                <a:gd name="connsiteX3" fmla="*/ 16669 w 185737"/>
+                <a:gd name="connsiteY3" fmla="*/ 85725 h 152400"/>
+                <a:gd name="connsiteX4" fmla="*/ 121444 w 185737"/>
+                <a:gd name="connsiteY4" fmla="*/ 152400 h 152400"/>
+                <a:gd name="connsiteX5" fmla="*/ 121444 w 185737"/>
+                <a:gd name="connsiteY5" fmla="*/ 57150 h 152400"/>
+                <a:gd name="connsiteX6" fmla="*/ 185737 w 185737"/>
+                <a:gd name="connsiteY6" fmla="*/ 57151 h 152400"/>
+              </a:gdLst>
+              <a:ahLst/>
+              <a:cxnLst>
+                <a:cxn ang="0">
+                  <a:pos x="connsiteX0" y="connsiteY0"/>
+                </a:cxn>
+                <a:cxn ang="0">
+                  <a:pos x="connsiteX1" y="connsiteY1"/>
+                </a:cxn>
+                <a:cxn ang="0">
+                  <a:pos x="connsiteX2" y="connsiteY2"/>
+                </a:cxn>
+                <a:cxn ang="0">
+                  <a:pos x="connsiteX3" y="connsiteY3"/>
+                </a:cxn>
+                <a:cxn ang="0">
+                  <a:pos x="connsiteX4" y="connsiteY4"/>
+                </a:cxn>
+                <a:cxn ang="0">
+                  <a:pos x="connsiteX5" y="connsiteY5"/>
+                </a:cxn>
+                <a:cxn ang="0">
+                  <a:pos x="connsiteX6" y="connsiteY6"/>
+                </a:cxn>
+              </a:cxnLst>
+              <a:rect l="l" t="t" r="r" b="b"/>
+              <a:pathLst>
+                <a:path w="185737" h="152400">
+                  <a:moveTo>
+                    <a:pt x="185737" y="57151"/>
+                  </a:moveTo>
+                  <a:lnTo>
+                    <a:pt x="76200" y="0"/>
+                  </a:lnTo>
+                  <a:lnTo>
+                    <a:pt x="0" y="7144"/>
+                  </a:lnTo>
+                  <a:lnTo>
+                    <a:pt x="16669" y="85725"/>
+                  </a:lnTo>
+                  <a:lnTo>
+                    <a:pt x="121444" y="152400"/>
+                  </a:lnTo>
+                  <a:lnTo>
+                    <a:pt x="121444" y="57150"/>
+                  </a:lnTo>
+                  <a:lnTo>
+                    <a:pt x="185737" y="57151"/>
+                  </a:lnTo>
+                  <a:close/>
+                </a:path>
+              </a:pathLst>
+            </a:custGeom>
+            <a:solidFill>
+              <a:schemeClr val="accent2">
+                <a:lumMod val="75000"/>
+              </a:schemeClr>
+            </a:solidFill>
+          </p:spPr>
+          <p:style>
+            <a:lnRef idx="2">
+              <a:schemeClr val="accent1">
+                <a:shade val="15000"/>
+              </a:schemeClr>
+            </a:lnRef>
+            <a:fillRef idx="1">
+              <a:schemeClr val="accent1"/>
+            </a:fillRef>
+            <a:effectRef idx="0">
+              <a:schemeClr val="accent1"/>
+            </a:effectRef>
+            <a:fontRef idx="minor">
+              <a:schemeClr val="lt1"/>
+            </a:fontRef>
+          </p:style>
+          <p:txBody>
+            <a:bodyPr rtlCol="0" anchor="ctr"/>
+            <a:lstStyle/>
+            <a:p>
+              <a:pPr algn="ctr"/>
+              <a:endParaRPr lang="LID4096"/>
+            </a:p>
+          </p:txBody>
+        </p:sp>
+      </p:grpSp>
+      <p:grpSp>
+        <p:nvGrpSpPr>
+          <p:cNvPr id="74" name="Group 73">
+            <a:extLst>
+              <a:ext uri="{FF2B5EF4-FFF2-40B4-BE49-F238E27FC236}">
+                <a16:creationId xmlns:a16="http://schemas.microsoft.com/office/drawing/2014/main" id="{B981D7EA-BC9E-F738-4BA6-ECCCD0FE1FBA}"/>
+              </a:ext>
+            </a:extLst>
+          </p:cNvPr>
+          <p:cNvGrpSpPr/>
+          <p:nvPr/>
+        </p:nvGrpSpPr>
+        <p:grpSpPr>
+          <a:xfrm>
+            <a:off x="4759882" y="4894138"/>
+            <a:ext cx="209550" cy="157163"/>
+            <a:chOff x="6669881" y="4393406"/>
+            <a:chExt cx="209550" cy="157163"/>
+          </a:xfrm>
+        </p:grpSpPr>
+        <p:sp>
+          <p:nvSpPr>
+            <p:cNvPr id="75" name="Rectangle 74">
+              <a:extLst>
+                <a:ext uri="{FF2B5EF4-FFF2-40B4-BE49-F238E27FC236}">
+                  <a16:creationId xmlns:a16="http://schemas.microsoft.com/office/drawing/2014/main" id="{D56FA857-2E3A-6003-E684-57B4DBB50E02}"/>
+                </a:ext>
+              </a:extLst>
+            </p:cNvPr>
+            <p:cNvSpPr/>
+            <p:nvPr/>
+          </p:nvSpPr>
+          <p:spPr>
+            <a:xfrm>
+              <a:off x="6788944" y="4455319"/>
+              <a:ext cx="90487" cy="95250"/>
+            </a:xfrm>
+            <a:prstGeom prst="rect">
+              <a:avLst/>
+            </a:prstGeom>
+            <a:solidFill>
+              <a:srgbClr val="FFC000"/>
+            </a:solidFill>
+          </p:spPr>
+          <p:style>
+            <a:lnRef idx="2">
+              <a:schemeClr val="accent1">
+                <a:shade val="15000"/>
+              </a:schemeClr>
+            </a:lnRef>
+            <a:fillRef idx="1">
+              <a:schemeClr val="accent1"/>
+            </a:fillRef>
+            <a:effectRef idx="0">
+              <a:schemeClr val="accent1"/>
+            </a:effectRef>
+            <a:fontRef idx="minor">
+              <a:schemeClr val="lt1"/>
+            </a:fontRef>
+          </p:style>
+          <p:txBody>
+            <a:bodyPr rtlCol="0" anchor="ctr"/>
+            <a:lstStyle/>
+            <a:p>
+              <a:pPr algn="ctr"/>
+              <a:endParaRPr lang="LID4096"/>
+            </a:p>
+          </p:txBody>
+        </p:sp>
+        <p:sp>
+          <p:nvSpPr>
+            <p:cNvPr id="76" name="Freeform: Shape 75">
+              <a:extLst>
+                <a:ext uri="{FF2B5EF4-FFF2-40B4-BE49-F238E27FC236}">
+                  <a16:creationId xmlns:a16="http://schemas.microsoft.com/office/drawing/2014/main" id="{FA66613C-21DE-A884-9675-9C3E05711122}"/>
+                </a:ext>
+              </a:extLst>
+            </p:cNvPr>
+            <p:cNvSpPr/>
+            <p:nvPr/>
+          </p:nvSpPr>
+          <p:spPr>
+            <a:xfrm>
+              <a:off x="6669881" y="4393406"/>
+              <a:ext cx="185737" cy="152400"/>
+            </a:xfrm>
+            <a:custGeom>
+              <a:avLst/>
+              <a:gdLst>
+                <a:gd name="connsiteX0" fmla="*/ 195263 w 195263"/>
+                <a:gd name="connsiteY0" fmla="*/ 57150 h 152400"/>
+                <a:gd name="connsiteX1" fmla="*/ 76200 w 195263"/>
+                <a:gd name="connsiteY1" fmla="*/ 0 h 152400"/>
+                <a:gd name="connsiteX2" fmla="*/ 0 w 195263"/>
+                <a:gd name="connsiteY2" fmla="*/ 7144 h 152400"/>
+                <a:gd name="connsiteX3" fmla="*/ 16669 w 195263"/>
+                <a:gd name="connsiteY3" fmla="*/ 85725 h 152400"/>
+                <a:gd name="connsiteX4" fmla="*/ 121444 w 195263"/>
+                <a:gd name="connsiteY4" fmla="*/ 152400 h 152400"/>
+                <a:gd name="connsiteX5" fmla="*/ 121444 w 195263"/>
+                <a:gd name="connsiteY5" fmla="*/ 57150 h 152400"/>
+                <a:gd name="connsiteX6" fmla="*/ 195263 w 195263"/>
+                <a:gd name="connsiteY6" fmla="*/ 57150 h 152400"/>
+                <a:gd name="connsiteX0" fmla="*/ 171450 w 171450"/>
+                <a:gd name="connsiteY0" fmla="*/ 59531 h 152400"/>
+                <a:gd name="connsiteX1" fmla="*/ 76200 w 171450"/>
+                <a:gd name="connsiteY1" fmla="*/ 0 h 152400"/>
+                <a:gd name="connsiteX2" fmla="*/ 0 w 171450"/>
+                <a:gd name="connsiteY2" fmla="*/ 7144 h 152400"/>
+                <a:gd name="connsiteX3" fmla="*/ 16669 w 171450"/>
+                <a:gd name="connsiteY3" fmla="*/ 85725 h 152400"/>
+                <a:gd name="connsiteX4" fmla="*/ 121444 w 171450"/>
+                <a:gd name="connsiteY4" fmla="*/ 152400 h 152400"/>
+                <a:gd name="connsiteX5" fmla="*/ 121444 w 171450"/>
+                <a:gd name="connsiteY5" fmla="*/ 57150 h 152400"/>
+                <a:gd name="connsiteX6" fmla="*/ 171450 w 171450"/>
+                <a:gd name="connsiteY6" fmla="*/ 59531 h 152400"/>
+                <a:gd name="connsiteX0" fmla="*/ 180975 w 180975"/>
+                <a:gd name="connsiteY0" fmla="*/ 61913 h 152400"/>
+                <a:gd name="connsiteX1" fmla="*/ 76200 w 180975"/>
+                <a:gd name="connsiteY1" fmla="*/ 0 h 152400"/>
+                <a:gd name="connsiteX2" fmla="*/ 0 w 180975"/>
+                <a:gd name="connsiteY2" fmla="*/ 7144 h 152400"/>
+                <a:gd name="connsiteX3" fmla="*/ 16669 w 180975"/>
+                <a:gd name="connsiteY3" fmla="*/ 85725 h 152400"/>
+                <a:gd name="connsiteX4" fmla="*/ 121444 w 180975"/>
+                <a:gd name="connsiteY4" fmla="*/ 152400 h 152400"/>
+                <a:gd name="connsiteX5" fmla="*/ 121444 w 180975"/>
+                <a:gd name="connsiteY5" fmla="*/ 57150 h 152400"/>
+                <a:gd name="connsiteX6" fmla="*/ 180975 w 180975"/>
+                <a:gd name="connsiteY6" fmla="*/ 61913 h 152400"/>
+                <a:gd name="connsiteX0" fmla="*/ 185737 w 185737"/>
+                <a:gd name="connsiteY0" fmla="*/ 57151 h 152400"/>
+                <a:gd name="connsiteX1" fmla="*/ 76200 w 185737"/>
+                <a:gd name="connsiteY1" fmla="*/ 0 h 152400"/>
+                <a:gd name="connsiteX2" fmla="*/ 0 w 185737"/>
+                <a:gd name="connsiteY2" fmla="*/ 7144 h 152400"/>
+                <a:gd name="connsiteX3" fmla="*/ 16669 w 185737"/>
+                <a:gd name="connsiteY3" fmla="*/ 85725 h 152400"/>
+                <a:gd name="connsiteX4" fmla="*/ 121444 w 185737"/>
+                <a:gd name="connsiteY4" fmla="*/ 152400 h 152400"/>
+                <a:gd name="connsiteX5" fmla="*/ 121444 w 185737"/>
+                <a:gd name="connsiteY5" fmla="*/ 57150 h 152400"/>
+                <a:gd name="connsiteX6" fmla="*/ 185737 w 185737"/>
+                <a:gd name="connsiteY6" fmla="*/ 57151 h 152400"/>
+              </a:gdLst>
+              <a:ahLst/>
+              <a:cxnLst>
+                <a:cxn ang="0">
+                  <a:pos x="connsiteX0" y="connsiteY0"/>
+                </a:cxn>
+                <a:cxn ang="0">
+                  <a:pos x="connsiteX1" y="connsiteY1"/>
+                </a:cxn>
+                <a:cxn ang="0">
+                  <a:pos x="connsiteX2" y="connsiteY2"/>
+                </a:cxn>
+                <a:cxn ang="0">
+                  <a:pos x="connsiteX3" y="connsiteY3"/>
+                </a:cxn>
+                <a:cxn ang="0">
+                  <a:pos x="connsiteX4" y="connsiteY4"/>
+                </a:cxn>
+                <a:cxn ang="0">
+                  <a:pos x="connsiteX5" y="connsiteY5"/>
+                </a:cxn>
+                <a:cxn ang="0">
+                  <a:pos x="connsiteX6" y="connsiteY6"/>
+                </a:cxn>
+              </a:cxnLst>
+              <a:rect l="l" t="t" r="r" b="b"/>
+              <a:pathLst>
+                <a:path w="185737" h="152400">
+                  <a:moveTo>
+                    <a:pt x="185737" y="57151"/>
+                  </a:moveTo>
+                  <a:lnTo>
+                    <a:pt x="76200" y="0"/>
+                  </a:lnTo>
+                  <a:lnTo>
+                    <a:pt x="0" y="7144"/>
+                  </a:lnTo>
+                  <a:lnTo>
+                    <a:pt x="16669" y="85725"/>
+                  </a:lnTo>
+                  <a:lnTo>
+                    <a:pt x="121444" y="152400"/>
+                  </a:lnTo>
+                  <a:lnTo>
+                    <a:pt x="121444" y="57150"/>
+                  </a:lnTo>
+                  <a:lnTo>
+                    <a:pt x="185737" y="57151"/>
+                  </a:lnTo>
+                  <a:close/>
+                </a:path>
+              </a:pathLst>
+            </a:custGeom>
+            <a:solidFill>
+              <a:schemeClr val="accent2">
+                <a:lumMod val="75000"/>
+              </a:schemeClr>
+            </a:solidFill>
+          </p:spPr>
+          <p:style>
+            <a:lnRef idx="2">
+              <a:schemeClr val="accent1">
+                <a:shade val="15000"/>
+              </a:schemeClr>
+            </a:lnRef>
+            <a:fillRef idx="1">
+              <a:schemeClr val="accent1"/>
+            </a:fillRef>
+            <a:effectRef idx="0">
+              <a:schemeClr val="accent1"/>
+            </a:effectRef>
+            <a:fontRef idx="minor">
+              <a:schemeClr val="lt1"/>
+            </a:fontRef>
+          </p:style>
+          <p:txBody>
+            <a:bodyPr rtlCol="0" anchor="ctr"/>
+            <a:lstStyle/>
+            <a:p>
+              <a:pPr algn="ctr"/>
+              <a:endParaRPr lang="LID4096"/>
+            </a:p>
+          </p:txBody>
+        </p:sp>
+      </p:grpSp>
+      <p:grpSp>
+        <p:nvGrpSpPr>
+          <p:cNvPr id="77" name="Group 76">
+            <a:extLst>
+              <a:ext uri="{FF2B5EF4-FFF2-40B4-BE49-F238E27FC236}">
+                <a16:creationId xmlns:a16="http://schemas.microsoft.com/office/drawing/2014/main" id="{B10C2771-EBA4-D928-60DA-D58EBBE34D4F}"/>
+              </a:ext>
+            </a:extLst>
+          </p:cNvPr>
+          <p:cNvGrpSpPr/>
+          <p:nvPr/>
+        </p:nvGrpSpPr>
+        <p:grpSpPr>
+          <a:xfrm>
+            <a:off x="5275654" y="4879851"/>
+            <a:ext cx="209550" cy="157163"/>
+            <a:chOff x="6669881" y="4393406"/>
+            <a:chExt cx="209550" cy="157163"/>
+          </a:xfrm>
+        </p:grpSpPr>
+        <p:sp>
+          <p:nvSpPr>
+            <p:cNvPr id="78" name="Rectangle 77">
+              <a:extLst>
+                <a:ext uri="{FF2B5EF4-FFF2-40B4-BE49-F238E27FC236}">
+                  <a16:creationId xmlns:a16="http://schemas.microsoft.com/office/drawing/2014/main" id="{3B58EEAC-CF25-C24E-074D-2D61F83C667E}"/>
+                </a:ext>
+              </a:extLst>
+            </p:cNvPr>
+            <p:cNvSpPr/>
+            <p:nvPr/>
+          </p:nvSpPr>
+          <p:spPr>
+            <a:xfrm>
+              <a:off x="6788944" y="4455319"/>
+              <a:ext cx="90487" cy="95250"/>
+            </a:xfrm>
+            <a:prstGeom prst="rect">
+              <a:avLst/>
+            </a:prstGeom>
+            <a:solidFill>
+              <a:srgbClr val="FFC000"/>
+            </a:solidFill>
+          </p:spPr>
+          <p:style>
+            <a:lnRef idx="2">
+              <a:schemeClr val="accent1">
+                <a:shade val="15000"/>
+              </a:schemeClr>
+            </a:lnRef>
+            <a:fillRef idx="1">
+              <a:schemeClr val="accent1"/>
+            </a:fillRef>
+            <a:effectRef idx="0">
+              <a:schemeClr val="accent1"/>
+            </a:effectRef>
+            <a:fontRef idx="minor">
+              <a:schemeClr val="lt1"/>
+            </a:fontRef>
+          </p:style>
+          <p:txBody>
+            <a:bodyPr rtlCol="0" anchor="ctr"/>
+            <a:lstStyle/>
+            <a:p>
+              <a:pPr algn="ctr"/>
+              <a:endParaRPr lang="LID4096"/>
+            </a:p>
+          </p:txBody>
+        </p:sp>
+        <p:sp>
+          <p:nvSpPr>
+            <p:cNvPr id="79" name="Freeform: Shape 78">
+              <a:extLst>
+                <a:ext uri="{FF2B5EF4-FFF2-40B4-BE49-F238E27FC236}">
+                  <a16:creationId xmlns:a16="http://schemas.microsoft.com/office/drawing/2014/main" id="{32386D2F-EF23-2E06-478A-9D77E820B43F}"/>
+                </a:ext>
+              </a:extLst>
+            </p:cNvPr>
+            <p:cNvSpPr/>
+            <p:nvPr/>
+          </p:nvSpPr>
+          <p:spPr>
+            <a:xfrm>
+              <a:off x="6669881" y="4393406"/>
+              <a:ext cx="185737" cy="152400"/>
+            </a:xfrm>
+            <a:custGeom>
+              <a:avLst/>
+              <a:gdLst>
+                <a:gd name="connsiteX0" fmla="*/ 195263 w 195263"/>
+                <a:gd name="connsiteY0" fmla="*/ 57150 h 152400"/>
+                <a:gd name="connsiteX1" fmla="*/ 76200 w 195263"/>
+                <a:gd name="connsiteY1" fmla="*/ 0 h 152400"/>
+                <a:gd name="connsiteX2" fmla="*/ 0 w 195263"/>
+                <a:gd name="connsiteY2" fmla="*/ 7144 h 152400"/>
+                <a:gd name="connsiteX3" fmla="*/ 16669 w 195263"/>
+                <a:gd name="connsiteY3" fmla="*/ 85725 h 152400"/>
+                <a:gd name="connsiteX4" fmla="*/ 121444 w 195263"/>
+                <a:gd name="connsiteY4" fmla="*/ 152400 h 152400"/>
+                <a:gd name="connsiteX5" fmla="*/ 121444 w 195263"/>
+                <a:gd name="connsiteY5" fmla="*/ 57150 h 152400"/>
+                <a:gd name="connsiteX6" fmla="*/ 195263 w 195263"/>
+                <a:gd name="connsiteY6" fmla="*/ 57150 h 152400"/>
+                <a:gd name="connsiteX0" fmla="*/ 171450 w 171450"/>
+                <a:gd name="connsiteY0" fmla="*/ 59531 h 152400"/>
+                <a:gd name="connsiteX1" fmla="*/ 76200 w 171450"/>
+                <a:gd name="connsiteY1" fmla="*/ 0 h 152400"/>
+                <a:gd name="connsiteX2" fmla="*/ 0 w 171450"/>
+                <a:gd name="connsiteY2" fmla="*/ 7144 h 152400"/>
+                <a:gd name="connsiteX3" fmla="*/ 16669 w 171450"/>
+                <a:gd name="connsiteY3" fmla="*/ 85725 h 152400"/>
+                <a:gd name="connsiteX4" fmla="*/ 121444 w 171450"/>
+                <a:gd name="connsiteY4" fmla="*/ 152400 h 152400"/>
+                <a:gd name="connsiteX5" fmla="*/ 121444 w 171450"/>
+                <a:gd name="connsiteY5" fmla="*/ 57150 h 152400"/>
+                <a:gd name="connsiteX6" fmla="*/ 171450 w 171450"/>
+                <a:gd name="connsiteY6" fmla="*/ 59531 h 152400"/>
+                <a:gd name="connsiteX0" fmla="*/ 180975 w 180975"/>
+                <a:gd name="connsiteY0" fmla="*/ 61913 h 152400"/>
+                <a:gd name="connsiteX1" fmla="*/ 76200 w 180975"/>
+                <a:gd name="connsiteY1" fmla="*/ 0 h 152400"/>
+                <a:gd name="connsiteX2" fmla="*/ 0 w 180975"/>
+                <a:gd name="connsiteY2" fmla="*/ 7144 h 152400"/>
+                <a:gd name="connsiteX3" fmla="*/ 16669 w 180975"/>
+                <a:gd name="connsiteY3" fmla="*/ 85725 h 152400"/>
+                <a:gd name="connsiteX4" fmla="*/ 121444 w 180975"/>
+                <a:gd name="connsiteY4" fmla="*/ 152400 h 152400"/>
+                <a:gd name="connsiteX5" fmla="*/ 121444 w 180975"/>
+                <a:gd name="connsiteY5" fmla="*/ 57150 h 152400"/>
+                <a:gd name="connsiteX6" fmla="*/ 180975 w 180975"/>
+                <a:gd name="connsiteY6" fmla="*/ 61913 h 152400"/>
+                <a:gd name="connsiteX0" fmla="*/ 185737 w 185737"/>
+                <a:gd name="connsiteY0" fmla="*/ 57151 h 152400"/>
+                <a:gd name="connsiteX1" fmla="*/ 76200 w 185737"/>
+                <a:gd name="connsiteY1" fmla="*/ 0 h 152400"/>
+                <a:gd name="connsiteX2" fmla="*/ 0 w 185737"/>
+                <a:gd name="connsiteY2" fmla="*/ 7144 h 152400"/>
+                <a:gd name="connsiteX3" fmla="*/ 16669 w 185737"/>
+                <a:gd name="connsiteY3" fmla="*/ 85725 h 152400"/>
+                <a:gd name="connsiteX4" fmla="*/ 121444 w 185737"/>
+                <a:gd name="connsiteY4" fmla="*/ 152400 h 152400"/>
+                <a:gd name="connsiteX5" fmla="*/ 121444 w 185737"/>
+                <a:gd name="connsiteY5" fmla="*/ 57150 h 152400"/>
+                <a:gd name="connsiteX6" fmla="*/ 185737 w 185737"/>
+                <a:gd name="connsiteY6" fmla="*/ 57151 h 152400"/>
+              </a:gdLst>
+              <a:ahLst/>
+              <a:cxnLst>
+                <a:cxn ang="0">
+                  <a:pos x="connsiteX0" y="connsiteY0"/>
+                </a:cxn>
+                <a:cxn ang="0">
+                  <a:pos x="connsiteX1" y="connsiteY1"/>
+                </a:cxn>
+                <a:cxn ang="0">
+                  <a:pos x="connsiteX2" y="connsiteY2"/>
+                </a:cxn>
+                <a:cxn ang="0">
+                  <a:pos x="connsiteX3" y="connsiteY3"/>
+                </a:cxn>
+                <a:cxn ang="0">
+                  <a:pos x="connsiteX4" y="connsiteY4"/>
+                </a:cxn>
+                <a:cxn ang="0">
+                  <a:pos x="connsiteX5" y="connsiteY5"/>
+                </a:cxn>
+                <a:cxn ang="0">
+                  <a:pos x="connsiteX6" y="connsiteY6"/>
+                </a:cxn>
+              </a:cxnLst>
+              <a:rect l="l" t="t" r="r" b="b"/>
+              <a:pathLst>
+                <a:path w="185737" h="152400">
+                  <a:moveTo>
+                    <a:pt x="185737" y="57151"/>
+                  </a:moveTo>
+                  <a:lnTo>
+                    <a:pt x="76200" y="0"/>
+                  </a:lnTo>
+                  <a:lnTo>
+                    <a:pt x="0" y="7144"/>
+                  </a:lnTo>
+                  <a:lnTo>
+                    <a:pt x="16669" y="85725"/>
+                  </a:lnTo>
+                  <a:lnTo>
+                    <a:pt x="121444" y="152400"/>
+                  </a:lnTo>
+                  <a:lnTo>
+                    <a:pt x="121444" y="57150"/>
+                  </a:lnTo>
+                  <a:lnTo>
+                    <a:pt x="185737" y="57151"/>
+                  </a:lnTo>
+                  <a:close/>
+                </a:path>
+              </a:pathLst>
+            </a:custGeom>
+            <a:solidFill>
+              <a:schemeClr val="accent2">
+                <a:lumMod val="75000"/>
+              </a:schemeClr>
+            </a:solidFill>
+          </p:spPr>
+          <p:style>
+            <a:lnRef idx="2">
+              <a:schemeClr val="accent1">
+                <a:shade val="15000"/>
+              </a:schemeClr>
+            </a:lnRef>
+            <a:fillRef idx="1">
+              <a:schemeClr val="accent1"/>
+            </a:fillRef>
+            <a:effectRef idx="0">
+              <a:schemeClr val="accent1"/>
+            </a:effectRef>
+            <a:fontRef idx="minor">
+              <a:schemeClr val="lt1"/>
+            </a:fontRef>
+          </p:style>
+          <p:txBody>
+            <a:bodyPr rtlCol="0" anchor="ctr"/>
+            <a:lstStyle/>
+            <a:p>
+              <a:pPr algn="ctr"/>
+              <a:endParaRPr lang="LID4096"/>
+            </a:p>
+          </p:txBody>
+        </p:sp>
+      </p:grpSp>
+      <p:grpSp>
+        <p:nvGrpSpPr>
+          <p:cNvPr id="80" name="Group 79">
+            <a:extLst>
+              <a:ext uri="{FF2B5EF4-FFF2-40B4-BE49-F238E27FC236}">
+                <a16:creationId xmlns:a16="http://schemas.microsoft.com/office/drawing/2014/main" id="{C990B727-D7D6-2DB4-63C1-871636A014F6}"/>
+              </a:ext>
+            </a:extLst>
+          </p:cNvPr>
+          <p:cNvGrpSpPr/>
+          <p:nvPr/>
+        </p:nvGrpSpPr>
+        <p:grpSpPr>
+          <a:xfrm>
+            <a:off x="5786434" y="4873381"/>
+            <a:ext cx="209550" cy="157163"/>
+            <a:chOff x="6669881" y="4393406"/>
+            <a:chExt cx="209550" cy="157163"/>
+          </a:xfrm>
+        </p:grpSpPr>
+        <p:sp>
+          <p:nvSpPr>
+            <p:cNvPr id="81" name="Rectangle 80">
+              <a:extLst>
+                <a:ext uri="{FF2B5EF4-FFF2-40B4-BE49-F238E27FC236}">
+                  <a16:creationId xmlns:a16="http://schemas.microsoft.com/office/drawing/2014/main" id="{71070728-F7C5-1F96-C9DE-C3CD10968920}"/>
+                </a:ext>
+              </a:extLst>
+            </p:cNvPr>
+            <p:cNvSpPr/>
+            <p:nvPr/>
+          </p:nvSpPr>
+          <p:spPr>
+            <a:xfrm>
+              <a:off x="6788944" y="4455319"/>
+              <a:ext cx="90487" cy="95250"/>
+            </a:xfrm>
+            <a:prstGeom prst="rect">
+              <a:avLst/>
+            </a:prstGeom>
+            <a:solidFill>
+              <a:srgbClr val="FFC000"/>
+            </a:solidFill>
+          </p:spPr>
+          <p:style>
+            <a:lnRef idx="2">
+              <a:schemeClr val="accent1">
+                <a:shade val="15000"/>
+              </a:schemeClr>
+            </a:lnRef>
+            <a:fillRef idx="1">
+              <a:schemeClr val="accent1"/>
+            </a:fillRef>
+            <a:effectRef idx="0">
+              <a:schemeClr val="accent1"/>
+            </a:effectRef>
+            <a:fontRef idx="minor">
+              <a:schemeClr val="lt1"/>
+            </a:fontRef>
+          </p:style>
+          <p:txBody>
+            <a:bodyPr rtlCol="0" anchor="ctr"/>
+            <a:lstStyle/>
+            <a:p>
+              <a:pPr algn="ctr"/>
+              <a:endParaRPr lang="LID4096"/>
+            </a:p>
+          </p:txBody>
+        </p:sp>
+        <p:sp>
+          <p:nvSpPr>
+            <p:cNvPr id="82" name="Freeform: Shape 81">
+              <a:extLst>
+                <a:ext uri="{FF2B5EF4-FFF2-40B4-BE49-F238E27FC236}">
+                  <a16:creationId xmlns:a16="http://schemas.microsoft.com/office/drawing/2014/main" id="{47FC1878-C15C-87D0-760A-E65F2190382F}"/>
+                </a:ext>
+              </a:extLst>
+            </p:cNvPr>
+            <p:cNvSpPr/>
+            <p:nvPr/>
+          </p:nvSpPr>
+          <p:spPr>
+            <a:xfrm>
+              <a:off x="6669881" y="4393406"/>
+              <a:ext cx="185737" cy="152400"/>
+            </a:xfrm>
+            <a:custGeom>
+              <a:avLst/>
+              <a:gdLst>
+                <a:gd name="connsiteX0" fmla="*/ 195263 w 195263"/>
+                <a:gd name="connsiteY0" fmla="*/ 57150 h 152400"/>
+                <a:gd name="connsiteX1" fmla="*/ 76200 w 195263"/>
+                <a:gd name="connsiteY1" fmla="*/ 0 h 152400"/>
+                <a:gd name="connsiteX2" fmla="*/ 0 w 195263"/>
+                <a:gd name="connsiteY2" fmla="*/ 7144 h 152400"/>
+                <a:gd name="connsiteX3" fmla="*/ 16669 w 195263"/>
+                <a:gd name="connsiteY3" fmla="*/ 85725 h 152400"/>
+                <a:gd name="connsiteX4" fmla="*/ 121444 w 195263"/>
+                <a:gd name="connsiteY4" fmla="*/ 152400 h 152400"/>
+                <a:gd name="connsiteX5" fmla="*/ 121444 w 195263"/>
+                <a:gd name="connsiteY5" fmla="*/ 57150 h 152400"/>
+                <a:gd name="connsiteX6" fmla="*/ 195263 w 195263"/>
+                <a:gd name="connsiteY6" fmla="*/ 57150 h 152400"/>
+                <a:gd name="connsiteX0" fmla="*/ 171450 w 171450"/>
+                <a:gd name="connsiteY0" fmla="*/ 59531 h 152400"/>
+                <a:gd name="connsiteX1" fmla="*/ 76200 w 171450"/>
+                <a:gd name="connsiteY1" fmla="*/ 0 h 152400"/>
+                <a:gd name="connsiteX2" fmla="*/ 0 w 171450"/>
+                <a:gd name="connsiteY2" fmla="*/ 7144 h 152400"/>
+                <a:gd name="connsiteX3" fmla="*/ 16669 w 171450"/>
+                <a:gd name="connsiteY3" fmla="*/ 85725 h 152400"/>
+                <a:gd name="connsiteX4" fmla="*/ 121444 w 171450"/>
+                <a:gd name="connsiteY4" fmla="*/ 152400 h 152400"/>
+                <a:gd name="connsiteX5" fmla="*/ 121444 w 171450"/>
+                <a:gd name="connsiteY5" fmla="*/ 57150 h 152400"/>
+                <a:gd name="connsiteX6" fmla="*/ 171450 w 171450"/>
+                <a:gd name="connsiteY6" fmla="*/ 59531 h 152400"/>
+                <a:gd name="connsiteX0" fmla="*/ 180975 w 180975"/>
+                <a:gd name="connsiteY0" fmla="*/ 61913 h 152400"/>
+                <a:gd name="connsiteX1" fmla="*/ 76200 w 180975"/>
+                <a:gd name="connsiteY1" fmla="*/ 0 h 152400"/>
+                <a:gd name="connsiteX2" fmla="*/ 0 w 180975"/>
+                <a:gd name="connsiteY2" fmla="*/ 7144 h 152400"/>
+                <a:gd name="connsiteX3" fmla="*/ 16669 w 180975"/>
+                <a:gd name="connsiteY3" fmla="*/ 85725 h 152400"/>
+                <a:gd name="connsiteX4" fmla="*/ 121444 w 180975"/>
+                <a:gd name="connsiteY4" fmla="*/ 152400 h 152400"/>
+                <a:gd name="connsiteX5" fmla="*/ 121444 w 180975"/>
+                <a:gd name="connsiteY5" fmla="*/ 57150 h 152400"/>
+                <a:gd name="connsiteX6" fmla="*/ 180975 w 180975"/>
+                <a:gd name="connsiteY6" fmla="*/ 61913 h 152400"/>
+                <a:gd name="connsiteX0" fmla="*/ 185737 w 185737"/>
+                <a:gd name="connsiteY0" fmla="*/ 57151 h 152400"/>
+                <a:gd name="connsiteX1" fmla="*/ 76200 w 185737"/>
+                <a:gd name="connsiteY1" fmla="*/ 0 h 152400"/>
+                <a:gd name="connsiteX2" fmla="*/ 0 w 185737"/>
+                <a:gd name="connsiteY2" fmla="*/ 7144 h 152400"/>
+                <a:gd name="connsiteX3" fmla="*/ 16669 w 185737"/>
+                <a:gd name="connsiteY3" fmla="*/ 85725 h 152400"/>
+                <a:gd name="connsiteX4" fmla="*/ 121444 w 185737"/>
+                <a:gd name="connsiteY4" fmla="*/ 152400 h 152400"/>
+                <a:gd name="connsiteX5" fmla="*/ 121444 w 185737"/>
+                <a:gd name="connsiteY5" fmla="*/ 57150 h 152400"/>
+                <a:gd name="connsiteX6" fmla="*/ 185737 w 185737"/>
+                <a:gd name="connsiteY6" fmla="*/ 57151 h 152400"/>
+              </a:gdLst>
+              <a:ahLst/>
+              <a:cxnLst>
+                <a:cxn ang="0">
+                  <a:pos x="connsiteX0" y="connsiteY0"/>
+                </a:cxn>
+                <a:cxn ang="0">
+                  <a:pos x="connsiteX1" y="connsiteY1"/>
+                </a:cxn>
+                <a:cxn ang="0">
+                  <a:pos x="connsiteX2" y="connsiteY2"/>
+                </a:cxn>
+                <a:cxn ang="0">
+                  <a:pos x="connsiteX3" y="connsiteY3"/>
+                </a:cxn>
+                <a:cxn ang="0">
+                  <a:pos x="connsiteX4" y="connsiteY4"/>
+                </a:cxn>
+                <a:cxn ang="0">
+                  <a:pos x="connsiteX5" y="connsiteY5"/>
+                </a:cxn>
+                <a:cxn ang="0">
+                  <a:pos x="connsiteX6" y="connsiteY6"/>
+                </a:cxn>
+              </a:cxnLst>
+              <a:rect l="l" t="t" r="r" b="b"/>
+              <a:pathLst>
+                <a:path w="185737" h="152400">
+                  <a:moveTo>
+                    <a:pt x="185737" y="57151"/>
+                  </a:moveTo>
+                  <a:lnTo>
+                    <a:pt x="76200" y="0"/>
+                  </a:lnTo>
+                  <a:lnTo>
+                    <a:pt x="0" y="7144"/>
+                  </a:lnTo>
+                  <a:lnTo>
+                    <a:pt x="16669" y="85725"/>
+                  </a:lnTo>
+                  <a:lnTo>
+                    <a:pt x="121444" y="152400"/>
+                  </a:lnTo>
+                  <a:lnTo>
+                    <a:pt x="121444" y="57150"/>
+                  </a:lnTo>
+                  <a:lnTo>
+                    <a:pt x="185737" y="57151"/>
+                  </a:lnTo>
+                  <a:close/>
+                </a:path>
+              </a:pathLst>
+            </a:custGeom>
+            <a:solidFill>
+              <a:schemeClr val="accent2">
+                <a:lumMod val="75000"/>
+              </a:schemeClr>
+            </a:solidFill>
+          </p:spPr>
+          <p:style>
+            <a:lnRef idx="2">
+              <a:schemeClr val="accent1">
+                <a:shade val="15000"/>
+              </a:schemeClr>
+            </a:lnRef>
+            <a:fillRef idx="1">
+              <a:schemeClr val="accent1"/>
+            </a:fillRef>
+            <a:effectRef idx="0">
+              <a:schemeClr val="accent1"/>
+            </a:effectRef>
+            <a:fontRef idx="minor">
+              <a:schemeClr val="lt1"/>
+            </a:fontRef>
+          </p:style>
+          <p:txBody>
+            <a:bodyPr rtlCol="0" anchor="ctr"/>
+            <a:lstStyle/>
+            <a:p>
+              <a:pPr algn="ctr"/>
+              <a:endParaRPr lang="LID4096"/>
+            </a:p>
+          </p:txBody>
+        </p:sp>
+      </p:grpSp>
+      <p:grpSp>
+        <p:nvGrpSpPr>
+          <p:cNvPr id="83" name="Group 82">
+            <a:extLst>
+              <a:ext uri="{FF2B5EF4-FFF2-40B4-BE49-F238E27FC236}">
+                <a16:creationId xmlns:a16="http://schemas.microsoft.com/office/drawing/2014/main" id="{AEF940E3-F317-0C45-EA8C-E214355F2ABE}"/>
+              </a:ext>
+            </a:extLst>
+          </p:cNvPr>
+          <p:cNvGrpSpPr/>
+          <p:nvPr/>
+        </p:nvGrpSpPr>
+        <p:grpSpPr>
+          <a:xfrm>
+            <a:off x="6255540" y="4879128"/>
+            <a:ext cx="209550" cy="157163"/>
+            <a:chOff x="6669881" y="4393406"/>
+            <a:chExt cx="209550" cy="157163"/>
+          </a:xfrm>
+        </p:grpSpPr>
+        <p:sp>
+          <p:nvSpPr>
+            <p:cNvPr id="84" name="Rectangle 83">
+              <a:extLst>
+                <a:ext uri="{FF2B5EF4-FFF2-40B4-BE49-F238E27FC236}">
+                  <a16:creationId xmlns:a16="http://schemas.microsoft.com/office/drawing/2014/main" id="{07C8ECD6-08F4-D2FD-279C-751FF143CD91}"/>
+                </a:ext>
+              </a:extLst>
+            </p:cNvPr>
+            <p:cNvSpPr/>
+            <p:nvPr/>
+          </p:nvSpPr>
+          <p:spPr>
+            <a:xfrm>
+              <a:off x="6788944" y="4455319"/>
+              <a:ext cx="90487" cy="95250"/>
+            </a:xfrm>
+            <a:prstGeom prst="rect">
+              <a:avLst/>
+            </a:prstGeom>
+            <a:solidFill>
+              <a:srgbClr val="FFC000"/>
+            </a:solidFill>
+          </p:spPr>
+          <p:style>
+            <a:lnRef idx="2">
+              <a:schemeClr val="accent1">
+                <a:shade val="15000"/>
+              </a:schemeClr>
+            </a:lnRef>
+            <a:fillRef idx="1">
+              <a:schemeClr val="accent1"/>
+            </a:fillRef>
+            <a:effectRef idx="0">
+              <a:schemeClr val="accent1"/>
+            </a:effectRef>
+            <a:fontRef idx="minor">
+              <a:schemeClr val="lt1"/>
+            </a:fontRef>
+          </p:style>
+          <p:txBody>
+            <a:bodyPr rtlCol="0" anchor="ctr"/>
+            <a:lstStyle/>
+            <a:p>
+              <a:pPr algn="ctr"/>
+              <a:endParaRPr lang="LID4096"/>
+            </a:p>
+          </p:txBody>
+        </p:sp>
+        <p:sp>
+          <p:nvSpPr>
+            <p:cNvPr id="85" name="Freeform: Shape 84">
+              <a:extLst>
+                <a:ext uri="{FF2B5EF4-FFF2-40B4-BE49-F238E27FC236}">
+                  <a16:creationId xmlns:a16="http://schemas.microsoft.com/office/drawing/2014/main" id="{92C5A368-5553-425D-FAB9-124B63C21CDE}"/>
+                </a:ext>
+              </a:extLst>
+            </p:cNvPr>
+            <p:cNvSpPr/>
+            <p:nvPr/>
+          </p:nvSpPr>
+          <p:spPr>
+            <a:xfrm>
+              <a:off x="6669881" y="4393406"/>
+              <a:ext cx="185737" cy="152400"/>
+            </a:xfrm>
+            <a:custGeom>
+              <a:avLst/>
+              <a:gdLst>
+                <a:gd name="connsiteX0" fmla="*/ 195263 w 195263"/>
+                <a:gd name="connsiteY0" fmla="*/ 57150 h 152400"/>
+                <a:gd name="connsiteX1" fmla="*/ 76200 w 195263"/>
+                <a:gd name="connsiteY1" fmla="*/ 0 h 152400"/>
+                <a:gd name="connsiteX2" fmla="*/ 0 w 195263"/>
+                <a:gd name="connsiteY2" fmla="*/ 7144 h 152400"/>
+                <a:gd name="connsiteX3" fmla="*/ 16669 w 195263"/>
+                <a:gd name="connsiteY3" fmla="*/ 85725 h 152400"/>
+                <a:gd name="connsiteX4" fmla="*/ 121444 w 195263"/>
+                <a:gd name="connsiteY4" fmla="*/ 152400 h 152400"/>
+                <a:gd name="connsiteX5" fmla="*/ 121444 w 195263"/>
+                <a:gd name="connsiteY5" fmla="*/ 57150 h 152400"/>
+                <a:gd name="connsiteX6" fmla="*/ 195263 w 195263"/>
+                <a:gd name="connsiteY6" fmla="*/ 57150 h 152400"/>
+                <a:gd name="connsiteX0" fmla="*/ 171450 w 171450"/>
+                <a:gd name="connsiteY0" fmla="*/ 59531 h 152400"/>
+                <a:gd name="connsiteX1" fmla="*/ 76200 w 171450"/>
+                <a:gd name="connsiteY1" fmla="*/ 0 h 152400"/>
+                <a:gd name="connsiteX2" fmla="*/ 0 w 171450"/>
+                <a:gd name="connsiteY2" fmla="*/ 7144 h 152400"/>
+                <a:gd name="connsiteX3" fmla="*/ 16669 w 171450"/>
+                <a:gd name="connsiteY3" fmla="*/ 85725 h 152400"/>
+                <a:gd name="connsiteX4" fmla="*/ 121444 w 171450"/>
+                <a:gd name="connsiteY4" fmla="*/ 152400 h 152400"/>
+                <a:gd name="connsiteX5" fmla="*/ 121444 w 171450"/>
+                <a:gd name="connsiteY5" fmla="*/ 57150 h 152400"/>
+                <a:gd name="connsiteX6" fmla="*/ 171450 w 171450"/>
+                <a:gd name="connsiteY6" fmla="*/ 59531 h 152400"/>
+                <a:gd name="connsiteX0" fmla="*/ 180975 w 180975"/>
+                <a:gd name="connsiteY0" fmla="*/ 61913 h 152400"/>
+                <a:gd name="connsiteX1" fmla="*/ 76200 w 180975"/>
+                <a:gd name="connsiteY1" fmla="*/ 0 h 152400"/>
+                <a:gd name="connsiteX2" fmla="*/ 0 w 180975"/>
+                <a:gd name="connsiteY2" fmla="*/ 7144 h 152400"/>
+                <a:gd name="connsiteX3" fmla="*/ 16669 w 180975"/>
+                <a:gd name="connsiteY3" fmla="*/ 85725 h 152400"/>
+                <a:gd name="connsiteX4" fmla="*/ 121444 w 180975"/>
+                <a:gd name="connsiteY4" fmla="*/ 152400 h 152400"/>
+                <a:gd name="connsiteX5" fmla="*/ 121444 w 180975"/>
+                <a:gd name="connsiteY5" fmla="*/ 57150 h 152400"/>
+                <a:gd name="connsiteX6" fmla="*/ 180975 w 180975"/>
+                <a:gd name="connsiteY6" fmla="*/ 61913 h 152400"/>
+                <a:gd name="connsiteX0" fmla="*/ 185737 w 185737"/>
+                <a:gd name="connsiteY0" fmla="*/ 57151 h 152400"/>
+                <a:gd name="connsiteX1" fmla="*/ 76200 w 185737"/>
+                <a:gd name="connsiteY1" fmla="*/ 0 h 152400"/>
+                <a:gd name="connsiteX2" fmla="*/ 0 w 185737"/>
+                <a:gd name="connsiteY2" fmla="*/ 7144 h 152400"/>
+                <a:gd name="connsiteX3" fmla="*/ 16669 w 185737"/>
+                <a:gd name="connsiteY3" fmla="*/ 85725 h 152400"/>
+                <a:gd name="connsiteX4" fmla="*/ 121444 w 185737"/>
+                <a:gd name="connsiteY4" fmla="*/ 152400 h 152400"/>
+                <a:gd name="connsiteX5" fmla="*/ 121444 w 185737"/>
+                <a:gd name="connsiteY5" fmla="*/ 57150 h 152400"/>
+                <a:gd name="connsiteX6" fmla="*/ 185737 w 185737"/>
+                <a:gd name="connsiteY6" fmla="*/ 57151 h 152400"/>
+              </a:gdLst>
+              <a:ahLst/>
+              <a:cxnLst>
+                <a:cxn ang="0">
+                  <a:pos x="connsiteX0" y="connsiteY0"/>
+                </a:cxn>
+                <a:cxn ang="0">
+                  <a:pos x="connsiteX1" y="connsiteY1"/>
+                </a:cxn>
+                <a:cxn ang="0">
+                  <a:pos x="connsiteX2" y="connsiteY2"/>
+                </a:cxn>
+                <a:cxn ang="0">
+                  <a:pos x="connsiteX3" y="connsiteY3"/>
+                </a:cxn>
+                <a:cxn ang="0">
+                  <a:pos x="connsiteX4" y="connsiteY4"/>
+                </a:cxn>
+                <a:cxn ang="0">
+                  <a:pos x="connsiteX5" y="connsiteY5"/>
+                </a:cxn>
+                <a:cxn ang="0">
+                  <a:pos x="connsiteX6" y="connsiteY6"/>
+                </a:cxn>
+              </a:cxnLst>
+              <a:rect l="l" t="t" r="r" b="b"/>
+              <a:pathLst>
+                <a:path w="185737" h="152400">
+                  <a:moveTo>
+                    <a:pt x="185737" y="57151"/>
+                  </a:moveTo>
+                  <a:lnTo>
+                    <a:pt x="76200" y="0"/>
+                  </a:lnTo>
+                  <a:lnTo>
+                    <a:pt x="0" y="7144"/>
+                  </a:lnTo>
+                  <a:lnTo>
+                    <a:pt x="16669" y="85725"/>
+                  </a:lnTo>
+                  <a:lnTo>
+                    <a:pt x="121444" y="152400"/>
+                  </a:lnTo>
+                  <a:lnTo>
+                    <a:pt x="121444" y="57150"/>
+                  </a:lnTo>
+                  <a:lnTo>
+                    <a:pt x="185737" y="57151"/>
+                  </a:lnTo>
+                  <a:close/>
+                </a:path>
+              </a:pathLst>
+            </a:custGeom>
+            <a:solidFill>
+              <a:schemeClr val="accent2">
+                <a:lumMod val="75000"/>
+              </a:schemeClr>
+            </a:solidFill>
+          </p:spPr>
+          <p:style>
+            <a:lnRef idx="2">
+              <a:schemeClr val="accent1">
+                <a:shade val="15000"/>
+              </a:schemeClr>
+            </a:lnRef>
+            <a:fillRef idx="1">
+              <a:schemeClr val="accent1"/>
+            </a:fillRef>
+            <a:effectRef idx="0">
+              <a:schemeClr val="accent1"/>
+            </a:effectRef>
+            <a:fontRef idx="minor">
+              <a:schemeClr val="lt1"/>
+            </a:fontRef>
+          </p:style>
+          <p:txBody>
+            <a:bodyPr rtlCol="0" anchor="ctr"/>
+            <a:lstStyle/>
+            <a:p>
+              <a:pPr algn="ctr"/>
+              <a:endParaRPr lang="LID4096"/>
+            </a:p>
+          </p:txBody>
+        </p:sp>
+      </p:grpSp>
+      <p:grpSp>
+        <p:nvGrpSpPr>
+          <p:cNvPr id="86" name="Group 85">
+            <a:extLst>
+              <a:ext uri="{FF2B5EF4-FFF2-40B4-BE49-F238E27FC236}">
+                <a16:creationId xmlns:a16="http://schemas.microsoft.com/office/drawing/2014/main" id="{3190253D-8883-D003-A0F5-01BC0866B5E4}"/>
+              </a:ext>
+            </a:extLst>
+          </p:cNvPr>
+          <p:cNvGrpSpPr/>
+          <p:nvPr/>
+        </p:nvGrpSpPr>
+        <p:grpSpPr>
+          <a:xfrm>
+            <a:off x="6698448" y="4868618"/>
+            <a:ext cx="209550" cy="157163"/>
+            <a:chOff x="6669881" y="4393406"/>
+            <a:chExt cx="209550" cy="157163"/>
+          </a:xfrm>
+        </p:grpSpPr>
+        <p:sp>
+          <p:nvSpPr>
+            <p:cNvPr id="87" name="Rectangle 86">
+              <a:extLst>
+                <a:ext uri="{FF2B5EF4-FFF2-40B4-BE49-F238E27FC236}">
+                  <a16:creationId xmlns:a16="http://schemas.microsoft.com/office/drawing/2014/main" id="{3F93CBFD-2233-22D3-B6F2-E4539821BB6B}"/>
+                </a:ext>
+              </a:extLst>
+            </p:cNvPr>
+            <p:cNvSpPr/>
+            <p:nvPr/>
+          </p:nvSpPr>
+          <p:spPr>
+            <a:xfrm>
+              <a:off x="6788944" y="4455319"/>
+              <a:ext cx="90487" cy="95250"/>
+            </a:xfrm>
+            <a:prstGeom prst="rect">
+              <a:avLst/>
+            </a:prstGeom>
+            <a:solidFill>
+              <a:srgbClr val="FFC000"/>
+            </a:solidFill>
+          </p:spPr>
+          <p:style>
+            <a:lnRef idx="2">
+              <a:schemeClr val="accent1">
+                <a:shade val="15000"/>
+              </a:schemeClr>
+            </a:lnRef>
+            <a:fillRef idx="1">
+              <a:schemeClr val="accent1"/>
+            </a:fillRef>
+            <a:effectRef idx="0">
+              <a:schemeClr val="accent1"/>
+            </a:effectRef>
+            <a:fontRef idx="minor">
+              <a:schemeClr val="lt1"/>
+            </a:fontRef>
+          </p:style>
+          <p:txBody>
+            <a:bodyPr rtlCol="0" anchor="ctr"/>
+            <a:lstStyle/>
+            <a:p>
+              <a:pPr algn="ctr"/>
+              <a:endParaRPr lang="LID4096"/>
+            </a:p>
+          </p:txBody>
+        </p:sp>
+        <p:sp>
+          <p:nvSpPr>
+            <p:cNvPr id="88" name="Freeform: Shape 87">
+              <a:extLst>
+                <a:ext uri="{FF2B5EF4-FFF2-40B4-BE49-F238E27FC236}">
+                  <a16:creationId xmlns:a16="http://schemas.microsoft.com/office/drawing/2014/main" id="{AAEC7B42-B370-9788-FF06-4C6F6997CBBA}"/>
+                </a:ext>
+              </a:extLst>
+            </p:cNvPr>
+            <p:cNvSpPr/>
+            <p:nvPr/>
+          </p:nvSpPr>
+          <p:spPr>
+            <a:xfrm>
+              <a:off x="6669881" y="4393406"/>
+              <a:ext cx="185737" cy="152400"/>
+            </a:xfrm>
+            <a:custGeom>
+              <a:avLst/>
+              <a:gdLst>
+                <a:gd name="connsiteX0" fmla="*/ 195263 w 195263"/>
+                <a:gd name="connsiteY0" fmla="*/ 57150 h 152400"/>
+                <a:gd name="connsiteX1" fmla="*/ 76200 w 195263"/>
+                <a:gd name="connsiteY1" fmla="*/ 0 h 152400"/>
+                <a:gd name="connsiteX2" fmla="*/ 0 w 195263"/>
+                <a:gd name="connsiteY2" fmla="*/ 7144 h 152400"/>
+                <a:gd name="connsiteX3" fmla="*/ 16669 w 195263"/>
+                <a:gd name="connsiteY3" fmla="*/ 85725 h 152400"/>
+                <a:gd name="connsiteX4" fmla="*/ 121444 w 195263"/>
+                <a:gd name="connsiteY4" fmla="*/ 152400 h 152400"/>
+                <a:gd name="connsiteX5" fmla="*/ 121444 w 195263"/>
+                <a:gd name="connsiteY5" fmla="*/ 57150 h 152400"/>
+                <a:gd name="connsiteX6" fmla="*/ 195263 w 195263"/>
+                <a:gd name="connsiteY6" fmla="*/ 57150 h 152400"/>
+                <a:gd name="connsiteX0" fmla="*/ 171450 w 171450"/>
+                <a:gd name="connsiteY0" fmla="*/ 59531 h 152400"/>
+                <a:gd name="connsiteX1" fmla="*/ 76200 w 171450"/>
+                <a:gd name="connsiteY1" fmla="*/ 0 h 152400"/>
+                <a:gd name="connsiteX2" fmla="*/ 0 w 171450"/>
+                <a:gd name="connsiteY2" fmla="*/ 7144 h 152400"/>
+                <a:gd name="connsiteX3" fmla="*/ 16669 w 171450"/>
+                <a:gd name="connsiteY3" fmla="*/ 85725 h 152400"/>
+                <a:gd name="connsiteX4" fmla="*/ 121444 w 171450"/>
+                <a:gd name="connsiteY4" fmla="*/ 152400 h 152400"/>
+                <a:gd name="connsiteX5" fmla="*/ 121444 w 171450"/>
+                <a:gd name="connsiteY5" fmla="*/ 57150 h 152400"/>
+                <a:gd name="connsiteX6" fmla="*/ 171450 w 171450"/>
+                <a:gd name="connsiteY6" fmla="*/ 59531 h 152400"/>
+                <a:gd name="connsiteX0" fmla="*/ 180975 w 180975"/>
+                <a:gd name="connsiteY0" fmla="*/ 61913 h 152400"/>
+                <a:gd name="connsiteX1" fmla="*/ 76200 w 180975"/>
+                <a:gd name="connsiteY1" fmla="*/ 0 h 152400"/>
+                <a:gd name="connsiteX2" fmla="*/ 0 w 180975"/>
+                <a:gd name="connsiteY2" fmla="*/ 7144 h 152400"/>
+                <a:gd name="connsiteX3" fmla="*/ 16669 w 180975"/>
+                <a:gd name="connsiteY3" fmla="*/ 85725 h 152400"/>
+                <a:gd name="connsiteX4" fmla="*/ 121444 w 180975"/>
+                <a:gd name="connsiteY4" fmla="*/ 152400 h 152400"/>
+                <a:gd name="connsiteX5" fmla="*/ 121444 w 180975"/>
+                <a:gd name="connsiteY5" fmla="*/ 57150 h 152400"/>
+                <a:gd name="connsiteX6" fmla="*/ 180975 w 180975"/>
+                <a:gd name="connsiteY6" fmla="*/ 61913 h 152400"/>
+                <a:gd name="connsiteX0" fmla="*/ 185737 w 185737"/>
+                <a:gd name="connsiteY0" fmla="*/ 57151 h 152400"/>
+                <a:gd name="connsiteX1" fmla="*/ 76200 w 185737"/>
+                <a:gd name="connsiteY1" fmla="*/ 0 h 152400"/>
+                <a:gd name="connsiteX2" fmla="*/ 0 w 185737"/>
+                <a:gd name="connsiteY2" fmla="*/ 7144 h 152400"/>
+                <a:gd name="connsiteX3" fmla="*/ 16669 w 185737"/>
+                <a:gd name="connsiteY3" fmla="*/ 85725 h 152400"/>
+                <a:gd name="connsiteX4" fmla="*/ 121444 w 185737"/>
+                <a:gd name="connsiteY4" fmla="*/ 152400 h 152400"/>
+                <a:gd name="connsiteX5" fmla="*/ 121444 w 185737"/>
+                <a:gd name="connsiteY5" fmla="*/ 57150 h 152400"/>
+                <a:gd name="connsiteX6" fmla="*/ 185737 w 185737"/>
+                <a:gd name="connsiteY6" fmla="*/ 57151 h 152400"/>
+              </a:gdLst>
+              <a:ahLst/>
+              <a:cxnLst>
+                <a:cxn ang="0">
+                  <a:pos x="connsiteX0" y="connsiteY0"/>
+                </a:cxn>
+                <a:cxn ang="0">
+                  <a:pos x="connsiteX1" y="connsiteY1"/>
+                </a:cxn>
+                <a:cxn ang="0">
+                  <a:pos x="connsiteX2" y="connsiteY2"/>
+                </a:cxn>
+                <a:cxn ang="0">
+                  <a:pos x="connsiteX3" y="connsiteY3"/>
+                </a:cxn>
+                <a:cxn ang="0">
+                  <a:pos x="connsiteX4" y="connsiteY4"/>
+                </a:cxn>
+                <a:cxn ang="0">
+                  <a:pos x="connsiteX5" y="connsiteY5"/>
+                </a:cxn>
+                <a:cxn ang="0">
+                  <a:pos x="connsiteX6" y="connsiteY6"/>
+                </a:cxn>
+              </a:cxnLst>
+              <a:rect l="l" t="t" r="r" b="b"/>
+              <a:pathLst>
+                <a:path w="185737" h="152400">
+                  <a:moveTo>
+                    <a:pt x="185737" y="57151"/>
+                  </a:moveTo>
+                  <a:lnTo>
+                    <a:pt x="76200" y="0"/>
+                  </a:lnTo>
+                  <a:lnTo>
+                    <a:pt x="0" y="7144"/>
+                  </a:lnTo>
+                  <a:lnTo>
+                    <a:pt x="16669" y="85725"/>
+                  </a:lnTo>
+                  <a:lnTo>
+                    <a:pt x="121444" y="152400"/>
+                  </a:lnTo>
+                  <a:lnTo>
+                    <a:pt x="121444" y="57150"/>
+                  </a:lnTo>
+                  <a:lnTo>
+                    <a:pt x="185737" y="57151"/>
+                  </a:lnTo>
+                  <a:close/>
+                </a:path>
+              </a:pathLst>
+            </a:custGeom>
+            <a:solidFill>
+              <a:schemeClr val="accent2">
+                <a:lumMod val="75000"/>
+              </a:schemeClr>
+            </a:solidFill>
+          </p:spPr>
+          <p:style>
+            <a:lnRef idx="2">
+              <a:schemeClr val="accent1">
+                <a:shade val="15000"/>
+              </a:schemeClr>
+            </a:lnRef>
+            <a:fillRef idx="1">
+              <a:schemeClr val="accent1"/>
+            </a:fillRef>
+            <a:effectRef idx="0">
+              <a:schemeClr val="accent1"/>
+            </a:effectRef>
+            <a:fontRef idx="minor">
+              <a:schemeClr val="lt1"/>
+            </a:fontRef>
+          </p:style>
+          <p:txBody>
+            <a:bodyPr rtlCol="0" anchor="ctr"/>
+            <a:lstStyle/>
+            <a:p>
+              <a:pPr algn="ctr"/>
+              <a:endParaRPr lang="LID4096"/>
+            </a:p>
+          </p:txBody>
+        </p:sp>
+      </p:grpSp>
+      <p:cxnSp>
+        <p:nvCxnSpPr>
+          <p:cNvPr id="91" name="Straight Connector 90">
+            <a:extLst>
+              <a:ext uri="{FF2B5EF4-FFF2-40B4-BE49-F238E27FC236}">
+                <a16:creationId xmlns:a16="http://schemas.microsoft.com/office/drawing/2014/main" id="{95C30C3B-4ED3-2A6A-8C6B-BABB356AAFA0}"/>
+              </a:ext>
+            </a:extLst>
+          </p:cNvPr>
+          <p:cNvCxnSpPr>
+            <a:cxnSpLocks/>
+            <a:endCxn id="92" idx="0"/>
+          </p:cNvCxnSpPr>
+          <p:nvPr/>
+        </p:nvCxnSpPr>
+        <p:spPr>
+          <a:xfrm flipH="1">
+            <a:off x="4825884" y="5172671"/>
+            <a:ext cx="5111" cy="1056158"/>
+          </a:xfrm>
+          <a:prstGeom prst="line">
+            <a:avLst/>
+          </a:prstGeom>
+          <a:ln w="50800">
+            <a:solidFill>
+              <a:schemeClr val="bg1">
+                <a:lumMod val="75000"/>
+              </a:schemeClr>
+            </a:solidFill>
+          </a:ln>
+        </p:spPr>
+        <p:style>
+          <a:lnRef idx="2">
+            <a:schemeClr val="accent1"/>
+          </a:lnRef>
+          <a:fillRef idx="0">
+            <a:schemeClr val="accent1"/>
+          </a:fillRef>
+          <a:effectRef idx="1">
+            <a:schemeClr val="accent1"/>
+          </a:effectRef>
+          <a:fontRef idx="minor">
+            <a:schemeClr val="tx1"/>
+          </a:fontRef>
+        </p:style>
+      </p:cxnSp>
+      <p:sp>
+        <p:nvSpPr>
+          <p:cNvPr id="92" name="TextBox 91">
+            <a:extLst>
+              <a:ext uri="{FF2B5EF4-FFF2-40B4-BE49-F238E27FC236}">
+                <a16:creationId xmlns:a16="http://schemas.microsoft.com/office/drawing/2014/main" id="{A1EDEB9A-06BF-364F-5F16-73D2A55190A8}"/>
+              </a:ext>
+            </a:extLst>
+          </p:cNvPr>
+          <p:cNvSpPr txBox="1"/>
+          <p:nvPr/>
+        </p:nvSpPr>
+        <p:spPr>
+          <a:xfrm>
+            <a:off x="4485887" y="6228829"/>
+            <a:ext cx="679994" cy="369332"/>
+          </a:xfrm>
+          <a:prstGeom prst="rect">
+            <a:avLst/>
+          </a:prstGeom>
+          <a:noFill/>
+        </p:spPr>
+        <p:txBody>
+          <a:bodyPr wrap="none" rtlCol="0">
+            <a:spAutoFit/>
+          </a:bodyPr>
+          <a:lstStyle/>
+          <a:p>
+            <a:r>
+              <a:rPr lang="sv-SE" b="1" dirty="0"/>
+              <a:t>GND</a:t>
+            </a:r>
+            <a:endParaRPr lang="LID4096" b="1" dirty="0"/>
+          </a:p>
+        </p:txBody>
+      </p:sp>
+      <p:cxnSp>
+        <p:nvCxnSpPr>
+          <p:cNvPr id="93" name="Straight Connector 92">
+            <a:extLst>
+              <a:ext uri="{FF2B5EF4-FFF2-40B4-BE49-F238E27FC236}">
+                <a16:creationId xmlns:a16="http://schemas.microsoft.com/office/drawing/2014/main" id="{AC3473B5-C156-1E8D-638B-97739C0E5687}"/>
+              </a:ext>
+            </a:extLst>
+          </p:cNvPr>
+          <p:cNvCxnSpPr>
+            <a:cxnSpLocks/>
+          </p:cNvCxnSpPr>
+          <p:nvPr/>
+        </p:nvCxnSpPr>
+        <p:spPr>
+          <a:xfrm>
+            <a:off x="6761420" y="2595397"/>
+            <a:ext cx="27524" cy="1673166"/>
+          </a:xfrm>
+          <a:prstGeom prst="line">
+            <a:avLst/>
+          </a:prstGeom>
+          <a:ln w="50800">
+            <a:solidFill>
+              <a:schemeClr val="bg1">
+                <a:lumMod val="75000"/>
+              </a:schemeClr>
+            </a:solidFill>
+          </a:ln>
+        </p:spPr>
+        <p:style>
+          <a:lnRef idx="2">
+            <a:schemeClr val="accent1"/>
+          </a:lnRef>
+          <a:fillRef idx="0">
+            <a:schemeClr val="accent1"/>
+          </a:fillRef>
+          <a:effectRef idx="1">
+            <a:schemeClr val="accent1"/>
+          </a:effectRef>
+          <a:fontRef idx="minor">
+            <a:schemeClr val="tx1"/>
+          </a:fontRef>
+        </p:style>
+      </p:cxnSp>
+      <p:sp>
+        <p:nvSpPr>
+          <p:cNvPr id="96" name="TextBox 95">
+            <a:extLst>
+              <a:ext uri="{FF2B5EF4-FFF2-40B4-BE49-F238E27FC236}">
+                <a16:creationId xmlns:a16="http://schemas.microsoft.com/office/drawing/2014/main" id="{2EC93A78-4DCB-8B19-B7F3-F3450CC405DD}"/>
+              </a:ext>
+            </a:extLst>
+          </p:cNvPr>
+          <p:cNvSpPr txBox="1"/>
+          <p:nvPr/>
+        </p:nvSpPr>
+        <p:spPr>
+          <a:xfrm>
+            <a:off x="6434137" y="2180793"/>
+            <a:ext cx="643125" cy="369332"/>
+          </a:xfrm>
+          <a:prstGeom prst="rect">
+            <a:avLst/>
+          </a:prstGeom>
+          <a:noFill/>
+        </p:spPr>
+        <p:txBody>
+          <a:bodyPr wrap="none" rtlCol="0">
+            <a:spAutoFit/>
+          </a:bodyPr>
+          <a:lstStyle/>
+          <a:p>
+            <a:r>
+              <a:rPr lang="sv-SE" b="1" dirty="0"/>
+              <a:t>3.3V</a:t>
+            </a:r>
+            <a:endParaRPr lang="LID4096" b="1" dirty="0"/>
+          </a:p>
+        </p:txBody>
+      </p:sp>
+      <p:cxnSp>
+        <p:nvCxnSpPr>
+          <p:cNvPr id="97" name="Straight Connector 96">
+            <a:extLst>
+              <a:ext uri="{FF2B5EF4-FFF2-40B4-BE49-F238E27FC236}">
+                <a16:creationId xmlns:a16="http://schemas.microsoft.com/office/drawing/2014/main" id="{7A278C3B-EE4A-376E-C2DA-0E305C001320}"/>
+              </a:ext>
+            </a:extLst>
+          </p:cNvPr>
+          <p:cNvCxnSpPr>
+            <a:cxnSpLocks/>
+          </p:cNvCxnSpPr>
+          <p:nvPr/>
+        </p:nvCxnSpPr>
+        <p:spPr>
+          <a:xfrm>
+            <a:off x="4825884" y="2723465"/>
+            <a:ext cx="0" cy="1545098"/>
+          </a:xfrm>
+          <a:prstGeom prst="line">
+            <a:avLst/>
+          </a:prstGeom>
+          <a:ln w="50800">
+            <a:solidFill>
+              <a:schemeClr val="bg1">
+                <a:lumMod val="75000"/>
+              </a:schemeClr>
+            </a:solidFill>
+          </a:ln>
+        </p:spPr>
+        <p:style>
+          <a:lnRef idx="2">
+            <a:schemeClr val="accent1"/>
+          </a:lnRef>
+          <a:fillRef idx="0">
+            <a:schemeClr val="accent1"/>
+          </a:fillRef>
+          <a:effectRef idx="1">
+            <a:schemeClr val="accent1"/>
+          </a:effectRef>
+          <a:fontRef idx="minor">
+            <a:schemeClr val="tx1"/>
+          </a:fontRef>
+        </p:style>
+      </p:cxnSp>
+      <p:sp>
+        <p:nvSpPr>
+          <p:cNvPr id="98" name="TextBox 97">
+            <a:extLst>
+              <a:ext uri="{FF2B5EF4-FFF2-40B4-BE49-F238E27FC236}">
+                <a16:creationId xmlns:a16="http://schemas.microsoft.com/office/drawing/2014/main" id="{1F974211-45F4-5E26-A538-77BB5B9BA199}"/>
+              </a:ext>
+            </a:extLst>
+          </p:cNvPr>
+          <p:cNvSpPr txBox="1"/>
+          <p:nvPr/>
+        </p:nvSpPr>
+        <p:spPr>
+          <a:xfrm>
+            <a:off x="4532888" y="2417653"/>
+            <a:ext cx="587020" cy="369332"/>
+          </a:xfrm>
+          <a:prstGeom prst="rect">
+            <a:avLst/>
+          </a:prstGeom>
+          <a:noFill/>
+        </p:spPr>
+        <p:txBody>
+          <a:bodyPr wrap="none" rtlCol="0">
+            <a:spAutoFit/>
+          </a:bodyPr>
+          <a:lstStyle/>
+          <a:p>
+            <a:r>
+              <a:rPr lang="sv-SE" b="1" dirty="0"/>
+              <a:t>bit0</a:t>
+            </a:r>
+            <a:endParaRPr lang="LID4096" b="1" dirty="0"/>
+          </a:p>
+        </p:txBody>
+      </p:sp>
+      <p:cxnSp>
+        <p:nvCxnSpPr>
+          <p:cNvPr id="99" name="Straight Connector 98">
+            <a:extLst>
+              <a:ext uri="{FF2B5EF4-FFF2-40B4-BE49-F238E27FC236}">
+                <a16:creationId xmlns:a16="http://schemas.microsoft.com/office/drawing/2014/main" id="{1045091D-C324-E614-B1F3-4E9C3A890772}"/>
+              </a:ext>
+            </a:extLst>
+          </p:cNvPr>
+          <p:cNvCxnSpPr>
+            <a:cxnSpLocks/>
+          </p:cNvCxnSpPr>
+          <p:nvPr/>
+        </p:nvCxnSpPr>
+        <p:spPr>
+          <a:xfrm>
+            <a:off x="5361119" y="2723465"/>
+            <a:ext cx="0" cy="1545098"/>
+          </a:xfrm>
+          <a:prstGeom prst="line">
+            <a:avLst/>
+          </a:prstGeom>
+          <a:ln w="50800">
+            <a:solidFill>
+              <a:schemeClr val="bg1">
+                <a:lumMod val="75000"/>
+              </a:schemeClr>
+            </a:solidFill>
+          </a:ln>
+        </p:spPr>
+        <p:style>
+          <a:lnRef idx="2">
+            <a:schemeClr val="accent1"/>
+          </a:lnRef>
+          <a:fillRef idx="0">
+            <a:schemeClr val="accent1"/>
+          </a:fillRef>
+          <a:effectRef idx="1">
+            <a:schemeClr val="accent1"/>
+          </a:effectRef>
+          <a:fontRef idx="minor">
+            <a:schemeClr val="tx1"/>
+          </a:fontRef>
+        </p:style>
+      </p:cxnSp>
+      <p:sp>
+        <p:nvSpPr>
+          <p:cNvPr id="100" name="TextBox 99">
+            <a:extLst>
+              <a:ext uri="{FF2B5EF4-FFF2-40B4-BE49-F238E27FC236}">
+                <a16:creationId xmlns:a16="http://schemas.microsoft.com/office/drawing/2014/main" id="{32A9533B-39A3-D488-54B1-27590AD2344B}"/>
+              </a:ext>
+            </a:extLst>
+          </p:cNvPr>
+          <p:cNvSpPr txBox="1"/>
+          <p:nvPr/>
+        </p:nvSpPr>
+        <p:spPr>
+          <a:xfrm>
+            <a:off x="5068123" y="2417653"/>
+            <a:ext cx="587020" cy="369332"/>
+          </a:xfrm>
+          <a:prstGeom prst="rect">
+            <a:avLst/>
+          </a:prstGeom>
+          <a:noFill/>
+        </p:spPr>
+        <p:txBody>
+          <a:bodyPr wrap="none" rtlCol="0">
+            <a:spAutoFit/>
+          </a:bodyPr>
+          <a:lstStyle/>
+          <a:p>
+            <a:r>
+              <a:rPr lang="sv-SE" b="1" dirty="0"/>
+              <a:t>bit2</a:t>
+            </a:r>
+            <a:endParaRPr lang="LID4096" b="1" dirty="0"/>
+          </a:p>
+        </p:txBody>
+      </p:sp>
+      <p:cxnSp>
+        <p:nvCxnSpPr>
+          <p:cNvPr id="102" name="Straight Connector 101">
+            <a:extLst>
+              <a:ext uri="{FF2B5EF4-FFF2-40B4-BE49-F238E27FC236}">
+                <a16:creationId xmlns:a16="http://schemas.microsoft.com/office/drawing/2014/main" id="{89EBB79D-80D2-39AB-50EB-2209FDA8C7A1}"/>
+              </a:ext>
+            </a:extLst>
+          </p:cNvPr>
+          <p:cNvCxnSpPr>
+            <a:cxnSpLocks/>
+          </p:cNvCxnSpPr>
+          <p:nvPr/>
+        </p:nvCxnSpPr>
+        <p:spPr>
+          <a:xfrm>
+            <a:off x="5880391" y="2723465"/>
+            <a:ext cx="0" cy="1545098"/>
+          </a:xfrm>
+          <a:prstGeom prst="line">
+            <a:avLst/>
+          </a:prstGeom>
+          <a:ln w="50800">
+            <a:solidFill>
+              <a:schemeClr val="bg1">
+                <a:lumMod val="75000"/>
+              </a:schemeClr>
+            </a:solidFill>
+          </a:ln>
+        </p:spPr>
+        <p:style>
+          <a:lnRef idx="2">
+            <a:schemeClr val="accent1"/>
+          </a:lnRef>
+          <a:fillRef idx="0">
+            <a:schemeClr val="accent1"/>
+          </a:fillRef>
+          <a:effectRef idx="1">
+            <a:schemeClr val="accent1"/>
+          </a:effectRef>
+          <a:fontRef idx="minor">
+            <a:schemeClr val="tx1"/>
+          </a:fontRef>
+        </p:style>
+      </p:cxnSp>
+      <p:sp>
+        <p:nvSpPr>
+          <p:cNvPr id="103" name="TextBox 102">
+            <a:extLst>
+              <a:ext uri="{FF2B5EF4-FFF2-40B4-BE49-F238E27FC236}">
+                <a16:creationId xmlns:a16="http://schemas.microsoft.com/office/drawing/2014/main" id="{971B4834-6BF6-D3A6-E125-AEF52187C6D5}"/>
+              </a:ext>
+            </a:extLst>
+          </p:cNvPr>
+          <p:cNvSpPr txBox="1"/>
+          <p:nvPr/>
+        </p:nvSpPr>
+        <p:spPr>
+          <a:xfrm>
+            <a:off x="5587395" y="2417653"/>
+            <a:ext cx="587020" cy="369332"/>
+          </a:xfrm>
+          <a:prstGeom prst="rect">
+            <a:avLst/>
+          </a:prstGeom>
+          <a:noFill/>
+        </p:spPr>
+        <p:txBody>
+          <a:bodyPr wrap="none" rtlCol="0">
+            <a:spAutoFit/>
+          </a:bodyPr>
+          <a:lstStyle/>
+          <a:p>
+            <a:r>
+              <a:rPr lang="sv-SE" b="1" dirty="0"/>
+              <a:t>bit4</a:t>
+            </a:r>
+            <a:endParaRPr lang="LID4096" b="1" dirty="0"/>
+          </a:p>
+        </p:txBody>
+      </p:sp>
+      <p:cxnSp>
+        <p:nvCxnSpPr>
+          <p:cNvPr id="105" name="Straight Connector 104">
+            <a:extLst>
+              <a:ext uri="{FF2B5EF4-FFF2-40B4-BE49-F238E27FC236}">
+                <a16:creationId xmlns:a16="http://schemas.microsoft.com/office/drawing/2014/main" id="{047FA994-8578-A5D2-E24F-3FB090F7454F}"/>
+              </a:ext>
+            </a:extLst>
+          </p:cNvPr>
+          <p:cNvCxnSpPr>
+            <a:cxnSpLocks/>
+          </p:cNvCxnSpPr>
+          <p:nvPr/>
+        </p:nvCxnSpPr>
+        <p:spPr>
+          <a:xfrm>
+            <a:off x="6334668" y="2709371"/>
+            <a:ext cx="0" cy="1545098"/>
+          </a:xfrm>
+          <a:prstGeom prst="line">
+            <a:avLst/>
+          </a:prstGeom>
+          <a:ln w="50800">
+            <a:solidFill>
+              <a:schemeClr val="bg1">
+                <a:lumMod val="75000"/>
+              </a:schemeClr>
+            </a:solidFill>
+          </a:ln>
+        </p:spPr>
+        <p:style>
+          <a:lnRef idx="2">
+            <a:schemeClr val="accent1"/>
+          </a:lnRef>
+          <a:fillRef idx="0">
+            <a:schemeClr val="accent1"/>
+          </a:fillRef>
+          <a:effectRef idx="1">
+            <a:schemeClr val="accent1"/>
+          </a:effectRef>
+          <a:fontRef idx="minor">
+            <a:schemeClr val="tx1"/>
+          </a:fontRef>
+        </p:style>
+      </p:cxnSp>
+      <p:sp>
+        <p:nvSpPr>
+          <p:cNvPr id="106" name="TextBox 105">
+            <a:extLst>
+              <a:ext uri="{FF2B5EF4-FFF2-40B4-BE49-F238E27FC236}">
+                <a16:creationId xmlns:a16="http://schemas.microsoft.com/office/drawing/2014/main" id="{23E09081-AC34-BD4A-D39B-B3BD6CE42F43}"/>
+              </a:ext>
+            </a:extLst>
+          </p:cNvPr>
+          <p:cNvSpPr txBox="1"/>
+          <p:nvPr/>
+        </p:nvSpPr>
+        <p:spPr>
+          <a:xfrm>
+            <a:off x="6041672" y="2403559"/>
+            <a:ext cx="587020" cy="369332"/>
+          </a:xfrm>
+          <a:prstGeom prst="rect">
+            <a:avLst/>
+          </a:prstGeom>
+          <a:noFill/>
+        </p:spPr>
+        <p:txBody>
+          <a:bodyPr wrap="none" rtlCol="0">
+            <a:spAutoFit/>
+          </a:bodyPr>
+          <a:lstStyle/>
+          <a:p>
+            <a:r>
+              <a:rPr lang="sv-SE" b="1" dirty="0"/>
+              <a:t>bit6</a:t>
+            </a:r>
+            <a:endParaRPr lang="LID4096" b="1" dirty="0"/>
+          </a:p>
+        </p:txBody>
+      </p:sp>
+      <p:cxnSp>
+        <p:nvCxnSpPr>
+          <p:cNvPr id="111" name="Straight Connector 110">
+            <a:extLst>
+              <a:ext uri="{FF2B5EF4-FFF2-40B4-BE49-F238E27FC236}">
+                <a16:creationId xmlns:a16="http://schemas.microsoft.com/office/drawing/2014/main" id="{02D3CA94-3F00-868F-47F0-89317AAEEEE2}"/>
+              </a:ext>
+            </a:extLst>
+          </p:cNvPr>
+          <p:cNvCxnSpPr>
+            <a:cxnSpLocks/>
+          </p:cNvCxnSpPr>
+          <p:nvPr/>
+        </p:nvCxnSpPr>
+        <p:spPr>
+          <a:xfrm>
+            <a:off x="5347056" y="5119294"/>
+            <a:ext cx="0" cy="809818"/>
+          </a:xfrm>
+          <a:prstGeom prst="line">
+            <a:avLst/>
+          </a:prstGeom>
+          <a:ln w="50800">
+            <a:solidFill>
+              <a:schemeClr val="bg1">
+                <a:lumMod val="75000"/>
+              </a:schemeClr>
+            </a:solidFill>
+          </a:ln>
+        </p:spPr>
+        <p:style>
+          <a:lnRef idx="2">
+            <a:schemeClr val="accent1"/>
+          </a:lnRef>
+          <a:fillRef idx="0">
+            <a:schemeClr val="accent1"/>
+          </a:fillRef>
+          <a:effectRef idx="1">
+            <a:schemeClr val="accent1"/>
+          </a:effectRef>
+          <a:fontRef idx="minor">
+            <a:schemeClr val="tx1"/>
+          </a:fontRef>
+        </p:style>
+      </p:cxnSp>
+      <p:sp>
+        <p:nvSpPr>
+          <p:cNvPr id="113" name="TextBox 112">
+            <a:extLst>
+              <a:ext uri="{FF2B5EF4-FFF2-40B4-BE49-F238E27FC236}">
+                <a16:creationId xmlns:a16="http://schemas.microsoft.com/office/drawing/2014/main" id="{E840B875-AF99-B34B-FBB3-EC0FB57A9827}"/>
+              </a:ext>
+            </a:extLst>
+          </p:cNvPr>
+          <p:cNvSpPr txBox="1"/>
+          <p:nvPr/>
+        </p:nvSpPr>
+        <p:spPr>
+          <a:xfrm>
+            <a:off x="5061308" y="5889903"/>
+            <a:ext cx="587020" cy="369332"/>
+          </a:xfrm>
+          <a:prstGeom prst="rect">
+            <a:avLst/>
+          </a:prstGeom>
+          <a:noFill/>
+        </p:spPr>
+        <p:txBody>
+          <a:bodyPr wrap="none" rtlCol="0">
+            <a:spAutoFit/>
+          </a:bodyPr>
+          <a:lstStyle/>
+          <a:p>
+            <a:r>
+              <a:rPr lang="sv-SE" b="1" dirty="0"/>
+              <a:t>bit1</a:t>
+            </a:r>
+            <a:endParaRPr lang="LID4096" b="1" dirty="0"/>
+          </a:p>
+        </p:txBody>
+      </p:sp>
+      <p:cxnSp>
+        <p:nvCxnSpPr>
+          <p:cNvPr id="114" name="Straight Connector 113">
+            <a:extLst>
+              <a:ext uri="{FF2B5EF4-FFF2-40B4-BE49-F238E27FC236}">
+                <a16:creationId xmlns:a16="http://schemas.microsoft.com/office/drawing/2014/main" id="{F0779239-4179-FE09-451F-6E0652F5A2CE}"/>
+              </a:ext>
+            </a:extLst>
+          </p:cNvPr>
+          <p:cNvCxnSpPr>
+            <a:cxnSpLocks/>
+          </p:cNvCxnSpPr>
+          <p:nvPr/>
+        </p:nvCxnSpPr>
+        <p:spPr>
+          <a:xfrm>
+            <a:off x="5863117" y="5117266"/>
+            <a:ext cx="0" cy="809818"/>
+          </a:xfrm>
+          <a:prstGeom prst="line">
+            <a:avLst/>
+          </a:prstGeom>
+          <a:ln w="50800">
+            <a:solidFill>
+              <a:schemeClr val="bg1">
+                <a:lumMod val="75000"/>
+              </a:schemeClr>
+            </a:solidFill>
+          </a:ln>
+        </p:spPr>
+        <p:style>
+          <a:lnRef idx="2">
+            <a:schemeClr val="accent1"/>
+          </a:lnRef>
+          <a:fillRef idx="0">
+            <a:schemeClr val="accent1"/>
+          </a:fillRef>
+          <a:effectRef idx="1">
+            <a:schemeClr val="accent1"/>
+          </a:effectRef>
+          <a:fontRef idx="minor">
+            <a:schemeClr val="tx1"/>
+          </a:fontRef>
+        </p:style>
+      </p:cxnSp>
+      <p:sp>
+        <p:nvSpPr>
+          <p:cNvPr id="115" name="TextBox 114">
+            <a:extLst>
+              <a:ext uri="{FF2B5EF4-FFF2-40B4-BE49-F238E27FC236}">
+                <a16:creationId xmlns:a16="http://schemas.microsoft.com/office/drawing/2014/main" id="{7D850A4F-1625-123C-FC1C-65068FCFEF74}"/>
+              </a:ext>
+            </a:extLst>
+          </p:cNvPr>
+          <p:cNvSpPr txBox="1"/>
+          <p:nvPr/>
+        </p:nvSpPr>
+        <p:spPr>
+          <a:xfrm>
+            <a:off x="5577369" y="5887875"/>
+            <a:ext cx="587020" cy="369332"/>
+          </a:xfrm>
+          <a:prstGeom prst="rect">
+            <a:avLst/>
+          </a:prstGeom>
+          <a:noFill/>
+        </p:spPr>
+        <p:txBody>
+          <a:bodyPr wrap="none" rtlCol="0">
+            <a:spAutoFit/>
+          </a:bodyPr>
+          <a:lstStyle/>
+          <a:p>
+            <a:r>
+              <a:rPr lang="sv-SE" b="1" dirty="0"/>
+              <a:t>bit3</a:t>
+            </a:r>
+            <a:endParaRPr lang="LID4096" b="1" dirty="0"/>
+          </a:p>
+        </p:txBody>
+      </p:sp>
+      <p:cxnSp>
+        <p:nvCxnSpPr>
+          <p:cNvPr id="117" name="Straight Connector 116">
+            <a:extLst>
+              <a:ext uri="{FF2B5EF4-FFF2-40B4-BE49-F238E27FC236}">
+                <a16:creationId xmlns:a16="http://schemas.microsoft.com/office/drawing/2014/main" id="{1251E317-0820-0DD9-A73B-64FA723AB8A8}"/>
+              </a:ext>
+            </a:extLst>
+          </p:cNvPr>
+          <p:cNvCxnSpPr>
+            <a:cxnSpLocks/>
+          </p:cNvCxnSpPr>
+          <p:nvPr/>
+        </p:nvCxnSpPr>
+        <p:spPr>
+          <a:xfrm>
+            <a:off x="6345564" y="5118280"/>
+            <a:ext cx="0" cy="809818"/>
+          </a:xfrm>
+          <a:prstGeom prst="line">
+            <a:avLst/>
+          </a:prstGeom>
+          <a:ln w="50800">
+            <a:solidFill>
+              <a:schemeClr val="bg1">
+                <a:lumMod val="75000"/>
+              </a:schemeClr>
+            </a:solidFill>
+          </a:ln>
+        </p:spPr>
+        <p:style>
+          <a:lnRef idx="2">
+            <a:schemeClr val="accent1"/>
+          </a:lnRef>
+          <a:fillRef idx="0">
+            <a:schemeClr val="accent1"/>
+          </a:fillRef>
+          <a:effectRef idx="1">
+            <a:schemeClr val="accent1"/>
+          </a:effectRef>
+          <a:fontRef idx="minor">
+            <a:schemeClr val="tx1"/>
+          </a:fontRef>
+        </p:style>
+      </p:cxnSp>
+      <p:sp>
+        <p:nvSpPr>
+          <p:cNvPr id="118" name="TextBox 117">
+            <a:extLst>
+              <a:ext uri="{FF2B5EF4-FFF2-40B4-BE49-F238E27FC236}">
+                <a16:creationId xmlns:a16="http://schemas.microsoft.com/office/drawing/2014/main" id="{269192A1-790F-8413-A58A-693151621356}"/>
+              </a:ext>
+            </a:extLst>
+          </p:cNvPr>
+          <p:cNvSpPr txBox="1"/>
+          <p:nvPr/>
+        </p:nvSpPr>
+        <p:spPr>
+          <a:xfrm>
+            <a:off x="6059816" y="5888889"/>
+            <a:ext cx="587020" cy="369332"/>
+          </a:xfrm>
+          <a:prstGeom prst="rect">
+            <a:avLst/>
+          </a:prstGeom>
+          <a:noFill/>
+        </p:spPr>
+        <p:txBody>
+          <a:bodyPr wrap="none" rtlCol="0">
+            <a:spAutoFit/>
+          </a:bodyPr>
+          <a:lstStyle/>
+          <a:p>
+            <a:r>
+              <a:rPr lang="sv-SE" b="1" dirty="0"/>
+              <a:t>bit5</a:t>
+            </a:r>
+            <a:endParaRPr lang="LID4096" b="1" dirty="0"/>
+          </a:p>
+        </p:txBody>
+      </p:sp>
+      <p:cxnSp>
+        <p:nvCxnSpPr>
+          <p:cNvPr id="119" name="Straight Connector 118">
+            <a:extLst>
+              <a:ext uri="{FF2B5EF4-FFF2-40B4-BE49-F238E27FC236}">
+                <a16:creationId xmlns:a16="http://schemas.microsoft.com/office/drawing/2014/main" id="{E09CBCBE-BA8E-FE64-2D4B-DFFAB01B1D54}"/>
+              </a:ext>
+            </a:extLst>
+          </p:cNvPr>
+          <p:cNvCxnSpPr>
+            <a:cxnSpLocks/>
+          </p:cNvCxnSpPr>
+          <p:nvPr/>
+        </p:nvCxnSpPr>
+        <p:spPr>
+          <a:xfrm>
+            <a:off x="6798719" y="5117266"/>
+            <a:ext cx="0" cy="809818"/>
+          </a:xfrm>
+          <a:prstGeom prst="line">
+            <a:avLst/>
+          </a:prstGeom>
+          <a:ln w="50800">
+            <a:solidFill>
+              <a:schemeClr val="bg1">
+                <a:lumMod val="75000"/>
+              </a:schemeClr>
+            </a:solidFill>
+          </a:ln>
+        </p:spPr>
+        <p:style>
+          <a:lnRef idx="2">
+            <a:schemeClr val="accent1"/>
+          </a:lnRef>
+          <a:fillRef idx="0">
+            <a:schemeClr val="accent1"/>
+          </a:fillRef>
+          <a:effectRef idx="1">
+            <a:schemeClr val="accent1"/>
+          </a:effectRef>
+          <a:fontRef idx="minor">
+            <a:schemeClr val="tx1"/>
+          </a:fontRef>
+        </p:style>
+      </p:cxnSp>
+      <p:sp>
+        <p:nvSpPr>
+          <p:cNvPr id="120" name="TextBox 119">
+            <a:extLst>
+              <a:ext uri="{FF2B5EF4-FFF2-40B4-BE49-F238E27FC236}">
+                <a16:creationId xmlns:a16="http://schemas.microsoft.com/office/drawing/2014/main" id="{912CDF52-E518-3265-5FA8-04D6E42F5084}"/>
+              </a:ext>
+            </a:extLst>
+          </p:cNvPr>
+          <p:cNvSpPr txBox="1"/>
+          <p:nvPr/>
+        </p:nvSpPr>
+        <p:spPr>
+          <a:xfrm>
+            <a:off x="6512971" y="5887875"/>
+            <a:ext cx="587020" cy="369332"/>
+          </a:xfrm>
+          <a:prstGeom prst="rect">
+            <a:avLst/>
+          </a:prstGeom>
+          <a:noFill/>
+        </p:spPr>
+        <p:txBody>
+          <a:bodyPr wrap="none" rtlCol="0">
+            <a:spAutoFit/>
+          </a:bodyPr>
+          <a:lstStyle/>
+          <a:p>
+            <a:r>
+              <a:rPr lang="sv-SE" b="1" dirty="0"/>
+              <a:t>bit7</a:t>
+            </a:r>
+            <a:endParaRPr lang="LID4096" b="1" dirty="0"/>
+          </a:p>
+        </p:txBody>
+      </p:sp>
+    </p:spTree>
+    <p:extLst>
+      <p:ext uri="{BB962C8B-B14F-4D97-AF65-F5344CB8AC3E}">
+        <p14:creationId xmlns:p14="http://schemas.microsoft.com/office/powerpoint/2010/main" val="3216618104"/>
+      </p:ext>
+    </p:extLst>
+  </p:cSld>
+  <p:clrMapOvr>
+    <a:masterClrMapping/>
+  </p:clrMapOvr>
+</p:sld>
+</file>
+
 <file path=ppt/theme/theme1.xml><?xml version="1.0" encoding="utf-8"?>
 <a:theme xmlns:a="http://schemas.openxmlformats.org/drawingml/2006/main" name="Office Theme">
   <a:themeElements>

--- a/images/figures.pptx
+++ b/images/figures.pptx
@@ -5,7 +5,7 @@
     <p:sldMasterId id="2147483648" r:id="rId1"/>
   </p:sldMasterIdLst>
   <p:notesMasterIdLst>
-    <p:notesMasterId r:id="rId9"/>
+    <p:notesMasterId r:id="rId10"/>
   </p:notesMasterIdLst>
   <p:sldIdLst>
     <p:sldId id="256" r:id="rId2"/>
@@ -15,6 +15,7 @@
     <p:sldId id="441" r:id="rId6"/>
     <p:sldId id="442" r:id="rId7"/>
     <p:sldId id="443" r:id="rId8"/>
+    <p:sldId id="444" r:id="rId9"/>
   </p:sldIdLst>
   <p:sldSz cx="12192000" cy="6858000"/>
   <p:notesSz cx="6858000" cy="9144000"/>
@@ -203,7 +204,7 @@
           <a:p>
             <a:fld id="{1E717189-69EA-4142-945D-85EE3E06463B}" type="datetimeFigureOut">
               <a:rPr lang="LID4096" smtClean="0"/>
-              <a:t>09/29/2025</a:t>
+              <a:t>09/30/2025</a:t>
             </a:fld>
             <a:endParaRPr lang="LID4096"/>
           </a:p>
@@ -1110,6 +1111,114 @@
 </p:notes>
 </file>
 
+<file path=ppt/notesSlides/notesSlide7.xml><?xml version="1.0" encoding="utf-8"?>
+<p:notes xmlns:a="http://schemas.openxmlformats.org/drawingml/2006/main" xmlns:r="http://schemas.openxmlformats.org/officeDocument/2006/relationships" xmlns:p="http://schemas.openxmlformats.org/presentationml/2006/main">
+  <p:cSld>
+    <p:spTree>
+      <p:nvGrpSpPr>
+        <p:cNvPr id="1" name="">
+          <a:extLst>
+            <a:ext uri="{FF2B5EF4-FFF2-40B4-BE49-F238E27FC236}">
+              <a16:creationId xmlns:a16="http://schemas.microsoft.com/office/drawing/2014/main" id="{D266BF08-D19E-6211-EA6D-7F9B8CB9B04F}"/>
+            </a:ext>
+          </a:extLst>
+        </p:cNvPr>
+        <p:cNvGrpSpPr/>
+        <p:nvPr/>
+      </p:nvGrpSpPr>
+      <p:grpSpPr>
+        <a:xfrm>
+          <a:off x="0" y="0"/>
+          <a:ext cx="0" cy="0"/>
+          <a:chOff x="0" y="0"/>
+          <a:chExt cx="0" cy="0"/>
+        </a:xfrm>
+      </p:grpSpPr>
+      <p:sp>
+        <p:nvSpPr>
+          <p:cNvPr id="2" name="Slide Image Placeholder 1">
+            <a:extLst>
+              <a:ext uri="{FF2B5EF4-FFF2-40B4-BE49-F238E27FC236}">
+                <a16:creationId xmlns:a16="http://schemas.microsoft.com/office/drawing/2014/main" id="{58CCDA47-27A8-9D93-F050-71DE669E9EE8}"/>
+              </a:ext>
+            </a:extLst>
+          </p:cNvPr>
+          <p:cNvSpPr>
+            <a:spLocks noGrp="1" noRot="1" noChangeAspect="1"/>
+          </p:cNvSpPr>
+          <p:nvPr>
+            <p:ph type="sldImg"/>
+          </p:nvPr>
+        </p:nvSpPr>
+        <p:spPr/>
+      </p:sp>
+      <p:sp>
+        <p:nvSpPr>
+          <p:cNvPr id="3" name="Notes Placeholder 2">
+            <a:extLst>
+              <a:ext uri="{FF2B5EF4-FFF2-40B4-BE49-F238E27FC236}">
+                <a16:creationId xmlns:a16="http://schemas.microsoft.com/office/drawing/2014/main" id="{2FF65739-26A5-8480-123E-7A653E13DC39}"/>
+              </a:ext>
+            </a:extLst>
+          </p:cNvPr>
+          <p:cNvSpPr>
+            <a:spLocks noGrp="1"/>
+          </p:cNvSpPr>
+          <p:nvPr>
+            <p:ph type="body" idx="1"/>
+          </p:nvPr>
+        </p:nvSpPr>
+        <p:spPr/>
+        <p:txBody>
+          <a:bodyPr/>
+          <a:lstStyle/>
+          <a:p>
+            <a:endParaRPr lang="LID4096" dirty="0"/>
+          </a:p>
+        </p:txBody>
+      </p:sp>
+      <p:sp>
+        <p:nvSpPr>
+          <p:cNvPr id="4" name="Slide Number Placeholder 3">
+            <a:extLst>
+              <a:ext uri="{FF2B5EF4-FFF2-40B4-BE49-F238E27FC236}">
+                <a16:creationId xmlns:a16="http://schemas.microsoft.com/office/drawing/2014/main" id="{552514A9-81F3-8958-18E9-8924E64027F5}"/>
+              </a:ext>
+            </a:extLst>
+          </p:cNvPr>
+          <p:cNvSpPr>
+            <a:spLocks noGrp="1"/>
+          </p:cNvSpPr>
+          <p:nvPr>
+            <p:ph type="sldNum" sz="quarter" idx="5"/>
+          </p:nvPr>
+        </p:nvSpPr>
+        <p:spPr/>
+        <p:txBody>
+          <a:bodyPr/>
+          <a:lstStyle/>
+          <a:p>
+            <a:fld id="{5FD2D078-0734-41DD-A137-6D7276E88BE2}" type="slidenum">
+              <a:rPr lang="LID4096" smtClean="0"/>
+              <a:t>8</a:t>
+            </a:fld>
+            <a:endParaRPr lang="LID4096"/>
+          </a:p>
+        </p:txBody>
+      </p:sp>
+    </p:spTree>
+    <p:extLst>
+      <p:ext uri="{BB962C8B-B14F-4D97-AF65-F5344CB8AC3E}">
+        <p14:creationId xmlns:p14="http://schemas.microsoft.com/office/powerpoint/2010/main" val="766936649"/>
+      </p:ext>
+    </p:extLst>
+  </p:cSld>
+  <p:clrMapOvr>
+    <a:masterClrMapping/>
+  </p:clrMapOvr>
+</p:notes>
+</file>
+
 <file path=ppt/slideLayouts/slideLayout1.xml><?xml version="1.0" encoding="utf-8"?>
 <p:sldLayout xmlns:a="http://schemas.openxmlformats.org/drawingml/2006/main" xmlns:r="http://schemas.openxmlformats.org/officeDocument/2006/relationships" xmlns:p="http://schemas.openxmlformats.org/presentationml/2006/main" type="title" preserve="1">
   <p:cSld name="Title Slide">
@@ -1259,7 +1368,7 @@
           <a:p>
             <a:fld id="{6E06BE13-2967-499D-85E1-E8100B951B63}" type="datetimeFigureOut">
               <a:rPr lang="LID4096" smtClean="0"/>
-              <a:t>09/29/2025</a:t>
+              <a:t>09/30/2025</a:t>
             </a:fld>
             <a:endParaRPr lang="LID4096"/>
           </a:p>
@@ -1459,7 +1568,7 @@
           <a:p>
             <a:fld id="{6E06BE13-2967-499D-85E1-E8100B951B63}" type="datetimeFigureOut">
               <a:rPr lang="LID4096" smtClean="0"/>
-              <a:t>09/29/2025</a:t>
+              <a:t>09/30/2025</a:t>
             </a:fld>
             <a:endParaRPr lang="LID4096"/>
           </a:p>
@@ -1669,7 +1778,7 @@
           <a:p>
             <a:fld id="{6E06BE13-2967-499D-85E1-E8100B951B63}" type="datetimeFigureOut">
               <a:rPr lang="LID4096" smtClean="0"/>
-              <a:t>09/29/2025</a:t>
+              <a:t>09/30/2025</a:t>
             </a:fld>
             <a:endParaRPr lang="LID4096"/>
           </a:p>
@@ -1869,7 +1978,7 @@
           <a:p>
             <a:fld id="{6E06BE13-2967-499D-85E1-E8100B951B63}" type="datetimeFigureOut">
               <a:rPr lang="LID4096" smtClean="0"/>
-              <a:t>09/29/2025</a:t>
+              <a:t>09/30/2025</a:t>
             </a:fld>
             <a:endParaRPr lang="LID4096"/>
           </a:p>
@@ -2145,7 +2254,7 @@
           <a:p>
             <a:fld id="{6E06BE13-2967-499D-85E1-E8100B951B63}" type="datetimeFigureOut">
               <a:rPr lang="LID4096" smtClean="0"/>
-              <a:t>09/29/2025</a:t>
+              <a:t>09/30/2025</a:t>
             </a:fld>
             <a:endParaRPr lang="LID4096"/>
           </a:p>
@@ -2413,7 +2522,7 @@
           <a:p>
             <a:fld id="{6E06BE13-2967-499D-85E1-E8100B951B63}" type="datetimeFigureOut">
               <a:rPr lang="LID4096" smtClean="0"/>
-              <a:t>09/29/2025</a:t>
+              <a:t>09/30/2025</a:t>
             </a:fld>
             <a:endParaRPr lang="LID4096"/>
           </a:p>
@@ -2828,7 +2937,7 @@
           <a:p>
             <a:fld id="{6E06BE13-2967-499D-85E1-E8100B951B63}" type="datetimeFigureOut">
               <a:rPr lang="LID4096" smtClean="0"/>
-              <a:t>09/29/2025</a:t>
+              <a:t>09/30/2025</a:t>
             </a:fld>
             <a:endParaRPr lang="LID4096"/>
           </a:p>
@@ -2970,7 +3079,7 @@
           <a:p>
             <a:fld id="{6E06BE13-2967-499D-85E1-E8100B951B63}" type="datetimeFigureOut">
               <a:rPr lang="LID4096" smtClean="0"/>
-              <a:t>09/29/2025</a:t>
+              <a:t>09/30/2025</a:t>
             </a:fld>
             <a:endParaRPr lang="LID4096"/>
           </a:p>
@@ -3083,7 +3192,7 @@
           <a:p>
             <a:fld id="{6E06BE13-2967-499D-85E1-E8100B951B63}" type="datetimeFigureOut">
               <a:rPr lang="LID4096" smtClean="0"/>
-              <a:t>09/29/2025</a:t>
+              <a:t>09/30/2025</a:t>
             </a:fld>
             <a:endParaRPr lang="LID4096"/>
           </a:p>
@@ -3396,7 +3505,7 @@
           <a:p>
             <a:fld id="{6E06BE13-2967-499D-85E1-E8100B951B63}" type="datetimeFigureOut">
               <a:rPr lang="LID4096" smtClean="0"/>
-              <a:t>09/29/2025</a:t>
+              <a:t>09/30/2025</a:t>
             </a:fld>
             <a:endParaRPr lang="LID4096"/>
           </a:p>
@@ -3685,7 +3794,7 @@
           <a:p>
             <a:fld id="{6E06BE13-2967-499D-85E1-E8100B951B63}" type="datetimeFigureOut">
               <a:rPr lang="LID4096" smtClean="0"/>
-              <a:t>09/29/2025</a:t>
+              <a:t>09/30/2025</a:t>
             </a:fld>
             <a:endParaRPr lang="LID4096"/>
           </a:p>
@@ -3928,7 +4037,7 @@
           <a:p>
             <a:fld id="{6E06BE13-2967-499D-85E1-E8100B951B63}" type="datetimeFigureOut">
               <a:rPr lang="LID4096" smtClean="0"/>
-              <a:t>09/29/2025</a:t>
+              <a:t>09/30/2025</a:t>
             </a:fld>
             <a:endParaRPr lang="LID4096"/>
           </a:p>
@@ -20556,7 +20665,7 @@
         </p:blipFill>
         <p:spPr>
           <a:xfrm>
-            <a:off x="2862973" y="2919219"/>
+            <a:off x="436296" y="2545839"/>
             <a:ext cx="5353797" cy="2772162"/>
           </a:xfrm>
           <a:prstGeom prst="rect">
@@ -20578,7 +20687,7 @@
         </p:nvSpPr>
         <p:spPr>
           <a:xfrm>
-            <a:off x="4005263" y="3931920"/>
+            <a:off x="1578586" y="3558540"/>
             <a:ext cx="3381375" cy="1402080"/>
           </a:xfrm>
           <a:prstGeom prst="rect">
@@ -20633,7 +20742,7 @@
         </p:nvSpPr>
         <p:spPr>
           <a:xfrm>
-            <a:off x="3863340" y="3779520"/>
+            <a:off x="1436663" y="3406140"/>
             <a:ext cx="3787140" cy="259080"/>
           </a:xfrm>
           <a:custGeom>
@@ -20745,7 +20854,7 @@
         </p:nvSpPr>
         <p:spPr>
           <a:xfrm>
-            <a:off x="3886200" y="3855720"/>
+            <a:off x="1459523" y="3482340"/>
             <a:ext cx="205740" cy="1714500"/>
           </a:xfrm>
           <a:custGeom>
@@ -20848,7 +20957,7 @@
         </p:nvSpPr>
         <p:spPr>
           <a:xfrm>
-            <a:off x="4084320" y="3931920"/>
+            <a:off x="1657643" y="3558540"/>
             <a:ext cx="3596640" cy="1653540"/>
           </a:xfrm>
           <a:custGeom>
@@ -21066,7 +21175,7 @@
         </p:nvSpPr>
         <p:spPr>
           <a:xfrm>
-            <a:off x="4260056" y="4100513"/>
+            <a:off x="1833379" y="3727133"/>
             <a:ext cx="3305175" cy="1312068"/>
           </a:xfrm>
           <a:custGeom>
@@ -21235,7 +21344,7 @@
         </p:nvSpPr>
         <p:spPr>
           <a:xfrm>
-            <a:off x="5545931" y="5269706"/>
+            <a:off x="3119254" y="4896326"/>
             <a:ext cx="819150" cy="247650"/>
           </a:xfrm>
           <a:custGeom>
@@ -21402,7 +21511,7 @@
         </p:nvGrpSpPr>
         <p:grpSpPr>
           <a:xfrm>
-            <a:off x="6669881" y="4393406"/>
+            <a:off x="4243204" y="4020026"/>
             <a:ext cx="209550" cy="157163"/>
             <a:chOff x="6669881" y="4393406"/>
             <a:chExt cx="209550" cy="157163"/>
@@ -21632,7 +21741,7 @@
         </p:nvGrpSpPr>
         <p:grpSpPr>
           <a:xfrm>
-            <a:off x="6224587" y="4424362"/>
+            <a:off x="3797910" y="4050982"/>
             <a:ext cx="209550" cy="157163"/>
             <a:chOff x="6669881" y="4393406"/>
             <a:chExt cx="209550" cy="157163"/>
@@ -21862,7 +21971,7 @@
         </p:nvGrpSpPr>
         <p:grpSpPr>
           <a:xfrm>
-            <a:off x="5779293" y="4455318"/>
+            <a:off x="3352616" y="4081938"/>
             <a:ext cx="209550" cy="157163"/>
             <a:chOff x="6669881" y="4393406"/>
             <a:chExt cx="209550" cy="157163"/>
@@ -22092,7 +22201,7 @@
         </p:nvGrpSpPr>
         <p:grpSpPr>
           <a:xfrm>
-            <a:off x="5278037" y="4467224"/>
+            <a:off x="2851360" y="4093844"/>
             <a:ext cx="209550" cy="157163"/>
             <a:chOff x="6669881" y="4393406"/>
             <a:chExt cx="209550" cy="157163"/>
@@ -22322,7 +22431,7 @@
         </p:nvGrpSpPr>
         <p:grpSpPr>
           <a:xfrm>
-            <a:off x="4771789" y="4486947"/>
+            <a:off x="2345112" y="4113567"/>
             <a:ext cx="209550" cy="157163"/>
             <a:chOff x="6669881" y="4393406"/>
             <a:chExt cx="209550" cy="157163"/>
@@ -22552,7 +22661,7 @@
         </p:nvGrpSpPr>
         <p:grpSpPr>
           <a:xfrm>
-            <a:off x="4759882" y="4894138"/>
+            <a:off x="2333205" y="4520758"/>
             <a:ext cx="209550" cy="157163"/>
             <a:chOff x="6669881" y="4393406"/>
             <a:chExt cx="209550" cy="157163"/>
@@ -22782,7 +22891,7 @@
         </p:nvGrpSpPr>
         <p:grpSpPr>
           <a:xfrm>
-            <a:off x="5275654" y="4879851"/>
+            <a:off x="2848977" y="4506471"/>
             <a:ext cx="209550" cy="157163"/>
             <a:chOff x="6669881" y="4393406"/>
             <a:chExt cx="209550" cy="157163"/>
@@ -23012,7 +23121,7 @@
         </p:nvGrpSpPr>
         <p:grpSpPr>
           <a:xfrm>
-            <a:off x="5786434" y="4873381"/>
+            <a:off x="3359757" y="4500001"/>
             <a:ext cx="209550" cy="157163"/>
             <a:chOff x="6669881" y="4393406"/>
             <a:chExt cx="209550" cy="157163"/>
@@ -23242,7 +23351,7 @@
         </p:nvGrpSpPr>
         <p:grpSpPr>
           <a:xfrm>
-            <a:off x="6255540" y="4879128"/>
+            <a:off x="3828863" y="4505748"/>
             <a:ext cx="209550" cy="157163"/>
             <a:chOff x="6669881" y="4393406"/>
             <a:chExt cx="209550" cy="157163"/>
@@ -23472,7 +23581,7 @@
         </p:nvGrpSpPr>
         <p:grpSpPr>
           <a:xfrm>
-            <a:off x="6698448" y="4868618"/>
+            <a:off x="4271771" y="4495238"/>
             <a:ext cx="209550" cy="157163"/>
             <a:chOff x="6669881" y="4393406"/>
             <a:chExt cx="209550" cy="157163"/>
@@ -23705,7 +23814,7 @@
         </p:nvCxnSpPr>
         <p:spPr>
           <a:xfrm flipH="1">
-            <a:off x="4825884" y="5172671"/>
+            <a:off x="2399207" y="4799291"/>
             <a:ext cx="5111" cy="1056158"/>
           </a:xfrm>
           <a:prstGeom prst="line">
@@ -23714,9 +23823,10 @@
           <a:ln w="50800">
             <a:solidFill>
               <a:schemeClr val="bg1">
-                <a:lumMod val="75000"/>
-              </a:schemeClr>
-            </a:solidFill>
+                <a:lumMod val="85000"/>
+              </a:schemeClr>
+            </a:solidFill>
+            <a:prstDash val="sysDash"/>
           </a:ln>
         </p:spPr>
         <p:style>
@@ -23748,7 +23858,7 @@
         </p:nvSpPr>
         <p:spPr>
           <a:xfrm>
-            <a:off x="4485887" y="6228829"/>
+            <a:off x="2059210" y="5855449"/>
             <a:ext cx="679994" cy="369332"/>
           </a:xfrm>
           <a:prstGeom prst="rect">
@@ -23786,7 +23896,7 @@
         </p:nvCxnSpPr>
         <p:spPr>
           <a:xfrm>
-            <a:off x="6761420" y="2595397"/>
+            <a:off x="4334743" y="2222017"/>
             <a:ext cx="27524" cy="1673166"/>
           </a:xfrm>
           <a:prstGeom prst="line">
@@ -23795,9 +23905,10 @@
           <a:ln w="50800">
             <a:solidFill>
               <a:schemeClr val="bg1">
-                <a:lumMod val="75000"/>
-              </a:schemeClr>
-            </a:solidFill>
+                <a:lumMod val="85000"/>
+              </a:schemeClr>
+            </a:solidFill>
+            <a:prstDash val="sysDash"/>
           </a:ln>
         </p:spPr>
         <p:style>
@@ -23829,7 +23940,7 @@
         </p:nvSpPr>
         <p:spPr>
           <a:xfrm>
-            <a:off x="6434137" y="2180793"/>
+            <a:off x="4007460" y="1807413"/>
             <a:ext cx="643125" cy="369332"/>
           </a:xfrm>
           <a:prstGeom prst="rect">
@@ -23867,7 +23978,7 @@
         </p:nvCxnSpPr>
         <p:spPr>
           <a:xfrm>
-            <a:off x="4825884" y="2723465"/>
+            <a:off x="2399207" y="2350085"/>
             <a:ext cx="0" cy="1545098"/>
           </a:xfrm>
           <a:prstGeom prst="line">
@@ -23876,9 +23987,10 @@
           <a:ln w="50800">
             <a:solidFill>
               <a:schemeClr val="bg1">
-                <a:lumMod val="75000"/>
-              </a:schemeClr>
-            </a:solidFill>
+                <a:lumMod val="85000"/>
+              </a:schemeClr>
+            </a:solidFill>
+            <a:prstDash val="sysDash"/>
           </a:ln>
         </p:spPr>
         <p:style>
@@ -23910,7 +24022,7 @@
         </p:nvSpPr>
         <p:spPr>
           <a:xfrm>
-            <a:off x="4532888" y="2417653"/>
+            <a:off x="2106211" y="2044273"/>
             <a:ext cx="587020" cy="369332"/>
           </a:xfrm>
           <a:prstGeom prst="rect">
@@ -23948,7 +24060,7 @@
         </p:nvCxnSpPr>
         <p:spPr>
           <a:xfrm>
-            <a:off x="5361119" y="2723465"/>
+            <a:off x="2934442" y="2350085"/>
             <a:ext cx="0" cy="1545098"/>
           </a:xfrm>
           <a:prstGeom prst="line">
@@ -23957,9 +24069,10 @@
           <a:ln w="50800">
             <a:solidFill>
               <a:schemeClr val="bg1">
-                <a:lumMod val="75000"/>
-              </a:schemeClr>
-            </a:solidFill>
+                <a:lumMod val="85000"/>
+              </a:schemeClr>
+            </a:solidFill>
+            <a:prstDash val="sysDash"/>
           </a:ln>
         </p:spPr>
         <p:style>
@@ -23991,7 +24104,7 @@
         </p:nvSpPr>
         <p:spPr>
           <a:xfrm>
-            <a:off x="5068123" y="2417653"/>
+            <a:off x="2641446" y="2044273"/>
             <a:ext cx="587020" cy="369332"/>
           </a:xfrm>
           <a:prstGeom prst="rect">
@@ -24029,7 +24142,7 @@
         </p:nvCxnSpPr>
         <p:spPr>
           <a:xfrm>
-            <a:off x="5880391" y="2723465"/>
+            <a:off x="3453714" y="2350085"/>
             <a:ext cx="0" cy="1545098"/>
           </a:xfrm>
           <a:prstGeom prst="line">
@@ -24038,9 +24151,10 @@
           <a:ln w="50800">
             <a:solidFill>
               <a:schemeClr val="bg1">
-                <a:lumMod val="75000"/>
-              </a:schemeClr>
-            </a:solidFill>
+                <a:lumMod val="85000"/>
+              </a:schemeClr>
+            </a:solidFill>
+            <a:prstDash val="sysDash"/>
           </a:ln>
         </p:spPr>
         <p:style>
@@ -24072,7 +24186,7 @@
         </p:nvSpPr>
         <p:spPr>
           <a:xfrm>
-            <a:off x="5587395" y="2417653"/>
+            <a:off x="3160718" y="2044273"/>
             <a:ext cx="587020" cy="369332"/>
           </a:xfrm>
           <a:prstGeom prst="rect">
@@ -24110,7 +24224,7 @@
         </p:nvCxnSpPr>
         <p:spPr>
           <a:xfrm>
-            <a:off x="6334668" y="2709371"/>
+            <a:off x="3907991" y="2335991"/>
             <a:ext cx="0" cy="1545098"/>
           </a:xfrm>
           <a:prstGeom prst="line">
@@ -24119,9 +24233,10 @@
           <a:ln w="50800">
             <a:solidFill>
               <a:schemeClr val="bg1">
-                <a:lumMod val="75000"/>
-              </a:schemeClr>
-            </a:solidFill>
+                <a:lumMod val="85000"/>
+              </a:schemeClr>
+            </a:solidFill>
+            <a:prstDash val="sysDash"/>
           </a:ln>
         </p:spPr>
         <p:style>
@@ -24153,7 +24268,7 @@
         </p:nvSpPr>
         <p:spPr>
           <a:xfrm>
-            <a:off x="6041672" y="2403559"/>
+            <a:off x="3614995" y="2030179"/>
             <a:ext cx="587020" cy="369332"/>
           </a:xfrm>
           <a:prstGeom prst="rect">
@@ -24191,7 +24306,7 @@
         </p:nvCxnSpPr>
         <p:spPr>
           <a:xfrm>
-            <a:off x="5347056" y="5119294"/>
+            <a:off x="2920379" y="4745914"/>
             <a:ext cx="0" cy="809818"/>
           </a:xfrm>
           <a:prstGeom prst="line">
@@ -24200,9 +24315,10 @@
           <a:ln w="50800">
             <a:solidFill>
               <a:schemeClr val="bg1">
-                <a:lumMod val="75000"/>
-              </a:schemeClr>
-            </a:solidFill>
+                <a:lumMod val="85000"/>
+              </a:schemeClr>
+            </a:solidFill>
+            <a:prstDash val="sysDash"/>
           </a:ln>
         </p:spPr>
         <p:style>
@@ -24234,7 +24350,7 @@
         </p:nvSpPr>
         <p:spPr>
           <a:xfrm>
-            <a:off x="5061308" y="5889903"/>
+            <a:off x="2634631" y="5516523"/>
             <a:ext cx="587020" cy="369332"/>
           </a:xfrm>
           <a:prstGeom prst="rect">
@@ -24272,7 +24388,7 @@
         </p:nvCxnSpPr>
         <p:spPr>
           <a:xfrm>
-            <a:off x="5863117" y="5117266"/>
+            <a:off x="3436440" y="4743886"/>
             <a:ext cx="0" cy="809818"/>
           </a:xfrm>
           <a:prstGeom prst="line">
@@ -24281,9 +24397,10 @@
           <a:ln w="50800">
             <a:solidFill>
               <a:schemeClr val="bg1">
-                <a:lumMod val="75000"/>
-              </a:schemeClr>
-            </a:solidFill>
+                <a:lumMod val="85000"/>
+              </a:schemeClr>
+            </a:solidFill>
+            <a:prstDash val="sysDash"/>
           </a:ln>
         </p:spPr>
         <p:style>
@@ -24315,7 +24432,7 @@
         </p:nvSpPr>
         <p:spPr>
           <a:xfrm>
-            <a:off x="5577369" y="5887875"/>
+            <a:off x="3150692" y="5514495"/>
             <a:ext cx="587020" cy="369332"/>
           </a:xfrm>
           <a:prstGeom prst="rect">
@@ -24353,7 +24470,7 @@
         </p:nvCxnSpPr>
         <p:spPr>
           <a:xfrm>
-            <a:off x="6345564" y="5118280"/>
+            <a:off x="3918887" y="4744900"/>
             <a:ext cx="0" cy="809818"/>
           </a:xfrm>
           <a:prstGeom prst="line">
@@ -24362,9 +24479,10 @@
           <a:ln w="50800">
             <a:solidFill>
               <a:schemeClr val="bg1">
-                <a:lumMod val="75000"/>
-              </a:schemeClr>
-            </a:solidFill>
+                <a:lumMod val="85000"/>
+              </a:schemeClr>
+            </a:solidFill>
+            <a:prstDash val="sysDash"/>
           </a:ln>
         </p:spPr>
         <p:style>
@@ -24396,7 +24514,7 @@
         </p:nvSpPr>
         <p:spPr>
           <a:xfrm>
-            <a:off x="6059816" y="5888889"/>
+            <a:off x="3633139" y="5515509"/>
             <a:ext cx="587020" cy="369332"/>
           </a:xfrm>
           <a:prstGeom prst="rect">
@@ -24434,7 +24552,7 @@
         </p:nvCxnSpPr>
         <p:spPr>
           <a:xfrm>
-            <a:off x="6798719" y="5117266"/>
+            <a:off x="4372042" y="4743886"/>
             <a:ext cx="0" cy="809818"/>
           </a:xfrm>
           <a:prstGeom prst="line">
@@ -24443,9 +24561,10 @@
           <a:ln w="50800">
             <a:solidFill>
               <a:schemeClr val="bg1">
-                <a:lumMod val="75000"/>
-              </a:schemeClr>
-            </a:solidFill>
+                <a:lumMod val="85000"/>
+              </a:schemeClr>
+            </a:solidFill>
+            <a:prstDash val="sysDash"/>
           </a:ln>
         </p:spPr>
         <p:style>
@@ -24477,7 +24596,7 @@
         </p:nvSpPr>
         <p:spPr>
           <a:xfrm>
-            <a:off x="6512971" y="5887875"/>
+            <a:off x="4086294" y="5514495"/>
             <a:ext cx="587020" cy="369332"/>
           </a:xfrm>
           <a:prstGeom prst="rect">
@@ -24499,10 +24618,1144 @@
           </a:p>
         </p:txBody>
       </p:sp>
+      <p:grpSp>
+        <p:nvGrpSpPr>
+          <p:cNvPr id="6" name="Group 5">
+            <a:extLst>
+              <a:ext uri="{FF2B5EF4-FFF2-40B4-BE49-F238E27FC236}">
+                <a16:creationId xmlns:a16="http://schemas.microsoft.com/office/drawing/2014/main" id="{960AF50C-6217-DB58-BB05-B497F7B4E244}"/>
+              </a:ext>
+            </a:extLst>
+          </p:cNvPr>
+          <p:cNvGrpSpPr/>
+          <p:nvPr/>
+        </p:nvGrpSpPr>
+        <p:grpSpPr>
+          <a:xfrm>
+            <a:off x="8146258" y="2295653"/>
+            <a:ext cx="2669370" cy="1907729"/>
+            <a:chOff x="9519713" y="2988597"/>
+            <a:chExt cx="1319935" cy="943323"/>
+          </a:xfrm>
+        </p:grpSpPr>
+        <p:pic>
+          <p:nvPicPr>
+            <p:cNvPr id="3" name="Picture 2">
+              <a:extLst>
+                <a:ext uri="{FF2B5EF4-FFF2-40B4-BE49-F238E27FC236}">
+                  <a16:creationId xmlns:a16="http://schemas.microsoft.com/office/drawing/2014/main" id="{FB67708D-5CE6-86FE-B604-40A10BAEC95A}"/>
+                </a:ext>
+              </a:extLst>
+            </p:cNvPr>
+            <p:cNvPicPr>
+              <a:picLocks noChangeAspect="1"/>
+            </p:cNvPicPr>
+            <p:nvPr/>
+          </p:nvPicPr>
+          <p:blipFill>
+            <a:blip r:embed="rId4"/>
+            <a:stretch>
+              <a:fillRect/>
+            </a:stretch>
+          </p:blipFill>
+          <p:spPr>
+            <a:xfrm>
+              <a:off x="9519713" y="2988597"/>
+              <a:ext cx="1319935" cy="943323"/>
+            </a:xfrm>
+            <a:prstGeom prst="rect">
+              <a:avLst/>
+            </a:prstGeom>
+          </p:spPr>
+        </p:pic>
+        <p:sp>
+          <p:nvSpPr>
+            <p:cNvPr id="5" name="Oval 4">
+              <a:extLst>
+                <a:ext uri="{FF2B5EF4-FFF2-40B4-BE49-F238E27FC236}">
+                  <a16:creationId xmlns:a16="http://schemas.microsoft.com/office/drawing/2014/main" id="{18C7FA37-73D6-8F1E-F0A9-9E903F5DD0E0}"/>
+                </a:ext>
+              </a:extLst>
+            </p:cNvPr>
+            <p:cNvSpPr/>
+            <p:nvPr/>
+          </p:nvSpPr>
+          <p:spPr>
+            <a:xfrm rot="19997983">
+              <a:off x="10475358" y="3191629"/>
+              <a:ext cx="265922" cy="134378"/>
+            </a:xfrm>
+            <a:prstGeom prst="ellipse">
+              <a:avLst/>
+            </a:prstGeom>
+            <a:noFill/>
+            <a:ln w="127">
+              <a:solidFill>
+                <a:srgbClr val="FF0000"/>
+              </a:solidFill>
+            </a:ln>
+            <a:effectLst>
+              <a:glow rad="127000">
+                <a:srgbClr val="FF0000">
+                  <a:alpha val="61000"/>
+                </a:srgbClr>
+              </a:glow>
+            </a:effectLst>
+          </p:spPr>
+          <p:style>
+            <a:lnRef idx="2">
+              <a:schemeClr val="accent1">
+                <a:shade val="15000"/>
+              </a:schemeClr>
+            </a:lnRef>
+            <a:fillRef idx="1">
+              <a:schemeClr val="accent1"/>
+            </a:fillRef>
+            <a:effectRef idx="0">
+              <a:schemeClr val="accent1"/>
+            </a:effectRef>
+            <a:fontRef idx="minor">
+              <a:schemeClr val="lt1"/>
+            </a:fontRef>
+          </p:style>
+          <p:txBody>
+            <a:bodyPr rtlCol="0" anchor="ctr"/>
+            <a:lstStyle/>
+            <a:p>
+              <a:pPr algn="ctr"/>
+              <a:endParaRPr lang="LID4096"/>
+            </a:p>
+          </p:txBody>
+        </p:sp>
+      </p:grpSp>
+      <p:sp>
+        <p:nvSpPr>
+          <p:cNvPr id="23" name="Freeform: Shape 22">
+            <a:extLst>
+              <a:ext uri="{FF2B5EF4-FFF2-40B4-BE49-F238E27FC236}">
+                <a16:creationId xmlns:a16="http://schemas.microsoft.com/office/drawing/2014/main" id="{1743F6B4-2DA2-0F57-36F0-16E48DF18E8F}"/>
+              </a:ext>
+            </a:extLst>
+          </p:cNvPr>
+          <p:cNvSpPr/>
+          <p:nvPr/>
+        </p:nvSpPr>
+        <p:spPr>
+          <a:xfrm>
+            <a:off x="8124345" y="3953629"/>
+            <a:ext cx="394705" cy="401283"/>
+          </a:xfrm>
+          <a:custGeom>
+            <a:avLst/>
+            <a:gdLst>
+              <a:gd name="connsiteX0" fmla="*/ 394705 w 394705"/>
+              <a:gd name="connsiteY0" fmla="*/ 0 h 401283"/>
+              <a:gd name="connsiteX1" fmla="*/ 171039 w 394705"/>
+              <a:gd name="connsiteY1" fmla="*/ 157882 h 401283"/>
+              <a:gd name="connsiteX2" fmla="*/ 0 w 394705"/>
+              <a:gd name="connsiteY2" fmla="*/ 401283 h 401283"/>
+            </a:gdLst>
+            <a:ahLst/>
+            <a:cxnLst>
+              <a:cxn ang="0">
+                <a:pos x="connsiteX0" y="connsiteY0"/>
+              </a:cxn>
+              <a:cxn ang="0">
+                <a:pos x="connsiteX1" y="connsiteY1"/>
+              </a:cxn>
+              <a:cxn ang="0">
+                <a:pos x="connsiteX2" y="connsiteY2"/>
+              </a:cxn>
+            </a:cxnLst>
+            <a:rect l="l" t="t" r="r" b="b"/>
+            <a:pathLst>
+              <a:path w="394705" h="401283">
+                <a:moveTo>
+                  <a:pt x="394705" y="0"/>
+                </a:moveTo>
+                <a:cubicBezTo>
+                  <a:pt x="315764" y="45501"/>
+                  <a:pt x="236823" y="91002"/>
+                  <a:pt x="171039" y="157882"/>
+                </a:cubicBezTo>
+                <a:cubicBezTo>
+                  <a:pt x="105255" y="224763"/>
+                  <a:pt x="52627" y="313023"/>
+                  <a:pt x="0" y="401283"/>
+                </a:cubicBezTo>
+              </a:path>
+            </a:pathLst>
+          </a:custGeom>
+          <a:noFill/>
+          <a:ln w="38100">
+            <a:solidFill>
+              <a:schemeClr val="bg1">
+                <a:lumMod val="75000"/>
+              </a:schemeClr>
+            </a:solidFill>
+          </a:ln>
+        </p:spPr>
+        <p:style>
+          <a:lnRef idx="2">
+            <a:schemeClr val="accent1">
+              <a:shade val="15000"/>
+            </a:schemeClr>
+          </a:lnRef>
+          <a:fillRef idx="1">
+            <a:schemeClr val="accent1"/>
+          </a:fillRef>
+          <a:effectRef idx="0">
+            <a:schemeClr val="accent1"/>
+          </a:effectRef>
+          <a:fontRef idx="minor">
+            <a:schemeClr val="lt1"/>
+          </a:fontRef>
+        </p:style>
+        <p:txBody>
+          <a:bodyPr rtlCol="0" anchor="ctr"/>
+          <a:lstStyle/>
+          <a:p>
+            <a:pPr algn="ctr"/>
+            <a:endParaRPr lang="LID4096"/>
+          </a:p>
+        </p:txBody>
+      </p:sp>
+      <p:sp>
+        <p:nvSpPr>
+          <p:cNvPr id="24" name="Freeform: Shape 23">
+            <a:extLst>
+              <a:ext uri="{FF2B5EF4-FFF2-40B4-BE49-F238E27FC236}">
+                <a16:creationId xmlns:a16="http://schemas.microsoft.com/office/drawing/2014/main" id="{185B09EE-93D8-8029-4540-11C28D093747}"/>
+              </a:ext>
+            </a:extLst>
+          </p:cNvPr>
+          <p:cNvSpPr/>
+          <p:nvPr/>
+        </p:nvSpPr>
+        <p:spPr>
+          <a:xfrm>
+            <a:off x="2526112" y="4644363"/>
+            <a:ext cx="5216685" cy="1237240"/>
+          </a:xfrm>
+          <a:custGeom>
+            <a:avLst/>
+            <a:gdLst>
+              <a:gd name="connsiteX0" fmla="*/ 5216685 w 5216685"/>
+              <a:gd name="connsiteY0" fmla="*/ 118411 h 1237240"/>
+              <a:gd name="connsiteX1" fmla="*/ 3861531 w 5216685"/>
+              <a:gd name="connsiteY1" fmla="*/ 1236742 h 1237240"/>
+              <a:gd name="connsiteX2" fmla="*/ 0 w 5216685"/>
+              <a:gd name="connsiteY2" fmla="*/ 0 h 1237240"/>
+            </a:gdLst>
+            <a:ahLst/>
+            <a:cxnLst>
+              <a:cxn ang="0">
+                <a:pos x="connsiteX0" y="connsiteY0"/>
+              </a:cxn>
+              <a:cxn ang="0">
+                <a:pos x="connsiteX1" y="connsiteY1"/>
+              </a:cxn>
+              <a:cxn ang="0">
+                <a:pos x="connsiteX2" y="connsiteY2"/>
+              </a:cxn>
+            </a:cxnLst>
+            <a:rect l="l" t="t" r="r" b="b"/>
+            <a:pathLst>
+              <a:path w="5216685" h="1237240">
+                <a:moveTo>
+                  <a:pt x="5216685" y="118411"/>
+                </a:moveTo>
+                <a:cubicBezTo>
+                  <a:pt x="4973831" y="687444"/>
+                  <a:pt x="4730978" y="1256477"/>
+                  <a:pt x="3861531" y="1236742"/>
+                </a:cubicBezTo>
+                <a:cubicBezTo>
+                  <a:pt x="2992084" y="1217007"/>
+                  <a:pt x="1496042" y="608503"/>
+                  <a:pt x="0" y="0"/>
+                </a:cubicBezTo>
+              </a:path>
+            </a:pathLst>
+          </a:custGeom>
+          <a:noFill/>
+          <a:ln w="38100">
+            <a:solidFill>
+              <a:schemeClr val="bg1">
+                <a:lumMod val="75000"/>
+              </a:schemeClr>
+            </a:solidFill>
+          </a:ln>
+        </p:spPr>
+        <p:style>
+          <a:lnRef idx="2">
+            <a:schemeClr val="accent1">
+              <a:shade val="15000"/>
+            </a:schemeClr>
+          </a:lnRef>
+          <a:fillRef idx="1">
+            <a:schemeClr val="accent1"/>
+          </a:fillRef>
+          <a:effectRef idx="0">
+            <a:schemeClr val="accent1"/>
+          </a:effectRef>
+          <a:fontRef idx="minor">
+            <a:schemeClr val="lt1"/>
+          </a:fontRef>
+        </p:style>
+        <p:txBody>
+          <a:bodyPr rtlCol="0" anchor="ctr"/>
+          <a:lstStyle/>
+          <a:p>
+            <a:pPr algn="ctr"/>
+            <a:endParaRPr lang="LID4096"/>
+          </a:p>
+        </p:txBody>
+      </p:sp>
+      <p:sp>
+        <p:nvSpPr>
+          <p:cNvPr id="25" name="Freeform: Shape 24">
+            <a:extLst>
+              <a:ext uri="{FF2B5EF4-FFF2-40B4-BE49-F238E27FC236}">
+                <a16:creationId xmlns:a16="http://schemas.microsoft.com/office/drawing/2014/main" id="{BE9B9503-DB71-6246-2A42-6F526C7C83DD}"/>
+              </a:ext>
+            </a:extLst>
+          </p:cNvPr>
+          <p:cNvSpPr/>
+          <p:nvPr/>
+        </p:nvSpPr>
+        <p:spPr>
+          <a:xfrm>
+            <a:off x="3973364" y="3874688"/>
+            <a:ext cx="4361491" cy="971359"/>
+          </a:xfrm>
+          <a:custGeom>
+            <a:avLst/>
+            <a:gdLst>
+              <a:gd name="connsiteX0" fmla="*/ 4361491 w 4361491"/>
+              <a:gd name="connsiteY0" fmla="*/ 0 h 971359"/>
+              <a:gd name="connsiteX1" fmla="*/ 2414279 w 4361491"/>
+              <a:gd name="connsiteY1" fmla="*/ 967027 h 971359"/>
+              <a:gd name="connsiteX2" fmla="*/ 0 w 4361491"/>
+              <a:gd name="connsiteY2" fmla="*/ 289450 h 971359"/>
+            </a:gdLst>
+            <a:ahLst/>
+            <a:cxnLst>
+              <a:cxn ang="0">
+                <a:pos x="connsiteX0" y="connsiteY0"/>
+              </a:cxn>
+              <a:cxn ang="0">
+                <a:pos x="connsiteX1" y="connsiteY1"/>
+              </a:cxn>
+              <a:cxn ang="0">
+                <a:pos x="connsiteX2" y="connsiteY2"/>
+              </a:cxn>
+            </a:cxnLst>
+            <a:rect l="l" t="t" r="r" b="b"/>
+            <a:pathLst>
+              <a:path w="4361491" h="971359">
+                <a:moveTo>
+                  <a:pt x="4361491" y="0"/>
+                </a:moveTo>
+                <a:cubicBezTo>
+                  <a:pt x="3751342" y="459392"/>
+                  <a:pt x="3141194" y="918785"/>
+                  <a:pt x="2414279" y="967027"/>
+                </a:cubicBezTo>
+                <a:cubicBezTo>
+                  <a:pt x="1687364" y="1015269"/>
+                  <a:pt x="843682" y="652359"/>
+                  <a:pt x="0" y="289450"/>
+                </a:cubicBezTo>
+              </a:path>
+            </a:pathLst>
+          </a:custGeom>
+          <a:noFill/>
+          <a:ln w="38100">
+            <a:solidFill>
+              <a:schemeClr val="bg1">
+                <a:lumMod val="75000"/>
+              </a:schemeClr>
+            </a:solidFill>
+          </a:ln>
+        </p:spPr>
+        <p:style>
+          <a:lnRef idx="2">
+            <a:schemeClr val="accent1">
+              <a:shade val="15000"/>
+            </a:schemeClr>
+          </a:lnRef>
+          <a:fillRef idx="1">
+            <a:schemeClr val="accent1"/>
+          </a:fillRef>
+          <a:effectRef idx="0">
+            <a:schemeClr val="accent1"/>
+          </a:effectRef>
+          <a:fontRef idx="minor">
+            <a:schemeClr val="lt1"/>
+          </a:fontRef>
+        </p:style>
+        <p:txBody>
+          <a:bodyPr rtlCol="0" anchor="ctr"/>
+          <a:lstStyle/>
+          <a:p>
+            <a:pPr algn="ctr"/>
+            <a:endParaRPr lang="LID4096"/>
+          </a:p>
+        </p:txBody>
+      </p:sp>
+      <p:grpSp>
+        <p:nvGrpSpPr>
+          <p:cNvPr id="22" name="Group 21">
+            <a:extLst>
+              <a:ext uri="{FF2B5EF4-FFF2-40B4-BE49-F238E27FC236}">
+                <a16:creationId xmlns:a16="http://schemas.microsoft.com/office/drawing/2014/main" id="{34CCA88B-1189-E6FA-67B2-C01B8F8BACAE}"/>
+              </a:ext>
+            </a:extLst>
+          </p:cNvPr>
+          <p:cNvGrpSpPr/>
+          <p:nvPr/>
+        </p:nvGrpSpPr>
+        <p:grpSpPr>
+          <a:xfrm rot="18737801">
+            <a:off x="7671049" y="4464771"/>
+            <a:ext cx="550143" cy="184758"/>
+            <a:chOff x="7629989" y="5236460"/>
+            <a:chExt cx="1027147" cy="344953"/>
+          </a:xfrm>
+        </p:grpSpPr>
+        <p:sp>
+          <p:nvSpPr>
+            <p:cNvPr id="21" name="Oval 20">
+              <a:extLst>
+                <a:ext uri="{FF2B5EF4-FFF2-40B4-BE49-F238E27FC236}">
+                  <a16:creationId xmlns:a16="http://schemas.microsoft.com/office/drawing/2014/main" id="{AA194F9C-88D6-4319-3EA9-5ACE4DFFB43B}"/>
+                </a:ext>
+              </a:extLst>
+            </p:cNvPr>
+            <p:cNvSpPr/>
+            <p:nvPr/>
+          </p:nvSpPr>
+          <p:spPr>
+            <a:xfrm>
+              <a:off x="7629989" y="5236460"/>
+              <a:ext cx="341624" cy="341624"/>
+            </a:xfrm>
+            <a:prstGeom prst="ellipse">
+              <a:avLst/>
+            </a:prstGeom>
+            <a:solidFill>
+              <a:schemeClr val="accent2">
+                <a:lumMod val="60000"/>
+                <a:lumOff val="40000"/>
+              </a:schemeClr>
+            </a:solidFill>
+            <a:ln w="25400">
+              <a:solidFill>
+                <a:schemeClr val="accent2">
+                  <a:lumMod val="75000"/>
+                </a:schemeClr>
+              </a:solidFill>
+            </a:ln>
+          </p:spPr>
+          <p:style>
+            <a:lnRef idx="2">
+              <a:schemeClr val="accent1">
+                <a:shade val="15000"/>
+              </a:schemeClr>
+            </a:lnRef>
+            <a:fillRef idx="1">
+              <a:schemeClr val="accent1"/>
+            </a:fillRef>
+            <a:effectRef idx="0">
+              <a:schemeClr val="accent1"/>
+            </a:effectRef>
+            <a:fontRef idx="minor">
+              <a:schemeClr val="lt1"/>
+            </a:fontRef>
+          </p:style>
+          <p:txBody>
+            <a:bodyPr rtlCol="0" anchor="ctr"/>
+            <a:lstStyle/>
+            <a:p>
+              <a:pPr algn="ctr"/>
+              <a:endParaRPr lang="LID4096"/>
+            </a:p>
+          </p:txBody>
+        </p:sp>
+        <p:sp>
+          <p:nvSpPr>
+            <p:cNvPr id="9" name="Oval 8">
+              <a:extLst>
+                <a:ext uri="{FF2B5EF4-FFF2-40B4-BE49-F238E27FC236}">
+                  <a16:creationId xmlns:a16="http://schemas.microsoft.com/office/drawing/2014/main" id="{64DD08F2-0160-25D1-D65C-40F74012AD28}"/>
+                </a:ext>
+              </a:extLst>
+            </p:cNvPr>
+            <p:cNvSpPr/>
+            <p:nvPr/>
+          </p:nvSpPr>
+          <p:spPr>
+            <a:xfrm>
+              <a:off x="8315512" y="5239789"/>
+              <a:ext cx="341624" cy="341624"/>
+            </a:xfrm>
+            <a:prstGeom prst="ellipse">
+              <a:avLst/>
+            </a:prstGeom>
+            <a:solidFill>
+              <a:schemeClr val="accent2">
+                <a:lumMod val="60000"/>
+                <a:lumOff val="40000"/>
+              </a:schemeClr>
+            </a:solidFill>
+            <a:ln w="25400">
+              <a:solidFill>
+                <a:schemeClr val="accent2">
+                  <a:lumMod val="75000"/>
+                </a:schemeClr>
+              </a:solidFill>
+            </a:ln>
+          </p:spPr>
+          <p:style>
+            <a:lnRef idx="2">
+              <a:schemeClr val="accent1">
+                <a:shade val="15000"/>
+              </a:schemeClr>
+            </a:lnRef>
+            <a:fillRef idx="1">
+              <a:schemeClr val="accent1"/>
+            </a:fillRef>
+            <a:effectRef idx="0">
+              <a:schemeClr val="accent1"/>
+            </a:effectRef>
+            <a:fontRef idx="minor">
+              <a:schemeClr val="lt1"/>
+            </a:fontRef>
+          </p:style>
+          <p:txBody>
+            <a:bodyPr rtlCol="0" anchor="ctr"/>
+            <a:lstStyle/>
+            <a:p>
+              <a:pPr algn="ctr"/>
+              <a:endParaRPr lang="LID4096"/>
+            </a:p>
+          </p:txBody>
+        </p:sp>
+        <p:sp>
+          <p:nvSpPr>
+            <p:cNvPr id="13" name="Rectangle 12">
+              <a:extLst>
+                <a:ext uri="{FF2B5EF4-FFF2-40B4-BE49-F238E27FC236}">
+                  <a16:creationId xmlns:a16="http://schemas.microsoft.com/office/drawing/2014/main" id="{469DD94C-B2D8-B8B9-61ED-42363ACB9357}"/>
+                </a:ext>
+              </a:extLst>
+            </p:cNvPr>
+            <p:cNvSpPr/>
+            <p:nvPr/>
+          </p:nvSpPr>
+          <p:spPr>
+            <a:xfrm>
+              <a:off x="7866077" y="5260841"/>
+              <a:ext cx="541140" cy="292863"/>
+            </a:xfrm>
+            <a:prstGeom prst="rect">
+              <a:avLst/>
+            </a:prstGeom>
+            <a:solidFill>
+              <a:schemeClr val="accent2">
+                <a:lumMod val="60000"/>
+                <a:lumOff val="40000"/>
+              </a:schemeClr>
+            </a:solidFill>
+            <a:ln w="25400">
+              <a:solidFill>
+                <a:schemeClr val="accent2">
+                  <a:lumMod val="75000"/>
+                </a:schemeClr>
+              </a:solidFill>
+            </a:ln>
+          </p:spPr>
+          <p:style>
+            <a:lnRef idx="2">
+              <a:schemeClr val="accent1">
+                <a:shade val="15000"/>
+              </a:schemeClr>
+            </a:lnRef>
+            <a:fillRef idx="1">
+              <a:schemeClr val="accent1"/>
+            </a:fillRef>
+            <a:effectRef idx="0">
+              <a:schemeClr val="accent1"/>
+            </a:effectRef>
+            <a:fontRef idx="minor">
+              <a:schemeClr val="lt1"/>
+            </a:fontRef>
+          </p:style>
+          <p:txBody>
+            <a:bodyPr rtlCol="0" anchor="ctr"/>
+            <a:lstStyle/>
+            <a:p>
+              <a:pPr algn="ctr"/>
+              <a:endParaRPr lang="LID4096"/>
+            </a:p>
+          </p:txBody>
+        </p:sp>
+        <p:cxnSp>
+          <p:nvCxnSpPr>
+            <p:cNvPr id="15" name="Straight Connector 14">
+              <a:extLst>
+                <a:ext uri="{FF2B5EF4-FFF2-40B4-BE49-F238E27FC236}">
+                  <a16:creationId xmlns:a16="http://schemas.microsoft.com/office/drawing/2014/main" id="{89A326E8-AE32-C3CC-BA73-0C7210F15F76}"/>
+                </a:ext>
+              </a:extLst>
+            </p:cNvPr>
+            <p:cNvCxnSpPr/>
+            <p:nvPr/>
+          </p:nvCxnSpPr>
+          <p:spPr>
+            <a:xfrm>
+              <a:off x="7953306" y="5260841"/>
+              <a:ext cx="0" cy="292863"/>
+            </a:xfrm>
+            <a:prstGeom prst="line">
+              <a:avLst/>
+            </a:prstGeom>
+            <a:ln w="38100"/>
+          </p:spPr>
+          <p:style>
+            <a:lnRef idx="2">
+              <a:schemeClr val="accent1"/>
+            </a:lnRef>
+            <a:fillRef idx="0">
+              <a:schemeClr val="accent1"/>
+            </a:fillRef>
+            <a:effectRef idx="1">
+              <a:schemeClr val="accent1"/>
+            </a:effectRef>
+            <a:fontRef idx="minor">
+              <a:schemeClr val="tx1"/>
+            </a:fontRef>
+          </p:style>
+        </p:cxnSp>
+        <p:cxnSp>
+          <p:nvCxnSpPr>
+            <p:cNvPr id="16" name="Straight Connector 15">
+              <a:extLst>
+                <a:ext uri="{FF2B5EF4-FFF2-40B4-BE49-F238E27FC236}">
+                  <a16:creationId xmlns:a16="http://schemas.microsoft.com/office/drawing/2014/main" id="{D93335A8-181E-3BD2-5531-546AB5CC26C8}"/>
+                </a:ext>
+              </a:extLst>
+            </p:cNvPr>
+            <p:cNvCxnSpPr/>
+            <p:nvPr/>
+          </p:nvCxnSpPr>
+          <p:spPr>
+            <a:xfrm>
+              <a:off x="8266751" y="5260841"/>
+              <a:ext cx="0" cy="292863"/>
+            </a:xfrm>
+            <a:prstGeom prst="line">
+              <a:avLst/>
+            </a:prstGeom>
+            <a:ln w="38100"/>
+          </p:spPr>
+          <p:style>
+            <a:lnRef idx="2">
+              <a:schemeClr val="accent1"/>
+            </a:lnRef>
+            <a:fillRef idx="0">
+              <a:schemeClr val="accent1"/>
+            </a:fillRef>
+            <a:effectRef idx="1">
+              <a:schemeClr val="accent1"/>
+            </a:effectRef>
+            <a:fontRef idx="minor">
+              <a:schemeClr val="tx1"/>
+            </a:fontRef>
+          </p:style>
+        </p:cxnSp>
+        <p:cxnSp>
+          <p:nvCxnSpPr>
+            <p:cNvPr id="17" name="Straight Connector 16">
+              <a:extLst>
+                <a:ext uri="{FF2B5EF4-FFF2-40B4-BE49-F238E27FC236}">
+                  <a16:creationId xmlns:a16="http://schemas.microsoft.com/office/drawing/2014/main" id="{C32B0AAA-7F9F-F4D3-3864-E5B28A431B9F}"/>
+                </a:ext>
+              </a:extLst>
+            </p:cNvPr>
+            <p:cNvCxnSpPr/>
+            <p:nvPr/>
+          </p:nvCxnSpPr>
+          <p:spPr>
+            <a:xfrm>
+              <a:off x="8099972" y="5260841"/>
+              <a:ext cx="0" cy="292863"/>
+            </a:xfrm>
+            <a:prstGeom prst="line">
+              <a:avLst/>
+            </a:prstGeom>
+            <a:ln w="50800">
+              <a:solidFill>
+                <a:schemeClr val="accent6">
+                  <a:lumMod val="75000"/>
+                </a:schemeClr>
+              </a:solidFill>
+            </a:ln>
+          </p:spPr>
+          <p:style>
+            <a:lnRef idx="2">
+              <a:schemeClr val="accent1"/>
+            </a:lnRef>
+            <a:fillRef idx="0">
+              <a:schemeClr val="accent1"/>
+            </a:fillRef>
+            <a:effectRef idx="1">
+              <a:schemeClr val="accent1"/>
+            </a:effectRef>
+            <a:fontRef idx="minor">
+              <a:schemeClr val="tx1"/>
+            </a:fontRef>
+          </p:style>
+        </p:cxnSp>
+        <p:cxnSp>
+          <p:nvCxnSpPr>
+            <p:cNvPr id="20" name="Straight Connector 19">
+              <a:extLst>
+                <a:ext uri="{FF2B5EF4-FFF2-40B4-BE49-F238E27FC236}">
+                  <a16:creationId xmlns:a16="http://schemas.microsoft.com/office/drawing/2014/main" id="{0D78C407-115F-892F-1BBE-400846FDF841}"/>
+                </a:ext>
+              </a:extLst>
+            </p:cNvPr>
+            <p:cNvCxnSpPr/>
+            <p:nvPr/>
+          </p:nvCxnSpPr>
+          <p:spPr>
+            <a:xfrm>
+              <a:off x="8196330" y="5260841"/>
+              <a:ext cx="0" cy="292863"/>
+            </a:xfrm>
+            <a:prstGeom prst="line">
+              <a:avLst/>
+            </a:prstGeom>
+            <a:ln w="50800">
+              <a:solidFill>
+                <a:schemeClr val="accent5">
+                  <a:lumMod val="60000"/>
+                  <a:lumOff val="40000"/>
+                </a:schemeClr>
+              </a:solidFill>
+            </a:ln>
+          </p:spPr>
+          <p:style>
+            <a:lnRef idx="2">
+              <a:schemeClr val="accent1"/>
+            </a:lnRef>
+            <a:fillRef idx="0">
+              <a:schemeClr val="accent1"/>
+            </a:fillRef>
+            <a:effectRef idx="1">
+              <a:schemeClr val="accent1"/>
+            </a:effectRef>
+            <a:fontRef idx="minor">
+              <a:schemeClr val="tx1"/>
+            </a:fontRef>
+          </p:style>
+        </p:cxnSp>
+      </p:grpSp>
     </p:spTree>
     <p:extLst>
       <p:ext uri="{BB962C8B-B14F-4D97-AF65-F5344CB8AC3E}">
         <p14:creationId xmlns:p14="http://schemas.microsoft.com/office/powerpoint/2010/main" val="3216618104"/>
+      </p:ext>
+    </p:extLst>
+  </p:cSld>
+  <p:clrMapOvr>
+    <a:masterClrMapping/>
+  </p:clrMapOvr>
+</p:sld>
+</file>
+
+<file path=ppt/slides/slide8.xml><?xml version="1.0" encoding="utf-8"?>
+<p:sld xmlns:a="http://schemas.openxmlformats.org/drawingml/2006/main" xmlns:r="http://schemas.openxmlformats.org/officeDocument/2006/relationships" xmlns:p="http://schemas.openxmlformats.org/presentationml/2006/main">
+  <p:cSld>
+    <p:spTree>
+      <p:nvGrpSpPr>
+        <p:cNvPr id="1" name="">
+          <a:extLst>
+            <a:ext uri="{FF2B5EF4-FFF2-40B4-BE49-F238E27FC236}">
+              <a16:creationId xmlns:a16="http://schemas.microsoft.com/office/drawing/2014/main" id="{70BBEF93-4CAA-0AB7-78A8-B9287FCFAEA7}"/>
+            </a:ext>
+          </a:extLst>
+        </p:cNvPr>
+        <p:cNvGrpSpPr/>
+        <p:nvPr/>
+      </p:nvGrpSpPr>
+      <p:grpSpPr>
+        <a:xfrm>
+          <a:off x="0" y="0"/>
+          <a:ext cx="0" cy="0"/>
+          <a:chOff x="0" y="0"/>
+          <a:chExt cx="0" cy="0"/>
+        </a:xfrm>
+      </p:grpSpPr>
+      <p:pic>
+        <p:nvPicPr>
+          <p:cNvPr id="5" name="Picture 4">
+            <a:extLst>
+              <a:ext uri="{FF2B5EF4-FFF2-40B4-BE49-F238E27FC236}">
+                <a16:creationId xmlns:a16="http://schemas.microsoft.com/office/drawing/2014/main" id="{C5B50886-5F6D-0A55-9A75-A3AA5C0030F0}"/>
+              </a:ext>
+            </a:extLst>
+          </p:cNvPr>
+          <p:cNvPicPr>
+            <a:picLocks noChangeAspect="1"/>
+          </p:cNvPicPr>
+          <p:nvPr/>
+        </p:nvPicPr>
+        <p:blipFill>
+          <a:blip r:embed="rId3"/>
+          <a:stretch>
+            <a:fillRect/>
+          </a:stretch>
+        </p:blipFill>
+        <p:spPr>
+          <a:xfrm rot="10800000">
+            <a:off x="1099221" y="2243241"/>
+            <a:ext cx="2583575" cy="2493188"/>
+          </a:xfrm>
+          <a:prstGeom prst="rect">
+            <a:avLst/>
+          </a:prstGeom>
+          <a:ln w="50800">
+            <a:solidFill>
+              <a:schemeClr val="tx1"/>
+            </a:solidFill>
+          </a:ln>
+        </p:spPr>
+      </p:pic>
+      <p:sp>
+        <p:nvSpPr>
+          <p:cNvPr id="2" name="TextBox 1">
+            <a:extLst>
+              <a:ext uri="{FF2B5EF4-FFF2-40B4-BE49-F238E27FC236}">
+                <a16:creationId xmlns:a16="http://schemas.microsoft.com/office/drawing/2014/main" id="{B554C09C-B921-DFF1-1038-E272F33354F6}"/>
+              </a:ext>
+            </a:extLst>
+          </p:cNvPr>
+          <p:cNvSpPr txBox="1"/>
+          <p:nvPr/>
+        </p:nvSpPr>
+        <p:spPr>
+          <a:xfrm>
+            <a:off x="1545929" y="2644523"/>
+            <a:ext cx="947292" cy="738664"/>
+          </a:xfrm>
+          <a:prstGeom prst="rect">
+            <a:avLst/>
+          </a:prstGeom>
+          <a:solidFill>
+            <a:schemeClr val="accent2">
+              <a:lumMod val="40000"/>
+              <a:lumOff val="60000"/>
+            </a:schemeClr>
+          </a:solidFill>
+          <a:ln>
+            <a:solidFill>
+              <a:schemeClr val="accent2">
+                <a:lumMod val="75000"/>
+              </a:schemeClr>
+            </a:solidFill>
+          </a:ln>
+        </p:spPr>
+        <p:txBody>
+          <a:bodyPr wrap="square" rtlCol="0">
+            <a:spAutoFit/>
+          </a:bodyPr>
+          <a:lstStyle/>
+          <a:p>
+            <a:pPr algn="ctr"/>
+            <a:r>
+              <a:rPr lang="en-US" sz="1000" dirty="0" err="1"/>
+              <a:t>Qingke</a:t>
+            </a:r>
+            <a:r>
+              <a:rPr lang="en-US" sz="1000" dirty="0"/>
+              <a:t> V4</a:t>
+            </a:r>
+          </a:p>
+          <a:p>
+            <a:pPr algn="ctr"/>
+            <a:r>
+              <a:rPr lang="en-US" sz="1000" dirty="0"/>
+              <a:t>RISCV</a:t>
+            </a:r>
+            <a:r>
+              <a:rPr lang="en-US" sz="1600" dirty="0"/>
+              <a:t> CPU</a:t>
+            </a:r>
+            <a:endParaRPr lang="LID4096" sz="1600" dirty="0"/>
+          </a:p>
+        </p:txBody>
+      </p:sp>
+      <p:sp>
+        <p:nvSpPr>
+          <p:cNvPr id="4" name="TextBox 3">
+            <a:extLst>
+              <a:ext uri="{FF2B5EF4-FFF2-40B4-BE49-F238E27FC236}">
+                <a16:creationId xmlns:a16="http://schemas.microsoft.com/office/drawing/2014/main" id="{2DFFADC1-F978-F20E-1CA3-B901D7FAFFC7}"/>
+              </a:ext>
+            </a:extLst>
+          </p:cNvPr>
+          <p:cNvSpPr txBox="1"/>
+          <p:nvPr/>
+        </p:nvSpPr>
+        <p:spPr>
+          <a:xfrm rot="16200000">
+            <a:off x="2553523" y="3289780"/>
+            <a:ext cx="947292" cy="400110"/>
+          </a:xfrm>
+          <a:prstGeom prst="rect">
+            <a:avLst/>
+          </a:prstGeom>
+          <a:solidFill>
+            <a:schemeClr val="tx2">
+              <a:lumMod val="25000"/>
+              <a:lumOff val="75000"/>
+            </a:schemeClr>
+          </a:solidFill>
+          <a:ln>
+            <a:solidFill>
+              <a:schemeClr val="tx2">
+                <a:lumMod val="75000"/>
+                <a:lumOff val="25000"/>
+              </a:schemeClr>
+            </a:solidFill>
+          </a:ln>
+        </p:spPr>
+        <p:txBody>
+          <a:bodyPr wrap="square" rtlCol="0">
+            <a:spAutoFit/>
+          </a:bodyPr>
+          <a:lstStyle/>
+          <a:p>
+            <a:pPr algn="ctr"/>
+            <a:r>
+              <a:rPr lang="en-US" sz="1000" dirty="0"/>
+              <a:t>Memory</a:t>
+            </a:r>
+            <a:br>
+              <a:rPr lang="en-US" sz="1000" dirty="0"/>
+            </a:br>
+            <a:r>
+              <a:rPr lang="en-US" sz="1000" dirty="0"/>
+              <a:t>Subsystem</a:t>
+            </a:r>
+          </a:p>
+        </p:txBody>
+      </p:sp>
+      <p:sp>
+        <p:nvSpPr>
+          <p:cNvPr id="7" name="TextBox 6">
+            <a:extLst>
+              <a:ext uri="{FF2B5EF4-FFF2-40B4-BE49-F238E27FC236}">
+                <a16:creationId xmlns:a16="http://schemas.microsoft.com/office/drawing/2014/main" id="{FABBAA12-17B8-03AE-D6FA-F35A36ED053C}"/>
+              </a:ext>
+            </a:extLst>
+          </p:cNvPr>
+          <p:cNvSpPr txBox="1"/>
+          <p:nvPr/>
+        </p:nvSpPr>
+        <p:spPr>
+          <a:xfrm>
+            <a:off x="1820089" y="3869605"/>
+            <a:ext cx="673132" cy="400110"/>
+          </a:xfrm>
+          <a:prstGeom prst="rect">
+            <a:avLst/>
+          </a:prstGeom>
+          <a:solidFill>
+            <a:schemeClr val="accent6">
+              <a:lumMod val="40000"/>
+              <a:lumOff val="60000"/>
+            </a:schemeClr>
+          </a:solidFill>
+          <a:ln>
+            <a:solidFill>
+              <a:schemeClr val="accent6">
+                <a:lumMod val="75000"/>
+              </a:schemeClr>
+            </a:solidFill>
+          </a:ln>
+        </p:spPr>
+        <p:txBody>
+          <a:bodyPr wrap="square" rtlCol="0">
+            <a:spAutoFit/>
+          </a:bodyPr>
+          <a:lstStyle/>
+          <a:p>
+            <a:pPr algn="ctr"/>
+            <a:r>
+              <a:rPr lang="en-US" sz="1000" dirty="0"/>
+              <a:t>GPIO</a:t>
+            </a:r>
+            <a:br>
+              <a:rPr lang="en-US" sz="1000" dirty="0"/>
+            </a:br>
+            <a:r>
+              <a:rPr lang="en-US" sz="1000" dirty="0"/>
+              <a:t>Module</a:t>
+            </a:r>
+            <a:endParaRPr lang="LID4096" sz="1600" dirty="0"/>
+          </a:p>
+        </p:txBody>
+      </p:sp>
+      <p:sp>
+        <p:nvSpPr>
+          <p:cNvPr id="11" name="Arrow: Up-Down 10">
+            <a:extLst>
+              <a:ext uri="{FF2B5EF4-FFF2-40B4-BE49-F238E27FC236}">
+                <a16:creationId xmlns:a16="http://schemas.microsoft.com/office/drawing/2014/main" id="{8BEC0DDB-83B1-319A-739C-AB857491BC06}"/>
+              </a:ext>
+            </a:extLst>
+          </p:cNvPr>
+          <p:cNvSpPr/>
+          <p:nvPr/>
+        </p:nvSpPr>
+        <p:spPr>
+          <a:xfrm rot="18008206">
+            <a:off x="2548333" y="2960390"/>
+            <a:ext cx="223666" cy="434175"/>
+          </a:xfrm>
+          <a:prstGeom prst="upDownArrow">
+            <a:avLst/>
+          </a:prstGeom>
+          <a:solidFill>
+            <a:schemeClr val="bg1"/>
+          </a:solidFill>
+          <a:ln>
+            <a:solidFill>
+              <a:schemeClr val="bg1">
+                <a:lumMod val="65000"/>
+              </a:schemeClr>
+            </a:solidFill>
+          </a:ln>
+        </p:spPr>
+        <p:style>
+          <a:lnRef idx="2">
+            <a:schemeClr val="accent1">
+              <a:shade val="15000"/>
+            </a:schemeClr>
+          </a:lnRef>
+          <a:fillRef idx="1">
+            <a:schemeClr val="accent1"/>
+          </a:fillRef>
+          <a:effectRef idx="0">
+            <a:schemeClr val="accent1"/>
+          </a:effectRef>
+          <a:fontRef idx="minor">
+            <a:schemeClr val="lt1"/>
+          </a:fontRef>
+        </p:style>
+        <p:txBody>
+          <a:bodyPr rtlCol="0" anchor="ctr"/>
+          <a:lstStyle/>
+          <a:p>
+            <a:pPr algn="ctr"/>
+            <a:endParaRPr lang="LID4096"/>
+          </a:p>
+        </p:txBody>
+      </p:sp>
+      <p:sp>
+        <p:nvSpPr>
+          <p:cNvPr id="12" name="Arrow: Up-Down 11">
+            <a:extLst>
+              <a:ext uri="{FF2B5EF4-FFF2-40B4-BE49-F238E27FC236}">
+                <a16:creationId xmlns:a16="http://schemas.microsoft.com/office/drawing/2014/main" id="{2F4DEB9A-5EDD-4CF8-563F-76DACFE7B238}"/>
+              </a:ext>
+            </a:extLst>
+          </p:cNvPr>
+          <p:cNvSpPr/>
+          <p:nvPr/>
+        </p:nvSpPr>
+        <p:spPr>
+          <a:xfrm rot="3255855">
+            <a:off x="2545972" y="3635006"/>
+            <a:ext cx="223666" cy="434175"/>
+          </a:xfrm>
+          <a:prstGeom prst="upDownArrow">
+            <a:avLst/>
+          </a:prstGeom>
+          <a:solidFill>
+            <a:schemeClr val="bg1"/>
+          </a:solidFill>
+          <a:ln>
+            <a:solidFill>
+              <a:schemeClr val="bg1">
+                <a:lumMod val="65000"/>
+              </a:schemeClr>
+            </a:solidFill>
+          </a:ln>
+        </p:spPr>
+        <p:style>
+          <a:lnRef idx="2">
+            <a:schemeClr val="accent1">
+              <a:shade val="15000"/>
+            </a:schemeClr>
+          </a:lnRef>
+          <a:fillRef idx="1">
+            <a:schemeClr val="accent1"/>
+          </a:fillRef>
+          <a:effectRef idx="0">
+            <a:schemeClr val="accent1"/>
+          </a:effectRef>
+          <a:fontRef idx="minor">
+            <a:schemeClr val="lt1"/>
+          </a:fontRef>
+        </p:style>
+        <p:txBody>
+          <a:bodyPr rtlCol="0" anchor="ctr"/>
+          <a:lstStyle/>
+          <a:p>
+            <a:pPr algn="ctr"/>
+            <a:endParaRPr lang="LID4096"/>
+          </a:p>
+        </p:txBody>
+      </p:sp>
+      <p:pic>
+        <p:nvPicPr>
+          <p:cNvPr id="32" name="Picture 31">
+            <a:extLst>
+              <a:ext uri="{FF2B5EF4-FFF2-40B4-BE49-F238E27FC236}">
+                <a16:creationId xmlns:a16="http://schemas.microsoft.com/office/drawing/2014/main" id="{3D305CB6-46CD-F44B-978D-47EFEA3B7849}"/>
+              </a:ext>
+            </a:extLst>
+          </p:cNvPr>
+          <p:cNvPicPr>
+            <a:picLocks noChangeAspect="1"/>
+          </p:cNvPicPr>
+          <p:nvPr/>
+        </p:nvPicPr>
+        <p:blipFill>
+          <a:blip r:embed="rId4"/>
+          <a:stretch>
+            <a:fillRect/>
+          </a:stretch>
+        </p:blipFill>
+        <p:spPr>
+          <a:xfrm>
+            <a:off x="3810276" y="2191288"/>
+            <a:ext cx="8257899" cy="2606400"/>
+          </a:xfrm>
+          <a:prstGeom prst="rect">
+            <a:avLst/>
+          </a:prstGeom>
+        </p:spPr>
+      </p:pic>
+    </p:spTree>
+    <p:extLst>
+      <p:ext uri="{BB962C8B-B14F-4D97-AF65-F5344CB8AC3E}">
+        <p14:creationId xmlns:p14="http://schemas.microsoft.com/office/powerpoint/2010/main" val="624036117"/>
       </p:ext>
     </p:extLst>
   </p:cSld>

--- a/images/figures.pptx
+++ b/images/figures.pptx
@@ -204,7 +204,7 @@
           <a:p>
             <a:fld id="{1E717189-69EA-4142-945D-85EE3E06463B}" type="datetimeFigureOut">
               <a:rPr lang="LID4096" smtClean="0"/>
-              <a:t>09/30/2025</a:t>
+              <a:t>10/02/2025</a:t>
             </a:fld>
             <a:endParaRPr lang="LID4096"/>
           </a:p>
@@ -1368,7 +1368,7 @@
           <a:p>
             <a:fld id="{6E06BE13-2967-499D-85E1-E8100B951B63}" type="datetimeFigureOut">
               <a:rPr lang="LID4096" smtClean="0"/>
-              <a:t>09/30/2025</a:t>
+              <a:t>10/02/2025</a:t>
             </a:fld>
             <a:endParaRPr lang="LID4096"/>
           </a:p>
@@ -1568,7 +1568,7 @@
           <a:p>
             <a:fld id="{6E06BE13-2967-499D-85E1-E8100B951B63}" type="datetimeFigureOut">
               <a:rPr lang="LID4096" smtClean="0"/>
-              <a:t>09/30/2025</a:t>
+              <a:t>10/02/2025</a:t>
             </a:fld>
             <a:endParaRPr lang="LID4096"/>
           </a:p>
@@ -1778,7 +1778,7 @@
           <a:p>
             <a:fld id="{6E06BE13-2967-499D-85E1-E8100B951B63}" type="datetimeFigureOut">
               <a:rPr lang="LID4096" smtClean="0"/>
-              <a:t>09/30/2025</a:t>
+              <a:t>10/02/2025</a:t>
             </a:fld>
             <a:endParaRPr lang="LID4096"/>
           </a:p>
@@ -1978,7 +1978,7 @@
           <a:p>
             <a:fld id="{6E06BE13-2967-499D-85E1-E8100B951B63}" type="datetimeFigureOut">
               <a:rPr lang="LID4096" smtClean="0"/>
-              <a:t>09/30/2025</a:t>
+              <a:t>10/02/2025</a:t>
             </a:fld>
             <a:endParaRPr lang="LID4096"/>
           </a:p>
@@ -2254,7 +2254,7 @@
           <a:p>
             <a:fld id="{6E06BE13-2967-499D-85E1-E8100B951B63}" type="datetimeFigureOut">
               <a:rPr lang="LID4096" smtClean="0"/>
-              <a:t>09/30/2025</a:t>
+              <a:t>10/02/2025</a:t>
             </a:fld>
             <a:endParaRPr lang="LID4096"/>
           </a:p>
@@ -2522,7 +2522,7 @@
           <a:p>
             <a:fld id="{6E06BE13-2967-499D-85E1-E8100B951B63}" type="datetimeFigureOut">
               <a:rPr lang="LID4096" smtClean="0"/>
-              <a:t>09/30/2025</a:t>
+              <a:t>10/02/2025</a:t>
             </a:fld>
             <a:endParaRPr lang="LID4096"/>
           </a:p>
@@ -2937,7 +2937,7 @@
           <a:p>
             <a:fld id="{6E06BE13-2967-499D-85E1-E8100B951B63}" type="datetimeFigureOut">
               <a:rPr lang="LID4096" smtClean="0"/>
-              <a:t>09/30/2025</a:t>
+              <a:t>10/02/2025</a:t>
             </a:fld>
             <a:endParaRPr lang="LID4096"/>
           </a:p>
@@ -3079,7 +3079,7 @@
           <a:p>
             <a:fld id="{6E06BE13-2967-499D-85E1-E8100B951B63}" type="datetimeFigureOut">
               <a:rPr lang="LID4096" smtClean="0"/>
-              <a:t>09/30/2025</a:t>
+              <a:t>10/02/2025</a:t>
             </a:fld>
             <a:endParaRPr lang="LID4096"/>
           </a:p>
@@ -3192,7 +3192,7 @@
           <a:p>
             <a:fld id="{6E06BE13-2967-499D-85E1-E8100B951B63}" type="datetimeFigureOut">
               <a:rPr lang="LID4096" smtClean="0"/>
-              <a:t>09/30/2025</a:t>
+              <a:t>10/02/2025</a:t>
             </a:fld>
             <a:endParaRPr lang="LID4096"/>
           </a:p>
@@ -3505,7 +3505,7 @@
           <a:p>
             <a:fld id="{6E06BE13-2967-499D-85E1-E8100B951B63}" type="datetimeFigureOut">
               <a:rPr lang="LID4096" smtClean="0"/>
-              <a:t>09/30/2025</a:t>
+              <a:t>10/02/2025</a:t>
             </a:fld>
             <a:endParaRPr lang="LID4096"/>
           </a:p>
@@ -3794,7 +3794,7 @@
           <a:p>
             <a:fld id="{6E06BE13-2967-499D-85E1-E8100B951B63}" type="datetimeFigureOut">
               <a:rPr lang="LID4096" smtClean="0"/>
-              <a:t>09/30/2025</a:t>
+              <a:t>10/02/2025</a:t>
             </a:fld>
             <a:endParaRPr lang="LID4096"/>
           </a:p>
@@ -4037,7 +4037,7 @@
           <a:p>
             <a:fld id="{6E06BE13-2967-499D-85E1-E8100B951B63}" type="datetimeFigureOut">
               <a:rPr lang="LID4096" smtClean="0"/>
-              <a:t>09/30/2025</a:t>
+              <a:t>10/02/2025</a:t>
             </a:fld>
             <a:endParaRPr lang="LID4096"/>
           </a:p>
@@ -19722,41 +19722,6 @@
           </a:prstGeom>
         </p:spPr>
       </p:pic>
-      <p:pic>
-        <p:nvPicPr>
-          <p:cNvPr id="5" name="Picture 4">
-            <a:extLst>
-              <a:ext uri="{FF2B5EF4-FFF2-40B4-BE49-F238E27FC236}">
-                <a16:creationId xmlns:a16="http://schemas.microsoft.com/office/drawing/2014/main" id="{5054D953-0B4D-75FC-68B1-B570C8467F16}"/>
-              </a:ext>
-            </a:extLst>
-          </p:cNvPr>
-          <p:cNvPicPr>
-            <a:picLocks noChangeAspect="1"/>
-          </p:cNvPicPr>
-          <p:nvPr/>
-        </p:nvPicPr>
-        <p:blipFill>
-          <a:blip r:embed="rId5"/>
-          <a:stretch>
-            <a:fillRect/>
-          </a:stretch>
-        </p:blipFill>
-        <p:spPr>
-          <a:xfrm rot="10800000">
-            <a:off x="7532914" y="2381387"/>
-            <a:ext cx="2583575" cy="2493188"/>
-          </a:xfrm>
-          <a:prstGeom prst="rect">
-            <a:avLst/>
-          </a:prstGeom>
-          <a:ln w="50800">
-            <a:solidFill>
-              <a:schemeClr val="tx1"/>
-            </a:solidFill>
-          </a:ln>
-        </p:spPr>
-      </p:pic>
       <p:sp>
         <p:nvSpPr>
           <p:cNvPr id="6" name="Rectangle 5">
@@ -20580,6 +20545,446 @@
             <a:solidFill>
               <a:schemeClr val="bg1"/>
             </a:solidFill>
+          </a:ln>
+        </p:spPr>
+        <p:style>
+          <a:lnRef idx="2">
+            <a:schemeClr val="accent1">
+              <a:shade val="15000"/>
+            </a:schemeClr>
+          </a:lnRef>
+          <a:fillRef idx="1">
+            <a:schemeClr val="accent1"/>
+          </a:fillRef>
+          <a:effectRef idx="0">
+            <a:schemeClr val="accent1"/>
+          </a:effectRef>
+          <a:fontRef idx="minor">
+            <a:schemeClr val="lt1"/>
+          </a:fontRef>
+        </p:style>
+        <p:txBody>
+          <a:bodyPr rtlCol="0" anchor="ctr"/>
+          <a:lstStyle/>
+          <a:p>
+            <a:pPr algn="ctr"/>
+            <a:endParaRPr lang="LID4096"/>
+          </a:p>
+        </p:txBody>
+      </p:sp>
+      <p:grpSp>
+        <p:nvGrpSpPr>
+          <p:cNvPr id="2" name="Group 1">
+            <a:extLst>
+              <a:ext uri="{FF2B5EF4-FFF2-40B4-BE49-F238E27FC236}">
+                <a16:creationId xmlns:a16="http://schemas.microsoft.com/office/drawing/2014/main" id="{F2C7B1E9-3E94-BF4E-61FC-20FFE095A186}"/>
+              </a:ext>
+            </a:extLst>
+          </p:cNvPr>
+          <p:cNvGrpSpPr/>
+          <p:nvPr/>
+        </p:nvGrpSpPr>
+        <p:grpSpPr>
+          <a:xfrm>
+            <a:off x="7521273" y="2392378"/>
+            <a:ext cx="2583575" cy="2493188"/>
+            <a:chOff x="1099221" y="2243241"/>
+            <a:chExt cx="2583575" cy="2493188"/>
+          </a:xfrm>
+        </p:grpSpPr>
+        <p:pic>
+          <p:nvPicPr>
+            <p:cNvPr id="4" name="Picture 3">
+              <a:extLst>
+                <a:ext uri="{FF2B5EF4-FFF2-40B4-BE49-F238E27FC236}">
+                  <a16:creationId xmlns:a16="http://schemas.microsoft.com/office/drawing/2014/main" id="{F062227D-2F66-19C1-9222-F248E650A9CF}"/>
+                </a:ext>
+              </a:extLst>
+            </p:cNvPr>
+            <p:cNvPicPr>
+              <a:picLocks noChangeAspect="1"/>
+            </p:cNvPicPr>
+            <p:nvPr/>
+          </p:nvPicPr>
+          <p:blipFill>
+            <a:blip r:embed="rId5"/>
+            <a:stretch>
+              <a:fillRect/>
+            </a:stretch>
+          </p:blipFill>
+          <p:spPr>
+            <a:xfrm rot="10800000">
+              <a:off x="1099221" y="2243241"/>
+              <a:ext cx="2583575" cy="2493188"/>
+            </a:xfrm>
+            <a:prstGeom prst="rect">
+              <a:avLst/>
+            </a:prstGeom>
+            <a:ln w="50800">
+              <a:solidFill>
+                <a:schemeClr val="tx1"/>
+              </a:solidFill>
+            </a:ln>
+          </p:spPr>
+        </p:pic>
+        <p:sp>
+          <p:nvSpPr>
+            <p:cNvPr id="7" name="TextBox 6">
+              <a:extLst>
+                <a:ext uri="{FF2B5EF4-FFF2-40B4-BE49-F238E27FC236}">
+                  <a16:creationId xmlns:a16="http://schemas.microsoft.com/office/drawing/2014/main" id="{6C9121B9-A4C8-EE6A-B7E5-390B1C44798B}"/>
+                </a:ext>
+              </a:extLst>
+            </p:cNvPr>
+            <p:cNvSpPr txBox="1"/>
+            <p:nvPr/>
+          </p:nvSpPr>
+          <p:spPr>
+            <a:xfrm>
+              <a:off x="1545929" y="2644523"/>
+              <a:ext cx="947292" cy="738664"/>
+            </a:xfrm>
+            <a:prstGeom prst="rect">
+              <a:avLst/>
+            </a:prstGeom>
+            <a:solidFill>
+              <a:schemeClr val="accent2">
+                <a:lumMod val="40000"/>
+                <a:lumOff val="60000"/>
+              </a:schemeClr>
+            </a:solidFill>
+            <a:ln>
+              <a:solidFill>
+                <a:schemeClr val="accent2">
+                  <a:lumMod val="75000"/>
+                </a:schemeClr>
+              </a:solidFill>
+            </a:ln>
+          </p:spPr>
+          <p:txBody>
+            <a:bodyPr wrap="square" rtlCol="0">
+              <a:spAutoFit/>
+            </a:bodyPr>
+            <a:lstStyle/>
+            <a:p>
+              <a:pPr algn="ctr"/>
+              <a:r>
+                <a:rPr lang="en-US" sz="1000" dirty="0" err="1"/>
+                <a:t>Qingke</a:t>
+              </a:r>
+              <a:r>
+                <a:rPr lang="en-US" sz="1000" dirty="0"/>
+                <a:t> V4</a:t>
+              </a:r>
+            </a:p>
+            <a:p>
+              <a:pPr algn="ctr"/>
+              <a:r>
+                <a:rPr lang="en-US" sz="1000" dirty="0"/>
+                <a:t>RISCV</a:t>
+              </a:r>
+              <a:r>
+                <a:rPr lang="en-US" sz="1600" dirty="0"/>
+                <a:t> CPU</a:t>
+              </a:r>
+              <a:endParaRPr lang="LID4096" sz="1600" dirty="0"/>
+            </a:p>
+          </p:txBody>
+        </p:sp>
+        <p:sp>
+          <p:nvSpPr>
+            <p:cNvPr id="10" name="TextBox 9">
+              <a:extLst>
+                <a:ext uri="{FF2B5EF4-FFF2-40B4-BE49-F238E27FC236}">
+                  <a16:creationId xmlns:a16="http://schemas.microsoft.com/office/drawing/2014/main" id="{DCDFD54B-A8A3-E82A-E8E4-7FDF9C94A3DC}"/>
+                </a:ext>
+              </a:extLst>
+            </p:cNvPr>
+            <p:cNvSpPr txBox="1"/>
+            <p:nvPr/>
+          </p:nvSpPr>
+          <p:spPr>
+            <a:xfrm rot="16200000">
+              <a:off x="2553523" y="3289780"/>
+              <a:ext cx="947292" cy="400110"/>
+            </a:xfrm>
+            <a:prstGeom prst="rect">
+              <a:avLst/>
+            </a:prstGeom>
+            <a:solidFill>
+              <a:schemeClr val="tx2">
+                <a:lumMod val="25000"/>
+                <a:lumOff val="75000"/>
+              </a:schemeClr>
+            </a:solidFill>
+            <a:ln>
+              <a:solidFill>
+                <a:schemeClr val="tx2">
+                  <a:lumMod val="75000"/>
+                  <a:lumOff val="25000"/>
+                </a:schemeClr>
+              </a:solidFill>
+            </a:ln>
+          </p:spPr>
+          <p:txBody>
+            <a:bodyPr wrap="square" rtlCol="0">
+              <a:spAutoFit/>
+            </a:bodyPr>
+            <a:lstStyle/>
+            <a:p>
+              <a:pPr algn="ctr"/>
+              <a:r>
+                <a:rPr lang="en-US" sz="1000" dirty="0"/>
+                <a:t>Memory</a:t>
+              </a:r>
+              <a:br>
+                <a:rPr lang="en-US" sz="1000" dirty="0"/>
+              </a:br>
+              <a:r>
+                <a:rPr lang="en-US" sz="1000" dirty="0"/>
+                <a:t>Subsystem</a:t>
+              </a:r>
+            </a:p>
+          </p:txBody>
+        </p:sp>
+        <p:sp>
+          <p:nvSpPr>
+            <p:cNvPr id="12" name="Arrow: Up-Down 11">
+              <a:extLst>
+                <a:ext uri="{FF2B5EF4-FFF2-40B4-BE49-F238E27FC236}">
+                  <a16:creationId xmlns:a16="http://schemas.microsoft.com/office/drawing/2014/main" id="{CF52C8D5-523D-38D7-0FE1-8C0CCCA5EDA7}"/>
+                </a:ext>
+              </a:extLst>
+            </p:cNvPr>
+            <p:cNvSpPr/>
+            <p:nvPr/>
+          </p:nvSpPr>
+          <p:spPr>
+            <a:xfrm rot="18008206">
+              <a:off x="2548333" y="2960390"/>
+              <a:ext cx="223666" cy="434175"/>
+            </a:xfrm>
+            <a:prstGeom prst="upDownArrow">
+              <a:avLst/>
+            </a:prstGeom>
+            <a:solidFill>
+              <a:schemeClr val="bg1"/>
+            </a:solidFill>
+            <a:ln>
+              <a:solidFill>
+                <a:schemeClr val="bg1">
+                  <a:lumMod val="65000"/>
+                </a:schemeClr>
+              </a:solidFill>
+            </a:ln>
+          </p:spPr>
+          <p:style>
+            <a:lnRef idx="2">
+              <a:schemeClr val="accent1">
+                <a:shade val="15000"/>
+              </a:schemeClr>
+            </a:lnRef>
+            <a:fillRef idx="1">
+              <a:schemeClr val="accent1"/>
+            </a:fillRef>
+            <a:effectRef idx="0">
+              <a:schemeClr val="accent1"/>
+            </a:effectRef>
+            <a:fontRef idx="minor">
+              <a:schemeClr val="lt1"/>
+            </a:fontRef>
+          </p:style>
+          <p:txBody>
+            <a:bodyPr rtlCol="0" anchor="ctr"/>
+            <a:lstStyle/>
+            <a:p>
+              <a:pPr algn="ctr"/>
+              <a:endParaRPr lang="LID4096"/>
+            </a:p>
+          </p:txBody>
+        </p:sp>
+        <p:sp>
+          <p:nvSpPr>
+            <p:cNvPr id="18" name="Arrow: Up-Down 17">
+              <a:extLst>
+                <a:ext uri="{FF2B5EF4-FFF2-40B4-BE49-F238E27FC236}">
+                  <a16:creationId xmlns:a16="http://schemas.microsoft.com/office/drawing/2014/main" id="{B553BD9C-05B7-1499-9684-1335EDEFD846}"/>
+                </a:ext>
+              </a:extLst>
+            </p:cNvPr>
+            <p:cNvSpPr/>
+            <p:nvPr/>
+          </p:nvSpPr>
+          <p:spPr>
+            <a:xfrm rot="3255855">
+              <a:off x="2545972" y="3635006"/>
+              <a:ext cx="223666" cy="434175"/>
+            </a:xfrm>
+            <a:prstGeom prst="upDownArrow">
+              <a:avLst/>
+            </a:prstGeom>
+            <a:solidFill>
+              <a:schemeClr val="bg1"/>
+            </a:solidFill>
+            <a:ln>
+              <a:solidFill>
+                <a:schemeClr val="bg1">
+                  <a:lumMod val="65000"/>
+                </a:schemeClr>
+              </a:solidFill>
+            </a:ln>
+          </p:spPr>
+          <p:style>
+            <a:lnRef idx="2">
+              <a:schemeClr val="accent1">
+                <a:shade val="15000"/>
+              </a:schemeClr>
+            </a:lnRef>
+            <a:fillRef idx="1">
+              <a:schemeClr val="accent1"/>
+            </a:fillRef>
+            <a:effectRef idx="0">
+              <a:schemeClr val="accent1"/>
+            </a:effectRef>
+            <a:fontRef idx="minor">
+              <a:schemeClr val="lt1"/>
+            </a:fontRef>
+          </p:style>
+          <p:txBody>
+            <a:bodyPr rtlCol="0" anchor="ctr"/>
+            <a:lstStyle/>
+            <a:p>
+              <a:pPr algn="ctr"/>
+              <a:endParaRPr lang="LID4096"/>
+            </a:p>
+          </p:txBody>
+        </p:sp>
+        <p:sp>
+          <p:nvSpPr>
+            <p:cNvPr id="11" name="TextBox 10">
+              <a:extLst>
+                <a:ext uri="{FF2B5EF4-FFF2-40B4-BE49-F238E27FC236}">
+                  <a16:creationId xmlns:a16="http://schemas.microsoft.com/office/drawing/2014/main" id="{9E450C54-8F81-CCFF-059C-FAEFF500FB6E}"/>
+                </a:ext>
+              </a:extLst>
+            </p:cNvPr>
+            <p:cNvSpPr txBox="1"/>
+            <p:nvPr/>
+          </p:nvSpPr>
+          <p:spPr>
+            <a:xfrm>
+              <a:off x="1820089" y="3869605"/>
+              <a:ext cx="673132" cy="400110"/>
+            </a:xfrm>
+            <a:prstGeom prst="rect">
+              <a:avLst/>
+            </a:prstGeom>
+            <a:solidFill>
+              <a:schemeClr val="accent6">
+                <a:lumMod val="40000"/>
+                <a:lumOff val="60000"/>
+              </a:schemeClr>
+            </a:solidFill>
+            <a:ln>
+              <a:solidFill>
+                <a:schemeClr val="accent6">
+                  <a:lumMod val="75000"/>
+                </a:schemeClr>
+              </a:solidFill>
+            </a:ln>
+          </p:spPr>
+          <p:txBody>
+            <a:bodyPr wrap="square" rtlCol="0">
+              <a:spAutoFit/>
+            </a:bodyPr>
+            <a:lstStyle/>
+            <a:p>
+              <a:pPr algn="ctr"/>
+              <a:r>
+                <a:rPr lang="en-US" sz="1000" dirty="0"/>
+                <a:t>GPIO</a:t>
+              </a:r>
+              <a:br>
+                <a:rPr lang="en-US" sz="1000" dirty="0"/>
+              </a:br>
+              <a:r>
+                <a:rPr lang="en-US" sz="1000" dirty="0"/>
+                <a:t>Module</a:t>
+              </a:r>
+              <a:endParaRPr lang="LID4096" sz="1600" dirty="0"/>
+            </a:p>
+          </p:txBody>
+        </p:sp>
+      </p:grpSp>
+      <p:sp>
+        <p:nvSpPr>
+          <p:cNvPr id="19" name="Freeform: Shape 18">
+            <a:extLst>
+              <a:ext uri="{FF2B5EF4-FFF2-40B4-BE49-F238E27FC236}">
+                <a16:creationId xmlns:a16="http://schemas.microsoft.com/office/drawing/2014/main" id="{73D1891B-5ACE-86CD-A6B3-255B9ADEE755}"/>
+              </a:ext>
+            </a:extLst>
+          </p:cNvPr>
+          <p:cNvSpPr/>
+          <p:nvPr/>
+        </p:nvSpPr>
+        <p:spPr>
+          <a:xfrm>
+            <a:off x="7550668" y="3924464"/>
+            <a:ext cx="733460" cy="302183"/>
+          </a:xfrm>
+          <a:custGeom>
+            <a:avLst/>
+            <a:gdLst>
+              <a:gd name="connsiteX0" fmla="*/ 710328 w 710328"/>
+              <a:gd name="connsiteY0" fmla="*/ 298259 h 302183"/>
+              <a:gd name="connsiteX1" fmla="*/ 482709 w 710328"/>
+              <a:gd name="connsiteY1" fmla="*/ 302183 h 302183"/>
+              <a:gd name="connsiteX2" fmla="*/ 470935 w 710328"/>
+              <a:gd name="connsiteY2" fmla="*/ 0 h 302183"/>
+              <a:gd name="connsiteX3" fmla="*/ 0 w 710328"/>
+              <a:gd name="connsiteY3" fmla="*/ 15697 h 302183"/>
+            </a:gdLst>
+            <a:ahLst/>
+            <a:cxnLst>
+              <a:cxn ang="0">
+                <a:pos x="connsiteX0" y="connsiteY0"/>
+              </a:cxn>
+              <a:cxn ang="0">
+                <a:pos x="connsiteX1" y="connsiteY1"/>
+              </a:cxn>
+              <a:cxn ang="0">
+                <a:pos x="connsiteX2" y="connsiteY2"/>
+              </a:cxn>
+              <a:cxn ang="0">
+                <a:pos x="connsiteX3" y="connsiteY3"/>
+              </a:cxn>
+            </a:cxnLst>
+            <a:rect l="l" t="t" r="r" b="b"/>
+            <a:pathLst>
+              <a:path w="710328" h="302183">
+                <a:moveTo>
+                  <a:pt x="710328" y="298259"/>
+                </a:moveTo>
+                <a:lnTo>
+                  <a:pt x="482709" y="302183"/>
+                </a:lnTo>
+                <a:lnTo>
+                  <a:pt x="470935" y="0"/>
+                </a:lnTo>
+                <a:lnTo>
+                  <a:pt x="0" y="15697"/>
+                </a:lnTo>
+              </a:path>
+            </a:pathLst>
+          </a:custGeom>
+          <a:noFill/>
+          <a:ln cap="rnd">
+            <a:solidFill>
+              <a:schemeClr val="bg1"/>
+            </a:solidFill>
+            <a:headEnd type="triangle"/>
+            <a:tailEnd type="triangle"/>
           </a:ln>
         </p:spPr>
         <p:style>
@@ -25399,329 +25804,350 @@
           <a:chExt cx="0" cy="0"/>
         </a:xfrm>
       </p:grpSpPr>
-      <p:pic>
-        <p:nvPicPr>
-          <p:cNvPr id="5" name="Picture 4">
-            <a:extLst>
-              <a:ext uri="{FF2B5EF4-FFF2-40B4-BE49-F238E27FC236}">
-                <a16:creationId xmlns:a16="http://schemas.microsoft.com/office/drawing/2014/main" id="{C5B50886-5F6D-0A55-9A75-A3AA5C0030F0}"/>
-              </a:ext>
-            </a:extLst>
-          </p:cNvPr>
-          <p:cNvPicPr>
-            <a:picLocks noChangeAspect="1"/>
-          </p:cNvPicPr>
-          <p:nvPr/>
-        </p:nvPicPr>
-        <p:blipFill>
-          <a:blip r:embed="rId3"/>
-          <a:stretch>
-            <a:fillRect/>
-          </a:stretch>
-        </p:blipFill>
-        <p:spPr>
-          <a:xfrm rot="10800000">
+      <p:grpSp>
+        <p:nvGrpSpPr>
+          <p:cNvPr id="3" name="Group 2">
+            <a:extLst>
+              <a:ext uri="{FF2B5EF4-FFF2-40B4-BE49-F238E27FC236}">
+                <a16:creationId xmlns:a16="http://schemas.microsoft.com/office/drawing/2014/main" id="{863D55BC-AA77-6B48-F4CB-7ECFB275F1F1}"/>
+              </a:ext>
+            </a:extLst>
+          </p:cNvPr>
+          <p:cNvGrpSpPr/>
+          <p:nvPr/>
+        </p:nvGrpSpPr>
+        <p:grpSpPr>
+          <a:xfrm>
             <a:off x="1099221" y="2243241"/>
             <a:ext cx="2583575" cy="2493188"/>
-          </a:xfrm>
-          <a:prstGeom prst="rect">
-            <a:avLst/>
-          </a:prstGeom>
-          <a:ln w="50800">
-            <a:solidFill>
-              <a:schemeClr val="tx1"/>
-            </a:solidFill>
-          </a:ln>
-        </p:spPr>
-      </p:pic>
-      <p:sp>
-        <p:nvSpPr>
-          <p:cNvPr id="2" name="TextBox 1">
-            <a:extLst>
-              <a:ext uri="{FF2B5EF4-FFF2-40B4-BE49-F238E27FC236}">
-                <a16:creationId xmlns:a16="http://schemas.microsoft.com/office/drawing/2014/main" id="{B554C09C-B921-DFF1-1038-E272F33354F6}"/>
-              </a:ext>
-            </a:extLst>
-          </p:cNvPr>
-          <p:cNvSpPr txBox="1"/>
-          <p:nvPr/>
-        </p:nvSpPr>
-        <p:spPr>
-          <a:xfrm>
-            <a:off x="1545929" y="2644523"/>
-            <a:ext cx="947292" cy="738664"/>
-          </a:xfrm>
-          <a:prstGeom prst="rect">
-            <a:avLst/>
-          </a:prstGeom>
-          <a:solidFill>
-            <a:schemeClr val="accent2">
-              <a:lumMod val="40000"/>
-              <a:lumOff val="60000"/>
-            </a:schemeClr>
-          </a:solidFill>
-          <a:ln>
+            <a:chOff x="1099221" y="2243241"/>
+            <a:chExt cx="2583575" cy="2493188"/>
+          </a:xfrm>
+        </p:grpSpPr>
+        <p:pic>
+          <p:nvPicPr>
+            <p:cNvPr id="5" name="Picture 4">
+              <a:extLst>
+                <a:ext uri="{FF2B5EF4-FFF2-40B4-BE49-F238E27FC236}">
+                  <a16:creationId xmlns:a16="http://schemas.microsoft.com/office/drawing/2014/main" id="{C5B50886-5F6D-0A55-9A75-A3AA5C0030F0}"/>
+                </a:ext>
+              </a:extLst>
+            </p:cNvPr>
+            <p:cNvPicPr>
+              <a:picLocks noChangeAspect="1"/>
+            </p:cNvPicPr>
+            <p:nvPr/>
+          </p:nvPicPr>
+          <p:blipFill>
+            <a:blip r:embed="rId3"/>
+            <a:stretch>
+              <a:fillRect/>
+            </a:stretch>
+          </p:blipFill>
+          <p:spPr>
+            <a:xfrm rot="10800000">
+              <a:off x="1099221" y="2243241"/>
+              <a:ext cx="2583575" cy="2493188"/>
+            </a:xfrm>
+            <a:prstGeom prst="rect">
+              <a:avLst/>
+            </a:prstGeom>
+            <a:ln w="50800">
+              <a:solidFill>
+                <a:schemeClr val="tx1"/>
+              </a:solidFill>
+            </a:ln>
+          </p:spPr>
+        </p:pic>
+        <p:sp>
+          <p:nvSpPr>
+            <p:cNvPr id="2" name="TextBox 1">
+              <a:extLst>
+                <a:ext uri="{FF2B5EF4-FFF2-40B4-BE49-F238E27FC236}">
+                  <a16:creationId xmlns:a16="http://schemas.microsoft.com/office/drawing/2014/main" id="{B554C09C-B921-DFF1-1038-E272F33354F6}"/>
+                </a:ext>
+              </a:extLst>
+            </p:cNvPr>
+            <p:cNvSpPr txBox="1"/>
+            <p:nvPr/>
+          </p:nvSpPr>
+          <p:spPr>
+            <a:xfrm>
+              <a:off x="1545929" y="2644523"/>
+              <a:ext cx="947292" cy="738664"/>
+            </a:xfrm>
+            <a:prstGeom prst="rect">
+              <a:avLst/>
+            </a:prstGeom>
             <a:solidFill>
               <a:schemeClr val="accent2">
-                <a:lumMod val="75000"/>
-              </a:schemeClr>
-            </a:solidFill>
-          </a:ln>
-        </p:spPr>
-        <p:txBody>
-          <a:bodyPr wrap="square" rtlCol="0">
-            <a:spAutoFit/>
-          </a:bodyPr>
-          <a:lstStyle/>
-          <a:p>
-            <a:pPr algn="ctr"/>
-            <a:r>
-              <a:rPr lang="en-US" sz="1000" dirty="0" err="1"/>
-              <a:t>Qingke</a:t>
-            </a:r>
-            <a:r>
-              <a:rPr lang="en-US" sz="1000" dirty="0"/>
-              <a:t> V4</a:t>
-            </a:r>
-          </a:p>
-          <a:p>
-            <a:pPr algn="ctr"/>
-            <a:r>
-              <a:rPr lang="en-US" sz="1000" dirty="0"/>
-              <a:t>RISCV</a:t>
-            </a:r>
-            <a:r>
-              <a:rPr lang="en-US" sz="1600" dirty="0"/>
-              <a:t> CPU</a:t>
-            </a:r>
-            <a:endParaRPr lang="LID4096" sz="1600" dirty="0"/>
-          </a:p>
-        </p:txBody>
-      </p:sp>
-      <p:sp>
-        <p:nvSpPr>
-          <p:cNvPr id="4" name="TextBox 3">
-            <a:extLst>
-              <a:ext uri="{FF2B5EF4-FFF2-40B4-BE49-F238E27FC236}">
-                <a16:creationId xmlns:a16="http://schemas.microsoft.com/office/drawing/2014/main" id="{2DFFADC1-F978-F20E-1CA3-B901D7FAFFC7}"/>
-              </a:ext>
-            </a:extLst>
-          </p:cNvPr>
-          <p:cNvSpPr txBox="1"/>
-          <p:nvPr/>
-        </p:nvSpPr>
-        <p:spPr>
-          <a:xfrm rot="16200000">
-            <a:off x="2553523" y="3289780"/>
-            <a:ext cx="947292" cy="400110"/>
-          </a:xfrm>
-          <a:prstGeom prst="rect">
-            <a:avLst/>
-          </a:prstGeom>
-          <a:solidFill>
-            <a:schemeClr val="tx2">
-              <a:lumMod val="25000"/>
-              <a:lumOff val="75000"/>
-            </a:schemeClr>
-          </a:solidFill>
-          <a:ln>
+                <a:lumMod val="40000"/>
+                <a:lumOff val="60000"/>
+              </a:schemeClr>
+            </a:solidFill>
+            <a:ln>
+              <a:solidFill>
+                <a:schemeClr val="accent2">
+                  <a:lumMod val="75000"/>
+                </a:schemeClr>
+              </a:solidFill>
+            </a:ln>
+          </p:spPr>
+          <p:txBody>
+            <a:bodyPr wrap="square" rtlCol="0">
+              <a:spAutoFit/>
+            </a:bodyPr>
+            <a:lstStyle/>
+            <a:p>
+              <a:pPr algn="ctr"/>
+              <a:r>
+                <a:rPr lang="en-US" sz="1000" dirty="0" err="1"/>
+                <a:t>Qingke</a:t>
+              </a:r>
+              <a:r>
+                <a:rPr lang="en-US" sz="1000" dirty="0"/>
+                <a:t> V4</a:t>
+              </a:r>
+            </a:p>
+            <a:p>
+              <a:pPr algn="ctr"/>
+              <a:r>
+                <a:rPr lang="en-US" sz="1000" dirty="0"/>
+                <a:t>RISCV</a:t>
+              </a:r>
+              <a:r>
+                <a:rPr lang="en-US" sz="1600" dirty="0"/>
+                <a:t> CPU</a:t>
+              </a:r>
+              <a:endParaRPr lang="LID4096" sz="1600" dirty="0"/>
+            </a:p>
+          </p:txBody>
+        </p:sp>
+        <p:sp>
+          <p:nvSpPr>
+            <p:cNvPr id="4" name="TextBox 3">
+              <a:extLst>
+                <a:ext uri="{FF2B5EF4-FFF2-40B4-BE49-F238E27FC236}">
+                  <a16:creationId xmlns:a16="http://schemas.microsoft.com/office/drawing/2014/main" id="{2DFFADC1-F978-F20E-1CA3-B901D7FAFFC7}"/>
+                </a:ext>
+              </a:extLst>
+            </p:cNvPr>
+            <p:cNvSpPr txBox="1"/>
+            <p:nvPr/>
+          </p:nvSpPr>
+          <p:spPr>
+            <a:xfrm rot="16200000">
+              <a:off x="2553523" y="3289780"/>
+              <a:ext cx="947292" cy="400110"/>
+            </a:xfrm>
+            <a:prstGeom prst="rect">
+              <a:avLst/>
+            </a:prstGeom>
             <a:solidFill>
               <a:schemeClr val="tx2">
-                <a:lumMod val="75000"/>
-                <a:lumOff val="25000"/>
-              </a:schemeClr>
-            </a:solidFill>
-          </a:ln>
-        </p:spPr>
-        <p:txBody>
-          <a:bodyPr wrap="square" rtlCol="0">
-            <a:spAutoFit/>
-          </a:bodyPr>
-          <a:lstStyle/>
-          <a:p>
-            <a:pPr algn="ctr"/>
-            <a:r>
-              <a:rPr lang="en-US" sz="1000" dirty="0"/>
-              <a:t>Memory</a:t>
-            </a:r>
-            <a:br>
-              <a:rPr lang="en-US" sz="1000" dirty="0"/>
-            </a:br>
-            <a:r>
-              <a:rPr lang="en-US" sz="1000" dirty="0"/>
-              <a:t>Subsystem</a:t>
-            </a:r>
-          </a:p>
-        </p:txBody>
-      </p:sp>
-      <p:sp>
-        <p:nvSpPr>
-          <p:cNvPr id="7" name="TextBox 6">
-            <a:extLst>
-              <a:ext uri="{FF2B5EF4-FFF2-40B4-BE49-F238E27FC236}">
-                <a16:creationId xmlns:a16="http://schemas.microsoft.com/office/drawing/2014/main" id="{FABBAA12-17B8-03AE-D6FA-F35A36ED053C}"/>
-              </a:ext>
-            </a:extLst>
-          </p:cNvPr>
-          <p:cNvSpPr txBox="1"/>
-          <p:nvPr/>
-        </p:nvSpPr>
-        <p:spPr>
-          <a:xfrm>
-            <a:off x="1820089" y="3869605"/>
-            <a:ext cx="673132" cy="400110"/>
-          </a:xfrm>
-          <a:prstGeom prst="rect">
-            <a:avLst/>
-          </a:prstGeom>
-          <a:solidFill>
-            <a:schemeClr val="accent6">
-              <a:lumMod val="40000"/>
-              <a:lumOff val="60000"/>
-            </a:schemeClr>
-          </a:solidFill>
-          <a:ln>
+                <a:lumMod val="25000"/>
+                <a:lumOff val="75000"/>
+              </a:schemeClr>
+            </a:solidFill>
+            <a:ln>
+              <a:solidFill>
+                <a:schemeClr val="tx2">
+                  <a:lumMod val="75000"/>
+                  <a:lumOff val="25000"/>
+                </a:schemeClr>
+              </a:solidFill>
+            </a:ln>
+          </p:spPr>
+          <p:txBody>
+            <a:bodyPr wrap="square" rtlCol="0">
+              <a:spAutoFit/>
+            </a:bodyPr>
+            <a:lstStyle/>
+            <a:p>
+              <a:pPr algn="ctr"/>
+              <a:r>
+                <a:rPr lang="en-US" sz="1000" dirty="0"/>
+                <a:t>Memory</a:t>
+              </a:r>
+              <a:br>
+                <a:rPr lang="en-US" sz="1000" dirty="0"/>
+              </a:br>
+              <a:r>
+                <a:rPr lang="en-US" sz="1000" dirty="0"/>
+                <a:t>Subsystem</a:t>
+              </a:r>
+            </a:p>
+          </p:txBody>
+        </p:sp>
+        <p:sp>
+          <p:nvSpPr>
+            <p:cNvPr id="7" name="TextBox 6">
+              <a:extLst>
+                <a:ext uri="{FF2B5EF4-FFF2-40B4-BE49-F238E27FC236}">
+                  <a16:creationId xmlns:a16="http://schemas.microsoft.com/office/drawing/2014/main" id="{FABBAA12-17B8-03AE-D6FA-F35A36ED053C}"/>
+                </a:ext>
+              </a:extLst>
+            </p:cNvPr>
+            <p:cNvSpPr txBox="1"/>
+            <p:nvPr/>
+          </p:nvSpPr>
+          <p:spPr>
+            <a:xfrm>
+              <a:off x="1820089" y="3869605"/>
+              <a:ext cx="673132" cy="400110"/>
+            </a:xfrm>
+            <a:prstGeom prst="rect">
+              <a:avLst/>
+            </a:prstGeom>
             <a:solidFill>
               <a:schemeClr val="accent6">
-                <a:lumMod val="75000"/>
-              </a:schemeClr>
-            </a:solidFill>
-          </a:ln>
-        </p:spPr>
-        <p:txBody>
-          <a:bodyPr wrap="square" rtlCol="0">
-            <a:spAutoFit/>
-          </a:bodyPr>
-          <a:lstStyle/>
-          <a:p>
-            <a:pPr algn="ctr"/>
-            <a:r>
-              <a:rPr lang="en-US" sz="1000" dirty="0"/>
-              <a:t>GPIO</a:t>
-            </a:r>
-            <a:br>
-              <a:rPr lang="en-US" sz="1000" dirty="0"/>
-            </a:br>
-            <a:r>
-              <a:rPr lang="en-US" sz="1000" dirty="0"/>
-              <a:t>Module</a:t>
-            </a:r>
-            <a:endParaRPr lang="LID4096" sz="1600" dirty="0"/>
-          </a:p>
-        </p:txBody>
-      </p:sp>
-      <p:sp>
-        <p:nvSpPr>
-          <p:cNvPr id="11" name="Arrow: Up-Down 10">
-            <a:extLst>
-              <a:ext uri="{FF2B5EF4-FFF2-40B4-BE49-F238E27FC236}">
-                <a16:creationId xmlns:a16="http://schemas.microsoft.com/office/drawing/2014/main" id="{8BEC0DDB-83B1-319A-739C-AB857491BC06}"/>
-              </a:ext>
-            </a:extLst>
-          </p:cNvPr>
-          <p:cNvSpPr/>
-          <p:nvPr/>
-        </p:nvSpPr>
-        <p:spPr>
-          <a:xfrm rot="18008206">
-            <a:off x="2548333" y="2960390"/>
-            <a:ext cx="223666" cy="434175"/>
-          </a:xfrm>
-          <a:prstGeom prst="upDownArrow">
-            <a:avLst/>
-          </a:prstGeom>
-          <a:solidFill>
-            <a:schemeClr val="bg1"/>
-          </a:solidFill>
-          <a:ln>
-            <a:solidFill>
-              <a:schemeClr val="bg1">
-                <a:lumMod val="65000"/>
-              </a:schemeClr>
-            </a:solidFill>
-          </a:ln>
-        </p:spPr>
-        <p:style>
-          <a:lnRef idx="2">
-            <a:schemeClr val="accent1">
-              <a:shade val="15000"/>
-            </a:schemeClr>
-          </a:lnRef>
-          <a:fillRef idx="1">
-            <a:schemeClr val="accent1"/>
-          </a:fillRef>
-          <a:effectRef idx="0">
-            <a:schemeClr val="accent1"/>
-          </a:effectRef>
-          <a:fontRef idx="minor">
-            <a:schemeClr val="lt1"/>
-          </a:fontRef>
-        </p:style>
-        <p:txBody>
-          <a:bodyPr rtlCol="0" anchor="ctr"/>
-          <a:lstStyle/>
-          <a:p>
-            <a:pPr algn="ctr"/>
-            <a:endParaRPr lang="LID4096"/>
-          </a:p>
-        </p:txBody>
-      </p:sp>
-      <p:sp>
-        <p:nvSpPr>
-          <p:cNvPr id="12" name="Arrow: Up-Down 11">
-            <a:extLst>
-              <a:ext uri="{FF2B5EF4-FFF2-40B4-BE49-F238E27FC236}">
-                <a16:creationId xmlns:a16="http://schemas.microsoft.com/office/drawing/2014/main" id="{2F4DEB9A-5EDD-4CF8-563F-76DACFE7B238}"/>
-              </a:ext>
-            </a:extLst>
-          </p:cNvPr>
-          <p:cNvSpPr/>
-          <p:nvPr/>
-        </p:nvSpPr>
-        <p:spPr>
-          <a:xfrm rot="3255855">
-            <a:off x="2545972" y="3635006"/>
-            <a:ext cx="223666" cy="434175"/>
-          </a:xfrm>
-          <a:prstGeom prst="upDownArrow">
-            <a:avLst/>
-          </a:prstGeom>
-          <a:solidFill>
-            <a:schemeClr val="bg1"/>
-          </a:solidFill>
-          <a:ln>
-            <a:solidFill>
-              <a:schemeClr val="bg1">
-                <a:lumMod val="65000"/>
-              </a:schemeClr>
-            </a:solidFill>
-          </a:ln>
-        </p:spPr>
-        <p:style>
-          <a:lnRef idx="2">
-            <a:schemeClr val="accent1">
-              <a:shade val="15000"/>
-            </a:schemeClr>
-          </a:lnRef>
-          <a:fillRef idx="1">
-            <a:schemeClr val="accent1"/>
-          </a:fillRef>
-          <a:effectRef idx="0">
-            <a:schemeClr val="accent1"/>
-          </a:effectRef>
-          <a:fontRef idx="minor">
-            <a:schemeClr val="lt1"/>
-          </a:fontRef>
-        </p:style>
-        <p:txBody>
-          <a:bodyPr rtlCol="0" anchor="ctr"/>
-          <a:lstStyle/>
-          <a:p>
-            <a:pPr algn="ctr"/>
-            <a:endParaRPr lang="LID4096"/>
-          </a:p>
-        </p:txBody>
-      </p:sp>
+                <a:lumMod val="40000"/>
+                <a:lumOff val="60000"/>
+              </a:schemeClr>
+            </a:solidFill>
+            <a:ln>
+              <a:solidFill>
+                <a:schemeClr val="accent6">
+                  <a:lumMod val="75000"/>
+                </a:schemeClr>
+              </a:solidFill>
+            </a:ln>
+          </p:spPr>
+          <p:txBody>
+            <a:bodyPr wrap="square" rtlCol="0">
+              <a:spAutoFit/>
+            </a:bodyPr>
+            <a:lstStyle/>
+            <a:p>
+              <a:pPr algn="ctr"/>
+              <a:r>
+                <a:rPr lang="en-US" sz="1000" dirty="0"/>
+                <a:t>GPIO</a:t>
+              </a:r>
+              <a:br>
+                <a:rPr lang="en-US" sz="1000" dirty="0"/>
+              </a:br>
+              <a:r>
+                <a:rPr lang="en-US" sz="1000" dirty="0"/>
+                <a:t>Module</a:t>
+              </a:r>
+              <a:endParaRPr lang="LID4096" sz="1600" dirty="0"/>
+            </a:p>
+          </p:txBody>
+        </p:sp>
+        <p:sp>
+          <p:nvSpPr>
+            <p:cNvPr id="11" name="Arrow: Up-Down 10">
+              <a:extLst>
+                <a:ext uri="{FF2B5EF4-FFF2-40B4-BE49-F238E27FC236}">
+                  <a16:creationId xmlns:a16="http://schemas.microsoft.com/office/drawing/2014/main" id="{8BEC0DDB-83B1-319A-739C-AB857491BC06}"/>
+                </a:ext>
+              </a:extLst>
+            </p:cNvPr>
+            <p:cNvSpPr/>
+            <p:nvPr/>
+          </p:nvSpPr>
+          <p:spPr>
+            <a:xfrm rot="18008206">
+              <a:off x="2548333" y="2960390"/>
+              <a:ext cx="223666" cy="434175"/>
+            </a:xfrm>
+            <a:prstGeom prst="upDownArrow">
+              <a:avLst/>
+            </a:prstGeom>
+            <a:solidFill>
+              <a:schemeClr val="bg1"/>
+            </a:solidFill>
+            <a:ln>
+              <a:solidFill>
+                <a:schemeClr val="bg1">
+                  <a:lumMod val="65000"/>
+                </a:schemeClr>
+              </a:solidFill>
+            </a:ln>
+          </p:spPr>
+          <p:style>
+            <a:lnRef idx="2">
+              <a:schemeClr val="accent1">
+                <a:shade val="15000"/>
+              </a:schemeClr>
+            </a:lnRef>
+            <a:fillRef idx="1">
+              <a:schemeClr val="accent1"/>
+            </a:fillRef>
+            <a:effectRef idx="0">
+              <a:schemeClr val="accent1"/>
+            </a:effectRef>
+            <a:fontRef idx="minor">
+              <a:schemeClr val="lt1"/>
+            </a:fontRef>
+          </p:style>
+          <p:txBody>
+            <a:bodyPr rtlCol="0" anchor="ctr"/>
+            <a:lstStyle/>
+            <a:p>
+              <a:pPr algn="ctr"/>
+              <a:endParaRPr lang="LID4096"/>
+            </a:p>
+          </p:txBody>
+        </p:sp>
+        <p:sp>
+          <p:nvSpPr>
+            <p:cNvPr id="12" name="Arrow: Up-Down 11">
+              <a:extLst>
+                <a:ext uri="{FF2B5EF4-FFF2-40B4-BE49-F238E27FC236}">
+                  <a16:creationId xmlns:a16="http://schemas.microsoft.com/office/drawing/2014/main" id="{2F4DEB9A-5EDD-4CF8-563F-76DACFE7B238}"/>
+                </a:ext>
+              </a:extLst>
+            </p:cNvPr>
+            <p:cNvSpPr/>
+            <p:nvPr/>
+          </p:nvSpPr>
+          <p:spPr>
+            <a:xfrm rot="3255855">
+              <a:off x="2545972" y="3635006"/>
+              <a:ext cx="223666" cy="434175"/>
+            </a:xfrm>
+            <a:prstGeom prst="upDownArrow">
+              <a:avLst/>
+            </a:prstGeom>
+            <a:solidFill>
+              <a:schemeClr val="bg1"/>
+            </a:solidFill>
+            <a:ln>
+              <a:solidFill>
+                <a:schemeClr val="bg1">
+                  <a:lumMod val="65000"/>
+                </a:schemeClr>
+              </a:solidFill>
+            </a:ln>
+          </p:spPr>
+          <p:style>
+            <a:lnRef idx="2">
+              <a:schemeClr val="accent1">
+                <a:shade val="15000"/>
+              </a:schemeClr>
+            </a:lnRef>
+            <a:fillRef idx="1">
+              <a:schemeClr val="accent1"/>
+            </a:fillRef>
+            <a:effectRef idx="0">
+              <a:schemeClr val="accent1"/>
+            </a:effectRef>
+            <a:fontRef idx="minor">
+              <a:schemeClr val="lt1"/>
+            </a:fontRef>
+          </p:style>
+          <p:txBody>
+            <a:bodyPr rtlCol="0" anchor="ctr"/>
+            <a:lstStyle/>
+            <a:p>
+              <a:pPr algn="ctr"/>
+              <a:endParaRPr lang="LID4096"/>
+            </a:p>
+          </p:txBody>
+        </p:sp>
+      </p:grpSp>
       <p:pic>
         <p:nvPicPr>
           <p:cNvPr id="32" name="Picture 31">
